--- a/teaching-materials/vcd-vce/powerpoint/Unit3-Reconceptualisation-and-Reinvention.pptx
+++ b/teaching-materials/vcd-vce/powerpoint/Unit3-Reconceptualisation-and-Reinvention.pptx
@@ -20,6 +20,7 @@
     <p:sldId id="268" r:id="rId19"/>
     <p:sldId id="269" r:id="rId20"/>
     <p:sldId id="270" r:id="rId21"/>
+    <p:sldId id="271" r:id="rId22"/>
   </p:sldIdLst>
   <p:sldSz cx="12191695" cy="6858000" type="screen4x3"/>
   <p:notesSz cx="6858000" cy="9144000"/>
@@ -3095,6 +3096,14 @@
 <file path=ppt/slides/slide1.xml><?xml version="1.0" encoding="utf-8"?>
 <p:sld xmlns:a="http://schemas.openxmlformats.org/drawingml/2006/main" xmlns:p="http://schemas.openxmlformats.org/presentationml/2006/main" xmlns:r="http://schemas.openxmlformats.org/officeDocument/2006/relationships">
   <p:cSld>
+    <p:bg>
+      <p:bgPr>
+        <a:solidFill>
+          <a:srgbClr val="F7F5EC"/>
+        </a:solidFill>
+        <a:effectLst/>
+      </p:bgPr>
+    </p:bg>
     <p:spTree>
       <p:nvGrpSpPr>
         <p:cNvPr id="1" name=""/>
@@ -3104,74 +3113,22 @@
       <p:grpSpPr/>
       <p:sp>
         <p:nvSpPr>
-          <p:cNvPr id="2" name="Title 1"/>
-          <p:cNvSpPr>
-            <a:spLocks noGrp="1"/>
-          </p:cNvSpPr>
-          <p:nvPr>
-            <p:ph type="ctrTitle"/>
-          </p:nvPr>
-        </p:nvSpPr>
-        <p:spPr/>
-        <p:txBody>
-          <a:bodyPr/>
-          <a:lstStyle/>
-          <a:p>
-            <a:r>
-              <a:rPr b="1">
-                <a:solidFill>
-                  <a:srgbClr val="1F4B3F"/>
-                </a:solidFill>
-                <a:latin typeface="Cambria"/>
-              </a:rPr>
-              <a:t>Unit 3: Reconceptualisation and Reinvention</a:t>
-            </a:r>
-          </a:p>
-        </p:txBody>
-      </p:sp>
-      <p:sp>
-        <p:nvSpPr>
-          <p:cNvPr id="3" name="Subtitle 2"/>
-          <p:cNvSpPr>
-            <a:spLocks noGrp="1"/>
-          </p:cNvSpPr>
-          <p:nvPr>
-            <p:ph type="subTitle" idx="1"/>
-          </p:nvPr>
-        </p:nvSpPr>
-        <p:spPr/>
-        <p:txBody>
-          <a:bodyPr/>
-          <a:lstStyle/>
-          <a:p>
-            <a:r>
-              <a:rPr sz="2000">
-                <a:solidFill>
-                  <a:srgbClr val="595959"/>
-                </a:solidFill>
-                <a:latin typeface="Calibri"/>
-              </a:rPr>
-              <a:t>VCE Visual Communication Design — Year 12</a:t>
-            </a:r>
-          </a:p>
-        </p:txBody>
-      </p:sp>
-      <p:sp>
-        <p:nvSpPr>
-          <p:cNvPr id="4" name="Rectangle 3"/>
+          <p:cNvPr id="2" name="Rounded Rectangle 1"/>
           <p:cNvSpPr/>
           <p:nvPr/>
         </p:nvSpPr>
         <p:spPr>
-          <a:xfrm>
-            <a:off x="548640" y="3063240"/>
-            <a:ext cx="1645920" cy="38100"/>
-          </a:xfrm>
-          <a:prstGeom prst="rect">
-            <a:avLst/>
+          <a:xfrm rot="21420000">
+            <a:off x="-1188720" y="-1005840"/>
+            <a:ext cx="7863840" cy="6766560"/>
+          </a:xfrm>
+          <a:prstGeom prst="roundRect">
+            <a:avLst>
+              <a:gd name="adj" fmla="val 32000"/>
+            </a:avLst>
           </a:prstGeom>
           <a:solidFill>
-            <a:srgbClr val="1F4B3F"/>
+            <a:srgbClr val="2F5233"/>
           </a:solidFill>
           <a:ln>
             <a:noFill/>
@@ -3197,6 +3154,254 @@
           <a:lstStyle/>
           <a:p>
             <a:pPr algn="ctr"/>
+          </a:p>
+        </p:txBody>
+      </p:sp>
+      <p:sp>
+        <p:nvSpPr>
+          <p:cNvPr id="3" name="Oval 2"/>
+          <p:cNvSpPr/>
+          <p:nvPr/>
+        </p:nvSpPr>
+        <p:spPr>
+          <a:xfrm>
+            <a:off x="10332720" y="-640080"/>
+            <a:ext cx="2194560" cy="2194560"/>
+          </a:xfrm>
+          <a:prstGeom prst="ellipse">
+            <a:avLst/>
+          </a:prstGeom>
+          <a:solidFill>
+            <a:srgbClr val="C9743D"/>
+          </a:solidFill>
+          <a:ln>
+            <a:noFill/>
+          </a:ln>
+          <a:effectLst/>
+        </p:spPr>
+        <p:style>
+          <a:lnRef idx="1">
+            <a:schemeClr val="accent1"/>
+          </a:lnRef>
+          <a:fillRef idx="3">
+            <a:schemeClr val="accent1"/>
+          </a:fillRef>
+          <a:effectRef idx="2">
+            <a:schemeClr val="accent1"/>
+          </a:effectRef>
+          <a:fontRef idx="minor">
+            <a:schemeClr val="lt1"/>
+          </a:fontRef>
+        </p:style>
+        <p:txBody>
+          <a:bodyPr rtlCol="0" anchor="ctr"/>
+          <a:lstStyle/>
+          <a:p>
+            <a:pPr algn="ctr"/>
+          </a:p>
+        </p:txBody>
+      </p:sp>
+      <p:sp>
+        <p:nvSpPr>
+          <p:cNvPr id="4" name="Oval 3"/>
+          <p:cNvSpPr/>
+          <p:nvPr/>
+        </p:nvSpPr>
+        <p:spPr>
+          <a:xfrm>
+            <a:off x="365760" y="5623560"/>
+            <a:ext cx="1371600" cy="1371600"/>
+          </a:xfrm>
+          <a:prstGeom prst="ellipse">
+            <a:avLst/>
+          </a:prstGeom>
+          <a:solidFill>
+            <a:srgbClr val="7FA3B0"/>
+          </a:solidFill>
+          <a:ln>
+            <a:noFill/>
+          </a:ln>
+          <a:effectLst/>
+        </p:spPr>
+        <p:style>
+          <a:lnRef idx="1">
+            <a:schemeClr val="accent1"/>
+          </a:lnRef>
+          <a:fillRef idx="3">
+            <a:schemeClr val="accent1"/>
+          </a:fillRef>
+          <a:effectRef idx="2">
+            <a:schemeClr val="accent1"/>
+          </a:effectRef>
+          <a:fontRef idx="minor">
+            <a:schemeClr val="lt1"/>
+          </a:fontRef>
+        </p:style>
+        <p:txBody>
+          <a:bodyPr rtlCol="0" anchor="ctr"/>
+          <a:lstStyle/>
+          <a:p>
+            <a:pPr algn="ctr"/>
+          </a:p>
+        </p:txBody>
+      </p:sp>
+      <p:sp>
+        <p:nvSpPr>
+          <p:cNvPr id="5" name="TextBox 4"/>
+          <p:cNvSpPr txBox="1"/>
+          <p:nvPr/>
+        </p:nvSpPr>
+        <p:spPr>
+          <a:xfrm>
+            <a:off x="8503920" y="3566160"/>
+            <a:ext cx="3291840" cy="3108960"/>
+          </a:xfrm>
+          <a:prstGeom prst="rect">
+            <a:avLst/>
+          </a:prstGeom>
+          <a:noFill/>
+        </p:spPr>
+        <p:txBody>
+          <a:bodyPr wrap="none" anchor="ctr">
+            <a:spAutoFit/>
+          </a:bodyPr>
+          <a:lstStyle/>
+          <a:p>
+            <a:pPr algn="ctr"/>
+            <a:r>
+              <a:rPr sz="22000" b="1" i="0">
+                <a:solidFill>
+                  <a:srgbClr val="D9DFDA"/>
+                </a:solidFill>
+                <a:latin typeface="Cambria"/>
+              </a:rPr>
+              <a:t>3</a:t>
+            </a:r>
+          </a:p>
+        </p:txBody>
+      </p:sp>
+      <p:sp>
+        <p:nvSpPr>
+          <p:cNvPr id="6" name="Rounded Rectangle 5"/>
+          <p:cNvSpPr/>
+          <p:nvPr/>
+        </p:nvSpPr>
+        <p:spPr>
+          <a:xfrm>
+            <a:off x="731520" y="640080"/>
+            <a:ext cx="4114800" cy="502920"/>
+          </a:xfrm>
+          <a:prstGeom prst="roundRect">
+            <a:avLst>
+              <a:gd name="adj" fmla="val 50000"/>
+            </a:avLst>
+          </a:prstGeom>
+          <a:solidFill>
+            <a:srgbClr val="FFFFFF"/>
+          </a:solidFill>
+          <a:ln>
+            <a:noFill/>
+          </a:ln>
+          <a:effectLst/>
+        </p:spPr>
+        <p:style>
+          <a:lnRef idx="1">
+            <a:schemeClr val="accent1"/>
+          </a:lnRef>
+          <a:fillRef idx="3">
+            <a:schemeClr val="accent1"/>
+          </a:fillRef>
+          <a:effectRef idx="2">
+            <a:schemeClr val="accent1"/>
+          </a:effectRef>
+          <a:fontRef idx="minor">
+            <a:schemeClr val="lt1"/>
+          </a:fontRef>
+        </p:style>
+        <p:txBody>
+          <a:bodyPr rtlCol="0" anchor="ctr" wrap="none" lIns="50800" rIns="50800"/>
+          <a:lstStyle/>
+          <a:p>
+            <a:pPr algn="ctr"/>
+            <a:r>
+              <a:rPr sz="1150" b="1">
+                <a:solidFill>
+                  <a:srgbClr val="2F5233"/>
+                </a:solidFill>
+                <a:latin typeface="Calibri"/>
+              </a:rPr>
+              <a:t>VCE VISUAL COMMUNICATION DESIGN</a:t>
+            </a:r>
+          </a:p>
+        </p:txBody>
+      </p:sp>
+      <p:sp>
+        <p:nvSpPr>
+          <p:cNvPr id="7" name="TextBox 6"/>
+          <p:cNvSpPr txBox="1"/>
+          <p:nvPr/>
+        </p:nvSpPr>
+        <p:spPr>
+          <a:xfrm>
+            <a:off x="685800" y="1417320"/>
+            <a:ext cx="5669280" cy="2377440"/>
+          </a:xfrm>
+          <a:prstGeom prst="rect">
+            <a:avLst/>
+          </a:prstGeom>
+          <a:noFill/>
+        </p:spPr>
+        <p:txBody>
+          <a:bodyPr wrap="square" anchor="t">
+            <a:spAutoFit/>
+          </a:bodyPr>
+          <a:lstStyle/>
+          <a:p>
+            <a:pPr algn="l"/>
+            <a:r>
+              <a:rPr sz="3400" b="1" i="0">
+                <a:solidFill>
+                  <a:srgbClr val="FFFFFF"/>
+                </a:solidFill>
+                <a:latin typeface="Cambria"/>
+              </a:rPr>
+              <a:t>Unit 3: Reconceptualisation and Reinvention</a:t>
+            </a:r>
+          </a:p>
+        </p:txBody>
+      </p:sp>
+      <p:sp>
+        <p:nvSpPr>
+          <p:cNvPr id="8" name="TextBox 7"/>
+          <p:cNvSpPr txBox="1"/>
+          <p:nvPr/>
+        </p:nvSpPr>
+        <p:spPr>
+          <a:xfrm>
+            <a:off x="731520" y="3794760"/>
+            <a:ext cx="5486400" cy="731520"/>
+          </a:xfrm>
+          <a:prstGeom prst="rect">
+            <a:avLst/>
+          </a:prstGeom>
+          <a:noFill/>
+        </p:spPr>
+        <p:txBody>
+          <a:bodyPr wrap="square" anchor="t">
+            <a:spAutoFit/>
+          </a:bodyPr>
+          <a:lstStyle/>
+          <a:p>
+            <a:pPr algn="l"/>
+            <a:r>
+              <a:rPr sz="1600" b="0" i="0">
+                <a:solidFill>
+                  <a:srgbClr val="EAEDEA"/>
+                </a:solidFill>
+                <a:latin typeface="Calibri"/>
+              </a:rPr>
+              <a:t>VCE Visual Communication Design — Year 12</a:t>
+            </a:r>
           </a:p>
         </p:txBody>
       </p:sp>
@@ -3211,6 +3416,14 @@
 <file path=ppt/slides/slide10.xml><?xml version="1.0" encoding="utf-8"?>
 <p:sld xmlns:a="http://schemas.openxmlformats.org/drawingml/2006/main" xmlns:p="http://schemas.openxmlformats.org/presentationml/2006/main" xmlns:r="http://schemas.openxmlformats.org/officeDocument/2006/relationships">
   <p:cSld>
+    <p:bg>
+      <p:bgPr>
+        <a:solidFill>
+          <a:srgbClr val="F7F5EC"/>
+        </a:solidFill>
+        <a:effectLst/>
+      </p:bgPr>
+    </p:bg>
     <p:spTree>
       <p:nvGrpSpPr>
         <p:cNvPr id="1" name=""/>
@@ -3220,225 +3433,390 @@
       <p:grpSpPr/>
       <p:sp>
         <p:nvSpPr>
-          <p:cNvPr id="2" name="Title 1"/>
-          <p:cNvSpPr>
-            <a:spLocks noGrp="1"/>
-          </p:cNvSpPr>
-          <p:nvPr>
-            <p:ph type="title"/>
-          </p:nvPr>
-        </p:nvSpPr>
-        <p:spPr/>
-        <p:txBody>
-          <a:bodyPr wrap="square"/>
-          <a:lstStyle/>
-          <a:p>
-            <a:r>
-              <a:rPr sz="3200" b="1">
-                <a:solidFill>
-                  <a:srgbClr val="1F4B3F"/>
-                </a:solidFill>
-                <a:latin typeface="Cambria"/>
-              </a:rPr>
-              <a:t>Writing Your Own Brief</a:t>
-            </a:r>
-          </a:p>
-        </p:txBody>
-      </p:sp>
-      <p:sp>
-        <p:nvSpPr>
-          <p:cNvPr id="3" name="Content Placeholder 2"/>
-          <p:cNvSpPr>
-            <a:spLocks noGrp="1"/>
-          </p:cNvSpPr>
-          <p:nvPr>
-            <p:ph idx="1" sz="half"/>
-          </p:nvPr>
-        </p:nvSpPr>
-        <p:spPr/>
-        <p:txBody>
-          <a:bodyPr wrap="square"/>
-          <a:lstStyle/>
-          <a:p>
-            <a:pPr>
-              <a:spcAft>
-                <a:spcPts val="1000"/>
-              </a:spcAft>
-            </a:pPr>
-            <a:r>
-              <a:rPr sz="2000" b="0" i="0">
-                <a:solidFill>
-                  <a:srgbClr val="333333"/>
-                </a:solidFill>
-                <a:latin typeface="Calibri"/>
-              </a:rPr>
-              <a:t>Using your Unit 3 AOS 1 analysis and reinterpretation, you write a </a:t>
-            </a:r>
-            <a:r>
-              <a:rPr sz="2000" b="1" i="0">
-                <a:solidFill>
-                  <a:srgbClr val="1F4B3F"/>
-                </a:solidFill>
-                <a:latin typeface="Calibri"/>
-              </a:rPr>
-              <a:t>design brief</a:t>
-            </a:r>
-            <a:r>
-              <a:rPr sz="2000" b="0" i="0">
-                <a:solidFill>
-                  <a:srgbClr val="333333"/>
-                </a:solidFill>
-                <a:latin typeface="Calibri"/>
-              </a:rPr>
-              <a:t> that will guide your folio work across Units 3 and 4.</a:t>
-            </a:r>
-          </a:p>
-          <a:p>
-            <a:pPr>
-              <a:spcAft>
-                <a:spcPts val="1000"/>
-              </a:spcAft>
-            </a:pPr>
-            <a:r>
-              <a:rPr sz="2000" b="0" i="0">
-                <a:solidFill>
-                  <a:srgbClr val="333333"/>
-                </a:solidFill>
-                <a:latin typeface="Calibri"/>
-              </a:rPr>
-              <a:t>This brief must be specific enough to guide two distinct concepts, but open enough to allow genuine creative exploration.</a:t>
-            </a:r>
-          </a:p>
-        </p:txBody>
-      </p:sp>
-      <p:sp>
-        <p:nvSpPr>
-          <p:cNvPr id="4" name="Content Placeholder 3"/>
-          <p:cNvSpPr>
-            <a:spLocks noGrp="1"/>
-          </p:cNvSpPr>
-          <p:nvPr>
-            <p:ph idx="2" sz="half"/>
-          </p:nvPr>
-        </p:nvSpPr>
-        <p:spPr/>
-        <p:txBody>
-          <a:bodyPr wrap="square"/>
-          <a:lstStyle/>
-          <a:p>
-            <a:pPr>
-              <a:spcAft>
-                <a:spcPts val="1000"/>
-              </a:spcAft>
-            </a:pPr>
-            <a:r>
-              <a:rPr sz="2000" b="0" i="0">
-                <a:solidFill>
-                  <a:srgbClr val="333333"/>
-                </a:solidFill>
-                <a:latin typeface="Calibri"/>
-              </a:rPr>
-              <a:t>Your Brief Must State</a:t>
-            </a:r>
-          </a:p>
-          <a:p>
-            <a:pPr lvl="1">
-              <a:spcAft>
-                <a:spcPts val="1000"/>
-              </a:spcAft>
-            </a:pPr>
-            <a:r>
-              <a:rPr sz="1800" b="0" i="0">
-                <a:solidFill>
-                  <a:srgbClr val="333333"/>
-                </a:solidFill>
-                <a:latin typeface="Calibri"/>
-              </a:rPr>
-              <a:t>Client / context</a:t>
-            </a:r>
-          </a:p>
-          <a:p>
-            <a:pPr lvl="1">
-              <a:spcAft>
-                <a:spcPts val="1000"/>
-              </a:spcAft>
-            </a:pPr>
-            <a:r>
-              <a:rPr sz="1800" b="0" i="0">
-                <a:solidFill>
-                  <a:srgbClr val="333333"/>
-                </a:solidFill>
-                <a:latin typeface="Calibri"/>
-              </a:rPr>
-              <a:t>Target audience</a:t>
-            </a:r>
-          </a:p>
-          <a:p>
-            <a:pPr lvl="1">
-              <a:spcAft>
-                <a:spcPts val="1000"/>
-              </a:spcAft>
-            </a:pPr>
-            <a:r>
-              <a:rPr sz="1800" b="0" i="0">
-                <a:solidFill>
-                  <a:srgbClr val="333333"/>
-                </a:solidFill>
-                <a:latin typeface="Calibri"/>
-              </a:rPr>
-              <a:t>Purpose &amp; communication objectives</a:t>
-            </a:r>
-          </a:p>
-          <a:p>
-            <a:pPr lvl="1">
-              <a:spcAft>
-                <a:spcPts val="1000"/>
-              </a:spcAft>
-            </a:pPr>
-            <a:r>
-              <a:rPr sz="1800" b="0" i="0">
-                <a:solidFill>
-                  <a:srgbClr val="333333"/>
-                </a:solidFill>
-                <a:latin typeface="Calibri"/>
-              </a:rPr>
-              <a:t>Constraints (time, materials, format)</a:t>
-            </a:r>
-          </a:p>
-          <a:p>
-            <a:pPr lvl="1">
-              <a:spcAft>
-                <a:spcPts val="1000"/>
-              </a:spcAft>
-            </a:pPr>
-            <a:r>
-              <a:rPr sz="1800" b="0" i="0">
-                <a:solidFill>
-                  <a:srgbClr val="333333"/>
-                </a:solidFill>
-                <a:latin typeface="Calibri"/>
-              </a:rPr>
-              <a:t>Two (2) obligatory design fields/outcomes</a:t>
-            </a:r>
-          </a:p>
-        </p:txBody>
-      </p:sp>
-      <p:sp>
-        <p:nvSpPr>
-          <p:cNvPr id="5" name="Rectangle 4"/>
+          <p:cNvPr id="2" name="Rounded Rectangle 1"/>
           <p:cNvSpPr/>
           <p:nvPr/>
         </p:nvSpPr>
         <p:spPr>
           <a:xfrm>
-            <a:off x="548640" y="1234440"/>
-            <a:ext cx="1463040" cy="38100"/>
+            <a:off x="685800" y="502920"/>
+            <a:ext cx="3291840" cy="457200"/>
+          </a:xfrm>
+          <a:prstGeom prst="roundRect">
+            <a:avLst>
+              <a:gd name="adj" fmla="val 50000"/>
+            </a:avLst>
+          </a:prstGeom>
+          <a:solidFill>
+            <a:srgbClr val="2F5233"/>
+          </a:solidFill>
+          <a:ln>
+            <a:noFill/>
+          </a:ln>
+          <a:effectLst/>
+        </p:spPr>
+        <p:style>
+          <a:lnRef idx="1">
+            <a:schemeClr val="accent1"/>
+          </a:lnRef>
+          <a:fillRef idx="3">
+            <a:schemeClr val="accent1"/>
+          </a:fillRef>
+          <a:effectRef idx="2">
+            <a:schemeClr val="accent1"/>
+          </a:effectRef>
+          <a:fontRef idx="minor">
+            <a:schemeClr val="lt1"/>
+          </a:fontRef>
+        </p:style>
+        <p:txBody>
+          <a:bodyPr rtlCol="0" anchor="ctr" wrap="none" lIns="50800" rIns="50800"/>
+          <a:lstStyle/>
+          <a:p>
+            <a:pPr algn="ctr"/>
+            <a:r>
+              <a:rPr sz="1100" b="1">
+                <a:solidFill>
+                  <a:srgbClr val="FFFFFF"/>
+                </a:solidFill>
+                <a:latin typeface="Calibri"/>
+              </a:rPr>
+              <a:t>THE BRIEF &amp; IDEATION</a:t>
+            </a:r>
+          </a:p>
+        </p:txBody>
+      </p:sp>
+      <p:sp>
+        <p:nvSpPr>
+          <p:cNvPr id="3" name="TextBox 2"/>
+          <p:cNvSpPr txBox="1"/>
+          <p:nvPr/>
+        </p:nvSpPr>
+        <p:spPr>
+          <a:xfrm>
+            <a:off x="685800" y="1051560"/>
+            <a:ext cx="10607040" cy="822960"/>
           </a:xfrm>
           <a:prstGeom prst="rect">
             <a:avLst/>
           </a:prstGeom>
+          <a:noFill/>
+        </p:spPr>
+        <p:txBody>
+          <a:bodyPr wrap="square" anchor="t">
+            <a:spAutoFit/>
+          </a:bodyPr>
+          <a:lstStyle/>
+          <a:p>
+            <a:pPr algn="l"/>
+            <a:r>
+              <a:rPr sz="2700" b="1" i="0">
+                <a:solidFill>
+                  <a:srgbClr val="20291F"/>
+                </a:solidFill>
+                <a:latin typeface="Cambria"/>
+              </a:rPr>
+              <a:t>Writing Your Own Brief</a:t>
+            </a:r>
+          </a:p>
+        </p:txBody>
+      </p:sp>
+      <p:sp>
+        <p:nvSpPr>
+          <p:cNvPr id="4" name="Rounded Rectangle 3"/>
+          <p:cNvSpPr/>
+          <p:nvPr/>
+        </p:nvSpPr>
+        <p:spPr>
+          <a:xfrm>
+            <a:off x="685800" y="1874519"/>
+            <a:ext cx="5166360" cy="4526280"/>
+          </a:xfrm>
+          <a:prstGeom prst="roundRect">
+            <a:avLst>
+              <a:gd name="adj" fmla="val 6000"/>
+            </a:avLst>
+          </a:prstGeom>
           <a:solidFill>
-            <a:srgbClr val="1F4B3F"/>
+            <a:srgbClr val="E6EAE6"/>
+          </a:solidFill>
+          <a:ln>
+            <a:noFill/>
+          </a:ln>
+          <a:effectLst/>
+        </p:spPr>
+        <p:style>
+          <a:lnRef idx="1">
+            <a:schemeClr val="accent1"/>
+          </a:lnRef>
+          <a:fillRef idx="3">
+            <a:schemeClr val="accent1"/>
+          </a:fillRef>
+          <a:effectRef idx="2">
+            <a:schemeClr val="accent1"/>
+          </a:effectRef>
+          <a:fontRef idx="minor">
+            <a:schemeClr val="lt1"/>
+          </a:fontRef>
+        </p:style>
+        <p:txBody>
+          <a:bodyPr rtlCol="0" anchor="ctr" lIns="279400" rIns="279400" tIns="228600" bIns="228600" wrap="square"/>
+          <a:lstStyle/>
+          <a:p>
+            <a:pPr algn="ctr" indent="-203200" marL="203200">
+              <a:spcAft>
+                <a:spcPts val="900"/>
+              </a:spcAft>
+              <a:buClr>
+                <a:srgbClr val="2F5233"/>
+              </a:buClr>
+              <a:buSzPct val="90000"/>
+              <a:buFont typeface="Arial"/>
+              <a:buChar char="●"/>
+            </a:pPr>
+            <a:r>
+              <a:rPr sz="1400" b="0" i="0">
+                <a:solidFill>
+                  <a:srgbClr val="20291F"/>
+                </a:solidFill>
+                <a:latin typeface="Calibri"/>
+              </a:rPr>
+              <a:t>Using your Unit 3 AOS 1 analysis and reinterpretation, you write a </a:t>
+            </a:r>
+            <a:r>
+              <a:rPr sz="1400" b="1" i="0">
+                <a:solidFill>
+                  <a:srgbClr val="27452B"/>
+                </a:solidFill>
+                <a:latin typeface="Calibri"/>
+              </a:rPr>
+              <a:t>design brief</a:t>
+            </a:r>
+            <a:r>
+              <a:rPr sz="1400" b="0" i="0">
+                <a:solidFill>
+                  <a:srgbClr val="20291F"/>
+                </a:solidFill>
+                <a:latin typeface="Calibri"/>
+              </a:rPr>
+              <a:t> that will guide your folio work across Units 3 and 4.</a:t>
+            </a:r>
+          </a:p>
+          <a:p>
+            <a:pPr indent="-203200" marL="203200">
+              <a:spcAft>
+                <a:spcPts val="900"/>
+              </a:spcAft>
+              <a:buClr>
+                <a:srgbClr val="2F5233"/>
+              </a:buClr>
+              <a:buSzPct val="90000"/>
+              <a:buFont typeface="Arial"/>
+              <a:buChar char="●"/>
+            </a:pPr>
+            <a:r>
+              <a:rPr sz="1400" b="0" i="0">
+                <a:solidFill>
+                  <a:srgbClr val="20291F"/>
+                </a:solidFill>
+                <a:latin typeface="Calibri"/>
+              </a:rPr>
+              <a:t>This brief must be specific enough to guide two distinct concepts, but open enough to allow genuine creative exploration.</a:t>
+            </a:r>
+          </a:p>
+        </p:txBody>
+      </p:sp>
+      <p:sp>
+        <p:nvSpPr>
+          <p:cNvPr id="5" name="Rounded Rectangle 4"/>
+          <p:cNvSpPr/>
+          <p:nvPr/>
+        </p:nvSpPr>
+        <p:spPr>
+          <a:xfrm>
+            <a:off x="6080760" y="1874519"/>
+            <a:ext cx="5166360" cy="4526280"/>
+          </a:xfrm>
+          <a:prstGeom prst="roundRect">
+            <a:avLst>
+              <a:gd name="adj" fmla="val 6000"/>
+            </a:avLst>
+          </a:prstGeom>
+          <a:solidFill>
+            <a:srgbClr val="DBE5E8"/>
+          </a:solidFill>
+          <a:ln>
+            <a:noFill/>
+          </a:ln>
+          <a:effectLst/>
+        </p:spPr>
+        <p:style>
+          <a:lnRef idx="1">
+            <a:schemeClr val="accent1"/>
+          </a:lnRef>
+          <a:fillRef idx="3">
+            <a:schemeClr val="accent1"/>
+          </a:fillRef>
+          <a:effectRef idx="2">
+            <a:schemeClr val="accent1"/>
+          </a:effectRef>
+          <a:fontRef idx="minor">
+            <a:schemeClr val="lt1"/>
+          </a:fontRef>
+        </p:style>
+        <p:txBody>
+          <a:bodyPr rtlCol="0" anchor="ctr" lIns="279400" rIns="279400" tIns="228600" bIns="228600" wrap="square"/>
+          <a:lstStyle/>
+          <a:p>
+            <a:pPr algn="ctr" indent="-203200" marL="203200">
+              <a:spcAft>
+                <a:spcPts val="900"/>
+              </a:spcAft>
+              <a:buClr>
+                <a:srgbClr val="7FA3B0"/>
+              </a:buClr>
+              <a:buSzPct val="90000"/>
+              <a:buFont typeface="Arial"/>
+              <a:buChar char="●"/>
+            </a:pPr>
+            <a:r>
+              <a:rPr sz="1400" b="0" i="0">
+                <a:solidFill>
+                  <a:srgbClr val="20291F"/>
+                </a:solidFill>
+                <a:latin typeface="Calibri"/>
+              </a:rPr>
+              <a:t>Your Brief Must State</a:t>
+            </a:r>
+          </a:p>
+          <a:p>
+            <a:pPr indent="-203200" marL="203200">
+              <a:spcAft>
+                <a:spcPts val="900"/>
+              </a:spcAft>
+              <a:buClr>
+                <a:srgbClr val="7FA3B0"/>
+              </a:buClr>
+              <a:buSzPct val="90000"/>
+              <a:buFont typeface="Arial"/>
+              <a:buChar char="–"/>
+            </a:pPr>
+            <a:r>
+              <a:rPr sz="1250" b="0" i="0">
+                <a:solidFill>
+                  <a:srgbClr val="20291F"/>
+                </a:solidFill>
+                <a:latin typeface="Calibri"/>
+              </a:rPr>
+              <a:t>Client / context</a:t>
+            </a:r>
+          </a:p>
+          <a:p>
+            <a:pPr indent="-203200" marL="203200">
+              <a:spcAft>
+                <a:spcPts val="900"/>
+              </a:spcAft>
+              <a:buClr>
+                <a:srgbClr val="7FA3B0"/>
+              </a:buClr>
+              <a:buSzPct val="90000"/>
+              <a:buFont typeface="Arial"/>
+              <a:buChar char="–"/>
+            </a:pPr>
+            <a:r>
+              <a:rPr sz="1250" b="0" i="0">
+                <a:solidFill>
+                  <a:srgbClr val="20291F"/>
+                </a:solidFill>
+                <a:latin typeface="Calibri"/>
+              </a:rPr>
+              <a:t>Target audience</a:t>
+            </a:r>
+          </a:p>
+          <a:p>
+            <a:pPr indent="-203200" marL="203200">
+              <a:spcAft>
+                <a:spcPts val="900"/>
+              </a:spcAft>
+              <a:buClr>
+                <a:srgbClr val="7FA3B0"/>
+              </a:buClr>
+              <a:buSzPct val="90000"/>
+              <a:buFont typeface="Arial"/>
+              <a:buChar char="–"/>
+            </a:pPr>
+            <a:r>
+              <a:rPr sz="1250" b="0" i="0">
+                <a:solidFill>
+                  <a:srgbClr val="20291F"/>
+                </a:solidFill>
+                <a:latin typeface="Calibri"/>
+              </a:rPr>
+              <a:t>Purpose &amp; communication objectives</a:t>
+            </a:r>
+          </a:p>
+          <a:p>
+            <a:pPr indent="-203200" marL="203200">
+              <a:spcAft>
+                <a:spcPts val="900"/>
+              </a:spcAft>
+              <a:buClr>
+                <a:srgbClr val="7FA3B0"/>
+              </a:buClr>
+              <a:buSzPct val="90000"/>
+              <a:buFont typeface="Arial"/>
+              <a:buChar char="–"/>
+            </a:pPr>
+            <a:r>
+              <a:rPr sz="1250" b="0" i="0">
+                <a:solidFill>
+                  <a:srgbClr val="20291F"/>
+                </a:solidFill>
+                <a:latin typeface="Calibri"/>
+              </a:rPr>
+              <a:t>Constraints (time, materials, format)</a:t>
+            </a:r>
+          </a:p>
+          <a:p>
+            <a:pPr indent="-203200" marL="203200">
+              <a:spcAft>
+                <a:spcPts val="900"/>
+              </a:spcAft>
+              <a:buClr>
+                <a:srgbClr val="7FA3B0"/>
+              </a:buClr>
+              <a:buSzPct val="90000"/>
+              <a:buFont typeface="Arial"/>
+              <a:buChar char="–"/>
+            </a:pPr>
+            <a:r>
+              <a:rPr sz="1250" b="0" i="0">
+                <a:solidFill>
+                  <a:srgbClr val="20291F"/>
+                </a:solidFill>
+                <a:latin typeface="Calibri"/>
+              </a:rPr>
+              <a:t>Two (2) obligatory design fields/outcomes</a:t>
+            </a:r>
+          </a:p>
+        </p:txBody>
+      </p:sp>
+      <p:sp>
+        <p:nvSpPr>
+          <p:cNvPr id="6" name="Oval 5"/>
+          <p:cNvSpPr/>
+          <p:nvPr/>
+        </p:nvSpPr>
+        <p:spPr>
+          <a:xfrm>
+            <a:off x="5532120" y="3840480"/>
+            <a:ext cx="685800" cy="685800"/>
+          </a:xfrm>
+          <a:prstGeom prst="ellipse">
+            <a:avLst/>
+          </a:prstGeom>
+          <a:solidFill>
+            <a:srgbClr val="C9743D"/>
           </a:solidFill>
           <a:ln>
             <a:noFill/>
@@ -3478,6 +3856,14 @@
 <file path=ppt/slides/slide11.xml><?xml version="1.0" encoding="utf-8"?>
 <p:sld xmlns:a="http://schemas.openxmlformats.org/drawingml/2006/main" xmlns:p="http://schemas.openxmlformats.org/presentationml/2006/main" xmlns:r="http://schemas.openxmlformats.org/officeDocument/2006/relationships">
   <p:cSld>
+    <p:bg>
+      <p:bgPr>
+        <a:solidFill>
+          <a:srgbClr val="F7F5EC"/>
+        </a:solidFill>
+        <a:effectLst/>
+      </p:bgPr>
+    </p:bg>
     <p:spTree>
       <p:nvGrpSpPr>
         <p:cNvPr id="1" name=""/>
@@ -3487,263 +3873,422 @@
       <p:grpSpPr/>
       <p:sp>
         <p:nvSpPr>
-          <p:cNvPr id="2" name="Title 1"/>
-          <p:cNvSpPr>
-            <a:spLocks noGrp="1"/>
-          </p:cNvSpPr>
-          <p:nvPr>
-            <p:ph type="title"/>
-          </p:nvPr>
-        </p:nvSpPr>
-        <p:spPr/>
-        <p:txBody>
-          <a:bodyPr wrap="square"/>
-          <a:lstStyle/>
-          <a:p>
-            <a:r>
-              <a:rPr sz="3200" b="1">
-                <a:solidFill>
-                  <a:srgbClr val="1F4B3F"/>
-                </a:solidFill>
-                <a:latin typeface="Cambria"/>
-              </a:rPr>
-              <a:t>Deconstructing a Brief</a:t>
-            </a:r>
-          </a:p>
-        </p:txBody>
-      </p:sp>
-      <p:sp>
-        <p:nvSpPr>
-          <p:cNvPr id="3" name="Content Placeholder 2"/>
-          <p:cNvSpPr>
-            <a:spLocks noGrp="1"/>
-          </p:cNvSpPr>
-          <p:nvPr>
-            <p:ph idx="1" sz="half"/>
-          </p:nvPr>
-        </p:nvSpPr>
-        <p:spPr/>
-        <p:txBody>
-          <a:bodyPr wrap="square"/>
-          <a:lstStyle/>
-          <a:p>
-            <a:pPr>
-              <a:spcAft>
-                <a:spcPts val="1000"/>
-              </a:spcAft>
-            </a:pPr>
-            <a:r>
-              <a:rPr sz="2000" b="0" i="0">
-                <a:solidFill>
-                  <a:srgbClr val="333333"/>
-                </a:solidFill>
-                <a:latin typeface="Calibri"/>
-              </a:rPr>
-              <a:t>Before generating ideas, break the brief into its component parts to ensure nothing is missed.</a:t>
-            </a:r>
-          </a:p>
-          <a:p>
-            <a:pPr lvl="1">
-              <a:spcAft>
-                <a:spcPts val="1000"/>
-              </a:spcAft>
-            </a:pPr>
-            <a:r>
-              <a:rPr sz="1800" b="1" i="0">
-                <a:solidFill>
-                  <a:srgbClr val="1F4B3F"/>
-                </a:solidFill>
-                <a:latin typeface="Calibri"/>
-              </a:rPr>
-              <a:t>Who</a:t>
-            </a:r>
-            <a:r>
-              <a:rPr sz="1800" b="0" i="0">
-                <a:solidFill>
-                  <a:srgbClr val="333333"/>
-                </a:solidFill>
-                <a:latin typeface="Calibri"/>
-              </a:rPr>
-              <a:t> — the target audience and their needs</a:t>
-            </a:r>
-          </a:p>
-          <a:p>
-            <a:pPr lvl="1">
-              <a:spcAft>
-                <a:spcPts val="1000"/>
-              </a:spcAft>
-            </a:pPr>
-            <a:r>
-              <a:rPr sz="1800" b="1" i="0">
-                <a:solidFill>
-                  <a:srgbClr val="1F4B3F"/>
-                </a:solidFill>
-                <a:latin typeface="Calibri"/>
-              </a:rPr>
-              <a:t>What</a:t>
-            </a:r>
-            <a:r>
-              <a:rPr sz="1800" b="0" i="0">
-                <a:solidFill>
-                  <a:srgbClr val="333333"/>
-                </a:solidFill>
-                <a:latin typeface="Calibri"/>
-              </a:rPr>
-              <a:t> — the required outcomes (obligatory design fields)</a:t>
-            </a:r>
-          </a:p>
-          <a:p>
-            <a:pPr lvl="1">
-              <a:spcAft>
-                <a:spcPts val="1000"/>
-              </a:spcAft>
-            </a:pPr>
-            <a:r>
-              <a:rPr sz="1800" b="1" i="0">
-                <a:solidFill>
-                  <a:srgbClr val="1F4B3F"/>
-                </a:solidFill>
-                <a:latin typeface="Calibri"/>
-              </a:rPr>
-              <a:t>Why</a:t>
-            </a:r>
-            <a:r>
-              <a:rPr sz="1800" b="0" i="0">
-                <a:solidFill>
-                  <a:srgbClr val="333333"/>
-                </a:solidFill>
-                <a:latin typeface="Calibri"/>
-              </a:rPr>
-              <a:t> — the purpose and desired effect</a:t>
-            </a:r>
-          </a:p>
-          <a:p>
-            <a:pPr lvl="1">
-              <a:spcAft>
-                <a:spcPts val="1000"/>
-              </a:spcAft>
-            </a:pPr>
-            <a:r>
-              <a:rPr sz="1800" b="1" i="0">
-                <a:solidFill>
-                  <a:srgbClr val="1F4B3F"/>
-                </a:solidFill>
-                <a:latin typeface="Calibri"/>
-              </a:rPr>
-              <a:t>Constraints</a:t>
-            </a:r>
-            <a:r>
-              <a:rPr sz="1800" b="0" i="0">
-                <a:solidFill>
-                  <a:srgbClr val="333333"/>
-                </a:solidFill>
-                <a:latin typeface="Calibri"/>
-              </a:rPr>
-              <a:t> — what limits the possible solutions</a:t>
-            </a:r>
-          </a:p>
-        </p:txBody>
-      </p:sp>
-      <p:sp>
-        <p:nvSpPr>
-          <p:cNvPr id="4" name="Content Placeholder 3"/>
-          <p:cNvSpPr>
-            <a:spLocks noGrp="1"/>
-          </p:cNvSpPr>
-          <p:nvPr>
-            <p:ph idx="2" sz="half"/>
-          </p:nvPr>
-        </p:nvSpPr>
-        <p:spPr/>
-        <p:txBody>
-          <a:bodyPr wrap="square"/>
-          <a:lstStyle/>
-          <a:p>
-            <a:pPr>
-              <a:spcAft>
-                <a:spcPts val="1000"/>
-              </a:spcAft>
-            </a:pPr>
-            <a:r>
-              <a:rPr sz="2000" b="0" i="0">
-                <a:solidFill>
-                  <a:srgbClr val="333333"/>
-                </a:solidFill>
-                <a:latin typeface="Calibri"/>
-              </a:rPr>
-              <a:t>Exam Tip</a:t>
-            </a:r>
-          </a:p>
-          <a:p>
-            <a:pPr>
-              <a:spcAft>
-                <a:spcPts val="1000"/>
-              </a:spcAft>
-            </a:pPr>
-            <a:r>
-              <a:rPr sz="2000" b="0" i="0">
-                <a:solidFill>
-                  <a:srgbClr val="333333"/>
-                </a:solidFill>
-                <a:latin typeface="Calibri"/>
-              </a:rPr>
-              <a:t>Exam questions often ask you to identify a </a:t>
-            </a:r>
-            <a:r>
-              <a:rPr sz="2000" b="1" i="0">
-                <a:solidFill>
-                  <a:srgbClr val="1F4B3F"/>
-                </a:solidFill>
-                <a:latin typeface="Calibri"/>
-              </a:rPr>
-              <a:t>missing</a:t>
-            </a:r>
-            <a:r>
-              <a:rPr sz="2000" b="0" i="0">
-                <a:solidFill>
-                  <a:srgbClr val="333333"/>
-                </a:solidFill>
-                <a:latin typeface="Calibri"/>
-              </a:rPr>
-              <a:t> or </a:t>
-            </a:r>
-            <a:r>
-              <a:rPr sz="2000" b="1" i="0">
-                <a:solidFill>
-                  <a:srgbClr val="1F4B3F"/>
-                </a:solidFill>
-                <a:latin typeface="Calibri"/>
-              </a:rPr>
-              <a:t>unclear</a:t>
-            </a:r>
-            <a:r>
-              <a:rPr sz="2000" b="0" i="0">
-                <a:solidFill>
-                  <a:srgbClr val="333333"/>
-                </a:solidFill>
-                <a:latin typeface="Calibri"/>
-              </a:rPr>
-              <a:t> part of a given brief — practice spotting gaps in audience, purpose or constraints.</a:t>
-            </a:r>
-          </a:p>
-        </p:txBody>
-      </p:sp>
-      <p:sp>
-        <p:nvSpPr>
-          <p:cNvPr id="5" name="Rectangle 4"/>
+          <p:cNvPr id="2" name="Rounded Rectangle 1"/>
           <p:cNvSpPr/>
           <p:nvPr/>
         </p:nvSpPr>
         <p:spPr>
           <a:xfrm>
-            <a:off x="548640" y="1234440"/>
-            <a:ext cx="1463040" cy="38100"/>
+            <a:off x="685800" y="502920"/>
+            <a:ext cx="3291840" cy="457200"/>
+          </a:xfrm>
+          <a:prstGeom prst="roundRect">
+            <a:avLst>
+              <a:gd name="adj" fmla="val 50000"/>
+            </a:avLst>
+          </a:prstGeom>
+          <a:solidFill>
+            <a:srgbClr val="2F5233"/>
+          </a:solidFill>
+          <a:ln>
+            <a:noFill/>
+          </a:ln>
+          <a:effectLst/>
+        </p:spPr>
+        <p:style>
+          <a:lnRef idx="1">
+            <a:schemeClr val="accent1"/>
+          </a:lnRef>
+          <a:fillRef idx="3">
+            <a:schemeClr val="accent1"/>
+          </a:fillRef>
+          <a:effectRef idx="2">
+            <a:schemeClr val="accent1"/>
+          </a:effectRef>
+          <a:fontRef idx="minor">
+            <a:schemeClr val="lt1"/>
+          </a:fontRef>
+        </p:style>
+        <p:txBody>
+          <a:bodyPr rtlCol="0" anchor="ctr" wrap="none" lIns="50800" rIns="50800"/>
+          <a:lstStyle/>
+          <a:p>
+            <a:pPr algn="ctr"/>
+            <a:r>
+              <a:rPr sz="1100" b="1">
+                <a:solidFill>
+                  <a:srgbClr val="FFFFFF"/>
+                </a:solidFill>
+                <a:latin typeface="Calibri"/>
+              </a:rPr>
+              <a:t>THE BRIEF &amp; IDEATION</a:t>
+            </a:r>
+          </a:p>
+        </p:txBody>
+      </p:sp>
+      <p:sp>
+        <p:nvSpPr>
+          <p:cNvPr id="3" name="TextBox 2"/>
+          <p:cNvSpPr txBox="1"/>
+          <p:nvPr/>
+        </p:nvSpPr>
+        <p:spPr>
+          <a:xfrm>
+            <a:off x="685800" y="1051560"/>
+            <a:ext cx="10607040" cy="822960"/>
           </a:xfrm>
           <a:prstGeom prst="rect">
             <a:avLst/>
           </a:prstGeom>
+          <a:noFill/>
+        </p:spPr>
+        <p:txBody>
+          <a:bodyPr wrap="square" anchor="t">
+            <a:spAutoFit/>
+          </a:bodyPr>
+          <a:lstStyle/>
+          <a:p>
+            <a:pPr algn="l"/>
+            <a:r>
+              <a:rPr sz="2700" b="1" i="0">
+                <a:solidFill>
+                  <a:srgbClr val="20291F"/>
+                </a:solidFill>
+                <a:latin typeface="Cambria"/>
+              </a:rPr>
+              <a:t>Deconstructing a Brief</a:t>
+            </a:r>
+          </a:p>
+        </p:txBody>
+      </p:sp>
+      <p:sp>
+        <p:nvSpPr>
+          <p:cNvPr id="4" name="Rounded Rectangle 3"/>
+          <p:cNvSpPr/>
+          <p:nvPr/>
+        </p:nvSpPr>
+        <p:spPr>
+          <a:xfrm>
+            <a:off x="685800" y="1874519"/>
+            <a:ext cx="5166360" cy="4526280"/>
+          </a:xfrm>
+          <a:prstGeom prst="roundRect">
+            <a:avLst>
+              <a:gd name="adj" fmla="val 6000"/>
+            </a:avLst>
+          </a:prstGeom>
           <a:solidFill>
-            <a:srgbClr val="1F4B3F"/>
+            <a:srgbClr val="E6EAE6"/>
+          </a:solidFill>
+          <a:ln>
+            <a:noFill/>
+          </a:ln>
+          <a:effectLst/>
+        </p:spPr>
+        <p:style>
+          <a:lnRef idx="1">
+            <a:schemeClr val="accent1"/>
+          </a:lnRef>
+          <a:fillRef idx="3">
+            <a:schemeClr val="accent1"/>
+          </a:fillRef>
+          <a:effectRef idx="2">
+            <a:schemeClr val="accent1"/>
+          </a:effectRef>
+          <a:fontRef idx="minor">
+            <a:schemeClr val="lt1"/>
+          </a:fontRef>
+        </p:style>
+        <p:txBody>
+          <a:bodyPr rtlCol="0" anchor="ctr" lIns="279400" rIns="279400" tIns="228600" bIns="228600" wrap="square"/>
+          <a:lstStyle/>
+          <a:p>
+            <a:pPr algn="ctr" indent="-203200" marL="203200">
+              <a:spcAft>
+                <a:spcPts val="900"/>
+              </a:spcAft>
+              <a:buClr>
+                <a:srgbClr val="2F5233"/>
+              </a:buClr>
+              <a:buSzPct val="90000"/>
+              <a:buFont typeface="Arial"/>
+              <a:buChar char="●"/>
+            </a:pPr>
+            <a:r>
+              <a:rPr sz="1400" b="0" i="0">
+                <a:solidFill>
+                  <a:srgbClr val="20291F"/>
+                </a:solidFill>
+                <a:latin typeface="Calibri"/>
+              </a:rPr>
+              <a:t>Before generating ideas, break the brief into its component parts to ensure nothing is missed.</a:t>
+            </a:r>
+          </a:p>
+          <a:p>
+            <a:pPr indent="-203200" marL="203200">
+              <a:spcAft>
+                <a:spcPts val="900"/>
+              </a:spcAft>
+              <a:buClr>
+                <a:srgbClr val="2F5233"/>
+              </a:buClr>
+              <a:buSzPct val="90000"/>
+              <a:buFont typeface="Arial"/>
+              <a:buChar char="–"/>
+            </a:pPr>
+            <a:r>
+              <a:rPr sz="1250" b="1" i="0">
+                <a:solidFill>
+                  <a:srgbClr val="27452B"/>
+                </a:solidFill>
+                <a:latin typeface="Calibri"/>
+              </a:rPr>
+              <a:t>Who</a:t>
+            </a:r>
+            <a:r>
+              <a:rPr sz="1250" b="0" i="0">
+                <a:solidFill>
+                  <a:srgbClr val="20291F"/>
+                </a:solidFill>
+                <a:latin typeface="Calibri"/>
+              </a:rPr>
+              <a:t> — the target audience and their needs</a:t>
+            </a:r>
+          </a:p>
+          <a:p>
+            <a:pPr indent="-203200" marL="203200">
+              <a:spcAft>
+                <a:spcPts val="900"/>
+              </a:spcAft>
+              <a:buClr>
+                <a:srgbClr val="2F5233"/>
+              </a:buClr>
+              <a:buSzPct val="90000"/>
+              <a:buFont typeface="Arial"/>
+              <a:buChar char="–"/>
+            </a:pPr>
+            <a:r>
+              <a:rPr sz="1250" b="1" i="0">
+                <a:solidFill>
+                  <a:srgbClr val="27452B"/>
+                </a:solidFill>
+                <a:latin typeface="Calibri"/>
+              </a:rPr>
+              <a:t>What</a:t>
+            </a:r>
+            <a:r>
+              <a:rPr sz="1250" b="0" i="0">
+                <a:solidFill>
+                  <a:srgbClr val="20291F"/>
+                </a:solidFill>
+                <a:latin typeface="Calibri"/>
+              </a:rPr>
+              <a:t> — the required outcomes (obligatory design fields)</a:t>
+            </a:r>
+          </a:p>
+          <a:p>
+            <a:pPr indent="-203200" marL="203200">
+              <a:spcAft>
+                <a:spcPts val="900"/>
+              </a:spcAft>
+              <a:buClr>
+                <a:srgbClr val="2F5233"/>
+              </a:buClr>
+              <a:buSzPct val="90000"/>
+              <a:buFont typeface="Arial"/>
+              <a:buChar char="–"/>
+            </a:pPr>
+            <a:r>
+              <a:rPr sz="1250" b="1" i="0">
+                <a:solidFill>
+                  <a:srgbClr val="27452B"/>
+                </a:solidFill>
+                <a:latin typeface="Calibri"/>
+              </a:rPr>
+              <a:t>Why</a:t>
+            </a:r>
+            <a:r>
+              <a:rPr sz="1250" b="0" i="0">
+                <a:solidFill>
+                  <a:srgbClr val="20291F"/>
+                </a:solidFill>
+                <a:latin typeface="Calibri"/>
+              </a:rPr>
+              <a:t> — the purpose and desired effect</a:t>
+            </a:r>
+          </a:p>
+          <a:p>
+            <a:pPr indent="-203200" marL="203200">
+              <a:spcAft>
+                <a:spcPts val="900"/>
+              </a:spcAft>
+              <a:buClr>
+                <a:srgbClr val="2F5233"/>
+              </a:buClr>
+              <a:buSzPct val="90000"/>
+              <a:buFont typeface="Arial"/>
+              <a:buChar char="–"/>
+            </a:pPr>
+            <a:r>
+              <a:rPr sz="1250" b="1" i="0">
+                <a:solidFill>
+                  <a:srgbClr val="27452B"/>
+                </a:solidFill>
+                <a:latin typeface="Calibri"/>
+              </a:rPr>
+              <a:t>Constraints</a:t>
+            </a:r>
+            <a:r>
+              <a:rPr sz="1250" b="0" i="0">
+                <a:solidFill>
+                  <a:srgbClr val="20291F"/>
+                </a:solidFill>
+                <a:latin typeface="Calibri"/>
+              </a:rPr>
+              <a:t> — what limits the possible solutions</a:t>
+            </a:r>
+          </a:p>
+        </p:txBody>
+      </p:sp>
+      <p:sp>
+        <p:nvSpPr>
+          <p:cNvPr id="5" name="Rounded Rectangle 4"/>
+          <p:cNvSpPr/>
+          <p:nvPr/>
+        </p:nvSpPr>
+        <p:spPr>
+          <a:xfrm>
+            <a:off x="6080760" y="1874519"/>
+            <a:ext cx="5166360" cy="4526280"/>
+          </a:xfrm>
+          <a:prstGeom prst="roundRect">
+            <a:avLst>
+              <a:gd name="adj" fmla="val 6000"/>
+            </a:avLst>
+          </a:prstGeom>
+          <a:solidFill>
+            <a:srgbClr val="DBE5E8"/>
+          </a:solidFill>
+          <a:ln>
+            <a:noFill/>
+          </a:ln>
+          <a:effectLst/>
+        </p:spPr>
+        <p:style>
+          <a:lnRef idx="1">
+            <a:schemeClr val="accent1"/>
+          </a:lnRef>
+          <a:fillRef idx="3">
+            <a:schemeClr val="accent1"/>
+          </a:fillRef>
+          <a:effectRef idx="2">
+            <a:schemeClr val="accent1"/>
+          </a:effectRef>
+          <a:fontRef idx="minor">
+            <a:schemeClr val="lt1"/>
+          </a:fontRef>
+        </p:style>
+        <p:txBody>
+          <a:bodyPr rtlCol="0" anchor="ctr" lIns="279400" rIns="279400" tIns="228600" bIns="228600" wrap="square"/>
+          <a:lstStyle/>
+          <a:p>
+            <a:pPr algn="ctr" indent="-203200" marL="203200">
+              <a:spcAft>
+                <a:spcPts val="900"/>
+              </a:spcAft>
+              <a:buClr>
+                <a:srgbClr val="7FA3B0"/>
+              </a:buClr>
+              <a:buSzPct val="90000"/>
+              <a:buFont typeface="Arial"/>
+              <a:buChar char="●"/>
+            </a:pPr>
+            <a:r>
+              <a:rPr sz="1400" b="0" i="0">
+                <a:solidFill>
+                  <a:srgbClr val="20291F"/>
+                </a:solidFill>
+                <a:latin typeface="Calibri"/>
+              </a:rPr>
+              <a:t>Exam Tip</a:t>
+            </a:r>
+          </a:p>
+          <a:p>
+            <a:pPr indent="-203200" marL="203200">
+              <a:spcAft>
+                <a:spcPts val="900"/>
+              </a:spcAft>
+              <a:buClr>
+                <a:srgbClr val="7FA3B0"/>
+              </a:buClr>
+              <a:buSzPct val="90000"/>
+              <a:buFont typeface="Arial"/>
+              <a:buChar char="●"/>
+            </a:pPr>
+            <a:r>
+              <a:rPr sz="1400" b="0" i="0">
+                <a:solidFill>
+                  <a:srgbClr val="20291F"/>
+                </a:solidFill>
+                <a:latin typeface="Calibri"/>
+              </a:rPr>
+              <a:t>Exam questions often ask you to identify a </a:t>
+            </a:r>
+            <a:r>
+              <a:rPr sz="1400" b="1" i="0">
+                <a:solidFill>
+                  <a:srgbClr val="6B8A95"/>
+                </a:solidFill>
+                <a:latin typeface="Calibri"/>
+              </a:rPr>
+              <a:t>missing</a:t>
+            </a:r>
+            <a:r>
+              <a:rPr sz="1400" b="0" i="0">
+                <a:solidFill>
+                  <a:srgbClr val="20291F"/>
+                </a:solidFill>
+                <a:latin typeface="Calibri"/>
+              </a:rPr>
+              <a:t> or </a:t>
+            </a:r>
+            <a:r>
+              <a:rPr sz="1400" b="1" i="0">
+                <a:solidFill>
+                  <a:srgbClr val="6B8A95"/>
+                </a:solidFill>
+                <a:latin typeface="Calibri"/>
+              </a:rPr>
+              <a:t>unclear</a:t>
+            </a:r>
+            <a:r>
+              <a:rPr sz="1400" b="0" i="0">
+                <a:solidFill>
+                  <a:srgbClr val="20291F"/>
+                </a:solidFill>
+                <a:latin typeface="Calibri"/>
+              </a:rPr>
+              <a:t> part of a given brief — practice spotting gaps in audience, purpose or constraints.</a:t>
+            </a:r>
+          </a:p>
+        </p:txBody>
+      </p:sp>
+      <p:sp>
+        <p:nvSpPr>
+          <p:cNvPr id="6" name="Oval 5"/>
+          <p:cNvSpPr/>
+          <p:nvPr/>
+        </p:nvSpPr>
+        <p:spPr>
+          <a:xfrm>
+            <a:off x="5532120" y="3840480"/>
+            <a:ext cx="685800" cy="685800"/>
+          </a:xfrm>
+          <a:prstGeom prst="ellipse">
+            <a:avLst/>
+          </a:prstGeom>
+          <a:solidFill>
+            <a:srgbClr val="C9743D"/>
           </a:solidFill>
           <a:ln>
             <a:noFill/>
@@ -3783,6 +4328,14 @@
 <file path=ppt/slides/slide12.xml><?xml version="1.0" encoding="utf-8"?>
 <p:sld xmlns:a="http://schemas.openxmlformats.org/drawingml/2006/main" xmlns:p="http://schemas.openxmlformats.org/presentationml/2006/main" xmlns:r="http://schemas.openxmlformats.org/officeDocument/2006/relationships">
   <p:cSld>
+    <p:bg>
+      <p:bgPr>
+        <a:solidFill>
+          <a:srgbClr val="F7F5EC"/>
+        </a:solidFill>
+        <a:effectLst/>
+      </p:bgPr>
+    </p:bg>
     <p:spTree>
       <p:nvGrpSpPr>
         <p:cNvPr id="1" name=""/>
@@ -3792,209 +4345,368 @@
       <p:grpSpPr/>
       <p:sp>
         <p:nvSpPr>
-          <p:cNvPr id="2" name="Title 1"/>
-          <p:cNvSpPr>
-            <a:spLocks noGrp="1"/>
-          </p:cNvSpPr>
-          <p:nvPr>
-            <p:ph type="title"/>
-          </p:nvPr>
-        </p:nvSpPr>
-        <p:spPr/>
-        <p:txBody>
-          <a:bodyPr wrap="square"/>
-          <a:lstStyle/>
-          <a:p>
-            <a:r>
-              <a:rPr sz="3200" b="1">
-                <a:solidFill>
-                  <a:srgbClr val="1F4B3F"/>
-                </a:solidFill>
-                <a:latin typeface="Cambria"/>
-              </a:rPr>
-              <a:t>Generating Two Distinct Concepts</a:t>
-            </a:r>
-          </a:p>
-        </p:txBody>
-      </p:sp>
-      <p:sp>
-        <p:nvSpPr>
-          <p:cNvPr id="3" name="Content Placeholder 2"/>
-          <p:cNvSpPr>
-            <a:spLocks noGrp="1"/>
-          </p:cNvSpPr>
-          <p:nvPr>
-            <p:ph idx="1" sz="half"/>
-          </p:nvPr>
-        </p:nvSpPr>
-        <p:spPr/>
-        <p:txBody>
-          <a:bodyPr wrap="square"/>
-          <a:lstStyle/>
-          <a:p>
-            <a:pPr>
-              <a:spcAft>
-                <a:spcPts val="1000"/>
-              </a:spcAft>
-            </a:pPr>
-            <a:r>
-              <a:rPr sz="2000" b="0" i="0">
-                <a:solidFill>
-                  <a:srgbClr val="333333"/>
-                </a:solidFill>
-                <a:latin typeface="Calibri"/>
-              </a:rPr>
-              <a:t>Your folio must show a genuine range of ideas — leading to </a:t>
-            </a:r>
-            <a:r>
-              <a:rPr sz="2000" b="1" i="0">
-                <a:solidFill>
-                  <a:srgbClr val="1F4B3F"/>
-                </a:solidFill>
-                <a:latin typeface="Calibri"/>
-              </a:rPr>
-              <a:t>two distinctly different concepts</a:t>
-            </a:r>
-            <a:r>
-              <a:rPr sz="2000" b="0" i="0">
-                <a:solidFill>
-                  <a:srgbClr val="333333"/>
-                </a:solidFill>
-                <a:latin typeface="Calibri"/>
-              </a:rPr>
-              <a:t> that will each be developed and refined in Unit 4.</a:t>
-            </a:r>
-          </a:p>
-          <a:p>
-            <a:pPr>
-              <a:spcAft>
-                <a:spcPts val="1000"/>
-              </a:spcAft>
-            </a:pPr>
-            <a:r>
-              <a:rPr sz="2000" b="0" i="0">
-                <a:solidFill>
-                  <a:srgbClr val="333333"/>
-                </a:solidFill>
-                <a:latin typeface="Calibri"/>
-              </a:rPr>
-              <a:t>What Makes Concepts "Distinct"?</a:t>
-            </a:r>
-          </a:p>
-          <a:p>
-            <a:pPr lvl="1">
-              <a:spcAft>
-                <a:spcPts val="1000"/>
-              </a:spcAft>
-            </a:pPr>
-            <a:r>
-              <a:rPr sz="1800" b="0" i="0">
-                <a:solidFill>
-                  <a:srgbClr val="333333"/>
-                </a:solidFill>
-                <a:latin typeface="Calibri"/>
-              </a:rPr>
-              <a:t>Different visual approach (not just colour changes)</a:t>
-            </a:r>
-          </a:p>
-          <a:p>
-            <a:pPr lvl="1">
-              <a:spcAft>
-                <a:spcPts val="1000"/>
-              </a:spcAft>
-            </a:pPr>
-            <a:r>
-              <a:rPr sz="1800" b="0" i="0">
-                <a:solidFill>
-                  <a:srgbClr val="333333"/>
-                </a:solidFill>
-                <a:latin typeface="Calibri"/>
-              </a:rPr>
-              <a:t>Different treatment of elements/principles</a:t>
-            </a:r>
-          </a:p>
-          <a:p>
-            <a:pPr lvl="1">
-              <a:spcAft>
-                <a:spcPts val="1000"/>
-              </a:spcAft>
-            </a:pPr>
-            <a:r>
-              <a:rPr sz="1800" b="0" i="0">
-                <a:solidFill>
-                  <a:srgbClr val="333333"/>
-                </a:solidFill>
-                <a:latin typeface="Calibri"/>
-              </a:rPr>
-              <a:t>Different overall style or design field emphasis</a:t>
-            </a:r>
-          </a:p>
-        </p:txBody>
-      </p:sp>
-      <p:sp>
-        <p:nvSpPr>
-          <p:cNvPr id="4" name="Content Placeholder 3"/>
-          <p:cNvSpPr>
-            <a:spLocks noGrp="1"/>
-          </p:cNvSpPr>
-          <p:nvPr>
-            <p:ph idx="2" sz="half"/>
-          </p:nvPr>
-        </p:nvSpPr>
-        <p:spPr/>
-        <p:txBody>
-          <a:bodyPr wrap="square"/>
-          <a:lstStyle/>
-          <a:p>
-            <a:pPr>
-              <a:spcAft>
-                <a:spcPts val="1000"/>
-              </a:spcAft>
-            </a:pPr>
-            <a:r>
-              <a:rPr sz="2000" b="0" i="0">
-                <a:solidFill>
-                  <a:srgbClr val="333333"/>
-                </a:solidFill>
-                <a:latin typeface="Calibri"/>
-              </a:rPr>
-              <a:t>Ideation Methods (recap)</a:t>
-            </a:r>
-          </a:p>
-          <a:p>
-            <a:pPr>
-              <a:spcAft>
-                <a:spcPts val="1000"/>
-              </a:spcAft>
-            </a:pPr>
-            <a:r>
-              <a:rPr sz="2000" b="0" i="0">
-                <a:solidFill>
-                  <a:srgbClr val="333333"/>
-                </a:solidFill>
-                <a:latin typeface="Calibri"/>
-              </a:rPr>
-              <a:t>Brainstorming, mind mapping, thumbnail sketches, mood boards, SCAMPER — see the Unit 1 AOS 2 Design Process materials for a full recap of these methods.</a:t>
-            </a:r>
-          </a:p>
-        </p:txBody>
-      </p:sp>
-      <p:sp>
-        <p:nvSpPr>
-          <p:cNvPr id="5" name="Rectangle 4"/>
+          <p:cNvPr id="2" name="Rounded Rectangle 1"/>
           <p:cNvSpPr/>
           <p:nvPr/>
         </p:nvSpPr>
         <p:spPr>
           <a:xfrm>
-            <a:off x="548640" y="1234440"/>
-            <a:ext cx="1463040" cy="38100"/>
+            <a:off x="685800" y="502920"/>
+            <a:ext cx="3291840" cy="457200"/>
+          </a:xfrm>
+          <a:prstGeom prst="roundRect">
+            <a:avLst>
+              <a:gd name="adj" fmla="val 50000"/>
+            </a:avLst>
+          </a:prstGeom>
+          <a:solidFill>
+            <a:srgbClr val="2F5233"/>
+          </a:solidFill>
+          <a:ln>
+            <a:noFill/>
+          </a:ln>
+          <a:effectLst/>
+        </p:spPr>
+        <p:style>
+          <a:lnRef idx="1">
+            <a:schemeClr val="accent1"/>
+          </a:lnRef>
+          <a:fillRef idx="3">
+            <a:schemeClr val="accent1"/>
+          </a:fillRef>
+          <a:effectRef idx="2">
+            <a:schemeClr val="accent1"/>
+          </a:effectRef>
+          <a:fontRef idx="minor">
+            <a:schemeClr val="lt1"/>
+          </a:fontRef>
+        </p:style>
+        <p:txBody>
+          <a:bodyPr rtlCol="0" anchor="ctr" wrap="none" lIns="50800" rIns="50800"/>
+          <a:lstStyle/>
+          <a:p>
+            <a:pPr algn="ctr"/>
+            <a:r>
+              <a:rPr sz="1100" b="1">
+                <a:solidFill>
+                  <a:srgbClr val="FFFFFF"/>
+                </a:solidFill>
+                <a:latin typeface="Calibri"/>
+              </a:rPr>
+              <a:t>THE BRIEF &amp; IDEATION</a:t>
+            </a:r>
+          </a:p>
+        </p:txBody>
+      </p:sp>
+      <p:sp>
+        <p:nvSpPr>
+          <p:cNvPr id="3" name="TextBox 2"/>
+          <p:cNvSpPr txBox="1"/>
+          <p:nvPr/>
+        </p:nvSpPr>
+        <p:spPr>
+          <a:xfrm>
+            <a:off x="685800" y="1051560"/>
+            <a:ext cx="10607040" cy="822960"/>
           </a:xfrm>
           <a:prstGeom prst="rect">
             <a:avLst/>
           </a:prstGeom>
+          <a:noFill/>
+        </p:spPr>
+        <p:txBody>
+          <a:bodyPr wrap="square" anchor="t">
+            <a:spAutoFit/>
+          </a:bodyPr>
+          <a:lstStyle/>
+          <a:p>
+            <a:pPr algn="l"/>
+            <a:r>
+              <a:rPr sz="2700" b="1" i="0">
+                <a:solidFill>
+                  <a:srgbClr val="20291F"/>
+                </a:solidFill>
+                <a:latin typeface="Cambria"/>
+              </a:rPr>
+              <a:t>Generating Two Distinct Concepts</a:t>
+            </a:r>
+          </a:p>
+        </p:txBody>
+      </p:sp>
+      <p:sp>
+        <p:nvSpPr>
+          <p:cNvPr id="4" name="Rounded Rectangle 3"/>
+          <p:cNvSpPr/>
+          <p:nvPr/>
+        </p:nvSpPr>
+        <p:spPr>
+          <a:xfrm>
+            <a:off x="685800" y="1874519"/>
+            <a:ext cx="5166360" cy="4526280"/>
+          </a:xfrm>
+          <a:prstGeom prst="roundRect">
+            <a:avLst>
+              <a:gd name="adj" fmla="val 6000"/>
+            </a:avLst>
+          </a:prstGeom>
           <a:solidFill>
-            <a:srgbClr val="1F4B3F"/>
+            <a:srgbClr val="E6EAE6"/>
+          </a:solidFill>
+          <a:ln>
+            <a:noFill/>
+          </a:ln>
+          <a:effectLst/>
+        </p:spPr>
+        <p:style>
+          <a:lnRef idx="1">
+            <a:schemeClr val="accent1"/>
+          </a:lnRef>
+          <a:fillRef idx="3">
+            <a:schemeClr val="accent1"/>
+          </a:fillRef>
+          <a:effectRef idx="2">
+            <a:schemeClr val="accent1"/>
+          </a:effectRef>
+          <a:fontRef idx="minor">
+            <a:schemeClr val="lt1"/>
+          </a:fontRef>
+        </p:style>
+        <p:txBody>
+          <a:bodyPr rtlCol="0" anchor="ctr" lIns="279400" rIns="279400" tIns="228600" bIns="228600" wrap="square"/>
+          <a:lstStyle/>
+          <a:p>
+            <a:pPr algn="ctr" indent="-203200" marL="203200">
+              <a:spcAft>
+                <a:spcPts val="900"/>
+              </a:spcAft>
+              <a:buClr>
+                <a:srgbClr val="2F5233"/>
+              </a:buClr>
+              <a:buSzPct val="90000"/>
+              <a:buFont typeface="Arial"/>
+              <a:buChar char="●"/>
+            </a:pPr>
+            <a:r>
+              <a:rPr sz="1400" b="0" i="0">
+                <a:solidFill>
+                  <a:srgbClr val="20291F"/>
+                </a:solidFill>
+                <a:latin typeface="Calibri"/>
+              </a:rPr>
+              <a:t>Your folio must show a genuine range of ideas — leading to </a:t>
+            </a:r>
+            <a:r>
+              <a:rPr sz="1400" b="1" i="0">
+                <a:solidFill>
+                  <a:srgbClr val="27452B"/>
+                </a:solidFill>
+                <a:latin typeface="Calibri"/>
+              </a:rPr>
+              <a:t>two distinctly different concepts</a:t>
+            </a:r>
+            <a:r>
+              <a:rPr sz="1400" b="0" i="0">
+                <a:solidFill>
+                  <a:srgbClr val="20291F"/>
+                </a:solidFill>
+                <a:latin typeface="Calibri"/>
+              </a:rPr>
+              <a:t> that will each be developed and refined in Unit 4.</a:t>
+            </a:r>
+          </a:p>
+          <a:p>
+            <a:pPr indent="-203200" marL="203200">
+              <a:spcAft>
+                <a:spcPts val="900"/>
+              </a:spcAft>
+              <a:buClr>
+                <a:srgbClr val="2F5233"/>
+              </a:buClr>
+              <a:buSzPct val="90000"/>
+              <a:buFont typeface="Arial"/>
+              <a:buChar char="●"/>
+            </a:pPr>
+            <a:r>
+              <a:rPr sz="1400" b="0" i="0">
+                <a:solidFill>
+                  <a:srgbClr val="20291F"/>
+                </a:solidFill>
+                <a:latin typeface="Calibri"/>
+              </a:rPr>
+              <a:t>What Makes Concepts "Distinct"?</a:t>
+            </a:r>
+          </a:p>
+          <a:p>
+            <a:pPr indent="-203200" marL="203200">
+              <a:spcAft>
+                <a:spcPts val="900"/>
+              </a:spcAft>
+              <a:buClr>
+                <a:srgbClr val="2F5233"/>
+              </a:buClr>
+              <a:buSzPct val="90000"/>
+              <a:buFont typeface="Arial"/>
+              <a:buChar char="–"/>
+            </a:pPr>
+            <a:r>
+              <a:rPr sz="1250" b="0" i="0">
+                <a:solidFill>
+                  <a:srgbClr val="20291F"/>
+                </a:solidFill>
+                <a:latin typeface="Calibri"/>
+              </a:rPr>
+              <a:t>Different visual approach (not just colour changes)</a:t>
+            </a:r>
+          </a:p>
+          <a:p>
+            <a:pPr indent="-203200" marL="203200">
+              <a:spcAft>
+                <a:spcPts val="900"/>
+              </a:spcAft>
+              <a:buClr>
+                <a:srgbClr val="2F5233"/>
+              </a:buClr>
+              <a:buSzPct val="90000"/>
+              <a:buFont typeface="Arial"/>
+              <a:buChar char="–"/>
+            </a:pPr>
+            <a:r>
+              <a:rPr sz="1250" b="0" i="0">
+                <a:solidFill>
+                  <a:srgbClr val="20291F"/>
+                </a:solidFill>
+                <a:latin typeface="Calibri"/>
+              </a:rPr>
+              <a:t>Different treatment of elements/principles</a:t>
+            </a:r>
+          </a:p>
+          <a:p>
+            <a:pPr indent="-203200" marL="203200">
+              <a:spcAft>
+                <a:spcPts val="900"/>
+              </a:spcAft>
+              <a:buClr>
+                <a:srgbClr val="2F5233"/>
+              </a:buClr>
+              <a:buSzPct val="90000"/>
+              <a:buFont typeface="Arial"/>
+              <a:buChar char="–"/>
+            </a:pPr>
+            <a:r>
+              <a:rPr sz="1250" b="0" i="0">
+                <a:solidFill>
+                  <a:srgbClr val="20291F"/>
+                </a:solidFill>
+                <a:latin typeface="Calibri"/>
+              </a:rPr>
+              <a:t>Different overall style or design field emphasis</a:t>
+            </a:r>
+          </a:p>
+        </p:txBody>
+      </p:sp>
+      <p:sp>
+        <p:nvSpPr>
+          <p:cNvPr id="5" name="Rounded Rectangle 4"/>
+          <p:cNvSpPr/>
+          <p:nvPr/>
+        </p:nvSpPr>
+        <p:spPr>
+          <a:xfrm>
+            <a:off x="6080760" y="1874519"/>
+            <a:ext cx="5166360" cy="4526280"/>
+          </a:xfrm>
+          <a:prstGeom prst="roundRect">
+            <a:avLst>
+              <a:gd name="adj" fmla="val 6000"/>
+            </a:avLst>
+          </a:prstGeom>
+          <a:solidFill>
+            <a:srgbClr val="DBE5E8"/>
+          </a:solidFill>
+          <a:ln>
+            <a:noFill/>
+          </a:ln>
+          <a:effectLst/>
+        </p:spPr>
+        <p:style>
+          <a:lnRef idx="1">
+            <a:schemeClr val="accent1"/>
+          </a:lnRef>
+          <a:fillRef idx="3">
+            <a:schemeClr val="accent1"/>
+          </a:fillRef>
+          <a:effectRef idx="2">
+            <a:schemeClr val="accent1"/>
+          </a:effectRef>
+          <a:fontRef idx="minor">
+            <a:schemeClr val="lt1"/>
+          </a:fontRef>
+        </p:style>
+        <p:txBody>
+          <a:bodyPr rtlCol="0" anchor="ctr" lIns="279400" rIns="279400" tIns="228600" bIns="228600" wrap="square"/>
+          <a:lstStyle/>
+          <a:p>
+            <a:pPr algn="ctr" indent="-203200" marL="203200">
+              <a:spcAft>
+                <a:spcPts val="900"/>
+              </a:spcAft>
+              <a:buClr>
+                <a:srgbClr val="7FA3B0"/>
+              </a:buClr>
+              <a:buSzPct val="90000"/>
+              <a:buFont typeface="Arial"/>
+              <a:buChar char="●"/>
+            </a:pPr>
+            <a:r>
+              <a:rPr sz="1400" b="0" i="0">
+                <a:solidFill>
+                  <a:srgbClr val="20291F"/>
+                </a:solidFill>
+                <a:latin typeface="Calibri"/>
+              </a:rPr>
+              <a:t>Ideation Methods (recap)</a:t>
+            </a:r>
+          </a:p>
+          <a:p>
+            <a:pPr indent="-203200" marL="203200">
+              <a:spcAft>
+                <a:spcPts val="900"/>
+              </a:spcAft>
+              <a:buClr>
+                <a:srgbClr val="7FA3B0"/>
+              </a:buClr>
+              <a:buSzPct val="90000"/>
+              <a:buFont typeface="Arial"/>
+              <a:buChar char="●"/>
+            </a:pPr>
+            <a:r>
+              <a:rPr sz="1400" b="0" i="0">
+                <a:solidFill>
+                  <a:srgbClr val="20291F"/>
+                </a:solidFill>
+                <a:latin typeface="Calibri"/>
+              </a:rPr>
+              <a:t>Brainstorming, mind mapping, thumbnail sketches, mood boards, SCAMPER — see the Unit 1 AOS 2 Design Process materials for a full recap of these methods.</a:t>
+            </a:r>
+          </a:p>
+        </p:txBody>
+      </p:sp>
+      <p:sp>
+        <p:nvSpPr>
+          <p:cNvPr id="6" name="Oval 5"/>
+          <p:cNvSpPr/>
+          <p:nvPr/>
+        </p:nvSpPr>
+        <p:spPr>
+          <a:xfrm>
+            <a:off x="5532120" y="3840480"/>
+            <a:ext cx="685800" cy="685800"/>
+          </a:xfrm>
+          <a:prstGeom prst="ellipse">
+            <a:avLst/>
+          </a:prstGeom>
+          <a:solidFill>
+            <a:srgbClr val="C9743D"/>
           </a:solidFill>
           <a:ln>
             <a:noFill/>
@@ -4034,6 +4746,14 @@
 <file path=ppt/slides/slide13.xml><?xml version="1.0" encoding="utf-8"?>
 <p:sld xmlns:a="http://schemas.openxmlformats.org/drawingml/2006/main" xmlns:p="http://schemas.openxmlformats.org/presentationml/2006/main" xmlns:r="http://schemas.openxmlformats.org/officeDocument/2006/relationships">
   <p:cSld>
+    <p:bg>
+      <p:bgPr>
+        <a:solidFill>
+          <a:srgbClr val="F7F5EC"/>
+        </a:solidFill>
+        <a:effectLst/>
+      </p:bgPr>
+    </p:bg>
     <p:spTree>
       <p:nvGrpSpPr>
         <p:cNvPr id="1" name=""/>
@@ -4043,204 +4763,351 @@
       <p:grpSpPr/>
       <p:sp>
         <p:nvSpPr>
-          <p:cNvPr id="2" name="Title 1"/>
-          <p:cNvSpPr>
-            <a:spLocks noGrp="1"/>
-          </p:cNvSpPr>
-          <p:nvPr>
-            <p:ph type="title"/>
-          </p:nvPr>
-        </p:nvSpPr>
-        <p:spPr/>
-        <p:txBody>
-          <a:bodyPr wrap="square"/>
-          <a:lstStyle/>
-          <a:p>
-            <a:r>
-              <a:rPr sz="3200" b="1">
-                <a:solidFill>
-                  <a:srgbClr val="1F4B3F"/>
-                </a:solidFill>
-                <a:latin typeface="Cambria"/>
-              </a:rPr>
-              <a:t>Research to Support Ideation</a:t>
-            </a:r>
-          </a:p>
-        </p:txBody>
-      </p:sp>
-      <p:sp>
-        <p:nvSpPr>
-          <p:cNvPr id="3" name="Content Placeholder 2"/>
-          <p:cNvSpPr>
-            <a:spLocks noGrp="1"/>
-          </p:cNvSpPr>
-          <p:nvPr>
-            <p:ph idx="1" sz="half"/>
-          </p:nvPr>
-        </p:nvSpPr>
-        <p:spPr/>
-        <p:txBody>
-          <a:bodyPr wrap="square"/>
-          <a:lstStyle/>
-          <a:p>
-            <a:pPr>
-              <a:spcAft>
-                <a:spcPts val="1000"/>
-              </a:spcAft>
-            </a:pPr>
-            <a:r>
-              <a:rPr sz="2000" b="0" i="0">
-                <a:solidFill>
-                  <a:srgbClr val="333333"/>
-                </a:solidFill>
-                <a:latin typeface="Calibri"/>
-              </a:rPr>
-              <a:t>Targeted research ensures your ideas are grounded in the brief's real audience and context, not just personal preference.</a:t>
-            </a:r>
-          </a:p>
-          <a:p>
-            <a:pPr lvl="1">
-              <a:spcAft>
-                <a:spcPts val="1000"/>
-              </a:spcAft>
-            </a:pPr>
-            <a:r>
-              <a:rPr sz="1800" b="1" i="0">
-                <a:solidFill>
-                  <a:srgbClr val="1F4B3F"/>
-                </a:solidFill>
-                <a:latin typeface="Calibri"/>
-              </a:rPr>
-              <a:t>Audience research</a:t>
-            </a:r>
-            <a:r>
-              <a:rPr sz="1800" b="0" i="0">
-                <a:solidFill>
-                  <a:srgbClr val="333333"/>
-                </a:solidFill>
-                <a:latin typeface="Calibri"/>
-              </a:rPr>
-              <a:t> — interviews, surveys of the target group</a:t>
-            </a:r>
-          </a:p>
-          <a:p>
-            <a:pPr lvl="1">
-              <a:spcAft>
-                <a:spcPts val="1000"/>
-              </a:spcAft>
-            </a:pPr>
-            <a:r>
-              <a:rPr sz="1800" b="1" i="0">
-                <a:solidFill>
-                  <a:srgbClr val="1F4B3F"/>
-                </a:solidFill>
-                <a:latin typeface="Calibri"/>
-              </a:rPr>
-              <a:t>Visual research</a:t>
-            </a:r>
-            <a:r>
-              <a:rPr sz="1800" b="0" i="0">
-                <a:solidFill>
-                  <a:srgbClr val="333333"/>
-                </a:solidFill>
-                <a:latin typeface="Calibri"/>
-              </a:rPr>
-              <a:t> — mood boards, existing designs in the same field</a:t>
-            </a:r>
-          </a:p>
-          <a:p>
-            <a:pPr lvl="1">
-              <a:spcAft>
-                <a:spcPts val="1000"/>
-              </a:spcAft>
-            </a:pPr>
-            <a:r>
-              <a:rPr sz="1800" b="1" i="0">
-                <a:solidFill>
-                  <a:srgbClr val="1F4B3F"/>
-                </a:solidFill>
-                <a:latin typeface="Calibri"/>
-              </a:rPr>
-              <a:t>Contextual research</a:t>
-            </a:r>
-            <a:r>
-              <a:rPr sz="1800" b="0" i="0">
-                <a:solidFill>
-                  <a:srgbClr val="333333"/>
-                </a:solidFill>
-                <a:latin typeface="Calibri"/>
-              </a:rPr>
-              <a:t> — relevant trends, industry practice, materials</a:t>
-            </a:r>
-          </a:p>
-        </p:txBody>
-      </p:sp>
-      <p:sp>
-        <p:nvSpPr>
-          <p:cNvPr id="4" name="Content Placeholder 3"/>
-          <p:cNvSpPr>
-            <a:spLocks noGrp="1"/>
-          </p:cNvSpPr>
-          <p:nvPr>
-            <p:ph idx="2" sz="half"/>
-          </p:nvPr>
-        </p:nvSpPr>
-        <p:spPr/>
-        <p:txBody>
-          <a:bodyPr wrap="square"/>
-          <a:lstStyle/>
-          <a:p>
-            <a:pPr>
-              <a:spcAft>
-                <a:spcPts val="1000"/>
-              </a:spcAft>
-            </a:pPr>
-            <a:r>
-              <a:rPr sz="2000" b="0" i="0">
-                <a:solidFill>
-                  <a:srgbClr val="333333"/>
-                </a:solidFill>
-                <a:latin typeface="Calibri"/>
-              </a:rPr>
-              <a:t>Link your research directly back to </a:t>
-            </a:r>
-            <a:r>
-              <a:rPr sz="2000" b="1" i="0">
-                <a:solidFill>
-                  <a:srgbClr val="1F4B3F"/>
-                </a:solidFill>
-                <a:latin typeface="Calibri"/>
-              </a:rPr>
-              <a:t>Unit 2</a:t>
-            </a:r>
-            <a:r>
-              <a:rPr sz="2000" b="0" i="0">
-                <a:solidFill>
-                  <a:srgbClr val="333333"/>
-                </a:solidFill>
-                <a:latin typeface="Calibri"/>
-              </a:rPr>
-              <a:t> concepts — current trends and industry connections should inform your ideas.</a:t>
-            </a:r>
-          </a:p>
-        </p:txBody>
-      </p:sp>
-      <p:sp>
-        <p:nvSpPr>
-          <p:cNvPr id="5" name="Rectangle 4"/>
+          <p:cNvPr id="2" name="Rounded Rectangle 1"/>
           <p:cNvSpPr/>
           <p:nvPr/>
         </p:nvSpPr>
         <p:spPr>
           <a:xfrm>
-            <a:off x="548640" y="1234440"/>
-            <a:ext cx="1463040" cy="38100"/>
+            <a:off x="685800" y="502920"/>
+            <a:ext cx="3291840" cy="457200"/>
+          </a:xfrm>
+          <a:prstGeom prst="roundRect">
+            <a:avLst>
+              <a:gd name="adj" fmla="val 50000"/>
+            </a:avLst>
+          </a:prstGeom>
+          <a:solidFill>
+            <a:srgbClr val="2F5233"/>
+          </a:solidFill>
+          <a:ln>
+            <a:noFill/>
+          </a:ln>
+          <a:effectLst/>
+        </p:spPr>
+        <p:style>
+          <a:lnRef idx="1">
+            <a:schemeClr val="accent1"/>
+          </a:lnRef>
+          <a:fillRef idx="3">
+            <a:schemeClr val="accent1"/>
+          </a:fillRef>
+          <a:effectRef idx="2">
+            <a:schemeClr val="accent1"/>
+          </a:effectRef>
+          <a:fontRef idx="minor">
+            <a:schemeClr val="lt1"/>
+          </a:fontRef>
+        </p:style>
+        <p:txBody>
+          <a:bodyPr rtlCol="0" anchor="ctr" wrap="none" lIns="50800" rIns="50800"/>
+          <a:lstStyle/>
+          <a:p>
+            <a:pPr algn="ctr"/>
+            <a:r>
+              <a:rPr sz="1100" b="1">
+                <a:solidFill>
+                  <a:srgbClr val="FFFFFF"/>
+                </a:solidFill>
+                <a:latin typeface="Calibri"/>
+              </a:rPr>
+              <a:t>THE BRIEF &amp; IDEATION</a:t>
+            </a:r>
+          </a:p>
+        </p:txBody>
+      </p:sp>
+      <p:sp>
+        <p:nvSpPr>
+          <p:cNvPr id="3" name="TextBox 2"/>
+          <p:cNvSpPr txBox="1"/>
+          <p:nvPr/>
+        </p:nvSpPr>
+        <p:spPr>
+          <a:xfrm>
+            <a:off x="685800" y="1051560"/>
+            <a:ext cx="10607040" cy="822960"/>
           </a:xfrm>
           <a:prstGeom prst="rect">
             <a:avLst/>
           </a:prstGeom>
+          <a:noFill/>
+        </p:spPr>
+        <p:txBody>
+          <a:bodyPr wrap="square" anchor="t">
+            <a:spAutoFit/>
+          </a:bodyPr>
+          <a:lstStyle/>
+          <a:p>
+            <a:pPr algn="l"/>
+            <a:r>
+              <a:rPr sz="2700" b="1" i="0">
+                <a:solidFill>
+                  <a:srgbClr val="20291F"/>
+                </a:solidFill>
+                <a:latin typeface="Cambria"/>
+              </a:rPr>
+              <a:t>Research to Support Ideation</a:t>
+            </a:r>
+          </a:p>
+        </p:txBody>
+      </p:sp>
+      <p:sp>
+        <p:nvSpPr>
+          <p:cNvPr id="4" name="Rounded Rectangle 3"/>
+          <p:cNvSpPr/>
+          <p:nvPr/>
+        </p:nvSpPr>
+        <p:spPr>
+          <a:xfrm>
+            <a:off x="685800" y="1874519"/>
+            <a:ext cx="5166360" cy="4526280"/>
+          </a:xfrm>
+          <a:prstGeom prst="roundRect">
+            <a:avLst>
+              <a:gd name="adj" fmla="val 6000"/>
+            </a:avLst>
+          </a:prstGeom>
           <a:solidFill>
-            <a:srgbClr val="1F4B3F"/>
+            <a:srgbClr val="E6EAE6"/>
+          </a:solidFill>
+          <a:ln>
+            <a:noFill/>
+          </a:ln>
+          <a:effectLst/>
+        </p:spPr>
+        <p:style>
+          <a:lnRef idx="1">
+            <a:schemeClr val="accent1"/>
+          </a:lnRef>
+          <a:fillRef idx="3">
+            <a:schemeClr val="accent1"/>
+          </a:fillRef>
+          <a:effectRef idx="2">
+            <a:schemeClr val="accent1"/>
+          </a:effectRef>
+          <a:fontRef idx="minor">
+            <a:schemeClr val="lt1"/>
+          </a:fontRef>
+        </p:style>
+        <p:txBody>
+          <a:bodyPr rtlCol="0" anchor="ctr" lIns="279400" rIns="279400" tIns="228600" bIns="228600" wrap="square"/>
+          <a:lstStyle/>
+          <a:p>
+            <a:pPr algn="ctr" indent="-203200" marL="203200">
+              <a:spcAft>
+                <a:spcPts val="900"/>
+              </a:spcAft>
+              <a:buClr>
+                <a:srgbClr val="2F5233"/>
+              </a:buClr>
+              <a:buSzPct val="90000"/>
+              <a:buFont typeface="Arial"/>
+              <a:buChar char="●"/>
+            </a:pPr>
+            <a:r>
+              <a:rPr sz="1400" b="0" i="0">
+                <a:solidFill>
+                  <a:srgbClr val="20291F"/>
+                </a:solidFill>
+                <a:latin typeface="Calibri"/>
+              </a:rPr>
+              <a:t>Targeted research ensures your ideas are grounded in the brief's real audience and context, not just personal preference.</a:t>
+            </a:r>
+          </a:p>
+          <a:p>
+            <a:pPr indent="-203200" marL="203200">
+              <a:spcAft>
+                <a:spcPts val="900"/>
+              </a:spcAft>
+              <a:buClr>
+                <a:srgbClr val="2F5233"/>
+              </a:buClr>
+              <a:buSzPct val="90000"/>
+              <a:buFont typeface="Arial"/>
+              <a:buChar char="–"/>
+            </a:pPr>
+            <a:r>
+              <a:rPr sz="1250" b="1" i="0">
+                <a:solidFill>
+                  <a:srgbClr val="27452B"/>
+                </a:solidFill>
+                <a:latin typeface="Calibri"/>
+              </a:rPr>
+              <a:t>Audience research</a:t>
+            </a:r>
+            <a:r>
+              <a:rPr sz="1250" b="0" i="0">
+                <a:solidFill>
+                  <a:srgbClr val="20291F"/>
+                </a:solidFill>
+                <a:latin typeface="Calibri"/>
+              </a:rPr>
+              <a:t> — interviews, surveys of the target group</a:t>
+            </a:r>
+          </a:p>
+          <a:p>
+            <a:pPr indent="-203200" marL="203200">
+              <a:spcAft>
+                <a:spcPts val="900"/>
+              </a:spcAft>
+              <a:buClr>
+                <a:srgbClr val="2F5233"/>
+              </a:buClr>
+              <a:buSzPct val="90000"/>
+              <a:buFont typeface="Arial"/>
+              <a:buChar char="–"/>
+            </a:pPr>
+            <a:r>
+              <a:rPr sz="1250" b="1" i="0">
+                <a:solidFill>
+                  <a:srgbClr val="27452B"/>
+                </a:solidFill>
+                <a:latin typeface="Calibri"/>
+              </a:rPr>
+              <a:t>Visual research</a:t>
+            </a:r>
+            <a:r>
+              <a:rPr sz="1250" b="0" i="0">
+                <a:solidFill>
+                  <a:srgbClr val="20291F"/>
+                </a:solidFill>
+                <a:latin typeface="Calibri"/>
+              </a:rPr>
+              <a:t> — mood boards, existing designs in the same field</a:t>
+            </a:r>
+          </a:p>
+          <a:p>
+            <a:pPr indent="-203200" marL="203200">
+              <a:spcAft>
+                <a:spcPts val="900"/>
+              </a:spcAft>
+              <a:buClr>
+                <a:srgbClr val="2F5233"/>
+              </a:buClr>
+              <a:buSzPct val="90000"/>
+              <a:buFont typeface="Arial"/>
+              <a:buChar char="–"/>
+            </a:pPr>
+            <a:r>
+              <a:rPr sz="1250" b="1" i="0">
+                <a:solidFill>
+                  <a:srgbClr val="27452B"/>
+                </a:solidFill>
+                <a:latin typeface="Calibri"/>
+              </a:rPr>
+              <a:t>Contextual research</a:t>
+            </a:r>
+            <a:r>
+              <a:rPr sz="1250" b="0" i="0">
+                <a:solidFill>
+                  <a:srgbClr val="20291F"/>
+                </a:solidFill>
+                <a:latin typeface="Calibri"/>
+              </a:rPr>
+              <a:t> — relevant trends, industry practice, materials</a:t>
+            </a:r>
+          </a:p>
+        </p:txBody>
+      </p:sp>
+      <p:sp>
+        <p:nvSpPr>
+          <p:cNvPr id="5" name="Rounded Rectangle 4"/>
+          <p:cNvSpPr/>
+          <p:nvPr/>
+        </p:nvSpPr>
+        <p:spPr>
+          <a:xfrm>
+            <a:off x="6080760" y="1874519"/>
+            <a:ext cx="5166360" cy="4526280"/>
+          </a:xfrm>
+          <a:prstGeom prst="roundRect">
+            <a:avLst>
+              <a:gd name="adj" fmla="val 6000"/>
+            </a:avLst>
+          </a:prstGeom>
+          <a:solidFill>
+            <a:srgbClr val="DBE5E8"/>
+          </a:solidFill>
+          <a:ln>
+            <a:noFill/>
+          </a:ln>
+          <a:effectLst/>
+        </p:spPr>
+        <p:style>
+          <a:lnRef idx="1">
+            <a:schemeClr val="accent1"/>
+          </a:lnRef>
+          <a:fillRef idx="3">
+            <a:schemeClr val="accent1"/>
+          </a:fillRef>
+          <a:effectRef idx="2">
+            <a:schemeClr val="accent1"/>
+          </a:effectRef>
+          <a:fontRef idx="minor">
+            <a:schemeClr val="lt1"/>
+          </a:fontRef>
+        </p:style>
+        <p:txBody>
+          <a:bodyPr rtlCol="0" anchor="ctr" lIns="279400" rIns="279400" tIns="228600" bIns="228600" wrap="square"/>
+          <a:lstStyle/>
+          <a:p>
+            <a:pPr algn="ctr" indent="-203200" marL="203200">
+              <a:spcAft>
+                <a:spcPts val="900"/>
+              </a:spcAft>
+              <a:buClr>
+                <a:srgbClr val="7FA3B0"/>
+              </a:buClr>
+              <a:buSzPct val="90000"/>
+              <a:buFont typeface="Arial"/>
+              <a:buChar char="●"/>
+            </a:pPr>
+            <a:r>
+              <a:rPr sz="1400" b="0" i="0">
+                <a:solidFill>
+                  <a:srgbClr val="20291F"/>
+                </a:solidFill>
+                <a:latin typeface="Calibri"/>
+              </a:rPr>
+              <a:t>Link your research directly back to </a:t>
+            </a:r>
+            <a:r>
+              <a:rPr sz="1400" b="1" i="0">
+                <a:solidFill>
+                  <a:srgbClr val="6B8A95"/>
+                </a:solidFill>
+                <a:latin typeface="Calibri"/>
+              </a:rPr>
+              <a:t>Unit 2</a:t>
+            </a:r>
+            <a:r>
+              <a:rPr sz="1400" b="0" i="0">
+                <a:solidFill>
+                  <a:srgbClr val="20291F"/>
+                </a:solidFill>
+                <a:latin typeface="Calibri"/>
+              </a:rPr>
+              <a:t> concepts — current trends and industry connections should inform your ideas.</a:t>
+            </a:r>
+          </a:p>
+        </p:txBody>
+      </p:sp>
+      <p:sp>
+        <p:nvSpPr>
+          <p:cNvPr id="6" name="Oval 5"/>
+          <p:cNvSpPr/>
+          <p:nvPr/>
+        </p:nvSpPr>
+        <p:spPr>
+          <a:xfrm>
+            <a:off x="5532120" y="3840480"/>
+            <a:ext cx="685800" cy="685800"/>
+          </a:xfrm>
+          <a:prstGeom prst="ellipse">
+            <a:avLst/>
+          </a:prstGeom>
+          <a:solidFill>
+            <a:srgbClr val="C9743D"/>
           </a:solidFill>
           <a:ln>
             <a:noFill/>
@@ -4280,6 +5147,14 @@
 <file path=ppt/slides/slide14.xml><?xml version="1.0" encoding="utf-8"?>
 <p:sld xmlns:a="http://schemas.openxmlformats.org/drawingml/2006/main" xmlns:p="http://schemas.openxmlformats.org/presentationml/2006/main" xmlns:r="http://schemas.openxmlformats.org/officeDocument/2006/relationships">
   <p:cSld>
+    <p:bg>
+      <p:bgPr>
+        <a:solidFill>
+          <a:srgbClr val="F7F5EC"/>
+        </a:solidFill>
+        <a:effectLst/>
+      </p:bgPr>
+    </p:bg>
     <p:spTree>
       <p:nvGrpSpPr>
         <p:cNvPr id="1" name=""/>
@@ -4289,207 +5164,367 @@
       <p:grpSpPr/>
       <p:sp>
         <p:nvSpPr>
-          <p:cNvPr id="2" name="Title 1"/>
-          <p:cNvSpPr>
-            <a:spLocks noGrp="1"/>
-          </p:cNvSpPr>
-          <p:nvPr>
-            <p:ph type="title"/>
-          </p:nvPr>
-        </p:nvSpPr>
-        <p:spPr/>
-        <p:txBody>
-          <a:bodyPr wrap="square"/>
-          <a:lstStyle/>
-          <a:p>
-            <a:r>
-              <a:rPr sz="3200" b="1">
-                <a:solidFill>
-                  <a:srgbClr val="1F4B3F"/>
-                </a:solidFill>
-                <a:latin typeface="Cambria"/>
-              </a:rPr>
-              <a:t>Answering Brief Questions</a:t>
-            </a:r>
-          </a:p>
-        </p:txBody>
-      </p:sp>
-      <p:sp>
-        <p:nvSpPr>
-          <p:cNvPr id="3" name="Content Placeholder 2"/>
-          <p:cNvSpPr>
-            <a:spLocks noGrp="1"/>
-          </p:cNvSpPr>
-          <p:nvPr>
-            <p:ph idx="1" sz="half"/>
-          </p:nvPr>
-        </p:nvSpPr>
-        <p:spPr/>
-        <p:txBody>
-          <a:bodyPr wrap="square"/>
-          <a:lstStyle/>
-          <a:p>
-            <a:pPr lvl="1">
-              <a:spcAft>
-                <a:spcPts val="1000"/>
-              </a:spcAft>
-            </a:pPr>
-            <a:r>
-              <a:rPr sz="1800" b="0" i="0">
-                <a:solidFill>
-                  <a:srgbClr val="333333"/>
-                </a:solidFill>
-                <a:latin typeface="Calibri"/>
-              </a:rPr>
-              <a:t>Identify → Explain → Suggest</a:t>
-            </a:r>
-          </a:p>
-          <a:p>
-            <a:pPr lvl="1">
-              <a:spcAft>
-                <a:spcPts val="1000"/>
-              </a:spcAft>
-            </a:pPr>
-            <a:r>
-              <a:rPr sz="1800" b="0" i="0">
-                <a:solidFill>
-                  <a:srgbClr val="333333"/>
-                </a:solidFill>
-                <a:latin typeface="Calibri"/>
-              </a:rPr>
-              <a:t>1. Identify the missing/unclear brief element</a:t>
-            </a:r>
-          </a:p>
-          <a:p>
-            <a:pPr lvl="1">
-              <a:spcAft>
-                <a:spcPts val="1000"/>
-              </a:spcAft>
-            </a:pPr>
-            <a:r>
-              <a:rPr sz="1800" b="0" i="0">
-                <a:solidFill>
-                  <a:srgbClr val="333333"/>
-                </a:solidFill>
-                <a:latin typeface="Calibri"/>
-              </a:rPr>
-              <a:t>2. Explain why it matters for the design outcome</a:t>
-            </a:r>
-          </a:p>
-          <a:p>
-            <a:pPr lvl="1">
-              <a:spcAft>
-                <a:spcPts val="1000"/>
-              </a:spcAft>
-            </a:pPr>
-            <a:r>
-              <a:rPr sz="1800" b="0" i="0">
-                <a:solidFill>
-                  <a:srgbClr val="333333"/>
-                </a:solidFill>
-                <a:latin typeface="Calibri"/>
-              </a:rPr>
-              <a:t>3. Suggest what information should be added</a:t>
-            </a:r>
-          </a:p>
-        </p:txBody>
-      </p:sp>
-      <p:sp>
-        <p:nvSpPr>
-          <p:cNvPr id="4" name="Content Placeholder 3"/>
-          <p:cNvSpPr>
-            <a:spLocks noGrp="1"/>
-          </p:cNvSpPr>
-          <p:nvPr>
-            <p:ph idx="2" sz="half"/>
-          </p:nvPr>
-        </p:nvSpPr>
-        <p:spPr/>
-        <p:txBody>
-          <a:bodyPr wrap="square"/>
-          <a:lstStyle/>
-          <a:p>
-            <a:pPr>
-              <a:spcAft>
-                <a:spcPts val="1000"/>
-              </a:spcAft>
-            </a:pPr>
-            <a:r>
-              <a:rPr sz="1800" b="0" i="1">
-                <a:solidFill>
-                  <a:srgbClr val="333333"/>
-                </a:solidFill>
-                <a:latin typeface="Calibri"/>
-              </a:rPr>
-              <a:t>Sentence Starters</a:t>
-            </a:r>
-          </a:p>
-          <a:p>
-            <a:pPr lvl="1">
-              <a:spcAft>
-                <a:spcPts val="1000"/>
-              </a:spcAft>
-            </a:pPr>
-            <a:r>
-              <a:rPr sz="1800" b="0" i="0">
-                <a:solidFill>
-                  <a:srgbClr val="333333"/>
-                </a:solidFill>
-                <a:latin typeface="Calibri"/>
-              </a:rPr>
-              <a:t>"The brief does not specify [element], which is important because..."</a:t>
-            </a:r>
-          </a:p>
-          <a:p>
-            <a:pPr lvl="1">
-              <a:spcAft>
-                <a:spcPts val="1000"/>
-              </a:spcAft>
-            </a:pPr>
-            <a:r>
-              <a:rPr sz="1800" b="0" i="0">
-                <a:solidFill>
-                  <a:srgbClr val="333333"/>
-                </a:solidFill>
-                <a:latin typeface="Calibri"/>
-              </a:rPr>
-              <a:t>"To generate ideas, [method] could be used to..."</a:t>
-            </a:r>
-          </a:p>
-          <a:p>
-            <a:pPr lvl="1">
-              <a:spcAft>
-                <a:spcPts val="1000"/>
-              </a:spcAft>
-            </a:pPr>
-            <a:r>
-              <a:rPr sz="1800" b="0" i="0">
-                <a:solidFill>
-                  <a:srgbClr val="333333"/>
-                </a:solidFill>
-                <a:latin typeface="Calibri"/>
-              </a:rPr>
-              <a:t>"These two concepts differ in that..."</a:t>
-            </a:r>
-          </a:p>
-        </p:txBody>
-      </p:sp>
-      <p:sp>
-        <p:nvSpPr>
-          <p:cNvPr id="5" name="Rectangle 4"/>
+          <p:cNvPr id="2" name="Rounded Rectangle 1"/>
           <p:cNvSpPr/>
           <p:nvPr/>
         </p:nvSpPr>
         <p:spPr>
           <a:xfrm>
-            <a:off x="548640" y="1234440"/>
-            <a:ext cx="1463040" cy="38100"/>
+            <a:off x="685800" y="502920"/>
+            <a:ext cx="3291840" cy="457200"/>
+          </a:xfrm>
+          <a:prstGeom prst="roundRect">
+            <a:avLst>
+              <a:gd name="adj" fmla="val 50000"/>
+            </a:avLst>
+          </a:prstGeom>
+          <a:solidFill>
+            <a:srgbClr val="2F5233"/>
+          </a:solidFill>
+          <a:ln>
+            <a:noFill/>
+          </a:ln>
+          <a:effectLst/>
+        </p:spPr>
+        <p:style>
+          <a:lnRef idx="1">
+            <a:schemeClr val="accent1"/>
+          </a:lnRef>
+          <a:fillRef idx="3">
+            <a:schemeClr val="accent1"/>
+          </a:fillRef>
+          <a:effectRef idx="2">
+            <a:schemeClr val="accent1"/>
+          </a:effectRef>
+          <a:fontRef idx="minor">
+            <a:schemeClr val="lt1"/>
+          </a:fontRef>
+        </p:style>
+        <p:txBody>
+          <a:bodyPr rtlCol="0" anchor="ctr" wrap="none" lIns="50800" rIns="50800"/>
+          <a:lstStyle/>
+          <a:p>
+            <a:pPr algn="ctr"/>
+            <a:r>
+              <a:rPr sz="1100" b="1">
+                <a:solidFill>
+                  <a:srgbClr val="FFFFFF"/>
+                </a:solidFill>
+                <a:latin typeface="Calibri"/>
+              </a:rPr>
+              <a:t>THE BRIEF &amp; IDEATION</a:t>
+            </a:r>
+          </a:p>
+        </p:txBody>
+      </p:sp>
+      <p:sp>
+        <p:nvSpPr>
+          <p:cNvPr id="3" name="TextBox 2"/>
+          <p:cNvSpPr txBox="1"/>
+          <p:nvPr/>
+        </p:nvSpPr>
+        <p:spPr>
+          <a:xfrm>
+            <a:off x="685800" y="1051560"/>
+            <a:ext cx="10607040" cy="822960"/>
           </a:xfrm>
           <a:prstGeom prst="rect">
             <a:avLst/>
           </a:prstGeom>
+          <a:noFill/>
+        </p:spPr>
+        <p:txBody>
+          <a:bodyPr wrap="square" anchor="t">
+            <a:spAutoFit/>
+          </a:bodyPr>
+          <a:lstStyle/>
+          <a:p>
+            <a:pPr algn="l"/>
+            <a:r>
+              <a:rPr sz="2700" b="1" i="0">
+                <a:solidFill>
+                  <a:srgbClr val="20291F"/>
+                </a:solidFill>
+                <a:latin typeface="Cambria"/>
+              </a:rPr>
+              <a:t>Answering Brief Questions</a:t>
+            </a:r>
+          </a:p>
+        </p:txBody>
+      </p:sp>
+      <p:sp>
+        <p:nvSpPr>
+          <p:cNvPr id="4" name="Rounded Rectangle 3"/>
+          <p:cNvSpPr/>
+          <p:nvPr/>
+        </p:nvSpPr>
+        <p:spPr>
+          <a:xfrm>
+            <a:off x="685800" y="1874519"/>
+            <a:ext cx="5166360" cy="4526280"/>
+          </a:xfrm>
+          <a:prstGeom prst="roundRect">
+            <a:avLst>
+              <a:gd name="adj" fmla="val 6000"/>
+            </a:avLst>
+          </a:prstGeom>
           <a:solidFill>
-            <a:srgbClr val="1F4B3F"/>
+            <a:srgbClr val="E6EAE6"/>
+          </a:solidFill>
+          <a:ln>
+            <a:noFill/>
+          </a:ln>
+          <a:effectLst/>
+        </p:spPr>
+        <p:style>
+          <a:lnRef idx="1">
+            <a:schemeClr val="accent1"/>
+          </a:lnRef>
+          <a:fillRef idx="3">
+            <a:schemeClr val="accent1"/>
+          </a:fillRef>
+          <a:effectRef idx="2">
+            <a:schemeClr val="accent1"/>
+          </a:effectRef>
+          <a:fontRef idx="minor">
+            <a:schemeClr val="lt1"/>
+          </a:fontRef>
+        </p:style>
+        <p:txBody>
+          <a:bodyPr rtlCol="0" anchor="ctr" lIns="279400" rIns="279400" tIns="228600" bIns="228600" wrap="square"/>
+          <a:lstStyle/>
+          <a:p>
+            <a:pPr algn="ctr" indent="-203200" marL="203200">
+              <a:spcAft>
+                <a:spcPts val="900"/>
+              </a:spcAft>
+              <a:buClr>
+                <a:srgbClr val="2F5233"/>
+              </a:buClr>
+              <a:buSzPct val="90000"/>
+              <a:buFont typeface="Arial"/>
+              <a:buChar char="–"/>
+            </a:pPr>
+            <a:r>
+              <a:rPr sz="1250" b="0" i="0">
+                <a:solidFill>
+                  <a:srgbClr val="20291F"/>
+                </a:solidFill>
+                <a:latin typeface="Calibri"/>
+              </a:rPr>
+              <a:t>Identify → Explain → Suggest</a:t>
+            </a:r>
+          </a:p>
+          <a:p>
+            <a:pPr indent="-203200" marL="203200">
+              <a:spcAft>
+                <a:spcPts val="900"/>
+              </a:spcAft>
+              <a:buClr>
+                <a:srgbClr val="2F5233"/>
+              </a:buClr>
+              <a:buSzPct val="90000"/>
+              <a:buFont typeface="Arial"/>
+              <a:buChar char="–"/>
+            </a:pPr>
+            <a:r>
+              <a:rPr sz="1250" b="0" i="0">
+                <a:solidFill>
+                  <a:srgbClr val="20291F"/>
+                </a:solidFill>
+                <a:latin typeface="Calibri"/>
+              </a:rPr>
+              <a:t>1. Identify the missing/unclear brief element</a:t>
+            </a:r>
+          </a:p>
+          <a:p>
+            <a:pPr indent="-203200" marL="203200">
+              <a:spcAft>
+                <a:spcPts val="900"/>
+              </a:spcAft>
+              <a:buClr>
+                <a:srgbClr val="2F5233"/>
+              </a:buClr>
+              <a:buSzPct val="90000"/>
+              <a:buFont typeface="Arial"/>
+              <a:buChar char="–"/>
+            </a:pPr>
+            <a:r>
+              <a:rPr sz="1250" b="0" i="0">
+                <a:solidFill>
+                  <a:srgbClr val="20291F"/>
+                </a:solidFill>
+                <a:latin typeface="Calibri"/>
+              </a:rPr>
+              <a:t>2. Explain why it matters for the design outcome</a:t>
+            </a:r>
+          </a:p>
+          <a:p>
+            <a:pPr indent="-203200" marL="203200">
+              <a:spcAft>
+                <a:spcPts val="900"/>
+              </a:spcAft>
+              <a:buClr>
+                <a:srgbClr val="2F5233"/>
+              </a:buClr>
+              <a:buSzPct val="90000"/>
+              <a:buFont typeface="Arial"/>
+              <a:buChar char="–"/>
+            </a:pPr>
+            <a:r>
+              <a:rPr sz="1250" b="0" i="0">
+                <a:solidFill>
+                  <a:srgbClr val="20291F"/>
+                </a:solidFill>
+                <a:latin typeface="Calibri"/>
+              </a:rPr>
+              <a:t>3. Suggest what information should be added</a:t>
+            </a:r>
+          </a:p>
+        </p:txBody>
+      </p:sp>
+      <p:sp>
+        <p:nvSpPr>
+          <p:cNvPr id="5" name="Rounded Rectangle 4"/>
+          <p:cNvSpPr/>
+          <p:nvPr/>
+        </p:nvSpPr>
+        <p:spPr>
+          <a:xfrm>
+            <a:off x="6080760" y="1874519"/>
+            <a:ext cx="5166360" cy="4526280"/>
+          </a:xfrm>
+          <a:prstGeom prst="roundRect">
+            <a:avLst>
+              <a:gd name="adj" fmla="val 6000"/>
+            </a:avLst>
+          </a:prstGeom>
+          <a:solidFill>
+            <a:srgbClr val="DBE5E8"/>
+          </a:solidFill>
+          <a:ln>
+            <a:noFill/>
+          </a:ln>
+          <a:effectLst/>
+        </p:spPr>
+        <p:style>
+          <a:lnRef idx="1">
+            <a:schemeClr val="accent1"/>
+          </a:lnRef>
+          <a:fillRef idx="3">
+            <a:schemeClr val="accent1"/>
+          </a:fillRef>
+          <a:effectRef idx="2">
+            <a:schemeClr val="accent1"/>
+          </a:effectRef>
+          <a:fontRef idx="minor">
+            <a:schemeClr val="lt1"/>
+          </a:fontRef>
+        </p:style>
+        <p:txBody>
+          <a:bodyPr rtlCol="0" anchor="ctr" lIns="279400" rIns="279400" tIns="228600" bIns="228600" wrap="square"/>
+          <a:lstStyle/>
+          <a:p>
+            <a:pPr algn="ctr">
+              <a:spcAft>
+                <a:spcPts val="900"/>
+              </a:spcAft>
+              <a:buNone/>
+            </a:pPr>
+            <a:r>
+              <a:rPr sz="1250" b="0" i="1">
+                <a:solidFill>
+                  <a:srgbClr val="20291F"/>
+                </a:solidFill>
+                <a:latin typeface="Calibri"/>
+              </a:rPr>
+              <a:t>Sentence Starters</a:t>
+            </a:r>
+          </a:p>
+          <a:p>
+            <a:pPr indent="-203200" marL="203200">
+              <a:spcAft>
+                <a:spcPts val="900"/>
+              </a:spcAft>
+              <a:buClr>
+                <a:srgbClr val="7FA3B0"/>
+              </a:buClr>
+              <a:buSzPct val="90000"/>
+              <a:buFont typeface="Arial"/>
+              <a:buChar char="–"/>
+            </a:pPr>
+            <a:r>
+              <a:rPr sz="1250" b="0" i="0">
+                <a:solidFill>
+                  <a:srgbClr val="20291F"/>
+                </a:solidFill>
+                <a:latin typeface="Calibri"/>
+              </a:rPr>
+              <a:t>"The brief does not specify [element], which is important because..."</a:t>
+            </a:r>
+          </a:p>
+          <a:p>
+            <a:pPr indent="-203200" marL="203200">
+              <a:spcAft>
+                <a:spcPts val="900"/>
+              </a:spcAft>
+              <a:buClr>
+                <a:srgbClr val="7FA3B0"/>
+              </a:buClr>
+              <a:buSzPct val="90000"/>
+              <a:buFont typeface="Arial"/>
+              <a:buChar char="–"/>
+            </a:pPr>
+            <a:r>
+              <a:rPr sz="1250" b="0" i="0">
+                <a:solidFill>
+                  <a:srgbClr val="20291F"/>
+                </a:solidFill>
+                <a:latin typeface="Calibri"/>
+              </a:rPr>
+              <a:t>"To generate ideas, [method] could be used to..."</a:t>
+            </a:r>
+          </a:p>
+          <a:p>
+            <a:pPr indent="-203200" marL="203200">
+              <a:spcAft>
+                <a:spcPts val="900"/>
+              </a:spcAft>
+              <a:buClr>
+                <a:srgbClr val="7FA3B0"/>
+              </a:buClr>
+              <a:buSzPct val="90000"/>
+              <a:buFont typeface="Arial"/>
+              <a:buChar char="–"/>
+            </a:pPr>
+            <a:r>
+              <a:rPr sz="1250" b="0" i="0">
+                <a:solidFill>
+                  <a:srgbClr val="20291F"/>
+                </a:solidFill>
+                <a:latin typeface="Calibri"/>
+              </a:rPr>
+              <a:t>"These two concepts differ in that..."</a:t>
+            </a:r>
+          </a:p>
+        </p:txBody>
+      </p:sp>
+      <p:sp>
+        <p:nvSpPr>
+          <p:cNvPr id="6" name="Oval 5"/>
+          <p:cNvSpPr/>
+          <p:nvPr/>
+        </p:nvSpPr>
+        <p:spPr>
+          <a:xfrm>
+            <a:off x="5532120" y="3840480"/>
+            <a:ext cx="685800" cy="685800"/>
+          </a:xfrm>
+          <a:prstGeom prst="ellipse">
+            <a:avLst/>
+          </a:prstGeom>
+          <a:solidFill>
+            <a:srgbClr val="C9743D"/>
           </a:solidFill>
           <a:ln>
             <a:noFill/>
@@ -4529,6 +5564,14 @@
 <file path=ppt/slides/slide15.xml><?xml version="1.0" encoding="utf-8"?>
 <p:sld xmlns:a="http://schemas.openxmlformats.org/drawingml/2006/main" xmlns:p="http://schemas.openxmlformats.org/presentationml/2006/main" xmlns:r="http://schemas.openxmlformats.org/officeDocument/2006/relationships">
   <p:cSld>
+    <p:bg>
+      <p:bgPr>
+        <a:solidFill>
+          <a:srgbClr val="F7F5EC"/>
+        </a:solidFill>
+        <a:effectLst/>
+      </p:bgPr>
+    </p:bg>
     <p:spTree>
       <p:nvGrpSpPr>
         <p:cNvPr id="1" name=""/>
@@ -4538,225 +5581,22 @@
       <p:grpSpPr/>
       <p:sp>
         <p:nvSpPr>
-          <p:cNvPr id="2" name="Title 1"/>
-          <p:cNvSpPr>
-            <a:spLocks noGrp="1"/>
-          </p:cNvSpPr>
-          <p:nvPr>
-            <p:ph type="title"/>
-          </p:nvPr>
-        </p:nvSpPr>
-        <p:spPr/>
-        <p:txBody>
-          <a:bodyPr wrap="square"/>
-          <a:lstStyle/>
-          <a:p>
-            <a:r>
-              <a:rPr sz="3200" b="1">
-                <a:solidFill>
-                  <a:srgbClr val="1F4B3F"/>
-                </a:solidFill>
-                <a:latin typeface="Cambria"/>
-              </a:rPr>
-              <a:t>Brief &amp; Ideation — Quick Reference</a:t>
-            </a:r>
-          </a:p>
-        </p:txBody>
-      </p:sp>
-      <p:sp>
-        <p:nvSpPr>
-          <p:cNvPr id="3" name="Content Placeholder 2"/>
-          <p:cNvSpPr>
-            <a:spLocks noGrp="1"/>
-          </p:cNvSpPr>
-          <p:nvPr>
-            <p:ph idx="1"/>
-          </p:nvPr>
-        </p:nvSpPr>
-        <p:spPr/>
-        <p:txBody>
-          <a:bodyPr wrap="square"/>
-          <a:lstStyle/>
-          <a:p>
-            <a:pPr lvl="1">
-              <a:spcAft>
-                <a:spcPts val="1000"/>
-              </a:spcAft>
-            </a:pPr>
-            <a:r>
-              <a:rPr sz="1800" b="0" i="0">
-                <a:solidFill>
-                  <a:srgbClr val="333333"/>
-                </a:solidFill>
-                <a:latin typeface="Calibri"/>
-              </a:rPr>
-              <a:t>Brief Elements</a:t>
-            </a:r>
-          </a:p>
-          <a:p>
-            <a:pPr lvl="1">
-              <a:spcAft>
-                <a:spcPts val="1000"/>
-              </a:spcAft>
-            </a:pPr>
-            <a:r>
-              <a:rPr sz="1800" b="0" i="0">
-                <a:solidFill>
-                  <a:srgbClr val="333333"/>
-                </a:solidFill>
-                <a:latin typeface="Calibri"/>
-              </a:rPr>
-              <a:t>Client, audience, purpose, constraints, obligatory fields.</a:t>
-            </a:r>
-          </a:p>
-          <a:p>
-            <a:pPr lvl="1">
-              <a:spcAft>
-                <a:spcPts val="1000"/>
-              </a:spcAft>
-            </a:pPr>
-            <a:r>
-              <a:rPr sz="1800" b="0" i="0">
-                <a:solidFill>
-                  <a:srgbClr val="333333"/>
-                </a:solidFill>
-                <a:latin typeface="Calibri"/>
-              </a:rPr>
-              <a:t>Deconstruct</a:t>
-            </a:r>
-          </a:p>
-          <a:p>
-            <a:pPr lvl="1">
-              <a:spcAft>
-                <a:spcPts val="1000"/>
-              </a:spcAft>
-            </a:pPr>
-            <a:r>
-              <a:rPr sz="1800" b="0" i="0">
-                <a:solidFill>
-                  <a:srgbClr val="333333"/>
-                </a:solidFill>
-                <a:latin typeface="Calibri"/>
-              </a:rPr>
-              <a:t>Who, what, why, constraints.</a:t>
-            </a:r>
-          </a:p>
-          <a:p>
-            <a:pPr lvl="1">
-              <a:spcAft>
-                <a:spcPts val="1000"/>
-              </a:spcAft>
-            </a:pPr>
-            <a:r>
-              <a:rPr sz="1800" b="0" i="0">
-                <a:solidFill>
-                  <a:srgbClr val="333333"/>
-                </a:solidFill>
-                <a:latin typeface="Calibri"/>
-              </a:rPr>
-              <a:t>Two Concepts</a:t>
-            </a:r>
-          </a:p>
-          <a:p>
-            <a:pPr lvl="1">
-              <a:spcAft>
-                <a:spcPts val="1000"/>
-              </a:spcAft>
-            </a:pPr>
-            <a:r>
-              <a:rPr sz="1800" b="0" i="0">
-                <a:solidFill>
-                  <a:srgbClr val="333333"/>
-                </a:solidFill>
-                <a:latin typeface="Calibri"/>
-              </a:rPr>
-              <a:t>Must be genuinely distinct, not colour variants.</a:t>
-            </a:r>
-          </a:p>
-          <a:p>
-            <a:pPr lvl="1">
-              <a:spcAft>
-                <a:spcPts val="1000"/>
-              </a:spcAft>
-            </a:pPr>
-            <a:r>
-              <a:rPr sz="1800" b="0" i="0">
-                <a:solidFill>
-                  <a:srgbClr val="333333"/>
-                </a:solidFill>
-                <a:latin typeface="Calibri"/>
-              </a:rPr>
-              <a:t>Research</a:t>
-            </a:r>
-          </a:p>
-          <a:p>
-            <a:pPr lvl="1">
-              <a:spcAft>
-                <a:spcPts val="1000"/>
-              </a:spcAft>
-            </a:pPr>
-            <a:r>
-              <a:rPr sz="1800" b="0" i="0">
-                <a:solidFill>
-                  <a:srgbClr val="333333"/>
-                </a:solidFill>
-                <a:latin typeface="Calibri"/>
-              </a:rPr>
-              <a:t>Audience, visual, contextual — links to Unit 2 trends.</a:t>
-            </a:r>
-          </a:p>
-          <a:p>
-            <a:pPr>
-              <a:spcAft>
-                <a:spcPts val="1000"/>
-              </a:spcAft>
-            </a:pPr>
-            <a:r>
-              <a:rPr sz="2000" b="0" i="0">
-                <a:solidFill>
-                  <a:srgbClr val="333333"/>
-                </a:solidFill>
-                <a:latin typeface="Calibri"/>
-              </a:rPr>
-              <a:t> Reminder: these two concepts carry forward into </a:t>
-            </a:r>
-            <a:r>
-              <a:rPr sz="2000" b="1" i="0">
-                <a:solidFill>
-                  <a:srgbClr val="1F4B3F"/>
-                </a:solidFill>
-                <a:latin typeface="Calibri"/>
-              </a:rPr>
-              <a:t>Unit 4</a:t>
-            </a:r>
-            <a:r>
-              <a:rPr sz="2000" b="0" i="0">
-                <a:solidFill>
-                  <a:srgbClr val="333333"/>
-                </a:solidFill>
-                <a:latin typeface="Calibri"/>
-              </a:rPr>
-              <a:t>, where you develop and refine them. </a:t>
-            </a:r>
-          </a:p>
-        </p:txBody>
-      </p:sp>
-      <p:sp>
-        <p:nvSpPr>
-          <p:cNvPr id="4" name="Rectangle 3"/>
+          <p:cNvPr id="2" name="Rounded Rectangle 1"/>
           <p:cNvSpPr/>
           <p:nvPr/>
         </p:nvSpPr>
         <p:spPr>
           <a:xfrm>
-            <a:off x="548640" y="1234440"/>
-            <a:ext cx="1463040" cy="38100"/>
-          </a:xfrm>
-          <a:prstGeom prst="rect">
-            <a:avLst/>
+            <a:off x="685800" y="502920"/>
+            <a:ext cx="3291840" cy="457200"/>
+          </a:xfrm>
+          <a:prstGeom prst="roundRect">
+            <a:avLst>
+              <a:gd name="adj" fmla="val 50000"/>
+            </a:avLst>
           </a:prstGeom>
           <a:solidFill>
-            <a:srgbClr val="1F4B3F"/>
+            <a:srgbClr val="2F5233"/>
           </a:solidFill>
           <a:ln>
             <a:noFill/>
@@ -4778,10 +5618,581 @@
           </a:fontRef>
         </p:style>
         <p:txBody>
+          <a:bodyPr rtlCol="0" anchor="ctr" wrap="none" lIns="50800" rIns="50800"/>
+          <a:lstStyle/>
+          <a:p>
+            <a:pPr algn="ctr"/>
+            <a:r>
+              <a:rPr sz="1100" b="1">
+                <a:solidFill>
+                  <a:srgbClr val="FFFFFF"/>
+                </a:solidFill>
+                <a:latin typeface="Calibri"/>
+              </a:rPr>
+              <a:t>THE BRIEF &amp; IDEATION</a:t>
+            </a:r>
+          </a:p>
+        </p:txBody>
+      </p:sp>
+      <p:sp>
+        <p:nvSpPr>
+          <p:cNvPr id="3" name="TextBox 2"/>
+          <p:cNvSpPr txBox="1"/>
+          <p:nvPr/>
+        </p:nvSpPr>
+        <p:spPr>
+          <a:xfrm>
+            <a:off x="685800" y="1051560"/>
+            <a:ext cx="10607040" cy="822960"/>
+          </a:xfrm>
+          <a:prstGeom prst="rect">
+            <a:avLst/>
+          </a:prstGeom>
+          <a:noFill/>
+        </p:spPr>
+        <p:txBody>
+          <a:bodyPr wrap="square" anchor="t">
+            <a:spAutoFit/>
+          </a:bodyPr>
+          <a:lstStyle/>
+          <a:p>
+            <a:pPr algn="l"/>
+            <a:r>
+              <a:rPr sz="2700" b="1" i="0">
+                <a:solidFill>
+                  <a:srgbClr val="20291F"/>
+                </a:solidFill>
+                <a:latin typeface="Cambria"/>
+              </a:rPr>
+              <a:t>Brief &amp; Ideation — Quick Reference</a:t>
+            </a:r>
+          </a:p>
+        </p:txBody>
+      </p:sp>
+      <p:sp>
+        <p:nvSpPr>
+          <p:cNvPr id="4" name="Rounded Rectangle 3"/>
+          <p:cNvSpPr/>
+          <p:nvPr/>
+        </p:nvSpPr>
+        <p:spPr>
+          <a:xfrm>
+            <a:off x="685800" y="1874519"/>
+            <a:ext cx="2500884" cy="1554480"/>
+          </a:xfrm>
+          <a:prstGeom prst="roundRect">
+            <a:avLst>
+              <a:gd name="adj" fmla="val 12000"/>
+            </a:avLst>
+          </a:prstGeom>
+          <a:solidFill>
+            <a:srgbClr val="DFE5E0"/>
+          </a:solidFill>
+          <a:ln>
+            <a:noFill/>
+          </a:ln>
+          <a:effectLst/>
+        </p:spPr>
+        <p:style>
+          <a:lnRef idx="1">
+            <a:schemeClr val="accent1"/>
+          </a:lnRef>
+          <a:fillRef idx="3">
+            <a:schemeClr val="accent1"/>
+          </a:fillRef>
+          <a:effectRef idx="2">
+            <a:schemeClr val="accent1"/>
+          </a:effectRef>
+          <a:fontRef idx="minor">
+            <a:schemeClr val="lt1"/>
+          </a:fontRef>
+        </p:style>
+        <p:txBody>
+          <a:bodyPr rtlCol="0" anchor="ctr" wrap="square" lIns="127000" rIns="127000" tIns="101600" bIns="101600"/>
+          <a:lstStyle/>
+          <a:p>
+            <a:pPr algn="ctr"/>
+            <a:r>
+              <a:rPr b="1" sz="1300">
+                <a:solidFill>
+                  <a:srgbClr val="254128"/>
+                </a:solidFill>
+                <a:latin typeface="Calibri"/>
+              </a:rPr>
+              <a:t>Brief Elements</a:t>
+            </a:r>
+          </a:p>
+          <a:p>
+            <a:r>
+              <a:rPr sz="1050">
+                <a:solidFill>
+                  <a:srgbClr val="20291F"/>
+                </a:solidFill>
+                <a:latin typeface="Calibri"/>
+              </a:rPr>
+              <a:t>Client, audience, purpose, constraints, obligatory fields.</a:t>
+            </a:r>
+          </a:p>
+        </p:txBody>
+      </p:sp>
+      <p:sp>
+        <p:nvSpPr>
+          <p:cNvPr id="5" name="Rounded Rectangle 4"/>
+          <p:cNvSpPr/>
+          <p:nvPr/>
+        </p:nvSpPr>
+        <p:spPr>
+          <a:xfrm>
+            <a:off x="3387852" y="1874519"/>
+            <a:ext cx="2500884" cy="1554480"/>
+          </a:xfrm>
+          <a:prstGeom prst="roundRect">
+            <a:avLst>
+              <a:gd name="adj" fmla="val 12000"/>
+            </a:avLst>
+          </a:prstGeom>
+          <a:solidFill>
+            <a:srgbClr val="F6EAE1"/>
+          </a:solidFill>
+          <a:ln>
+            <a:noFill/>
+          </a:ln>
+          <a:effectLst/>
+        </p:spPr>
+        <p:style>
+          <a:lnRef idx="1">
+            <a:schemeClr val="accent1"/>
+          </a:lnRef>
+          <a:fillRef idx="3">
+            <a:schemeClr val="accent1"/>
+          </a:fillRef>
+          <a:effectRef idx="2">
+            <a:schemeClr val="accent1"/>
+          </a:effectRef>
+          <a:fontRef idx="minor">
+            <a:schemeClr val="lt1"/>
+          </a:fontRef>
+        </p:style>
+        <p:txBody>
+          <a:bodyPr rtlCol="0" anchor="ctr" wrap="square" lIns="127000" rIns="127000" tIns="101600" bIns="101600"/>
+          <a:lstStyle/>
+          <a:p>
+            <a:pPr algn="ctr"/>
+            <a:r>
+              <a:rPr b="1" sz="1300">
+                <a:solidFill>
+                  <a:srgbClr val="A05C30"/>
+                </a:solidFill>
+                <a:latin typeface="Calibri"/>
+              </a:rPr>
+              <a:t>Deconstruct</a:t>
+            </a:r>
+          </a:p>
+          <a:p>
+            <a:r>
+              <a:rPr sz="1050">
+                <a:solidFill>
+                  <a:srgbClr val="20291F"/>
+                </a:solidFill>
+                <a:latin typeface="Calibri"/>
+              </a:rPr>
+              <a:t>Who, what, why, constraints.</a:t>
+            </a:r>
+          </a:p>
+        </p:txBody>
+      </p:sp>
+      <p:sp>
+        <p:nvSpPr>
+          <p:cNvPr id="6" name="Rounded Rectangle 5"/>
+          <p:cNvSpPr/>
+          <p:nvPr/>
+        </p:nvSpPr>
+        <p:spPr>
+          <a:xfrm>
+            <a:off x="6089904" y="1874519"/>
+            <a:ext cx="2500884" cy="1554480"/>
+          </a:xfrm>
+          <a:prstGeom prst="roundRect">
+            <a:avLst>
+              <a:gd name="adj" fmla="val 12000"/>
+            </a:avLst>
+          </a:prstGeom>
+          <a:solidFill>
+            <a:srgbClr val="EBF1F3"/>
+          </a:solidFill>
+          <a:ln>
+            <a:noFill/>
+          </a:ln>
+          <a:effectLst/>
+        </p:spPr>
+        <p:style>
+          <a:lnRef idx="1">
+            <a:schemeClr val="accent1"/>
+          </a:lnRef>
+          <a:fillRef idx="3">
+            <a:schemeClr val="accent1"/>
+          </a:fillRef>
+          <a:effectRef idx="2">
+            <a:schemeClr val="accent1"/>
+          </a:effectRef>
+          <a:fontRef idx="minor">
+            <a:schemeClr val="lt1"/>
+          </a:fontRef>
+        </p:style>
+        <p:txBody>
+          <a:bodyPr rtlCol="0" anchor="ctr" wrap="square" lIns="127000" rIns="127000" tIns="101600" bIns="101600"/>
+          <a:lstStyle/>
+          <a:p>
+            <a:pPr algn="ctr"/>
+            <a:r>
+              <a:rPr b="1" sz="1300">
+                <a:solidFill>
+                  <a:srgbClr val="65828C"/>
+                </a:solidFill>
+                <a:latin typeface="Calibri"/>
+              </a:rPr>
+              <a:t>Two Concepts</a:t>
+            </a:r>
+          </a:p>
+          <a:p>
+            <a:r>
+              <a:rPr sz="1050">
+                <a:solidFill>
+                  <a:srgbClr val="20291F"/>
+                </a:solidFill>
+                <a:latin typeface="Calibri"/>
+              </a:rPr>
+              <a:t>Must be genuinely distinct, not colour variants.</a:t>
+            </a:r>
+          </a:p>
+        </p:txBody>
+      </p:sp>
+      <p:sp>
+        <p:nvSpPr>
+          <p:cNvPr id="7" name="Rounded Rectangle 6"/>
+          <p:cNvSpPr/>
+          <p:nvPr/>
+        </p:nvSpPr>
+        <p:spPr>
+          <a:xfrm>
+            <a:off x="8791956" y="1874519"/>
+            <a:ext cx="2500884" cy="1554480"/>
+          </a:xfrm>
+          <a:prstGeom prst="roundRect">
+            <a:avLst>
+              <a:gd name="adj" fmla="val 12000"/>
+            </a:avLst>
+          </a:prstGeom>
+          <a:solidFill>
+            <a:srgbClr val="DFE5E0"/>
+          </a:solidFill>
+          <a:ln>
+            <a:noFill/>
+          </a:ln>
+          <a:effectLst/>
+        </p:spPr>
+        <p:style>
+          <a:lnRef idx="1">
+            <a:schemeClr val="accent1"/>
+          </a:lnRef>
+          <a:fillRef idx="3">
+            <a:schemeClr val="accent1"/>
+          </a:fillRef>
+          <a:effectRef idx="2">
+            <a:schemeClr val="accent1"/>
+          </a:effectRef>
+          <a:fontRef idx="minor">
+            <a:schemeClr val="lt1"/>
+          </a:fontRef>
+        </p:style>
+        <p:txBody>
+          <a:bodyPr rtlCol="0" anchor="ctr" wrap="square" lIns="127000" rIns="127000" tIns="101600" bIns="101600"/>
+          <a:lstStyle/>
+          <a:p>
+            <a:pPr algn="ctr"/>
+            <a:r>
+              <a:rPr b="1" sz="1300">
+                <a:solidFill>
+                  <a:srgbClr val="254128"/>
+                </a:solidFill>
+                <a:latin typeface="Calibri"/>
+              </a:rPr>
+              <a:t>Research</a:t>
+            </a:r>
+          </a:p>
+          <a:p>
+            <a:r>
+              <a:rPr sz="1050">
+                <a:solidFill>
+                  <a:srgbClr val="20291F"/>
+                </a:solidFill>
+                <a:latin typeface="Calibri"/>
+              </a:rPr>
+              <a:t>Audience, visual, contextual — links to Unit 2 trends.</a:t>
+            </a:r>
+          </a:p>
+        </p:txBody>
+      </p:sp>
+      <p:sp>
+        <p:nvSpPr>
+          <p:cNvPr id="8" name="Rounded Rectangle 7"/>
+          <p:cNvSpPr/>
+          <p:nvPr/>
+        </p:nvSpPr>
+        <p:spPr>
+          <a:xfrm>
+            <a:off x="685800" y="3675887"/>
+            <a:ext cx="10607040" cy="2862073"/>
+          </a:xfrm>
+          <a:prstGeom prst="roundRect">
+            <a:avLst>
+              <a:gd name="adj" fmla="val 10000"/>
+            </a:avLst>
+          </a:prstGeom>
+          <a:solidFill>
+            <a:srgbClr val="F6EAE1"/>
+          </a:solidFill>
+          <a:ln>
+            <a:noFill/>
+          </a:ln>
+          <a:effectLst/>
+        </p:spPr>
+        <p:style>
+          <a:lnRef idx="1">
+            <a:schemeClr val="accent1"/>
+          </a:lnRef>
+          <a:fillRef idx="3">
+            <a:schemeClr val="accent1"/>
+          </a:fillRef>
+          <a:effectRef idx="2">
+            <a:schemeClr val="accent1"/>
+          </a:effectRef>
+          <a:fontRef idx="minor">
+            <a:schemeClr val="lt1"/>
+          </a:fontRef>
+        </p:style>
+        <p:txBody>
+          <a:bodyPr rtlCol="0" anchor="ctr" lIns="203200" rIns="203200" tIns="101600" bIns="101600" wrap="square"/>
+          <a:lstStyle/>
+          <a:p>
+            <a:pPr algn="ctr" indent="-203200" marL="203200">
+              <a:spcAft>
+                <a:spcPts val="900"/>
+              </a:spcAft>
+              <a:buClr>
+                <a:srgbClr val="C9743D"/>
+              </a:buClr>
+              <a:buSzPct val="90000"/>
+              <a:buFont typeface="Arial"/>
+              <a:buChar char="●"/>
+            </a:pPr>
+            <a:r>
+              <a:rPr sz="1200" b="0" i="0">
+                <a:solidFill>
+                  <a:srgbClr val="20291F"/>
+                </a:solidFill>
+                <a:latin typeface="Calibri"/>
+              </a:rPr>
+              <a:t> Reminder: these two concepts carry forward into </a:t>
+            </a:r>
+            <a:r>
+              <a:rPr sz="1200" b="1" i="0">
+                <a:solidFill>
+                  <a:srgbClr val="AA6233"/>
+                </a:solidFill>
+                <a:latin typeface="Calibri"/>
+              </a:rPr>
+              <a:t>Unit 4</a:t>
+            </a:r>
+            <a:r>
+              <a:rPr sz="1200" b="0" i="0">
+                <a:solidFill>
+                  <a:srgbClr val="20291F"/>
+                </a:solidFill>
+                <a:latin typeface="Calibri"/>
+              </a:rPr>
+              <a:t>, where you develop and refine them. </a:t>
+            </a:r>
+          </a:p>
+        </p:txBody>
+      </p:sp>
+    </p:spTree>
+  </p:cSld>
+  <p:clrMapOvr>
+    <a:masterClrMapping/>
+  </p:clrMapOvr>
+</p:sld>
+</file>
+
+<file path=ppt/slides/slide16.xml><?xml version="1.0" encoding="utf-8"?>
+<p:sld xmlns:a="http://schemas.openxmlformats.org/drawingml/2006/main" xmlns:p="http://schemas.openxmlformats.org/presentationml/2006/main" xmlns:r="http://schemas.openxmlformats.org/officeDocument/2006/relationships">
+  <p:cSld>
+    <p:bg>
+      <p:bgPr>
+        <a:solidFill>
+          <a:srgbClr val="2F5233"/>
+        </a:solidFill>
+        <a:effectLst/>
+      </p:bgPr>
+    </p:bg>
+    <p:spTree>
+      <p:nvGrpSpPr>
+        <p:cNvPr id="1" name=""/>
+        <p:cNvGrpSpPr/>
+        <p:nvPr/>
+      </p:nvGrpSpPr>
+      <p:grpSpPr/>
+      <p:sp>
+        <p:nvSpPr>
+          <p:cNvPr id="2" name="Oval 1"/>
+          <p:cNvSpPr/>
+          <p:nvPr/>
+        </p:nvSpPr>
+        <p:spPr>
+          <a:xfrm>
+            <a:off x="-1097280" y="4114800"/>
+            <a:ext cx="3108960" cy="3108960"/>
+          </a:xfrm>
+          <a:prstGeom prst="ellipse">
+            <a:avLst/>
+          </a:prstGeom>
+          <a:solidFill>
+            <a:srgbClr val="29482C"/>
+          </a:solidFill>
+          <a:ln>
+            <a:noFill/>
+          </a:ln>
+          <a:effectLst/>
+        </p:spPr>
+        <p:style>
+          <a:lnRef idx="1">
+            <a:schemeClr val="accent1"/>
+          </a:lnRef>
+          <a:fillRef idx="3">
+            <a:schemeClr val="accent1"/>
+          </a:fillRef>
+          <a:effectRef idx="2">
+            <a:schemeClr val="accent1"/>
+          </a:effectRef>
+          <a:fontRef idx="minor">
+            <a:schemeClr val="lt1"/>
+          </a:fontRef>
+        </p:style>
+        <p:txBody>
           <a:bodyPr rtlCol="0" anchor="ctr"/>
           <a:lstStyle/>
           <a:p>
             <a:pPr algn="ctr"/>
+          </a:p>
+        </p:txBody>
+      </p:sp>
+      <p:sp>
+        <p:nvSpPr>
+          <p:cNvPr id="3" name="Oval 2"/>
+          <p:cNvSpPr/>
+          <p:nvPr/>
+        </p:nvSpPr>
+        <p:spPr>
+          <a:xfrm>
+            <a:off x="9875520" y="-1188720"/>
+            <a:ext cx="2743200" cy="2743200"/>
+          </a:xfrm>
+          <a:prstGeom prst="ellipse">
+            <a:avLst/>
+          </a:prstGeom>
+          <a:solidFill>
+            <a:srgbClr val="C9743D"/>
+          </a:solidFill>
+          <a:ln>
+            <a:noFill/>
+          </a:ln>
+          <a:effectLst/>
+        </p:spPr>
+        <p:style>
+          <a:lnRef idx="1">
+            <a:schemeClr val="accent1"/>
+          </a:lnRef>
+          <a:fillRef idx="3">
+            <a:schemeClr val="accent1"/>
+          </a:fillRef>
+          <a:effectRef idx="2">
+            <a:schemeClr val="accent1"/>
+          </a:effectRef>
+          <a:fontRef idx="minor">
+            <a:schemeClr val="lt1"/>
+          </a:fontRef>
+        </p:style>
+        <p:txBody>
+          <a:bodyPr rtlCol="0" anchor="ctr"/>
+          <a:lstStyle/>
+          <a:p>
+            <a:pPr algn="ctr"/>
+          </a:p>
+        </p:txBody>
+      </p:sp>
+      <p:sp>
+        <p:nvSpPr>
+          <p:cNvPr id="4" name="Rounded Rectangle 3"/>
+          <p:cNvSpPr/>
+          <p:nvPr/>
+        </p:nvSpPr>
+        <p:spPr>
+          <a:xfrm>
+            <a:off x="1920240" y="2286000"/>
+            <a:ext cx="8321040" cy="2377440"/>
+          </a:xfrm>
+          <a:prstGeom prst="roundRect">
+            <a:avLst>
+              <a:gd name="adj" fmla="val 20000"/>
+            </a:avLst>
+          </a:prstGeom>
+          <a:solidFill>
+            <a:srgbClr val="FFFFFF"/>
+          </a:solidFill>
+          <a:ln>
+            <a:noFill/>
+          </a:ln>
+          <a:effectLst/>
+        </p:spPr>
+        <p:style>
+          <a:lnRef idx="1">
+            <a:schemeClr val="accent1"/>
+          </a:lnRef>
+          <a:fillRef idx="3">
+            <a:schemeClr val="accent1"/>
+          </a:fillRef>
+          <a:effectRef idx="2">
+            <a:schemeClr val="accent1"/>
+          </a:effectRef>
+          <a:fontRef idx="minor">
+            <a:schemeClr val="lt1"/>
+          </a:fontRef>
+        </p:style>
+        <p:txBody>
+          <a:bodyPr rtlCol="0" anchor="ctr"/>
+          <a:lstStyle/>
+          <a:p>
+            <a:pPr algn="ctr"/>
+            <a:r>
+              <a:rPr b="1" sz="3000">
+                <a:solidFill>
+                  <a:srgbClr val="2F5233"/>
+                </a:solidFill>
+                <a:latin typeface="Cambria"/>
+              </a:rPr>
+              <a:t>End of Unit 3</a:t>
+            </a:r>
+          </a:p>
+          <a:p>
+            <a:pPr algn="ctr"/>
+            <a:r>
+              <a:rPr sz="1400">
+                <a:solidFill>
+                  <a:srgbClr val="595959"/>
+                </a:solidFill>
+              </a:rPr>
+              <a:t>Review the matching workbook to consolidate what you have learnt.</a:t>
+            </a:r>
           </a:p>
         </p:txBody>
       </p:sp>
@@ -4799,7 +6210,7 @@
     <p:bg>
       <p:bgPr>
         <a:solidFill>
-          <a:srgbClr val="1F4B3F"/>
+          <a:srgbClr val="C9743D"/>
         </a:solidFill>
         <a:effectLst/>
       </p:bgPr>
@@ -4813,23 +6224,220 @@
       <p:grpSpPr/>
       <p:sp>
         <p:nvSpPr>
-          <p:cNvPr id="2" name="Title 1"/>
-          <p:cNvSpPr>
-            <a:spLocks noGrp="1"/>
-          </p:cNvSpPr>
-          <p:nvPr>
-            <p:ph type="title"/>
-          </p:nvPr>
-        </p:nvSpPr>
-        <p:spPr/>
-        <p:txBody>
-          <a:bodyPr/>
-          <a:lstStyle/>
-          <a:p>
-            <a:r>
-              <a:rPr sz="4000" b="1">
-                <a:solidFill>
-                  <a:srgbClr val="FFFFFF"/>
+          <p:cNvPr id="2" name="Oval 1"/>
+          <p:cNvSpPr/>
+          <p:nvPr/>
+        </p:nvSpPr>
+        <p:spPr>
+          <a:xfrm>
+            <a:off x="9692640" y="-914400"/>
+            <a:ext cx="2926080" cy="2926080"/>
+          </a:xfrm>
+          <a:prstGeom prst="ellipse">
+            <a:avLst/>
+          </a:prstGeom>
+          <a:solidFill>
+            <a:srgbClr val="B06635"/>
+          </a:solidFill>
+          <a:ln>
+            <a:noFill/>
+          </a:ln>
+          <a:effectLst/>
+        </p:spPr>
+        <p:style>
+          <a:lnRef idx="1">
+            <a:schemeClr val="accent1"/>
+          </a:lnRef>
+          <a:fillRef idx="3">
+            <a:schemeClr val="accent1"/>
+          </a:fillRef>
+          <a:effectRef idx="2">
+            <a:schemeClr val="accent1"/>
+          </a:effectRef>
+          <a:fontRef idx="minor">
+            <a:schemeClr val="lt1"/>
+          </a:fontRef>
+        </p:style>
+        <p:txBody>
+          <a:bodyPr rtlCol="0" anchor="ctr"/>
+          <a:lstStyle/>
+          <a:p>
+            <a:pPr algn="ctr"/>
+          </a:p>
+        </p:txBody>
+      </p:sp>
+      <p:sp>
+        <p:nvSpPr>
+          <p:cNvPr id="3" name="Oval 2"/>
+          <p:cNvSpPr/>
+          <p:nvPr/>
+        </p:nvSpPr>
+        <p:spPr>
+          <a:xfrm>
+            <a:off x="-914400" y="4937760"/>
+            <a:ext cx="2377440" cy="2377440"/>
+          </a:xfrm>
+          <a:prstGeom prst="ellipse">
+            <a:avLst/>
+          </a:prstGeom>
+          <a:solidFill>
+            <a:srgbClr val="B06635"/>
+          </a:solidFill>
+          <a:ln>
+            <a:noFill/>
+          </a:ln>
+          <a:effectLst/>
+        </p:spPr>
+        <p:style>
+          <a:lnRef idx="1">
+            <a:schemeClr val="accent1"/>
+          </a:lnRef>
+          <a:fillRef idx="3">
+            <a:schemeClr val="accent1"/>
+          </a:fillRef>
+          <a:effectRef idx="2">
+            <a:schemeClr val="accent1"/>
+          </a:effectRef>
+          <a:fontRef idx="minor">
+            <a:schemeClr val="lt1"/>
+          </a:fontRef>
+        </p:style>
+        <p:txBody>
+          <a:bodyPr rtlCol="0" anchor="ctr"/>
+          <a:lstStyle/>
+          <a:p>
+            <a:pPr algn="ctr"/>
+          </a:p>
+        </p:txBody>
+      </p:sp>
+      <p:sp>
+        <p:nvSpPr>
+          <p:cNvPr id="4" name="Rounded Rectangle 3"/>
+          <p:cNvSpPr/>
+          <p:nvPr/>
+        </p:nvSpPr>
+        <p:spPr>
+          <a:xfrm>
+            <a:off x="822960" y="1051560"/>
+            <a:ext cx="1188720" cy="502920"/>
+          </a:xfrm>
+          <a:prstGeom prst="roundRect">
+            <a:avLst>
+              <a:gd name="adj" fmla="val 50000"/>
+            </a:avLst>
+          </a:prstGeom>
+          <a:solidFill>
+            <a:srgbClr val="FFFFFF"/>
+          </a:solidFill>
+          <a:ln>
+            <a:noFill/>
+          </a:ln>
+          <a:effectLst/>
+        </p:spPr>
+        <p:style>
+          <a:lnRef idx="1">
+            <a:schemeClr val="accent1"/>
+          </a:lnRef>
+          <a:fillRef idx="3">
+            <a:schemeClr val="accent1"/>
+          </a:fillRef>
+          <a:effectRef idx="2">
+            <a:schemeClr val="accent1"/>
+          </a:effectRef>
+          <a:fontRef idx="minor">
+            <a:schemeClr val="lt1"/>
+          </a:fontRef>
+        </p:style>
+        <p:txBody>
+          <a:bodyPr rtlCol="0" anchor="ctr" wrap="none" lIns="50800" rIns="50800"/>
+          <a:lstStyle/>
+          <a:p>
+            <a:pPr algn="ctr"/>
+            <a:r>
+              <a:rPr sz="1400" b="1">
+                <a:solidFill>
+                  <a:srgbClr val="A05C30"/>
+                </a:solidFill>
+                <a:latin typeface="Calibri"/>
+              </a:rPr>
+              <a:t>01</a:t>
+            </a:r>
+          </a:p>
+        </p:txBody>
+      </p:sp>
+      <p:sp>
+        <p:nvSpPr>
+          <p:cNvPr id="5" name="Rounded Rectangle 4"/>
+          <p:cNvSpPr/>
+          <p:nvPr/>
+        </p:nvSpPr>
+        <p:spPr>
+          <a:xfrm>
+            <a:off x="822960" y="2011680"/>
+            <a:ext cx="10515600" cy="2834640"/>
+          </a:xfrm>
+          <a:prstGeom prst="roundRect">
+            <a:avLst>
+              <a:gd name="adj" fmla="val 18000"/>
+            </a:avLst>
+          </a:prstGeom>
+          <a:solidFill>
+            <a:srgbClr val="FFFFFF"/>
+          </a:solidFill>
+          <a:ln>
+            <a:noFill/>
+          </a:ln>
+          <a:effectLst/>
+        </p:spPr>
+        <p:style>
+          <a:lnRef idx="1">
+            <a:schemeClr val="accent1"/>
+          </a:lnRef>
+          <a:fillRef idx="3">
+            <a:schemeClr val="accent1"/>
+          </a:fillRef>
+          <a:effectRef idx="2">
+            <a:schemeClr val="accent1"/>
+          </a:effectRef>
+          <a:fontRef idx="minor">
+            <a:schemeClr val="lt1"/>
+          </a:fontRef>
+        </p:style>
+        <p:txBody>
+          <a:bodyPr rtlCol="0" anchor="ctr"/>
+          <a:lstStyle/>
+          <a:p>
+            <a:pPr algn="ctr"/>
+          </a:p>
+        </p:txBody>
+      </p:sp>
+      <p:sp>
+        <p:nvSpPr>
+          <p:cNvPr id="6" name="TextBox 5"/>
+          <p:cNvSpPr txBox="1"/>
+          <p:nvPr/>
+        </p:nvSpPr>
+        <p:spPr>
+          <a:xfrm>
+            <a:off x="1280160" y="2697480"/>
+            <a:ext cx="9601200" cy="1097280"/>
+          </a:xfrm>
+          <a:prstGeom prst="rect">
+            <a:avLst/>
+          </a:prstGeom>
+          <a:noFill/>
+        </p:spPr>
+        <p:txBody>
+          <a:bodyPr wrap="square" anchor="t">
+            <a:spAutoFit/>
+          </a:bodyPr>
+          <a:lstStyle/>
+          <a:p>
+            <a:pPr algn="l"/>
+            <a:r>
+              <a:rPr sz="3400" b="1" i="0">
+                <a:solidFill>
+                  <a:srgbClr val="AA6233"/>
                 </a:solidFill>
                 <a:latin typeface="Cambria"/>
               </a:rPr>
@@ -4840,27 +6448,35 @@
       </p:sp>
       <p:sp>
         <p:nvSpPr>
-          <p:cNvPr id="3" name="Text Placeholder 2"/>
-          <p:cNvSpPr>
-            <a:spLocks noGrp="1"/>
-          </p:cNvSpPr>
-          <p:nvPr>
-            <p:ph type="body" idx="1"/>
-          </p:nvPr>
-        </p:nvSpPr>
-        <p:spPr/>
-        <p:txBody>
-          <a:bodyPr/>
-          <a:lstStyle/>
-          <a:p>
-            <a:r>
-              <a:rPr sz="1800">
-                <a:solidFill>
-                  <a:srgbClr val="E5E5E5"/>
-                </a:solidFill>
-                <a:latin typeface="Calibri"/>
-              </a:rPr>
-              <a:t>AOS 1 · Analysis and Practice in Context</a:t>
+          <p:cNvPr id="7" name="TextBox 6"/>
+          <p:cNvSpPr txBox="1"/>
+          <p:nvPr/>
+        </p:nvSpPr>
+        <p:spPr>
+          <a:xfrm>
+            <a:off x="1280160" y="3657600"/>
+            <a:ext cx="9601200" cy="548640"/>
+          </a:xfrm>
+          <a:prstGeom prst="rect">
+            <a:avLst/>
+          </a:prstGeom>
+          <a:noFill/>
+        </p:spPr>
+        <p:txBody>
+          <a:bodyPr wrap="square" anchor="t">
+            <a:spAutoFit/>
+          </a:bodyPr>
+          <a:lstStyle/>
+          <a:p>
+            <a:pPr algn="l"/>
+            <a:r>
+              <a:rPr sz="1500" b="0" i="0">
+                <a:solidFill>
+                  <a:srgbClr val="6B6B6B"/>
+                </a:solidFill>
+                <a:latin typeface="Calibri"/>
+              </a:rPr>
+              <a:t>AOS 1 - Analysis and Practice in Context</a:t>
             </a:r>
           </a:p>
         </p:txBody>
@@ -4876,6 +6492,14 @@
 <file path=ppt/slides/slide3.xml><?xml version="1.0" encoding="utf-8"?>
 <p:sld xmlns:a="http://schemas.openxmlformats.org/drawingml/2006/main" xmlns:p="http://schemas.openxmlformats.org/presentationml/2006/main" xmlns:r="http://schemas.openxmlformats.org/officeDocument/2006/relationships">
   <p:cSld>
+    <p:bg>
+      <p:bgPr>
+        <a:solidFill>
+          <a:srgbClr val="F7F5EC"/>
+        </a:solidFill>
+        <a:effectLst/>
+      </p:bgPr>
+    </p:bg>
     <p:spTree>
       <p:nvGrpSpPr>
         <p:cNvPr id="1" name=""/>
@@ -4885,204 +6509,351 @@
       <p:grpSpPr/>
       <p:sp>
         <p:nvSpPr>
-          <p:cNvPr id="2" name="Title 1"/>
-          <p:cNvSpPr>
-            <a:spLocks noGrp="1"/>
-          </p:cNvSpPr>
-          <p:nvPr>
-            <p:ph type="title"/>
-          </p:nvPr>
-        </p:nvSpPr>
-        <p:spPr/>
-        <p:txBody>
-          <a:bodyPr wrap="square"/>
-          <a:lstStyle/>
-          <a:p>
-            <a:r>
-              <a:rPr sz="3200" b="1">
-                <a:solidFill>
-                  <a:srgbClr val="1F4B3F"/>
-                </a:solidFill>
-                <a:latin typeface="Cambria"/>
-              </a:rPr>
-              <a:t>Analysing &amp; Reinterpreting Designs</a:t>
-            </a:r>
-          </a:p>
-        </p:txBody>
-      </p:sp>
-      <p:sp>
-        <p:nvSpPr>
-          <p:cNvPr id="3" name="Content Placeholder 2"/>
-          <p:cNvSpPr>
-            <a:spLocks noGrp="1"/>
-          </p:cNvSpPr>
-          <p:nvPr>
-            <p:ph idx="1" sz="half"/>
-          </p:nvPr>
-        </p:nvSpPr>
-        <p:spPr/>
-        <p:txBody>
-          <a:bodyPr wrap="square"/>
-          <a:lstStyle/>
-          <a:p>
-            <a:pPr>
-              <a:spcAft>
-                <a:spcPts val="1000"/>
-              </a:spcAft>
-            </a:pPr>
-            <a:r>
-              <a:rPr sz="2000" b="0" i="0">
-                <a:solidFill>
-                  <a:srgbClr val="333333"/>
-                </a:solidFill>
-                <a:latin typeface="Calibri"/>
-              </a:rPr>
-              <a:t>In Unit 3, you select an </a:t>
-            </a:r>
-            <a:r>
-              <a:rPr sz="2000" b="1" i="0">
-                <a:solidFill>
-                  <a:srgbClr val="1F4B3F"/>
-                </a:solidFill>
-                <a:latin typeface="Calibri"/>
-              </a:rPr>
-              <a:t>existing design</a:t>
-            </a:r>
-            <a:r>
-              <a:rPr sz="2000" b="0" i="0">
-                <a:solidFill>
-                  <a:srgbClr val="333333"/>
-                </a:solidFill>
-                <a:latin typeface="Calibri"/>
-              </a:rPr>
-              <a:t> from one of the four design fields, analyse it in depth, then reinterpret it for a </a:t>
-            </a:r>
-            <a:r>
-              <a:rPr sz="2000" b="1" i="0">
-                <a:solidFill>
-                  <a:srgbClr val="1F4B3F"/>
-                </a:solidFill>
-                <a:latin typeface="Calibri"/>
-              </a:rPr>
-              <a:t>new context, audience or purpose.</a:t>
-            </a:r>
-          </a:p>
-          <a:p>
-            <a:pPr>
-              <a:spcAft>
-                <a:spcPts val="1000"/>
-              </a:spcAft>
-            </a:pPr>
-            <a:r>
-              <a:rPr sz="2000" b="0" i="0">
-                <a:solidFill>
-                  <a:srgbClr val="333333"/>
-                </a:solidFill>
-                <a:latin typeface="Calibri"/>
-              </a:rPr>
-              <a:t>This process forms the foundation for your folio — the analysis and reinterpretation informs the two concepts you will develop across Units 3 and 4.</a:t>
-            </a:r>
-          </a:p>
-        </p:txBody>
-      </p:sp>
-      <p:sp>
-        <p:nvSpPr>
-          <p:cNvPr id="4" name="Content Placeholder 3"/>
-          <p:cNvSpPr>
-            <a:spLocks noGrp="1"/>
-          </p:cNvSpPr>
-          <p:nvPr>
-            <p:ph idx="2" sz="half"/>
-          </p:nvPr>
-        </p:nvSpPr>
-        <p:spPr/>
-        <p:txBody>
-          <a:bodyPr wrap="square"/>
-          <a:lstStyle/>
-          <a:p>
-            <a:pPr>
-              <a:spcAft>
-                <a:spcPts val="1000"/>
-              </a:spcAft>
-            </a:pPr>
-            <a:r>
-              <a:rPr sz="2000" b="0" i="0">
-                <a:solidFill>
-                  <a:srgbClr val="333333"/>
-                </a:solidFill>
-                <a:latin typeface="Calibri"/>
-              </a:rPr>
-              <a:t>The Two Stages</a:t>
-            </a:r>
-          </a:p>
-          <a:p>
-            <a:pPr lvl="1">
-              <a:spcAft>
-                <a:spcPts val="1000"/>
-              </a:spcAft>
-            </a:pPr>
-            <a:r>
-              <a:rPr sz="1800" b="1" i="0">
-                <a:solidFill>
-                  <a:srgbClr val="1F4B3F"/>
-                </a:solidFill>
-                <a:latin typeface="Calibri"/>
-              </a:rPr>
-              <a:t>1. Analysis</a:t>
-            </a:r>
-            <a:r>
-              <a:rPr sz="1800" b="0" i="0">
-                <a:solidFill>
-                  <a:srgbClr val="333333"/>
-                </a:solidFill>
-                <a:latin typeface="Calibri"/>
-              </a:rPr>
-              <a:t> — understanding the original design in depth</a:t>
-            </a:r>
-          </a:p>
-          <a:p>
-            <a:pPr lvl="1">
-              <a:spcAft>
-                <a:spcPts val="1000"/>
-              </a:spcAft>
-            </a:pPr>
-            <a:r>
-              <a:rPr sz="1800" b="1" i="0">
-                <a:solidFill>
-                  <a:srgbClr val="1F4B3F"/>
-                </a:solidFill>
-                <a:latin typeface="Calibri"/>
-              </a:rPr>
-              <a:t>2. Reinterpretation</a:t>
-            </a:r>
-            <a:r>
-              <a:rPr sz="1800" b="0" i="0">
-                <a:solidFill>
-                  <a:srgbClr val="333333"/>
-                </a:solidFill>
-                <a:latin typeface="Calibri"/>
-              </a:rPr>
-              <a:t> — reimagining it for a different context</a:t>
-            </a:r>
-          </a:p>
-        </p:txBody>
-      </p:sp>
-      <p:sp>
-        <p:nvSpPr>
-          <p:cNvPr id="5" name="Rectangle 4"/>
+          <p:cNvPr id="2" name="Rounded Rectangle 1"/>
           <p:cNvSpPr/>
           <p:nvPr/>
         </p:nvSpPr>
         <p:spPr>
           <a:xfrm>
-            <a:off x="548640" y="1234440"/>
-            <a:ext cx="1463040" cy="38100"/>
+            <a:off x="685800" y="502920"/>
+            <a:ext cx="3291840" cy="457200"/>
+          </a:xfrm>
+          <a:prstGeom prst="roundRect">
+            <a:avLst>
+              <a:gd name="adj" fmla="val 50000"/>
+            </a:avLst>
+          </a:prstGeom>
+          <a:solidFill>
+            <a:srgbClr val="2F5233"/>
+          </a:solidFill>
+          <a:ln>
+            <a:noFill/>
+          </a:ln>
+          <a:effectLst/>
+        </p:spPr>
+        <p:style>
+          <a:lnRef idx="1">
+            <a:schemeClr val="accent1"/>
+          </a:lnRef>
+          <a:fillRef idx="3">
+            <a:schemeClr val="accent1"/>
+          </a:fillRef>
+          <a:effectRef idx="2">
+            <a:schemeClr val="accent1"/>
+          </a:effectRef>
+          <a:fontRef idx="minor">
+            <a:schemeClr val="lt1"/>
+          </a:fontRef>
+        </p:style>
+        <p:txBody>
+          <a:bodyPr rtlCol="0" anchor="ctr" wrap="none" lIns="50800" rIns="50800"/>
+          <a:lstStyle/>
+          <a:p>
+            <a:pPr algn="ctr"/>
+            <a:r>
+              <a:rPr sz="1100" b="1">
+                <a:solidFill>
+                  <a:srgbClr val="FFFFFF"/>
+                </a:solidFill>
+                <a:latin typeface="Calibri"/>
+              </a:rPr>
+              <a:t>ANALYSIS &amp; REINTERPRETATION</a:t>
+            </a:r>
+          </a:p>
+        </p:txBody>
+      </p:sp>
+      <p:sp>
+        <p:nvSpPr>
+          <p:cNvPr id="3" name="TextBox 2"/>
+          <p:cNvSpPr txBox="1"/>
+          <p:nvPr/>
+        </p:nvSpPr>
+        <p:spPr>
+          <a:xfrm>
+            <a:off x="685800" y="1051560"/>
+            <a:ext cx="10607040" cy="822960"/>
           </a:xfrm>
           <a:prstGeom prst="rect">
             <a:avLst/>
           </a:prstGeom>
+          <a:noFill/>
+        </p:spPr>
+        <p:txBody>
+          <a:bodyPr wrap="square" anchor="t">
+            <a:spAutoFit/>
+          </a:bodyPr>
+          <a:lstStyle/>
+          <a:p>
+            <a:pPr algn="l"/>
+            <a:r>
+              <a:rPr sz="2700" b="1" i="0">
+                <a:solidFill>
+                  <a:srgbClr val="20291F"/>
+                </a:solidFill>
+                <a:latin typeface="Cambria"/>
+              </a:rPr>
+              <a:t>Analysing &amp; Reinterpreting Designs</a:t>
+            </a:r>
+          </a:p>
+        </p:txBody>
+      </p:sp>
+      <p:sp>
+        <p:nvSpPr>
+          <p:cNvPr id="4" name="Rounded Rectangle 3"/>
+          <p:cNvSpPr/>
+          <p:nvPr/>
+        </p:nvSpPr>
+        <p:spPr>
+          <a:xfrm>
+            <a:off x="685800" y="1874519"/>
+            <a:ext cx="5166360" cy="4526280"/>
+          </a:xfrm>
+          <a:prstGeom prst="roundRect">
+            <a:avLst>
+              <a:gd name="adj" fmla="val 6000"/>
+            </a:avLst>
+          </a:prstGeom>
           <a:solidFill>
-            <a:srgbClr val="1F4B3F"/>
+            <a:srgbClr val="E6EAE6"/>
+          </a:solidFill>
+          <a:ln>
+            <a:noFill/>
+          </a:ln>
+          <a:effectLst/>
+        </p:spPr>
+        <p:style>
+          <a:lnRef idx="1">
+            <a:schemeClr val="accent1"/>
+          </a:lnRef>
+          <a:fillRef idx="3">
+            <a:schemeClr val="accent1"/>
+          </a:fillRef>
+          <a:effectRef idx="2">
+            <a:schemeClr val="accent1"/>
+          </a:effectRef>
+          <a:fontRef idx="minor">
+            <a:schemeClr val="lt1"/>
+          </a:fontRef>
+        </p:style>
+        <p:txBody>
+          <a:bodyPr rtlCol="0" anchor="ctr" lIns="279400" rIns="279400" tIns="228600" bIns="228600" wrap="square"/>
+          <a:lstStyle/>
+          <a:p>
+            <a:pPr algn="ctr" indent="-203200" marL="203200">
+              <a:spcAft>
+                <a:spcPts val="900"/>
+              </a:spcAft>
+              <a:buClr>
+                <a:srgbClr val="2F5233"/>
+              </a:buClr>
+              <a:buSzPct val="90000"/>
+              <a:buFont typeface="Arial"/>
+              <a:buChar char="●"/>
+            </a:pPr>
+            <a:r>
+              <a:rPr sz="1400" b="0" i="0">
+                <a:solidFill>
+                  <a:srgbClr val="20291F"/>
+                </a:solidFill>
+                <a:latin typeface="Calibri"/>
+              </a:rPr>
+              <a:t>In Unit 3, you select an </a:t>
+            </a:r>
+            <a:r>
+              <a:rPr sz="1400" b="1" i="0">
+                <a:solidFill>
+                  <a:srgbClr val="27452B"/>
+                </a:solidFill>
+                <a:latin typeface="Calibri"/>
+              </a:rPr>
+              <a:t>existing design</a:t>
+            </a:r>
+            <a:r>
+              <a:rPr sz="1400" b="0" i="0">
+                <a:solidFill>
+                  <a:srgbClr val="20291F"/>
+                </a:solidFill>
+                <a:latin typeface="Calibri"/>
+              </a:rPr>
+              <a:t> from one of the four design fields, analyse it in depth, then reinterpret it for a </a:t>
+            </a:r>
+            <a:r>
+              <a:rPr sz="1400" b="1" i="0">
+                <a:solidFill>
+                  <a:srgbClr val="27452B"/>
+                </a:solidFill>
+                <a:latin typeface="Calibri"/>
+              </a:rPr>
+              <a:t>new context, audience or purpose.</a:t>
+            </a:r>
+          </a:p>
+          <a:p>
+            <a:pPr indent="-203200" marL="203200">
+              <a:spcAft>
+                <a:spcPts val="900"/>
+              </a:spcAft>
+              <a:buClr>
+                <a:srgbClr val="2F5233"/>
+              </a:buClr>
+              <a:buSzPct val="90000"/>
+              <a:buFont typeface="Arial"/>
+              <a:buChar char="●"/>
+            </a:pPr>
+            <a:r>
+              <a:rPr sz="1400" b="0" i="0">
+                <a:solidFill>
+                  <a:srgbClr val="20291F"/>
+                </a:solidFill>
+                <a:latin typeface="Calibri"/>
+              </a:rPr>
+              <a:t>This process forms the foundation for your folio — the analysis and reinterpretation informs the two concepts you will develop across Units 3 and 4.</a:t>
+            </a:r>
+          </a:p>
+        </p:txBody>
+      </p:sp>
+      <p:sp>
+        <p:nvSpPr>
+          <p:cNvPr id="5" name="Rounded Rectangle 4"/>
+          <p:cNvSpPr/>
+          <p:nvPr/>
+        </p:nvSpPr>
+        <p:spPr>
+          <a:xfrm>
+            <a:off x="6080760" y="1874519"/>
+            <a:ext cx="5166360" cy="4526280"/>
+          </a:xfrm>
+          <a:prstGeom prst="roundRect">
+            <a:avLst>
+              <a:gd name="adj" fmla="val 6000"/>
+            </a:avLst>
+          </a:prstGeom>
+          <a:solidFill>
+            <a:srgbClr val="DBE5E8"/>
+          </a:solidFill>
+          <a:ln>
+            <a:noFill/>
+          </a:ln>
+          <a:effectLst/>
+        </p:spPr>
+        <p:style>
+          <a:lnRef idx="1">
+            <a:schemeClr val="accent1"/>
+          </a:lnRef>
+          <a:fillRef idx="3">
+            <a:schemeClr val="accent1"/>
+          </a:fillRef>
+          <a:effectRef idx="2">
+            <a:schemeClr val="accent1"/>
+          </a:effectRef>
+          <a:fontRef idx="minor">
+            <a:schemeClr val="lt1"/>
+          </a:fontRef>
+        </p:style>
+        <p:txBody>
+          <a:bodyPr rtlCol="0" anchor="ctr" lIns="279400" rIns="279400" tIns="228600" bIns="228600" wrap="square"/>
+          <a:lstStyle/>
+          <a:p>
+            <a:pPr algn="ctr" indent="-203200" marL="203200">
+              <a:spcAft>
+                <a:spcPts val="900"/>
+              </a:spcAft>
+              <a:buClr>
+                <a:srgbClr val="7FA3B0"/>
+              </a:buClr>
+              <a:buSzPct val="90000"/>
+              <a:buFont typeface="Arial"/>
+              <a:buChar char="●"/>
+            </a:pPr>
+            <a:r>
+              <a:rPr sz="1400" b="0" i="0">
+                <a:solidFill>
+                  <a:srgbClr val="20291F"/>
+                </a:solidFill>
+                <a:latin typeface="Calibri"/>
+              </a:rPr>
+              <a:t>The Two Stages</a:t>
+            </a:r>
+          </a:p>
+          <a:p>
+            <a:pPr indent="-203200" marL="203200">
+              <a:spcAft>
+                <a:spcPts val="900"/>
+              </a:spcAft>
+              <a:buClr>
+                <a:srgbClr val="7FA3B0"/>
+              </a:buClr>
+              <a:buSzPct val="90000"/>
+              <a:buFont typeface="Arial"/>
+              <a:buChar char="–"/>
+            </a:pPr>
+            <a:r>
+              <a:rPr sz="1250" b="1" i="0">
+                <a:solidFill>
+                  <a:srgbClr val="6B8A95"/>
+                </a:solidFill>
+                <a:latin typeface="Calibri"/>
+              </a:rPr>
+              <a:t>1. Analysis</a:t>
+            </a:r>
+            <a:r>
+              <a:rPr sz="1250" b="0" i="0">
+                <a:solidFill>
+                  <a:srgbClr val="20291F"/>
+                </a:solidFill>
+                <a:latin typeface="Calibri"/>
+              </a:rPr>
+              <a:t> — understanding the original design in depth</a:t>
+            </a:r>
+          </a:p>
+          <a:p>
+            <a:pPr indent="-203200" marL="203200">
+              <a:spcAft>
+                <a:spcPts val="900"/>
+              </a:spcAft>
+              <a:buClr>
+                <a:srgbClr val="7FA3B0"/>
+              </a:buClr>
+              <a:buSzPct val="90000"/>
+              <a:buFont typeface="Arial"/>
+              <a:buChar char="–"/>
+            </a:pPr>
+            <a:r>
+              <a:rPr sz="1250" b="1" i="0">
+                <a:solidFill>
+                  <a:srgbClr val="6B8A95"/>
+                </a:solidFill>
+                <a:latin typeface="Calibri"/>
+              </a:rPr>
+              <a:t>2. Reinterpretation</a:t>
+            </a:r>
+            <a:r>
+              <a:rPr sz="1250" b="0" i="0">
+                <a:solidFill>
+                  <a:srgbClr val="20291F"/>
+                </a:solidFill>
+                <a:latin typeface="Calibri"/>
+              </a:rPr>
+              <a:t> — reimagining it for a different context</a:t>
+            </a:r>
+          </a:p>
+        </p:txBody>
+      </p:sp>
+      <p:sp>
+        <p:nvSpPr>
+          <p:cNvPr id="6" name="Oval 5"/>
+          <p:cNvSpPr/>
+          <p:nvPr/>
+        </p:nvSpPr>
+        <p:spPr>
+          <a:xfrm>
+            <a:off x="5532120" y="3840480"/>
+            <a:ext cx="685800" cy="685800"/>
+          </a:xfrm>
+          <a:prstGeom prst="ellipse">
+            <a:avLst/>
+          </a:prstGeom>
+          <a:solidFill>
+            <a:srgbClr val="C9743D"/>
           </a:solidFill>
           <a:ln>
             <a:noFill/>
@@ -5122,6 +6893,14 @@
 <file path=ppt/slides/slide4.xml><?xml version="1.0" encoding="utf-8"?>
 <p:sld xmlns:a="http://schemas.openxmlformats.org/drawingml/2006/main" xmlns:p="http://schemas.openxmlformats.org/presentationml/2006/main" xmlns:r="http://schemas.openxmlformats.org/officeDocument/2006/relationships">
   <p:cSld>
+    <p:bg>
+      <p:bgPr>
+        <a:solidFill>
+          <a:srgbClr val="F7F5EC"/>
+        </a:solidFill>
+        <a:effectLst/>
+      </p:bgPr>
+    </p:bg>
     <p:spTree>
       <p:nvGrpSpPr>
         <p:cNvPr id="1" name=""/>
@@ -5131,245 +6910,404 @@
       <p:grpSpPr/>
       <p:sp>
         <p:nvSpPr>
-          <p:cNvPr id="2" name="Title 1"/>
-          <p:cNvSpPr>
-            <a:spLocks noGrp="1"/>
-          </p:cNvSpPr>
-          <p:nvPr>
-            <p:ph type="title"/>
-          </p:nvPr>
-        </p:nvSpPr>
-        <p:spPr/>
-        <p:txBody>
-          <a:bodyPr wrap="square"/>
-          <a:lstStyle/>
-          <a:p>
-            <a:r>
-              <a:rPr sz="3200" b="1">
-                <a:solidFill>
-                  <a:srgbClr val="1F4B3F"/>
-                </a:solidFill>
-                <a:latin typeface="Cambria"/>
-              </a:rPr>
-              <a:t>A Framework for Analysis</a:t>
-            </a:r>
-          </a:p>
-        </p:txBody>
-      </p:sp>
-      <p:sp>
-        <p:nvSpPr>
-          <p:cNvPr id="3" name="Content Placeholder 2"/>
-          <p:cNvSpPr>
-            <a:spLocks noGrp="1"/>
-          </p:cNvSpPr>
-          <p:nvPr>
-            <p:ph idx="1" sz="half"/>
-          </p:nvPr>
-        </p:nvSpPr>
-        <p:spPr/>
-        <p:txBody>
-          <a:bodyPr wrap="square"/>
-          <a:lstStyle/>
-          <a:p>
-            <a:pPr>
-              <a:spcAft>
-                <a:spcPts val="1000"/>
-              </a:spcAft>
-            </a:pPr>
-            <a:r>
-              <a:rPr sz="2000" b="0" i="0">
-                <a:solidFill>
-                  <a:srgbClr val="333333"/>
-                </a:solidFill>
-                <a:latin typeface="Calibri"/>
-              </a:rPr>
-              <a:t>A thorough analysis considers more than just appearance — it examines the design's full context of creation and use.</a:t>
-            </a:r>
-          </a:p>
-          <a:p>
-            <a:pPr lvl="1">
-              <a:spcAft>
-                <a:spcPts val="1000"/>
-              </a:spcAft>
-            </a:pPr>
-            <a:r>
-              <a:rPr sz="1800" b="1" i="0">
-                <a:solidFill>
-                  <a:srgbClr val="1F4B3F"/>
-                </a:solidFill>
-                <a:latin typeface="Calibri"/>
-              </a:rPr>
-              <a:t>Purpose &amp; audience</a:t>
-            </a:r>
-            <a:r>
-              <a:rPr sz="1800" b="0" i="0">
-                <a:solidFill>
-                  <a:srgbClr val="333333"/>
-                </a:solidFill>
-                <a:latin typeface="Calibri"/>
-              </a:rPr>
-              <a:t> — who was it made for, and why?</a:t>
-            </a:r>
-          </a:p>
-          <a:p>
-            <a:pPr lvl="1">
-              <a:spcAft>
-                <a:spcPts val="1000"/>
-              </a:spcAft>
-            </a:pPr>
-            <a:r>
-              <a:rPr sz="1800" b="1" i="0">
-                <a:solidFill>
-                  <a:srgbClr val="1F4B3F"/>
-                </a:solidFill>
-                <a:latin typeface="Calibri"/>
-              </a:rPr>
-              <a:t>Elements &amp; principles</a:t>
-            </a:r>
-            <a:r>
-              <a:rPr sz="1800" b="0" i="0">
-                <a:solidFill>
-                  <a:srgbClr val="333333"/>
-                </a:solidFill>
-                <a:latin typeface="Calibri"/>
-              </a:rPr>
-              <a:t> — what visual language is used, and to what effect?</a:t>
-            </a:r>
-          </a:p>
-          <a:p>
-            <a:pPr lvl="1">
-              <a:spcAft>
-                <a:spcPts val="1000"/>
-              </a:spcAft>
-            </a:pPr>
-            <a:r>
-              <a:rPr sz="1800" b="1" i="0">
-                <a:solidFill>
-                  <a:srgbClr val="1F4B3F"/>
-                </a:solidFill>
-                <a:latin typeface="Calibri"/>
-              </a:rPr>
-              <a:t>Materials &amp; methods</a:t>
-            </a:r>
-            <a:r>
-              <a:rPr sz="1800" b="0" i="0">
-                <a:solidFill>
-                  <a:srgbClr val="333333"/>
-                </a:solidFill>
-                <a:latin typeface="Calibri"/>
-              </a:rPr>
-              <a:t> — how was it made or produced?</a:t>
-            </a:r>
-          </a:p>
-          <a:p>
-            <a:pPr lvl="1">
-              <a:spcAft>
-                <a:spcPts val="1000"/>
-              </a:spcAft>
-            </a:pPr>
-            <a:r>
-              <a:rPr sz="1800" b="1" i="0">
-                <a:solidFill>
-                  <a:srgbClr val="1F4B3F"/>
-                </a:solidFill>
-                <a:latin typeface="Calibri"/>
-              </a:rPr>
-              <a:t>Context</a:t>
-            </a:r>
-            <a:r>
-              <a:rPr sz="1800" b="0" i="0">
-                <a:solidFill>
-                  <a:srgbClr val="333333"/>
-                </a:solidFill>
-                <a:latin typeface="Calibri"/>
-              </a:rPr>
-              <a:t> — when/where was it created; what design field and movement does it belong to?</a:t>
-            </a:r>
-          </a:p>
-        </p:txBody>
-      </p:sp>
-      <p:sp>
-        <p:nvSpPr>
-          <p:cNvPr id="4" name="Content Placeholder 3"/>
-          <p:cNvSpPr>
-            <a:spLocks noGrp="1"/>
-          </p:cNvSpPr>
-          <p:nvPr>
-            <p:ph idx="2" sz="half"/>
-          </p:nvPr>
-        </p:nvSpPr>
-        <p:spPr/>
-        <p:txBody>
-          <a:bodyPr wrap="square"/>
-          <a:lstStyle/>
-          <a:p>
-            <a:pPr>
-              <a:spcAft>
-                <a:spcPts val="1000"/>
-              </a:spcAft>
-            </a:pPr>
-            <a:r>
-              <a:rPr sz="2000" b="0" i="0">
-                <a:solidFill>
-                  <a:srgbClr val="333333"/>
-                </a:solidFill>
-                <a:latin typeface="Calibri"/>
-              </a:rPr>
-              <a:t>Exam Tip</a:t>
-            </a:r>
-          </a:p>
-          <a:p>
-            <a:pPr>
-              <a:spcAft>
-                <a:spcPts val="1000"/>
-              </a:spcAft>
-            </a:pPr>
-            <a:r>
-              <a:rPr sz="2000" b="0" i="0">
-                <a:solidFill>
-                  <a:srgbClr val="333333"/>
-                </a:solidFill>
-                <a:latin typeface="Calibri"/>
-              </a:rPr>
-              <a:t>Always support analysis with </a:t>
-            </a:r>
-            <a:r>
-              <a:rPr sz="2000" b="1" i="0">
-                <a:solidFill>
-                  <a:srgbClr val="1F4B3F"/>
-                </a:solidFill>
-                <a:latin typeface="Calibri"/>
-              </a:rPr>
-              <a:t>specific visual evidence</a:t>
-            </a:r>
-            <a:r>
-              <a:rPr sz="2000" b="0" i="0">
-                <a:solidFill>
-                  <a:srgbClr val="333333"/>
-                </a:solidFill>
-                <a:latin typeface="Calibri"/>
-              </a:rPr>
-              <a:t> from the design — not general impressions. Use the Name → Evidence → Effect formula.</a:t>
-            </a:r>
-          </a:p>
-        </p:txBody>
-      </p:sp>
-      <p:sp>
-        <p:nvSpPr>
-          <p:cNvPr id="5" name="Rectangle 4"/>
+          <p:cNvPr id="2" name="Rounded Rectangle 1"/>
           <p:cNvSpPr/>
           <p:nvPr/>
         </p:nvSpPr>
         <p:spPr>
           <a:xfrm>
-            <a:off x="548640" y="1234440"/>
-            <a:ext cx="1463040" cy="38100"/>
+            <a:off x="685800" y="502920"/>
+            <a:ext cx="3291840" cy="457200"/>
+          </a:xfrm>
+          <a:prstGeom prst="roundRect">
+            <a:avLst>
+              <a:gd name="adj" fmla="val 50000"/>
+            </a:avLst>
+          </a:prstGeom>
+          <a:solidFill>
+            <a:srgbClr val="2F5233"/>
+          </a:solidFill>
+          <a:ln>
+            <a:noFill/>
+          </a:ln>
+          <a:effectLst/>
+        </p:spPr>
+        <p:style>
+          <a:lnRef idx="1">
+            <a:schemeClr val="accent1"/>
+          </a:lnRef>
+          <a:fillRef idx="3">
+            <a:schemeClr val="accent1"/>
+          </a:fillRef>
+          <a:effectRef idx="2">
+            <a:schemeClr val="accent1"/>
+          </a:effectRef>
+          <a:fontRef idx="minor">
+            <a:schemeClr val="lt1"/>
+          </a:fontRef>
+        </p:style>
+        <p:txBody>
+          <a:bodyPr rtlCol="0" anchor="ctr" wrap="none" lIns="50800" rIns="50800"/>
+          <a:lstStyle/>
+          <a:p>
+            <a:pPr algn="ctr"/>
+            <a:r>
+              <a:rPr sz="1100" b="1">
+                <a:solidFill>
+                  <a:srgbClr val="FFFFFF"/>
+                </a:solidFill>
+                <a:latin typeface="Calibri"/>
+              </a:rPr>
+              <a:t>ANALYSIS &amp; REINTERPRETATION</a:t>
+            </a:r>
+          </a:p>
+        </p:txBody>
+      </p:sp>
+      <p:sp>
+        <p:nvSpPr>
+          <p:cNvPr id="3" name="TextBox 2"/>
+          <p:cNvSpPr txBox="1"/>
+          <p:nvPr/>
+        </p:nvSpPr>
+        <p:spPr>
+          <a:xfrm>
+            <a:off x="685800" y="1051560"/>
+            <a:ext cx="10607040" cy="822960"/>
           </a:xfrm>
           <a:prstGeom prst="rect">
             <a:avLst/>
           </a:prstGeom>
+          <a:noFill/>
+        </p:spPr>
+        <p:txBody>
+          <a:bodyPr wrap="square" anchor="t">
+            <a:spAutoFit/>
+          </a:bodyPr>
+          <a:lstStyle/>
+          <a:p>
+            <a:pPr algn="l"/>
+            <a:r>
+              <a:rPr sz="2700" b="1" i="0">
+                <a:solidFill>
+                  <a:srgbClr val="20291F"/>
+                </a:solidFill>
+                <a:latin typeface="Cambria"/>
+              </a:rPr>
+              <a:t>A Framework for Analysis</a:t>
+            </a:r>
+          </a:p>
+        </p:txBody>
+      </p:sp>
+      <p:sp>
+        <p:nvSpPr>
+          <p:cNvPr id="4" name="Rounded Rectangle 3"/>
+          <p:cNvSpPr/>
+          <p:nvPr/>
+        </p:nvSpPr>
+        <p:spPr>
+          <a:xfrm>
+            <a:off x="685800" y="1874519"/>
+            <a:ext cx="5166360" cy="4526280"/>
+          </a:xfrm>
+          <a:prstGeom prst="roundRect">
+            <a:avLst>
+              <a:gd name="adj" fmla="val 6000"/>
+            </a:avLst>
+          </a:prstGeom>
           <a:solidFill>
-            <a:srgbClr val="1F4B3F"/>
+            <a:srgbClr val="E6EAE6"/>
+          </a:solidFill>
+          <a:ln>
+            <a:noFill/>
+          </a:ln>
+          <a:effectLst/>
+        </p:spPr>
+        <p:style>
+          <a:lnRef idx="1">
+            <a:schemeClr val="accent1"/>
+          </a:lnRef>
+          <a:fillRef idx="3">
+            <a:schemeClr val="accent1"/>
+          </a:fillRef>
+          <a:effectRef idx="2">
+            <a:schemeClr val="accent1"/>
+          </a:effectRef>
+          <a:fontRef idx="minor">
+            <a:schemeClr val="lt1"/>
+          </a:fontRef>
+        </p:style>
+        <p:txBody>
+          <a:bodyPr rtlCol="0" anchor="ctr" lIns="279400" rIns="279400" tIns="228600" bIns="228600" wrap="square"/>
+          <a:lstStyle/>
+          <a:p>
+            <a:pPr algn="ctr" indent="-203200" marL="203200">
+              <a:spcAft>
+                <a:spcPts val="900"/>
+              </a:spcAft>
+              <a:buClr>
+                <a:srgbClr val="2F5233"/>
+              </a:buClr>
+              <a:buSzPct val="90000"/>
+              <a:buFont typeface="Arial"/>
+              <a:buChar char="●"/>
+            </a:pPr>
+            <a:r>
+              <a:rPr sz="1400" b="0" i="0">
+                <a:solidFill>
+                  <a:srgbClr val="20291F"/>
+                </a:solidFill>
+                <a:latin typeface="Calibri"/>
+              </a:rPr>
+              <a:t>A thorough analysis considers more than just appearance — it examines the design's full context of creation and use.</a:t>
+            </a:r>
+          </a:p>
+          <a:p>
+            <a:pPr indent="-203200" marL="203200">
+              <a:spcAft>
+                <a:spcPts val="900"/>
+              </a:spcAft>
+              <a:buClr>
+                <a:srgbClr val="2F5233"/>
+              </a:buClr>
+              <a:buSzPct val="90000"/>
+              <a:buFont typeface="Arial"/>
+              <a:buChar char="–"/>
+            </a:pPr>
+            <a:r>
+              <a:rPr sz="1250" b="1" i="0">
+                <a:solidFill>
+                  <a:srgbClr val="27452B"/>
+                </a:solidFill>
+                <a:latin typeface="Calibri"/>
+              </a:rPr>
+              <a:t>Purpose &amp; audience</a:t>
+            </a:r>
+            <a:r>
+              <a:rPr sz="1250" b="0" i="0">
+                <a:solidFill>
+                  <a:srgbClr val="20291F"/>
+                </a:solidFill>
+                <a:latin typeface="Calibri"/>
+              </a:rPr>
+              <a:t> — who was it made for, and why?</a:t>
+            </a:r>
+          </a:p>
+          <a:p>
+            <a:pPr indent="-203200" marL="203200">
+              <a:spcAft>
+                <a:spcPts val="900"/>
+              </a:spcAft>
+              <a:buClr>
+                <a:srgbClr val="2F5233"/>
+              </a:buClr>
+              <a:buSzPct val="90000"/>
+              <a:buFont typeface="Arial"/>
+              <a:buChar char="–"/>
+            </a:pPr>
+            <a:r>
+              <a:rPr sz="1250" b="1" i="0">
+                <a:solidFill>
+                  <a:srgbClr val="27452B"/>
+                </a:solidFill>
+                <a:latin typeface="Calibri"/>
+              </a:rPr>
+              <a:t>Elements &amp; principles</a:t>
+            </a:r>
+            <a:r>
+              <a:rPr sz="1250" b="0" i="0">
+                <a:solidFill>
+                  <a:srgbClr val="20291F"/>
+                </a:solidFill>
+                <a:latin typeface="Calibri"/>
+              </a:rPr>
+              <a:t> — what visual language is used, and to what effect?</a:t>
+            </a:r>
+          </a:p>
+          <a:p>
+            <a:pPr indent="-203200" marL="203200">
+              <a:spcAft>
+                <a:spcPts val="900"/>
+              </a:spcAft>
+              <a:buClr>
+                <a:srgbClr val="2F5233"/>
+              </a:buClr>
+              <a:buSzPct val="90000"/>
+              <a:buFont typeface="Arial"/>
+              <a:buChar char="–"/>
+            </a:pPr>
+            <a:r>
+              <a:rPr sz="1250" b="1" i="0">
+                <a:solidFill>
+                  <a:srgbClr val="27452B"/>
+                </a:solidFill>
+                <a:latin typeface="Calibri"/>
+              </a:rPr>
+              <a:t>Materials &amp; methods</a:t>
+            </a:r>
+            <a:r>
+              <a:rPr sz="1250" b="0" i="0">
+                <a:solidFill>
+                  <a:srgbClr val="20291F"/>
+                </a:solidFill>
+                <a:latin typeface="Calibri"/>
+              </a:rPr>
+              <a:t> — how was it made or produced?</a:t>
+            </a:r>
+          </a:p>
+          <a:p>
+            <a:pPr indent="-203200" marL="203200">
+              <a:spcAft>
+                <a:spcPts val="900"/>
+              </a:spcAft>
+              <a:buClr>
+                <a:srgbClr val="2F5233"/>
+              </a:buClr>
+              <a:buSzPct val="90000"/>
+              <a:buFont typeface="Arial"/>
+              <a:buChar char="–"/>
+            </a:pPr>
+            <a:r>
+              <a:rPr sz="1250" b="1" i="0">
+                <a:solidFill>
+                  <a:srgbClr val="27452B"/>
+                </a:solidFill>
+                <a:latin typeface="Calibri"/>
+              </a:rPr>
+              <a:t>Context</a:t>
+            </a:r>
+            <a:r>
+              <a:rPr sz="1250" b="0" i="0">
+                <a:solidFill>
+                  <a:srgbClr val="20291F"/>
+                </a:solidFill>
+                <a:latin typeface="Calibri"/>
+              </a:rPr>
+              <a:t> — when/where was it created; what design field and movement does it belong to?</a:t>
+            </a:r>
+          </a:p>
+        </p:txBody>
+      </p:sp>
+      <p:sp>
+        <p:nvSpPr>
+          <p:cNvPr id="5" name="Rounded Rectangle 4"/>
+          <p:cNvSpPr/>
+          <p:nvPr/>
+        </p:nvSpPr>
+        <p:spPr>
+          <a:xfrm>
+            <a:off x="6080760" y="1874519"/>
+            <a:ext cx="5166360" cy="4526280"/>
+          </a:xfrm>
+          <a:prstGeom prst="roundRect">
+            <a:avLst>
+              <a:gd name="adj" fmla="val 6000"/>
+            </a:avLst>
+          </a:prstGeom>
+          <a:solidFill>
+            <a:srgbClr val="DBE5E8"/>
+          </a:solidFill>
+          <a:ln>
+            <a:noFill/>
+          </a:ln>
+          <a:effectLst/>
+        </p:spPr>
+        <p:style>
+          <a:lnRef idx="1">
+            <a:schemeClr val="accent1"/>
+          </a:lnRef>
+          <a:fillRef idx="3">
+            <a:schemeClr val="accent1"/>
+          </a:fillRef>
+          <a:effectRef idx="2">
+            <a:schemeClr val="accent1"/>
+          </a:effectRef>
+          <a:fontRef idx="minor">
+            <a:schemeClr val="lt1"/>
+          </a:fontRef>
+        </p:style>
+        <p:txBody>
+          <a:bodyPr rtlCol="0" anchor="ctr" lIns="279400" rIns="279400" tIns="228600" bIns="228600" wrap="square"/>
+          <a:lstStyle/>
+          <a:p>
+            <a:pPr algn="ctr" indent="-203200" marL="203200">
+              <a:spcAft>
+                <a:spcPts val="900"/>
+              </a:spcAft>
+              <a:buClr>
+                <a:srgbClr val="7FA3B0"/>
+              </a:buClr>
+              <a:buSzPct val="90000"/>
+              <a:buFont typeface="Arial"/>
+              <a:buChar char="●"/>
+            </a:pPr>
+            <a:r>
+              <a:rPr sz="1400" b="0" i="0">
+                <a:solidFill>
+                  <a:srgbClr val="20291F"/>
+                </a:solidFill>
+                <a:latin typeface="Calibri"/>
+              </a:rPr>
+              <a:t>Exam Tip</a:t>
+            </a:r>
+          </a:p>
+          <a:p>
+            <a:pPr indent="-203200" marL="203200">
+              <a:spcAft>
+                <a:spcPts val="900"/>
+              </a:spcAft>
+              <a:buClr>
+                <a:srgbClr val="7FA3B0"/>
+              </a:buClr>
+              <a:buSzPct val="90000"/>
+              <a:buFont typeface="Arial"/>
+              <a:buChar char="●"/>
+            </a:pPr>
+            <a:r>
+              <a:rPr sz="1400" b="0" i="0">
+                <a:solidFill>
+                  <a:srgbClr val="20291F"/>
+                </a:solidFill>
+                <a:latin typeface="Calibri"/>
+              </a:rPr>
+              <a:t>Always support analysis with </a:t>
+            </a:r>
+            <a:r>
+              <a:rPr sz="1400" b="1" i="0">
+                <a:solidFill>
+                  <a:srgbClr val="6B8A95"/>
+                </a:solidFill>
+                <a:latin typeface="Calibri"/>
+              </a:rPr>
+              <a:t>specific visual evidence</a:t>
+            </a:r>
+            <a:r>
+              <a:rPr sz="1400" b="0" i="0">
+                <a:solidFill>
+                  <a:srgbClr val="20291F"/>
+                </a:solidFill>
+                <a:latin typeface="Calibri"/>
+              </a:rPr>
+              <a:t> from the design — not general impressions. Use the Name → Evidence → Effect formula.</a:t>
+            </a:r>
+          </a:p>
+        </p:txBody>
+      </p:sp>
+      <p:sp>
+        <p:nvSpPr>
+          <p:cNvPr id="6" name="Oval 5"/>
+          <p:cNvSpPr/>
+          <p:nvPr/>
+        </p:nvSpPr>
+        <p:spPr>
+          <a:xfrm>
+            <a:off x="5532120" y="3840480"/>
+            <a:ext cx="685800" cy="685800"/>
+          </a:xfrm>
+          <a:prstGeom prst="ellipse">
+            <a:avLst/>
+          </a:prstGeom>
+          <a:solidFill>
+            <a:srgbClr val="C9743D"/>
           </a:solidFill>
           <a:ln>
             <a:noFill/>
@@ -5409,6 +7347,14 @@
 <file path=ppt/slides/slide5.xml><?xml version="1.0" encoding="utf-8"?>
 <p:sld xmlns:a="http://schemas.openxmlformats.org/drawingml/2006/main" xmlns:p="http://schemas.openxmlformats.org/presentationml/2006/main" xmlns:r="http://schemas.openxmlformats.org/officeDocument/2006/relationships">
   <p:cSld>
+    <p:bg>
+      <p:bgPr>
+        <a:solidFill>
+          <a:srgbClr val="F7F5EC"/>
+        </a:solidFill>
+        <a:effectLst/>
+      </p:bgPr>
+    </p:bg>
     <p:spTree>
       <p:nvGrpSpPr>
         <p:cNvPr id="1" name=""/>
@@ -5418,211 +7364,364 @@
       <p:grpSpPr/>
       <p:sp>
         <p:nvSpPr>
-          <p:cNvPr id="2" name="Title 1"/>
-          <p:cNvSpPr>
-            <a:spLocks noGrp="1"/>
-          </p:cNvSpPr>
-          <p:nvPr>
-            <p:ph type="title"/>
-          </p:nvPr>
-        </p:nvSpPr>
-        <p:spPr/>
-        <p:txBody>
-          <a:bodyPr wrap="square"/>
-          <a:lstStyle/>
-          <a:p>
-            <a:r>
-              <a:rPr sz="3200" b="1">
-                <a:solidFill>
-                  <a:srgbClr val="1F4B3F"/>
-                </a:solidFill>
-                <a:latin typeface="Cambria"/>
-              </a:rPr>
-              <a:t>Reconceptualisation vs Reinvention</a:t>
-            </a:r>
-          </a:p>
-        </p:txBody>
-      </p:sp>
-      <p:sp>
-        <p:nvSpPr>
-          <p:cNvPr id="3" name="Content Placeholder 2"/>
-          <p:cNvSpPr>
-            <a:spLocks noGrp="1"/>
-          </p:cNvSpPr>
-          <p:nvPr>
-            <p:ph idx="1" sz="half"/>
-          </p:nvPr>
-        </p:nvSpPr>
-        <p:spPr/>
-        <p:txBody>
-          <a:bodyPr wrap="square"/>
-          <a:lstStyle/>
-          <a:p>
-            <a:pPr>
-              <a:spcAft>
-                <a:spcPts val="1000"/>
-              </a:spcAft>
-            </a:pPr>
-            <a:r>
-              <a:rPr sz="2000" b="0" i="0">
-                <a:solidFill>
-                  <a:srgbClr val="333333"/>
-                </a:solidFill>
-                <a:latin typeface="Calibri"/>
-              </a:rPr>
-              <a:t>Reconceptualisation</a:t>
-            </a:r>
-          </a:p>
-          <a:p>
-            <a:pPr>
-              <a:spcAft>
-                <a:spcPts val="1000"/>
-              </a:spcAft>
-            </a:pPr>
-            <a:r>
-              <a:rPr sz="2000" b="0" i="0">
-                <a:solidFill>
-                  <a:srgbClr val="333333"/>
-                </a:solidFill>
-                <a:latin typeface="Calibri"/>
-              </a:rPr>
-              <a:t>Changing the design for a </a:t>
-            </a:r>
-            <a:r>
-              <a:rPr sz="2000" b="1" i="0">
-                <a:solidFill>
-                  <a:srgbClr val="1F4B3F"/>
-                </a:solidFill>
-                <a:latin typeface="Calibri"/>
-              </a:rPr>
-              <a:t>new audience, purpose or context</a:t>
-            </a:r>
-            <a:r>
-              <a:rPr sz="2000" b="0" i="0">
-                <a:solidFill>
-                  <a:srgbClr val="333333"/>
-                </a:solidFill>
-                <a:latin typeface="Calibri"/>
-              </a:rPr>
-              <a:t> while keeping its core visual identity recognisable.</a:t>
-            </a:r>
-          </a:p>
-          <a:p>
-            <a:pPr>
-              <a:spcAft>
-                <a:spcPts val="1000"/>
-              </a:spcAft>
-            </a:pPr>
-            <a:r>
-              <a:rPr sz="2000" b="0" i="0">
-                <a:solidFill>
-                  <a:srgbClr val="333333"/>
-                </a:solidFill>
-                <a:latin typeface="Calibri"/>
-              </a:rPr>
-              <a:t>e.g. redesigning a children's brand identity for an adult luxury market</a:t>
-            </a:r>
-          </a:p>
-        </p:txBody>
-      </p:sp>
-      <p:sp>
-        <p:nvSpPr>
-          <p:cNvPr id="4" name="Content Placeholder 3"/>
-          <p:cNvSpPr>
-            <a:spLocks noGrp="1"/>
-          </p:cNvSpPr>
-          <p:nvPr>
-            <p:ph idx="2" sz="half"/>
-          </p:nvPr>
-        </p:nvSpPr>
-        <p:spPr/>
-        <p:txBody>
-          <a:bodyPr wrap="square"/>
-          <a:lstStyle/>
-          <a:p>
-            <a:pPr>
-              <a:spcAft>
-                <a:spcPts val="1000"/>
-              </a:spcAft>
-            </a:pPr>
-            <a:r>
-              <a:rPr sz="2000" b="0" i="0">
-                <a:solidFill>
-                  <a:srgbClr val="333333"/>
-                </a:solidFill>
-                <a:latin typeface="Calibri"/>
-              </a:rPr>
-              <a:t>Reinvention</a:t>
-            </a:r>
-          </a:p>
-          <a:p>
-            <a:pPr>
-              <a:spcAft>
-                <a:spcPts val="1000"/>
-              </a:spcAft>
-            </a:pPr>
-            <a:r>
-              <a:rPr sz="2000" b="0" i="0">
-                <a:solidFill>
-                  <a:srgbClr val="333333"/>
-                </a:solidFill>
-                <a:latin typeface="Calibri"/>
-              </a:rPr>
-              <a:t>A more </a:t>
-            </a:r>
-            <a:r>
-              <a:rPr sz="2000" b="1" i="0">
-                <a:solidFill>
-                  <a:srgbClr val="1F4B3F"/>
-                </a:solidFill>
-                <a:latin typeface="Calibri"/>
-              </a:rPr>
-              <a:t>radical transformation</a:t>
-            </a:r>
-            <a:r>
-              <a:rPr sz="2000" b="0" i="0">
-                <a:solidFill>
-                  <a:srgbClr val="333333"/>
-                </a:solidFill>
-                <a:latin typeface="Calibri"/>
-              </a:rPr>
-              <a:t> — taking the underlying idea or function of a design and expressing it in an entirely new visual form or medium.</a:t>
-            </a:r>
-          </a:p>
-          <a:p>
-            <a:pPr>
-              <a:spcAft>
-                <a:spcPts val="1000"/>
-              </a:spcAft>
-            </a:pPr>
-            <a:r>
-              <a:rPr sz="2000" b="0" i="0">
-                <a:solidFill>
-                  <a:srgbClr val="333333"/>
-                </a:solidFill>
-                <a:latin typeface="Calibri"/>
-              </a:rPr>
-              <a:t>e.g. reinventing a print poster campaign as an interactive app experience</a:t>
-            </a:r>
-          </a:p>
-        </p:txBody>
-      </p:sp>
-      <p:sp>
-        <p:nvSpPr>
-          <p:cNvPr id="5" name="Rectangle 4"/>
+          <p:cNvPr id="2" name="Rounded Rectangle 1"/>
           <p:cNvSpPr/>
           <p:nvPr/>
         </p:nvSpPr>
         <p:spPr>
           <a:xfrm>
-            <a:off x="548640" y="1234440"/>
-            <a:ext cx="1463040" cy="38100"/>
+            <a:off x="685800" y="502920"/>
+            <a:ext cx="3291840" cy="457200"/>
+          </a:xfrm>
+          <a:prstGeom prst="roundRect">
+            <a:avLst>
+              <a:gd name="adj" fmla="val 50000"/>
+            </a:avLst>
+          </a:prstGeom>
+          <a:solidFill>
+            <a:srgbClr val="2F5233"/>
+          </a:solidFill>
+          <a:ln>
+            <a:noFill/>
+          </a:ln>
+          <a:effectLst/>
+        </p:spPr>
+        <p:style>
+          <a:lnRef idx="1">
+            <a:schemeClr val="accent1"/>
+          </a:lnRef>
+          <a:fillRef idx="3">
+            <a:schemeClr val="accent1"/>
+          </a:fillRef>
+          <a:effectRef idx="2">
+            <a:schemeClr val="accent1"/>
+          </a:effectRef>
+          <a:fontRef idx="minor">
+            <a:schemeClr val="lt1"/>
+          </a:fontRef>
+        </p:style>
+        <p:txBody>
+          <a:bodyPr rtlCol="0" anchor="ctr" wrap="none" lIns="50800" rIns="50800"/>
+          <a:lstStyle/>
+          <a:p>
+            <a:pPr algn="ctr"/>
+            <a:r>
+              <a:rPr sz="1100" b="1">
+                <a:solidFill>
+                  <a:srgbClr val="FFFFFF"/>
+                </a:solidFill>
+                <a:latin typeface="Calibri"/>
+              </a:rPr>
+              <a:t>ANALYSIS &amp; REINTERPRETATION</a:t>
+            </a:r>
+          </a:p>
+        </p:txBody>
+      </p:sp>
+      <p:sp>
+        <p:nvSpPr>
+          <p:cNvPr id="3" name="TextBox 2"/>
+          <p:cNvSpPr txBox="1"/>
+          <p:nvPr/>
+        </p:nvSpPr>
+        <p:spPr>
+          <a:xfrm>
+            <a:off x="685800" y="1051560"/>
+            <a:ext cx="10607040" cy="822960"/>
           </a:xfrm>
           <a:prstGeom prst="rect">
             <a:avLst/>
           </a:prstGeom>
+          <a:noFill/>
+        </p:spPr>
+        <p:txBody>
+          <a:bodyPr wrap="square" anchor="t">
+            <a:spAutoFit/>
+          </a:bodyPr>
+          <a:lstStyle/>
+          <a:p>
+            <a:pPr algn="l"/>
+            <a:r>
+              <a:rPr sz="2700" b="1" i="0">
+                <a:solidFill>
+                  <a:srgbClr val="20291F"/>
+                </a:solidFill>
+                <a:latin typeface="Cambria"/>
+              </a:rPr>
+              <a:t>Reconceptualisation vs Reinvention</a:t>
+            </a:r>
+          </a:p>
+        </p:txBody>
+      </p:sp>
+      <p:sp>
+        <p:nvSpPr>
+          <p:cNvPr id="4" name="Rounded Rectangle 3"/>
+          <p:cNvSpPr/>
+          <p:nvPr/>
+        </p:nvSpPr>
+        <p:spPr>
+          <a:xfrm>
+            <a:off x="685800" y="1874519"/>
+            <a:ext cx="5166360" cy="4526280"/>
+          </a:xfrm>
+          <a:prstGeom prst="roundRect">
+            <a:avLst>
+              <a:gd name="adj" fmla="val 6000"/>
+            </a:avLst>
+          </a:prstGeom>
           <a:solidFill>
-            <a:srgbClr val="1F4B3F"/>
+            <a:srgbClr val="E6EAE6"/>
+          </a:solidFill>
+          <a:ln>
+            <a:noFill/>
+          </a:ln>
+          <a:effectLst/>
+        </p:spPr>
+        <p:style>
+          <a:lnRef idx="1">
+            <a:schemeClr val="accent1"/>
+          </a:lnRef>
+          <a:fillRef idx="3">
+            <a:schemeClr val="accent1"/>
+          </a:fillRef>
+          <a:effectRef idx="2">
+            <a:schemeClr val="accent1"/>
+          </a:effectRef>
+          <a:fontRef idx="minor">
+            <a:schemeClr val="lt1"/>
+          </a:fontRef>
+        </p:style>
+        <p:txBody>
+          <a:bodyPr rtlCol="0" anchor="ctr" lIns="279400" rIns="279400" tIns="228600" bIns="228600" wrap="square"/>
+          <a:lstStyle/>
+          <a:p>
+            <a:pPr algn="ctr" indent="-203200" marL="203200">
+              <a:spcAft>
+                <a:spcPts val="900"/>
+              </a:spcAft>
+              <a:buClr>
+                <a:srgbClr val="2F5233"/>
+              </a:buClr>
+              <a:buSzPct val="90000"/>
+              <a:buFont typeface="Arial"/>
+              <a:buChar char="●"/>
+            </a:pPr>
+            <a:r>
+              <a:rPr sz="1400" b="0" i="0">
+                <a:solidFill>
+                  <a:srgbClr val="20291F"/>
+                </a:solidFill>
+                <a:latin typeface="Calibri"/>
+              </a:rPr>
+              <a:t>Reconceptualisation</a:t>
+            </a:r>
+          </a:p>
+          <a:p>
+            <a:pPr indent="-203200" marL="203200">
+              <a:spcAft>
+                <a:spcPts val="900"/>
+              </a:spcAft>
+              <a:buClr>
+                <a:srgbClr val="2F5233"/>
+              </a:buClr>
+              <a:buSzPct val="90000"/>
+              <a:buFont typeface="Arial"/>
+              <a:buChar char="●"/>
+            </a:pPr>
+            <a:r>
+              <a:rPr sz="1400" b="0" i="0">
+                <a:solidFill>
+                  <a:srgbClr val="20291F"/>
+                </a:solidFill>
+                <a:latin typeface="Calibri"/>
+              </a:rPr>
+              <a:t>Changing the design for a </a:t>
+            </a:r>
+            <a:r>
+              <a:rPr sz="1400" b="1" i="0">
+                <a:solidFill>
+                  <a:srgbClr val="27452B"/>
+                </a:solidFill>
+                <a:latin typeface="Calibri"/>
+              </a:rPr>
+              <a:t>new audience, purpose or context</a:t>
+            </a:r>
+            <a:r>
+              <a:rPr sz="1400" b="0" i="0">
+                <a:solidFill>
+                  <a:srgbClr val="20291F"/>
+                </a:solidFill>
+                <a:latin typeface="Calibri"/>
+              </a:rPr>
+              <a:t> while keeping its core visual identity recognisable.</a:t>
+            </a:r>
+          </a:p>
+          <a:p>
+            <a:pPr indent="-203200" marL="203200">
+              <a:spcAft>
+                <a:spcPts val="900"/>
+              </a:spcAft>
+              <a:buClr>
+                <a:srgbClr val="2F5233"/>
+              </a:buClr>
+              <a:buSzPct val="90000"/>
+              <a:buFont typeface="Arial"/>
+              <a:buChar char="●"/>
+            </a:pPr>
+            <a:r>
+              <a:rPr sz="1400" b="0" i="0">
+                <a:solidFill>
+                  <a:srgbClr val="20291F"/>
+                </a:solidFill>
+                <a:latin typeface="Calibri"/>
+              </a:rPr>
+              <a:t>e.g. redesigning a children's brand identity for an adult luxury market</a:t>
+            </a:r>
+          </a:p>
+        </p:txBody>
+      </p:sp>
+      <p:sp>
+        <p:nvSpPr>
+          <p:cNvPr id="5" name="Rounded Rectangle 4"/>
+          <p:cNvSpPr/>
+          <p:nvPr/>
+        </p:nvSpPr>
+        <p:spPr>
+          <a:xfrm>
+            <a:off x="6080760" y="1874519"/>
+            <a:ext cx="5166360" cy="4526280"/>
+          </a:xfrm>
+          <a:prstGeom prst="roundRect">
+            <a:avLst>
+              <a:gd name="adj" fmla="val 6000"/>
+            </a:avLst>
+          </a:prstGeom>
+          <a:solidFill>
+            <a:srgbClr val="DBE5E8"/>
+          </a:solidFill>
+          <a:ln>
+            <a:noFill/>
+          </a:ln>
+          <a:effectLst/>
+        </p:spPr>
+        <p:style>
+          <a:lnRef idx="1">
+            <a:schemeClr val="accent1"/>
+          </a:lnRef>
+          <a:fillRef idx="3">
+            <a:schemeClr val="accent1"/>
+          </a:fillRef>
+          <a:effectRef idx="2">
+            <a:schemeClr val="accent1"/>
+          </a:effectRef>
+          <a:fontRef idx="minor">
+            <a:schemeClr val="lt1"/>
+          </a:fontRef>
+        </p:style>
+        <p:txBody>
+          <a:bodyPr rtlCol="0" anchor="ctr" lIns="279400" rIns="279400" tIns="228600" bIns="228600" wrap="square"/>
+          <a:lstStyle/>
+          <a:p>
+            <a:pPr algn="ctr" indent="-203200" marL="203200">
+              <a:spcAft>
+                <a:spcPts val="900"/>
+              </a:spcAft>
+              <a:buClr>
+                <a:srgbClr val="7FA3B0"/>
+              </a:buClr>
+              <a:buSzPct val="90000"/>
+              <a:buFont typeface="Arial"/>
+              <a:buChar char="●"/>
+            </a:pPr>
+            <a:r>
+              <a:rPr sz="1400" b="0" i="0">
+                <a:solidFill>
+                  <a:srgbClr val="20291F"/>
+                </a:solidFill>
+                <a:latin typeface="Calibri"/>
+              </a:rPr>
+              <a:t>Reinvention</a:t>
+            </a:r>
+          </a:p>
+          <a:p>
+            <a:pPr indent="-203200" marL="203200">
+              <a:spcAft>
+                <a:spcPts val="900"/>
+              </a:spcAft>
+              <a:buClr>
+                <a:srgbClr val="7FA3B0"/>
+              </a:buClr>
+              <a:buSzPct val="90000"/>
+              <a:buFont typeface="Arial"/>
+              <a:buChar char="●"/>
+            </a:pPr>
+            <a:r>
+              <a:rPr sz="1400" b="0" i="0">
+                <a:solidFill>
+                  <a:srgbClr val="20291F"/>
+                </a:solidFill>
+                <a:latin typeface="Calibri"/>
+              </a:rPr>
+              <a:t>A more </a:t>
+            </a:r>
+            <a:r>
+              <a:rPr sz="1400" b="1" i="0">
+                <a:solidFill>
+                  <a:srgbClr val="6B8A95"/>
+                </a:solidFill>
+                <a:latin typeface="Calibri"/>
+              </a:rPr>
+              <a:t>radical transformation</a:t>
+            </a:r>
+            <a:r>
+              <a:rPr sz="1400" b="0" i="0">
+                <a:solidFill>
+                  <a:srgbClr val="20291F"/>
+                </a:solidFill>
+                <a:latin typeface="Calibri"/>
+              </a:rPr>
+              <a:t> — taking the underlying idea or function of a design and expressing it in an entirely new visual form or medium.</a:t>
+            </a:r>
+          </a:p>
+          <a:p>
+            <a:pPr indent="-203200" marL="203200">
+              <a:spcAft>
+                <a:spcPts val="900"/>
+              </a:spcAft>
+              <a:buClr>
+                <a:srgbClr val="7FA3B0"/>
+              </a:buClr>
+              <a:buSzPct val="90000"/>
+              <a:buFont typeface="Arial"/>
+              <a:buChar char="●"/>
+            </a:pPr>
+            <a:r>
+              <a:rPr sz="1400" b="0" i="0">
+                <a:solidFill>
+                  <a:srgbClr val="20291F"/>
+                </a:solidFill>
+                <a:latin typeface="Calibri"/>
+              </a:rPr>
+              <a:t>e.g. reinventing a print poster campaign as an interactive app experience</a:t>
+            </a:r>
+          </a:p>
+        </p:txBody>
+      </p:sp>
+      <p:sp>
+        <p:nvSpPr>
+          <p:cNvPr id="6" name="Oval 5"/>
+          <p:cNvSpPr/>
+          <p:nvPr/>
+        </p:nvSpPr>
+        <p:spPr>
+          <a:xfrm>
+            <a:off x="5532120" y="3840480"/>
+            <a:ext cx="685800" cy="685800"/>
+          </a:xfrm>
+          <a:prstGeom prst="ellipse">
+            <a:avLst/>
+          </a:prstGeom>
+          <a:solidFill>
+            <a:srgbClr val="C9743D"/>
           </a:solidFill>
           <a:ln>
             <a:noFill/>
@@ -5662,6 +7761,14 @@
 <file path=ppt/slides/slide6.xml><?xml version="1.0" encoding="utf-8"?>
 <p:sld xmlns:a="http://schemas.openxmlformats.org/drawingml/2006/main" xmlns:p="http://schemas.openxmlformats.org/presentationml/2006/main" xmlns:r="http://schemas.openxmlformats.org/officeDocument/2006/relationships">
   <p:cSld>
+    <p:bg>
+      <p:bgPr>
+        <a:solidFill>
+          <a:srgbClr val="F7F5EC"/>
+        </a:solidFill>
+        <a:effectLst/>
+      </p:bgPr>
+    </p:bg>
     <p:spTree>
       <p:nvGrpSpPr>
         <p:cNvPr id="1" name=""/>
@@ -5671,216 +7778,22 @@
       <p:grpSpPr/>
       <p:sp>
         <p:nvSpPr>
-          <p:cNvPr id="2" name="Title 1"/>
-          <p:cNvSpPr>
-            <a:spLocks noGrp="1"/>
-          </p:cNvSpPr>
-          <p:nvPr>
-            <p:ph type="title"/>
-          </p:nvPr>
-        </p:nvSpPr>
-        <p:spPr/>
-        <p:txBody>
-          <a:bodyPr wrap="square"/>
-          <a:lstStyle/>
-          <a:p>
-            <a:r>
-              <a:rPr sz="3200" b="1">
-                <a:solidFill>
-                  <a:srgbClr val="1F4B3F"/>
-                </a:solidFill>
-                <a:latin typeface="Cambria"/>
-              </a:rPr>
-              <a:t>Ways to Reinterpret a Design</a:t>
-            </a:r>
-          </a:p>
-        </p:txBody>
-      </p:sp>
-      <p:sp>
-        <p:nvSpPr>
-          <p:cNvPr id="3" name="Content Placeholder 2"/>
-          <p:cNvSpPr>
-            <a:spLocks noGrp="1"/>
-          </p:cNvSpPr>
-          <p:nvPr>
-            <p:ph idx="1"/>
-          </p:nvPr>
-        </p:nvSpPr>
-        <p:spPr/>
-        <p:txBody>
-          <a:bodyPr wrap="square"/>
-          <a:lstStyle/>
-          <a:p>
-            <a:pPr lvl="1">
-              <a:spcAft>
-                <a:spcPts val="1000"/>
-              </a:spcAft>
-            </a:pPr>
-            <a:r>
-              <a:rPr sz="1800" b="0" i="0">
-                <a:solidFill>
-                  <a:srgbClr val="333333"/>
-                </a:solidFill>
-                <a:latin typeface="Calibri"/>
-              </a:rPr>
-              <a:t>Change Audience</a:t>
-            </a:r>
-          </a:p>
-          <a:p>
-            <a:pPr lvl="1">
-              <a:spcAft>
-                <a:spcPts val="1000"/>
-              </a:spcAft>
-            </a:pPr>
-            <a:r>
-              <a:rPr sz="1800" b="0" i="0">
-                <a:solidFill>
-                  <a:srgbClr val="333333"/>
-                </a:solidFill>
-                <a:latin typeface="Calibri"/>
-              </a:rPr>
-              <a:t>Redesign for a different age group, culture, or market segment.</a:t>
-            </a:r>
-          </a:p>
-          <a:p>
-            <a:pPr lvl="1">
-              <a:spcAft>
-                <a:spcPts val="1000"/>
-              </a:spcAft>
-            </a:pPr>
-            <a:r>
-              <a:rPr sz="1800" b="0" i="0">
-                <a:solidFill>
-                  <a:srgbClr val="333333"/>
-                </a:solidFill>
-                <a:latin typeface="Calibri"/>
-              </a:rPr>
-              <a:t>Change Field</a:t>
-            </a:r>
-          </a:p>
-          <a:p>
-            <a:pPr lvl="1">
-              <a:spcAft>
-                <a:spcPts val="1000"/>
-              </a:spcAft>
-            </a:pPr>
-            <a:r>
-              <a:rPr sz="1800" b="0" i="0">
-                <a:solidFill>
-                  <a:srgbClr val="333333"/>
-                </a:solidFill>
-                <a:latin typeface="Calibri"/>
-              </a:rPr>
-              <a:t>Move a concept from one design field to another (e.g. a logo to a spatial installation).</a:t>
-            </a:r>
-          </a:p>
-          <a:p>
-            <a:pPr lvl="1">
-              <a:spcAft>
-                <a:spcPts val="1000"/>
-              </a:spcAft>
-            </a:pPr>
-            <a:r>
-              <a:rPr sz="1800" b="0" i="0">
-                <a:solidFill>
-                  <a:srgbClr val="333333"/>
-                </a:solidFill>
-                <a:latin typeface="Calibri"/>
-              </a:rPr>
-              <a:t>Change Era/Style</a:t>
-            </a:r>
-          </a:p>
-          <a:p>
-            <a:pPr lvl="1">
-              <a:spcAft>
-                <a:spcPts val="1000"/>
-              </a:spcAft>
-            </a:pPr>
-            <a:r>
-              <a:rPr sz="1800" b="0" i="0">
-                <a:solidFill>
-                  <a:srgbClr val="333333"/>
-                </a:solidFill>
-                <a:latin typeface="Calibri"/>
-              </a:rPr>
-              <a:t>Reimagine a historical design using a contemporary visual style, or vice versa.</a:t>
-            </a:r>
-          </a:p>
-          <a:p>
-            <a:pPr lvl="1">
-              <a:spcAft>
-                <a:spcPts val="1000"/>
-              </a:spcAft>
-            </a:pPr>
-            <a:r>
-              <a:rPr sz="1800" b="0" i="0">
-                <a:solidFill>
-                  <a:srgbClr val="333333"/>
-                </a:solidFill>
-                <a:latin typeface="Calibri"/>
-              </a:rPr>
-              <a:t>Change Medium</a:t>
-            </a:r>
-          </a:p>
-          <a:p>
-            <a:pPr lvl="1">
-              <a:spcAft>
-                <a:spcPts val="1000"/>
-              </a:spcAft>
-            </a:pPr>
-            <a:r>
-              <a:rPr sz="1800" b="0" i="0">
-                <a:solidFill>
-                  <a:srgbClr val="333333"/>
-                </a:solidFill>
-                <a:latin typeface="Calibri"/>
-              </a:rPr>
-              <a:t>Translate a static design into digital, interactive or 3D form.</a:t>
-            </a:r>
-          </a:p>
-          <a:p>
-            <a:pPr>
-              <a:spcAft>
-                <a:spcPts val="1000"/>
-              </a:spcAft>
-            </a:pPr>
-            <a:r>
-              <a:rPr sz="1800" b="1" i="1">
-                <a:solidFill>
-                  <a:srgbClr val="1F4B3F"/>
-                </a:solidFill>
-                <a:latin typeface="Calibri"/>
-              </a:rPr>
-              <a:t>Exam vocab:</a:t>
-            </a:r>
-            <a:r>
-              <a:rPr sz="1800" b="0" i="1">
-                <a:solidFill>
-                  <a:srgbClr val="333333"/>
-                </a:solidFill>
-                <a:latin typeface="Calibri"/>
-              </a:rPr>
-              <a:t> reconceptualise, reinvent, reinterpret, contemporary context, target audience shift, visual identity, transform</a:t>
-            </a:r>
-          </a:p>
-        </p:txBody>
-      </p:sp>
-      <p:sp>
-        <p:nvSpPr>
-          <p:cNvPr id="4" name="Rectangle 3"/>
+          <p:cNvPr id="2" name="Rounded Rectangle 1"/>
           <p:cNvSpPr/>
           <p:nvPr/>
         </p:nvSpPr>
         <p:spPr>
           <a:xfrm>
-            <a:off x="548640" y="1234440"/>
-            <a:ext cx="1463040" cy="38100"/>
-          </a:xfrm>
-          <a:prstGeom prst="rect">
-            <a:avLst/>
+            <a:off x="685800" y="502920"/>
+            <a:ext cx="3291840" cy="457200"/>
+          </a:xfrm>
+          <a:prstGeom prst="roundRect">
+            <a:avLst>
+              <a:gd name="adj" fmla="val 50000"/>
+            </a:avLst>
           </a:prstGeom>
           <a:solidFill>
-            <a:srgbClr val="1F4B3F"/>
+            <a:srgbClr val="2F5233"/>
           </a:solidFill>
           <a:ln>
             <a:noFill/>
@@ -5902,10 +7815,387 @@
           </a:fontRef>
         </p:style>
         <p:txBody>
-          <a:bodyPr rtlCol="0" anchor="ctr"/>
+          <a:bodyPr rtlCol="0" anchor="ctr" wrap="none" lIns="50800" rIns="50800"/>
           <a:lstStyle/>
           <a:p>
             <a:pPr algn="ctr"/>
+            <a:r>
+              <a:rPr sz="1100" b="1">
+                <a:solidFill>
+                  <a:srgbClr val="FFFFFF"/>
+                </a:solidFill>
+                <a:latin typeface="Calibri"/>
+              </a:rPr>
+              <a:t>ANALYSIS &amp; REINTERPRETATION</a:t>
+            </a:r>
+          </a:p>
+        </p:txBody>
+      </p:sp>
+      <p:sp>
+        <p:nvSpPr>
+          <p:cNvPr id="3" name="TextBox 2"/>
+          <p:cNvSpPr txBox="1"/>
+          <p:nvPr/>
+        </p:nvSpPr>
+        <p:spPr>
+          <a:xfrm>
+            <a:off x="685800" y="1051560"/>
+            <a:ext cx="10607040" cy="822960"/>
+          </a:xfrm>
+          <a:prstGeom prst="rect">
+            <a:avLst/>
+          </a:prstGeom>
+          <a:noFill/>
+        </p:spPr>
+        <p:txBody>
+          <a:bodyPr wrap="square" anchor="t">
+            <a:spAutoFit/>
+          </a:bodyPr>
+          <a:lstStyle/>
+          <a:p>
+            <a:pPr algn="l"/>
+            <a:r>
+              <a:rPr sz="2700" b="1" i="0">
+                <a:solidFill>
+                  <a:srgbClr val="20291F"/>
+                </a:solidFill>
+                <a:latin typeface="Cambria"/>
+              </a:rPr>
+              <a:t>Ways to Reinterpret a Design</a:t>
+            </a:r>
+          </a:p>
+        </p:txBody>
+      </p:sp>
+      <p:sp>
+        <p:nvSpPr>
+          <p:cNvPr id="4" name="Rounded Rectangle 3"/>
+          <p:cNvSpPr/>
+          <p:nvPr/>
+        </p:nvSpPr>
+        <p:spPr>
+          <a:xfrm>
+            <a:off x="685800" y="1874519"/>
+            <a:ext cx="2500884" cy="1554480"/>
+          </a:xfrm>
+          <a:prstGeom prst="roundRect">
+            <a:avLst>
+              <a:gd name="adj" fmla="val 12000"/>
+            </a:avLst>
+          </a:prstGeom>
+          <a:solidFill>
+            <a:srgbClr val="DFE5E0"/>
+          </a:solidFill>
+          <a:ln>
+            <a:noFill/>
+          </a:ln>
+          <a:effectLst/>
+        </p:spPr>
+        <p:style>
+          <a:lnRef idx="1">
+            <a:schemeClr val="accent1"/>
+          </a:lnRef>
+          <a:fillRef idx="3">
+            <a:schemeClr val="accent1"/>
+          </a:fillRef>
+          <a:effectRef idx="2">
+            <a:schemeClr val="accent1"/>
+          </a:effectRef>
+          <a:fontRef idx="minor">
+            <a:schemeClr val="lt1"/>
+          </a:fontRef>
+        </p:style>
+        <p:txBody>
+          <a:bodyPr rtlCol="0" anchor="ctr" wrap="square" lIns="127000" rIns="127000" tIns="101600" bIns="101600"/>
+          <a:lstStyle/>
+          <a:p>
+            <a:pPr algn="ctr"/>
+            <a:r>
+              <a:rPr b="1" sz="1300">
+                <a:solidFill>
+                  <a:srgbClr val="254128"/>
+                </a:solidFill>
+                <a:latin typeface="Calibri"/>
+              </a:rPr>
+              <a:t>Change Audience</a:t>
+            </a:r>
+          </a:p>
+          <a:p>
+            <a:r>
+              <a:rPr sz="1050">
+                <a:solidFill>
+                  <a:srgbClr val="20291F"/>
+                </a:solidFill>
+                <a:latin typeface="Calibri"/>
+              </a:rPr>
+              <a:t>Redesign for a different age group, culture, or market segment.</a:t>
+            </a:r>
+          </a:p>
+        </p:txBody>
+      </p:sp>
+      <p:sp>
+        <p:nvSpPr>
+          <p:cNvPr id="5" name="Rounded Rectangle 4"/>
+          <p:cNvSpPr/>
+          <p:nvPr/>
+        </p:nvSpPr>
+        <p:spPr>
+          <a:xfrm>
+            <a:off x="3387852" y="1874519"/>
+            <a:ext cx="2500884" cy="1554480"/>
+          </a:xfrm>
+          <a:prstGeom prst="roundRect">
+            <a:avLst>
+              <a:gd name="adj" fmla="val 12000"/>
+            </a:avLst>
+          </a:prstGeom>
+          <a:solidFill>
+            <a:srgbClr val="F6EAE1"/>
+          </a:solidFill>
+          <a:ln>
+            <a:noFill/>
+          </a:ln>
+          <a:effectLst/>
+        </p:spPr>
+        <p:style>
+          <a:lnRef idx="1">
+            <a:schemeClr val="accent1"/>
+          </a:lnRef>
+          <a:fillRef idx="3">
+            <a:schemeClr val="accent1"/>
+          </a:fillRef>
+          <a:effectRef idx="2">
+            <a:schemeClr val="accent1"/>
+          </a:effectRef>
+          <a:fontRef idx="minor">
+            <a:schemeClr val="lt1"/>
+          </a:fontRef>
+        </p:style>
+        <p:txBody>
+          <a:bodyPr rtlCol="0" anchor="ctr" wrap="square" lIns="127000" rIns="127000" tIns="101600" bIns="101600"/>
+          <a:lstStyle/>
+          <a:p>
+            <a:pPr algn="ctr"/>
+            <a:r>
+              <a:rPr b="1" sz="1300">
+                <a:solidFill>
+                  <a:srgbClr val="A05C30"/>
+                </a:solidFill>
+                <a:latin typeface="Calibri"/>
+              </a:rPr>
+              <a:t>Change Field</a:t>
+            </a:r>
+          </a:p>
+          <a:p>
+            <a:r>
+              <a:rPr sz="1050">
+                <a:solidFill>
+                  <a:srgbClr val="20291F"/>
+                </a:solidFill>
+                <a:latin typeface="Calibri"/>
+              </a:rPr>
+              <a:t>Move a concept from one design field to another (e.g. a logo to a spatial installation).</a:t>
+            </a:r>
+          </a:p>
+        </p:txBody>
+      </p:sp>
+      <p:sp>
+        <p:nvSpPr>
+          <p:cNvPr id="6" name="Rounded Rectangle 5"/>
+          <p:cNvSpPr/>
+          <p:nvPr/>
+        </p:nvSpPr>
+        <p:spPr>
+          <a:xfrm>
+            <a:off x="6089904" y="1874519"/>
+            <a:ext cx="2500884" cy="1554480"/>
+          </a:xfrm>
+          <a:prstGeom prst="roundRect">
+            <a:avLst>
+              <a:gd name="adj" fmla="val 12000"/>
+            </a:avLst>
+          </a:prstGeom>
+          <a:solidFill>
+            <a:srgbClr val="EBF1F3"/>
+          </a:solidFill>
+          <a:ln>
+            <a:noFill/>
+          </a:ln>
+          <a:effectLst/>
+        </p:spPr>
+        <p:style>
+          <a:lnRef idx="1">
+            <a:schemeClr val="accent1"/>
+          </a:lnRef>
+          <a:fillRef idx="3">
+            <a:schemeClr val="accent1"/>
+          </a:fillRef>
+          <a:effectRef idx="2">
+            <a:schemeClr val="accent1"/>
+          </a:effectRef>
+          <a:fontRef idx="minor">
+            <a:schemeClr val="lt1"/>
+          </a:fontRef>
+        </p:style>
+        <p:txBody>
+          <a:bodyPr rtlCol="0" anchor="ctr" wrap="square" lIns="127000" rIns="127000" tIns="101600" bIns="101600"/>
+          <a:lstStyle/>
+          <a:p>
+            <a:pPr algn="ctr"/>
+            <a:r>
+              <a:rPr b="1" sz="1300">
+                <a:solidFill>
+                  <a:srgbClr val="65828C"/>
+                </a:solidFill>
+                <a:latin typeface="Calibri"/>
+              </a:rPr>
+              <a:t>Change Era/Style</a:t>
+            </a:r>
+          </a:p>
+          <a:p>
+            <a:r>
+              <a:rPr sz="1050">
+                <a:solidFill>
+                  <a:srgbClr val="20291F"/>
+                </a:solidFill>
+                <a:latin typeface="Calibri"/>
+              </a:rPr>
+              <a:t>Reimagine a historical design using a contemporary visual style, or vice versa.</a:t>
+            </a:r>
+          </a:p>
+        </p:txBody>
+      </p:sp>
+      <p:sp>
+        <p:nvSpPr>
+          <p:cNvPr id="7" name="Rounded Rectangle 6"/>
+          <p:cNvSpPr/>
+          <p:nvPr/>
+        </p:nvSpPr>
+        <p:spPr>
+          <a:xfrm>
+            <a:off x="8791956" y="1874519"/>
+            <a:ext cx="2500884" cy="1554480"/>
+          </a:xfrm>
+          <a:prstGeom prst="roundRect">
+            <a:avLst>
+              <a:gd name="adj" fmla="val 12000"/>
+            </a:avLst>
+          </a:prstGeom>
+          <a:solidFill>
+            <a:srgbClr val="DFE5E0"/>
+          </a:solidFill>
+          <a:ln>
+            <a:noFill/>
+          </a:ln>
+          <a:effectLst/>
+        </p:spPr>
+        <p:style>
+          <a:lnRef idx="1">
+            <a:schemeClr val="accent1"/>
+          </a:lnRef>
+          <a:fillRef idx="3">
+            <a:schemeClr val="accent1"/>
+          </a:fillRef>
+          <a:effectRef idx="2">
+            <a:schemeClr val="accent1"/>
+          </a:effectRef>
+          <a:fontRef idx="minor">
+            <a:schemeClr val="lt1"/>
+          </a:fontRef>
+        </p:style>
+        <p:txBody>
+          <a:bodyPr rtlCol="0" anchor="ctr" wrap="square" lIns="127000" rIns="127000" tIns="101600" bIns="101600"/>
+          <a:lstStyle/>
+          <a:p>
+            <a:pPr algn="ctr"/>
+            <a:r>
+              <a:rPr b="1" sz="1300">
+                <a:solidFill>
+                  <a:srgbClr val="254128"/>
+                </a:solidFill>
+                <a:latin typeface="Calibri"/>
+              </a:rPr>
+              <a:t>Change Medium</a:t>
+            </a:r>
+          </a:p>
+          <a:p>
+            <a:r>
+              <a:rPr sz="1050">
+                <a:solidFill>
+                  <a:srgbClr val="20291F"/>
+                </a:solidFill>
+                <a:latin typeface="Calibri"/>
+              </a:rPr>
+              <a:t>Translate a static design into digital, interactive or 3D form.</a:t>
+            </a:r>
+          </a:p>
+        </p:txBody>
+      </p:sp>
+      <p:sp>
+        <p:nvSpPr>
+          <p:cNvPr id="8" name="Rounded Rectangle 7"/>
+          <p:cNvSpPr/>
+          <p:nvPr/>
+        </p:nvSpPr>
+        <p:spPr>
+          <a:xfrm>
+            <a:off x="685800" y="3675887"/>
+            <a:ext cx="10607040" cy="2862073"/>
+          </a:xfrm>
+          <a:prstGeom prst="roundRect">
+            <a:avLst>
+              <a:gd name="adj" fmla="val 10000"/>
+            </a:avLst>
+          </a:prstGeom>
+          <a:solidFill>
+            <a:srgbClr val="F6EAE1"/>
+          </a:solidFill>
+          <a:ln>
+            <a:noFill/>
+          </a:ln>
+          <a:effectLst/>
+        </p:spPr>
+        <p:style>
+          <a:lnRef idx="1">
+            <a:schemeClr val="accent1"/>
+          </a:lnRef>
+          <a:fillRef idx="3">
+            <a:schemeClr val="accent1"/>
+          </a:fillRef>
+          <a:effectRef idx="2">
+            <a:schemeClr val="accent1"/>
+          </a:effectRef>
+          <a:fontRef idx="minor">
+            <a:schemeClr val="lt1"/>
+          </a:fontRef>
+        </p:style>
+        <p:txBody>
+          <a:bodyPr rtlCol="0" anchor="ctr" lIns="203200" rIns="203200" tIns="101600" bIns="101600" wrap="square"/>
+          <a:lstStyle/>
+          <a:p>
+            <a:pPr algn="ctr">
+              <a:spcAft>
+                <a:spcPts val="900"/>
+              </a:spcAft>
+              <a:buNone/>
+            </a:pPr>
+            <a:r>
+              <a:rPr sz="1050" b="1" i="1">
+                <a:solidFill>
+                  <a:srgbClr val="AA6233"/>
+                </a:solidFill>
+                <a:latin typeface="Calibri"/>
+              </a:rPr>
+              <a:t>Exam vocab:</a:t>
+            </a:r>
+            <a:r>
+              <a:rPr sz="1050" b="0" i="1">
+                <a:solidFill>
+                  <a:srgbClr val="20291F"/>
+                </a:solidFill>
+                <a:latin typeface="Calibri"/>
+              </a:rPr>
+              <a:t> reconceptualise, reinvent, reinterpret, contemporary context, target audience shift, visual identity, transform</a:t>
+            </a:r>
           </a:p>
         </p:txBody>
       </p:sp>
@@ -5920,6 +8210,14 @@
 <file path=ppt/slides/slide7.xml><?xml version="1.0" encoding="utf-8"?>
 <p:sld xmlns:a="http://schemas.openxmlformats.org/drawingml/2006/main" xmlns:p="http://schemas.openxmlformats.org/presentationml/2006/main" xmlns:r="http://schemas.openxmlformats.org/officeDocument/2006/relationships">
   <p:cSld>
+    <p:bg>
+      <p:bgPr>
+        <a:solidFill>
+          <a:srgbClr val="F7F5EC"/>
+        </a:solidFill>
+        <a:effectLst/>
+      </p:bgPr>
+    </p:bg>
     <p:spTree>
       <p:nvGrpSpPr>
         <p:cNvPr id="1" name=""/>
@@ -5929,223 +8227,389 @@
       <p:grpSpPr/>
       <p:sp>
         <p:nvSpPr>
-          <p:cNvPr id="2" name="Title 1"/>
-          <p:cNvSpPr>
-            <a:spLocks noGrp="1"/>
-          </p:cNvSpPr>
-          <p:nvPr>
-            <p:ph type="title"/>
-          </p:nvPr>
-        </p:nvSpPr>
-        <p:spPr/>
-        <p:txBody>
-          <a:bodyPr wrap="square"/>
-          <a:lstStyle/>
-          <a:p>
-            <a:r>
-              <a:rPr sz="3200" b="1">
-                <a:solidFill>
-                  <a:srgbClr val="1F4B3F"/>
-                </a:solidFill>
-                <a:latin typeface="Cambria"/>
-              </a:rPr>
-              <a:t>Answering Analysis Questions</a:t>
-            </a:r>
-          </a:p>
-        </p:txBody>
-      </p:sp>
-      <p:sp>
-        <p:nvSpPr>
-          <p:cNvPr id="3" name="Content Placeholder 2"/>
-          <p:cNvSpPr>
-            <a:spLocks noGrp="1"/>
-          </p:cNvSpPr>
-          <p:nvPr>
-            <p:ph idx="1" sz="half"/>
-          </p:nvPr>
-        </p:nvSpPr>
-        <p:spPr/>
-        <p:txBody>
-          <a:bodyPr wrap="square"/>
-          <a:lstStyle/>
-          <a:p>
-            <a:pPr lvl="1">
-              <a:spcAft>
-                <a:spcPts val="1000"/>
-              </a:spcAft>
-            </a:pPr>
-            <a:r>
-              <a:rPr sz="1800" b="0" i="0">
-                <a:solidFill>
-                  <a:srgbClr val="333333"/>
-                </a:solidFill>
-                <a:latin typeface="Calibri"/>
-              </a:rPr>
-              <a:t>Feature → Evidence → Effect → Context</a:t>
-            </a:r>
-          </a:p>
-          <a:p>
-            <a:pPr lvl="1">
-              <a:spcAft>
-                <a:spcPts val="1000"/>
-              </a:spcAft>
-            </a:pPr>
-            <a:r>
-              <a:rPr sz="1800" b="0" i="0">
-                <a:solidFill>
-                  <a:srgbClr val="333333"/>
-                </a:solidFill>
-                <a:latin typeface="Calibri"/>
-              </a:rPr>
-              <a:t>1. Name a visual feature (element/principle)</a:t>
-            </a:r>
-          </a:p>
-          <a:p>
-            <a:pPr lvl="1">
-              <a:spcAft>
-                <a:spcPts val="1000"/>
-              </a:spcAft>
-            </a:pPr>
-            <a:r>
-              <a:rPr sz="1800" b="0" i="0">
-                <a:solidFill>
-                  <a:srgbClr val="333333"/>
-                </a:solidFill>
-                <a:latin typeface="Calibri"/>
-              </a:rPr>
-              <a:t>2. Describe specific evidence in the design</a:t>
-            </a:r>
-          </a:p>
-          <a:p>
-            <a:pPr lvl="1">
-              <a:spcAft>
-                <a:spcPts val="1000"/>
-              </a:spcAft>
-            </a:pPr>
-            <a:r>
-              <a:rPr sz="1800" b="0" i="0">
-                <a:solidFill>
-                  <a:srgbClr val="333333"/>
-                </a:solidFill>
-                <a:latin typeface="Calibri"/>
-              </a:rPr>
-              <a:t>3. Explain the effect on the audience</a:t>
-            </a:r>
-          </a:p>
-          <a:p>
-            <a:pPr lvl="1">
-              <a:spcAft>
-                <a:spcPts val="1000"/>
-              </a:spcAft>
-            </a:pPr>
-            <a:r>
-              <a:rPr sz="1800" b="0" i="0">
-                <a:solidFill>
-                  <a:srgbClr val="333333"/>
-                </a:solidFill>
-                <a:latin typeface="Calibri"/>
-              </a:rPr>
-              <a:t>4. Link to the design's context or purpose</a:t>
-            </a:r>
-          </a:p>
-        </p:txBody>
-      </p:sp>
-      <p:sp>
-        <p:nvSpPr>
-          <p:cNvPr id="4" name="Content Placeholder 3"/>
-          <p:cNvSpPr>
-            <a:spLocks noGrp="1"/>
-          </p:cNvSpPr>
-          <p:nvPr>
-            <p:ph idx="2" sz="half"/>
-          </p:nvPr>
-        </p:nvSpPr>
-        <p:spPr/>
-        <p:txBody>
-          <a:bodyPr wrap="square"/>
-          <a:lstStyle/>
-          <a:p>
-            <a:pPr>
-              <a:spcAft>
-                <a:spcPts val="1000"/>
-              </a:spcAft>
-            </a:pPr>
-            <a:r>
-              <a:rPr sz="1800" b="0" i="1">
-                <a:solidFill>
-                  <a:srgbClr val="333333"/>
-                </a:solidFill>
-                <a:latin typeface="Calibri"/>
-              </a:rPr>
-              <a:t>Sentence Starters</a:t>
-            </a:r>
-          </a:p>
-          <a:p>
-            <a:pPr lvl="1">
-              <a:spcAft>
-                <a:spcPts val="1000"/>
-              </a:spcAft>
-            </a:pPr>
-            <a:r>
-              <a:rPr sz="1800" b="0" i="0">
-                <a:solidFill>
-                  <a:srgbClr val="333333"/>
-                </a:solidFill>
-                <a:latin typeface="Calibri"/>
-              </a:rPr>
-              <a:t>"The original design uses [element/principle] to..."</a:t>
-            </a:r>
-          </a:p>
-          <a:p>
-            <a:pPr lvl="1">
-              <a:spcAft>
-                <a:spcPts val="1000"/>
-              </a:spcAft>
-            </a:pPr>
-            <a:r>
-              <a:rPr sz="1800" b="0" i="0">
-                <a:solidFill>
-                  <a:srgbClr val="333333"/>
-                </a:solidFill>
-                <a:latin typeface="Calibri"/>
-              </a:rPr>
-              <a:t>"If reconceptualised for [new audience], this could..."</a:t>
-            </a:r>
-          </a:p>
-          <a:p>
-            <a:pPr lvl="1">
-              <a:spcAft>
-                <a:spcPts val="1000"/>
-              </a:spcAft>
-            </a:pPr>
-            <a:r>
-              <a:rPr sz="1800" b="0" i="0">
-                <a:solidFill>
-                  <a:srgbClr val="333333"/>
-                </a:solidFill>
-                <a:latin typeface="Calibri"/>
-              </a:rPr>
-              <a:t>"Reinventing this in [new field/medium] would require..."</a:t>
-            </a:r>
-          </a:p>
-        </p:txBody>
-      </p:sp>
-      <p:sp>
-        <p:nvSpPr>
-          <p:cNvPr id="5" name="Rectangle 4"/>
+          <p:cNvPr id="2" name="Rounded Rectangle 1"/>
           <p:cNvSpPr/>
           <p:nvPr/>
         </p:nvSpPr>
         <p:spPr>
           <a:xfrm>
-            <a:off x="548640" y="1234440"/>
-            <a:ext cx="1463040" cy="38100"/>
+            <a:off x="685800" y="502920"/>
+            <a:ext cx="3291840" cy="457200"/>
+          </a:xfrm>
+          <a:prstGeom prst="roundRect">
+            <a:avLst>
+              <a:gd name="adj" fmla="val 50000"/>
+            </a:avLst>
+          </a:prstGeom>
+          <a:solidFill>
+            <a:srgbClr val="2F5233"/>
+          </a:solidFill>
+          <a:ln>
+            <a:noFill/>
+          </a:ln>
+          <a:effectLst/>
+        </p:spPr>
+        <p:style>
+          <a:lnRef idx="1">
+            <a:schemeClr val="accent1"/>
+          </a:lnRef>
+          <a:fillRef idx="3">
+            <a:schemeClr val="accent1"/>
+          </a:fillRef>
+          <a:effectRef idx="2">
+            <a:schemeClr val="accent1"/>
+          </a:effectRef>
+          <a:fontRef idx="minor">
+            <a:schemeClr val="lt1"/>
+          </a:fontRef>
+        </p:style>
+        <p:txBody>
+          <a:bodyPr rtlCol="0" anchor="ctr" wrap="none" lIns="50800" rIns="50800"/>
+          <a:lstStyle/>
+          <a:p>
+            <a:pPr algn="ctr"/>
+            <a:r>
+              <a:rPr sz="1100" b="1">
+                <a:solidFill>
+                  <a:srgbClr val="FFFFFF"/>
+                </a:solidFill>
+                <a:latin typeface="Calibri"/>
+              </a:rPr>
+              <a:t>ANALYSIS &amp; REINTERPRETATION</a:t>
+            </a:r>
+          </a:p>
+        </p:txBody>
+      </p:sp>
+      <p:sp>
+        <p:nvSpPr>
+          <p:cNvPr id="3" name="TextBox 2"/>
+          <p:cNvSpPr txBox="1"/>
+          <p:nvPr/>
+        </p:nvSpPr>
+        <p:spPr>
+          <a:xfrm>
+            <a:off x="685800" y="1051560"/>
+            <a:ext cx="10607040" cy="822960"/>
           </a:xfrm>
           <a:prstGeom prst="rect">
             <a:avLst/>
           </a:prstGeom>
+          <a:noFill/>
+        </p:spPr>
+        <p:txBody>
+          <a:bodyPr wrap="square" anchor="t">
+            <a:spAutoFit/>
+          </a:bodyPr>
+          <a:lstStyle/>
+          <a:p>
+            <a:pPr algn="l"/>
+            <a:r>
+              <a:rPr sz="2700" b="1" i="0">
+                <a:solidFill>
+                  <a:srgbClr val="20291F"/>
+                </a:solidFill>
+                <a:latin typeface="Cambria"/>
+              </a:rPr>
+              <a:t>Answering Analysis Questions</a:t>
+            </a:r>
+          </a:p>
+        </p:txBody>
+      </p:sp>
+      <p:sp>
+        <p:nvSpPr>
+          <p:cNvPr id="4" name="Rounded Rectangle 3"/>
+          <p:cNvSpPr/>
+          <p:nvPr/>
+        </p:nvSpPr>
+        <p:spPr>
+          <a:xfrm>
+            <a:off x="685800" y="1874519"/>
+            <a:ext cx="5166360" cy="4526280"/>
+          </a:xfrm>
+          <a:prstGeom prst="roundRect">
+            <a:avLst>
+              <a:gd name="adj" fmla="val 6000"/>
+            </a:avLst>
+          </a:prstGeom>
           <a:solidFill>
-            <a:srgbClr val="1F4B3F"/>
+            <a:srgbClr val="E6EAE6"/>
+          </a:solidFill>
+          <a:ln>
+            <a:noFill/>
+          </a:ln>
+          <a:effectLst/>
+        </p:spPr>
+        <p:style>
+          <a:lnRef idx="1">
+            <a:schemeClr val="accent1"/>
+          </a:lnRef>
+          <a:fillRef idx="3">
+            <a:schemeClr val="accent1"/>
+          </a:fillRef>
+          <a:effectRef idx="2">
+            <a:schemeClr val="accent1"/>
+          </a:effectRef>
+          <a:fontRef idx="minor">
+            <a:schemeClr val="lt1"/>
+          </a:fontRef>
+        </p:style>
+        <p:txBody>
+          <a:bodyPr rtlCol="0" anchor="ctr" lIns="279400" rIns="279400" tIns="228600" bIns="228600" wrap="square"/>
+          <a:lstStyle/>
+          <a:p>
+            <a:pPr algn="ctr" indent="-203200" marL="203200">
+              <a:spcAft>
+                <a:spcPts val="900"/>
+              </a:spcAft>
+              <a:buClr>
+                <a:srgbClr val="2F5233"/>
+              </a:buClr>
+              <a:buSzPct val="90000"/>
+              <a:buFont typeface="Arial"/>
+              <a:buChar char="–"/>
+            </a:pPr>
+            <a:r>
+              <a:rPr sz="1250" b="0" i="0">
+                <a:solidFill>
+                  <a:srgbClr val="20291F"/>
+                </a:solidFill>
+                <a:latin typeface="Calibri"/>
+              </a:rPr>
+              <a:t>Feature → Evidence → Effect → Context</a:t>
+            </a:r>
+          </a:p>
+          <a:p>
+            <a:pPr indent="-203200" marL="203200">
+              <a:spcAft>
+                <a:spcPts val="900"/>
+              </a:spcAft>
+              <a:buClr>
+                <a:srgbClr val="2F5233"/>
+              </a:buClr>
+              <a:buSzPct val="90000"/>
+              <a:buFont typeface="Arial"/>
+              <a:buChar char="–"/>
+            </a:pPr>
+            <a:r>
+              <a:rPr sz="1250" b="0" i="0">
+                <a:solidFill>
+                  <a:srgbClr val="20291F"/>
+                </a:solidFill>
+                <a:latin typeface="Calibri"/>
+              </a:rPr>
+              <a:t>1. Name a visual feature (element/principle)</a:t>
+            </a:r>
+          </a:p>
+          <a:p>
+            <a:pPr indent="-203200" marL="203200">
+              <a:spcAft>
+                <a:spcPts val="900"/>
+              </a:spcAft>
+              <a:buClr>
+                <a:srgbClr val="2F5233"/>
+              </a:buClr>
+              <a:buSzPct val="90000"/>
+              <a:buFont typeface="Arial"/>
+              <a:buChar char="–"/>
+            </a:pPr>
+            <a:r>
+              <a:rPr sz="1250" b="0" i="0">
+                <a:solidFill>
+                  <a:srgbClr val="20291F"/>
+                </a:solidFill>
+                <a:latin typeface="Calibri"/>
+              </a:rPr>
+              <a:t>2. Describe specific evidence in the design</a:t>
+            </a:r>
+          </a:p>
+          <a:p>
+            <a:pPr indent="-203200" marL="203200">
+              <a:spcAft>
+                <a:spcPts val="900"/>
+              </a:spcAft>
+              <a:buClr>
+                <a:srgbClr val="2F5233"/>
+              </a:buClr>
+              <a:buSzPct val="90000"/>
+              <a:buFont typeface="Arial"/>
+              <a:buChar char="–"/>
+            </a:pPr>
+            <a:r>
+              <a:rPr sz="1250" b="0" i="0">
+                <a:solidFill>
+                  <a:srgbClr val="20291F"/>
+                </a:solidFill>
+                <a:latin typeface="Calibri"/>
+              </a:rPr>
+              <a:t>3. Explain the effect on the audience</a:t>
+            </a:r>
+          </a:p>
+          <a:p>
+            <a:pPr indent="-203200" marL="203200">
+              <a:spcAft>
+                <a:spcPts val="900"/>
+              </a:spcAft>
+              <a:buClr>
+                <a:srgbClr val="2F5233"/>
+              </a:buClr>
+              <a:buSzPct val="90000"/>
+              <a:buFont typeface="Arial"/>
+              <a:buChar char="–"/>
+            </a:pPr>
+            <a:r>
+              <a:rPr sz="1250" b="0" i="0">
+                <a:solidFill>
+                  <a:srgbClr val="20291F"/>
+                </a:solidFill>
+                <a:latin typeface="Calibri"/>
+              </a:rPr>
+              <a:t>4. Link to the design's context or purpose</a:t>
+            </a:r>
+          </a:p>
+        </p:txBody>
+      </p:sp>
+      <p:sp>
+        <p:nvSpPr>
+          <p:cNvPr id="5" name="Rounded Rectangle 4"/>
+          <p:cNvSpPr/>
+          <p:nvPr/>
+        </p:nvSpPr>
+        <p:spPr>
+          <a:xfrm>
+            <a:off x="6080760" y="1874519"/>
+            <a:ext cx="5166360" cy="4526280"/>
+          </a:xfrm>
+          <a:prstGeom prst="roundRect">
+            <a:avLst>
+              <a:gd name="adj" fmla="val 6000"/>
+            </a:avLst>
+          </a:prstGeom>
+          <a:solidFill>
+            <a:srgbClr val="DBE5E8"/>
+          </a:solidFill>
+          <a:ln>
+            <a:noFill/>
+          </a:ln>
+          <a:effectLst/>
+        </p:spPr>
+        <p:style>
+          <a:lnRef idx="1">
+            <a:schemeClr val="accent1"/>
+          </a:lnRef>
+          <a:fillRef idx="3">
+            <a:schemeClr val="accent1"/>
+          </a:fillRef>
+          <a:effectRef idx="2">
+            <a:schemeClr val="accent1"/>
+          </a:effectRef>
+          <a:fontRef idx="minor">
+            <a:schemeClr val="lt1"/>
+          </a:fontRef>
+        </p:style>
+        <p:txBody>
+          <a:bodyPr rtlCol="0" anchor="ctr" lIns="279400" rIns="279400" tIns="228600" bIns="228600" wrap="square"/>
+          <a:lstStyle/>
+          <a:p>
+            <a:pPr algn="ctr">
+              <a:spcAft>
+                <a:spcPts val="900"/>
+              </a:spcAft>
+              <a:buNone/>
+            </a:pPr>
+            <a:r>
+              <a:rPr sz="1250" b="0" i="1">
+                <a:solidFill>
+                  <a:srgbClr val="20291F"/>
+                </a:solidFill>
+                <a:latin typeface="Calibri"/>
+              </a:rPr>
+              <a:t>Sentence Starters</a:t>
+            </a:r>
+          </a:p>
+          <a:p>
+            <a:pPr indent="-203200" marL="203200">
+              <a:spcAft>
+                <a:spcPts val="900"/>
+              </a:spcAft>
+              <a:buClr>
+                <a:srgbClr val="7FA3B0"/>
+              </a:buClr>
+              <a:buSzPct val="90000"/>
+              <a:buFont typeface="Arial"/>
+              <a:buChar char="–"/>
+            </a:pPr>
+            <a:r>
+              <a:rPr sz="1250" b="0" i="0">
+                <a:solidFill>
+                  <a:srgbClr val="20291F"/>
+                </a:solidFill>
+                <a:latin typeface="Calibri"/>
+              </a:rPr>
+              <a:t>"The original design uses [element/principle] to..."</a:t>
+            </a:r>
+          </a:p>
+          <a:p>
+            <a:pPr indent="-203200" marL="203200">
+              <a:spcAft>
+                <a:spcPts val="900"/>
+              </a:spcAft>
+              <a:buClr>
+                <a:srgbClr val="7FA3B0"/>
+              </a:buClr>
+              <a:buSzPct val="90000"/>
+              <a:buFont typeface="Arial"/>
+              <a:buChar char="–"/>
+            </a:pPr>
+            <a:r>
+              <a:rPr sz="1250" b="0" i="0">
+                <a:solidFill>
+                  <a:srgbClr val="20291F"/>
+                </a:solidFill>
+                <a:latin typeface="Calibri"/>
+              </a:rPr>
+              <a:t>"If reconceptualised for [new audience], this could..."</a:t>
+            </a:r>
+          </a:p>
+          <a:p>
+            <a:pPr indent="-203200" marL="203200">
+              <a:spcAft>
+                <a:spcPts val="900"/>
+              </a:spcAft>
+              <a:buClr>
+                <a:srgbClr val="7FA3B0"/>
+              </a:buClr>
+              <a:buSzPct val="90000"/>
+              <a:buFont typeface="Arial"/>
+              <a:buChar char="–"/>
+            </a:pPr>
+            <a:r>
+              <a:rPr sz="1250" b="0" i="0">
+                <a:solidFill>
+                  <a:srgbClr val="20291F"/>
+                </a:solidFill>
+                <a:latin typeface="Calibri"/>
+              </a:rPr>
+              <a:t>"Reinventing this in [new field/medium] would require..."</a:t>
+            </a:r>
+          </a:p>
+        </p:txBody>
+      </p:sp>
+      <p:sp>
+        <p:nvSpPr>
+          <p:cNvPr id="6" name="Oval 5"/>
+          <p:cNvSpPr/>
+          <p:nvPr/>
+        </p:nvSpPr>
+        <p:spPr>
+          <a:xfrm>
+            <a:off x="5532120" y="3840480"/>
+            <a:ext cx="685800" cy="685800"/>
+          </a:xfrm>
+          <a:prstGeom prst="ellipse">
+            <a:avLst/>
+          </a:prstGeom>
+          <a:solidFill>
+            <a:srgbClr val="C9743D"/>
           </a:solidFill>
           <a:ln>
             <a:noFill/>
@@ -6185,6 +8649,14 @@
 <file path=ppt/slides/slide8.xml><?xml version="1.0" encoding="utf-8"?>
 <p:sld xmlns:a="http://schemas.openxmlformats.org/drawingml/2006/main" xmlns:p="http://schemas.openxmlformats.org/presentationml/2006/main" xmlns:r="http://schemas.openxmlformats.org/officeDocument/2006/relationships">
   <p:cSld>
+    <p:bg>
+      <p:bgPr>
+        <a:solidFill>
+          <a:srgbClr val="F7F5EC"/>
+        </a:solidFill>
+        <a:effectLst/>
+      </p:bgPr>
+    </p:bg>
     <p:spTree>
       <p:nvGrpSpPr>
         <p:cNvPr id="1" name=""/>
@@ -6194,225 +8666,22 @@
       <p:grpSpPr/>
       <p:sp>
         <p:nvSpPr>
-          <p:cNvPr id="2" name="Title 1"/>
-          <p:cNvSpPr>
-            <a:spLocks noGrp="1"/>
-          </p:cNvSpPr>
-          <p:nvPr>
-            <p:ph type="title"/>
-          </p:nvPr>
-        </p:nvSpPr>
-        <p:spPr/>
-        <p:txBody>
-          <a:bodyPr wrap="square"/>
-          <a:lstStyle/>
-          <a:p>
-            <a:r>
-              <a:rPr sz="3200" b="1">
-                <a:solidFill>
-                  <a:srgbClr val="1F4B3F"/>
-                </a:solidFill>
-                <a:latin typeface="Cambria"/>
-              </a:rPr>
-              <a:t>Analysis &amp; Reinterpretation — Quick Reference</a:t>
-            </a:r>
-          </a:p>
-        </p:txBody>
-      </p:sp>
-      <p:sp>
-        <p:nvSpPr>
-          <p:cNvPr id="3" name="Content Placeholder 2"/>
-          <p:cNvSpPr>
-            <a:spLocks noGrp="1"/>
-          </p:cNvSpPr>
-          <p:nvPr>
-            <p:ph idx="1"/>
-          </p:nvPr>
-        </p:nvSpPr>
-        <p:spPr/>
-        <p:txBody>
-          <a:bodyPr wrap="square"/>
-          <a:lstStyle/>
-          <a:p>
-            <a:pPr lvl="1">
-              <a:spcAft>
-                <a:spcPts val="1000"/>
-              </a:spcAft>
-            </a:pPr>
-            <a:r>
-              <a:rPr sz="1800" b="0" i="0">
-                <a:solidFill>
-                  <a:srgbClr val="333333"/>
-                </a:solidFill>
-                <a:latin typeface="Calibri"/>
-              </a:rPr>
-              <a:t>Analysis</a:t>
-            </a:r>
-          </a:p>
-          <a:p>
-            <a:pPr lvl="1">
-              <a:spcAft>
-                <a:spcPts val="1000"/>
-              </a:spcAft>
-            </a:pPr>
-            <a:r>
-              <a:rPr sz="1800" b="0" i="0">
-                <a:solidFill>
-                  <a:srgbClr val="333333"/>
-                </a:solidFill>
-                <a:latin typeface="Calibri"/>
-              </a:rPr>
-              <a:t>Purpose, audience, elements/principles, materials, context.</a:t>
-            </a:r>
-          </a:p>
-          <a:p>
-            <a:pPr lvl="1">
-              <a:spcAft>
-                <a:spcPts val="1000"/>
-              </a:spcAft>
-            </a:pPr>
-            <a:r>
-              <a:rPr sz="1800" b="0" i="0">
-                <a:solidFill>
-                  <a:srgbClr val="333333"/>
-                </a:solidFill>
-                <a:latin typeface="Calibri"/>
-              </a:rPr>
-              <a:t>Reconceptualise</a:t>
-            </a:r>
-          </a:p>
-          <a:p>
-            <a:pPr lvl="1">
-              <a:spcAft>
-                <a:spcPts val="1000"/>
-              </a:spcAft>
-            </a:pPr>
-            <a:r>
-              <a:rPr sz="1800" b="0" i="0">
-                <a:solidFill>
-                  <a:srgbClr val="333333"/>
-                </a:solidFill>
-                <a:latin typeface="Calibri"/>
-              </a:rPr>
-              <a:t>Same core identity, new audience/purpose.</a:t>
-            </a:r>
-          </a:p>
-          <a:p>
-            <a:pPr lvl="1">
-              <a:spcAft>
-                <a:spcPts val="1000"/>
-              </a:spcAft>
-            </a:pPr>
-            <a:r>
-              <a:rPr sz="1800" b="0" i="0">
-                <a:solidFill>
-                  <a:srgbClr val="333333"/>
-                </a:solidFill>
-                <a:latin typeface="Calibri"/>
-              </a:rPr>
-              <a:t>Reinvent</a:t>
-            </a:r>
-          </a:p>
-          <a:p>
-            <a:pPr lvl="1">
-              <a:spcAft>
-                <a:spcPts val="1000"/>
-              </a:spcAft>
-            </a:pPr>
-            <a:r>
-              <a:rPr sz="1800" b="0" i="0">
-                <a:solidFill>
-                  <a:srgbClr val="333333"/>
-                </a:solidFill>
-                <a:latin typeface="Calibri"/>
-              </a:rPr>
-              <a:t>Radical transformation of form/medium.</a:t>
-            </a:r>
-          </a:p>
-          <a:p>
-            <a:pPr lvl="1">
-              <a:spcAft>
-                <a:spcPts val="1000"/>
-              </a:spcAft>
-            </a:pPr>
-            <a:r>
-              <a:rPr sz="1800" b="0" i="0">
-                <a:solidFill>
-                  <a:srgbClr val="333333"/>
-                </a:solidFill>
-                <a:latin typeface="Calibri"/>
-              </a:rPr>
-              <a:t>Justify</a:t>
-            </a:r>
-          </a:p>
-          <a:p>
-            <a:pPr lvl="1">
-              <a:spcAft>
-                <a:spcPts val="1000"/>
-              </a:spcAft>
-            </a:pPr>
-            <a:r>
-              <a:rPr sz="1800" b="0" i="0">
-                <a:solidFill>
-                  <a:srgbClr val="333333"/>
-                </a:solidFill>
-                <a:latin typeface="Calibri"/>
-              </a:rPr>
-              <a:t>Always explain why the change suits the new context.</a:t>
-            </a:r>
-          </a:p>
-          <a:p>
-            <a:pPr>
-              <a:spcAft>
-                <a:spcPts val="1000"/>
-              </a:spcAft>
-            </a:pPr>
-            <a:r>
-              <a:rPr sz="2000" b="0" i="0">
-                <a:solidFill>
-                  <a:srgbClr val="333333"/>
-                </a:solidFill>
-                <a:latin typeface="Calibri"/>
-              </a:rPr>
-              <a:t> Reminder: this analysis directly feeds into the </a:t>
-            </a:r>
-            <a:r>
-              <a:rPr sz="2000" b="1" i="0">
-                <a:solidFill>
-                  <a:srgbClr val="1F4B3F"/>
-                </a:solidFill>
-                <a:latin typeface="Calibri"/>
-              </a:rPr>
-              <a:t>brief you write for your own folio work</a:t>
-            </a:r>
-            <a:r>
-              <a:rPr sz="2000" b="0" i="0">
-                <a:solidFill>
-                  <a:srgbClr val="333333"/>
-                </a:solidFill>
-                <a:latin typeface="Calibri"/>
-              </a:rPr>
-              <a:t> in AOS 2. </a:t>
-            </a:r>
-          </a:p>
-        </p:txBody>
-      </p:sp>
-      <p:sp>
-        <p:nvSpPr>
-          <p:cNvPr id="4" name="Rectangle 3"/>
+          <p:cNvPr id="2" name="Rounded Rectangle 1"/>
           <p:cNvSpPr/>
           <p:nvPr/>
         </p:nvSpPr>
         <p:spPr>
           <a:xfrm>
-            <a:off x="548640" y="1234440"/>
-            <a:ext cx="1463040" cy="38100"/>
-          </a:xfrm>
-          <a:prstGeom prst="rect">
-            <a:avLst/>
+            <a:off x="685800" y="502920"/>
+            <a:ext cx="3291840" cy="457200"/>
+          </a:xfrm>
+          <a:prstGeom prst="roundRect">
+            <a:avLst>
+              <a:gd name="adj" fmla="val 50000"/>
+            </a:avLst>
           </a:prstGeom>
           <a:solidFill>
-            <a:srgbClr val="1F4B3F"/>
+            <a:srgbClr val="2F5233"/>
           </a:solidFill>
           <a:ln>
             <a:noFill/>
@@ -6434,10 +8703,401 @@
           </a:fontRef>
         </p:style>
         <p:txBody>
-          <a:bodyPr rtlCol="0" anchor="ctr"/>
+          <a:bodyPr rtlCol="0" anchor="ctr" wrap="none" lIns="50800" rIns="50800"/>
           <a:lstStyle/>
           <a:p>
             <a:pPr algn="ctr"/>
+            <a:r>
+              <a:rPr sz="1100" b="1">
+                <a:solidFill>
+                  <a:srgbClr val="FFFFFF"/>
+                </a:solidFill>
+                <a:latin typeface="Calibri"/>
+              </a:rPr>
+              <a:t>ANALYSIS &amp; REINTERPRETATION</a:t>
+            </a:r>
+          </a:p>
+        </p:txBody>
+      </p:sp>
+      <p:sp>
+        <p:nvSpPr>
+          <p:cNvPr id="3" name="TextBox 2"/>
+          <p:cNvSpPr txBox="1"/>
+          <p:nvPr/>
+        </p:nvSpPr>
+        <p:spPr>
+          <a:xfrm>
+            <a:off x="685800" y="1051560"/>
+            <a:ext cx="10607040" cy="822960"/>
+          </a:xfrm>
+          <a:prstGeom prst="rect">
+            <a:avLst/>
+          </a:prstGeom>
+          <a:noFill/>
+        </p:spPr>
+        <p:txBody>
+          <a:bodyPr wrap="square" anchor="t">
+            <a:spAutoFit/>
+          </a:bodyPr>
+          <a:lstStyle/>
+          <a:p>
+            <a:pPr algn="l"/>
+            <a:r>
+              <a:rPr sz="2700" b="1" i="0">
+                <a:solidFill>
+                  <a:srgbClr val="20291F"/>
+                </a:solidFill>
+                <a:latin typeface="Cambria"/>
+              </a:rPr>
+              <a:t>Analysis &amp; Reinterpretation — Quick Reference</a:t>
+            </a:r>
+          </a:p>
+        </p:txBody>
+      </p:sp>
+      <p:sp>
+        <p:nvSpPr>
+          <p:cNvPr id="4" name="Rounded Rectangle 3"/>
+          <p:cNvSpPr/>
+          <p:nvPr/>
+        </p:nvSpPr>
+        <p:spPr>
+          <a:xfrm>
+            <a:off x="685800" y="1874519"/>
+            <a:ext cx="2500884" cy="1554480"/>
+          </a:xfrm>
+          <a:prstGeom prst="roundRect">
+            <a:avLst>
+              <a:gd name="adj" fmla="val 12000"/>
+            </a:avLst>
+          </a:prstGeom>
+          <a:solidFill>
+            <a:srgbClr val="DFE5E0"/>
+          </a:solidFill>
+          <a:ln>
+            <a:noFill/>
+          </a:ln>
+          <a:effectLst/>
+        </p:spPr>
+        <p:style>
+          <a:lnRef idx="1">
+            <a:schemeClr val="accent1"/>
+          </a:lnRef>
+          <a:fillRef idx="3">
+            <a:schemeClr val="accent1"/>
+          </a:fillRef>
+          <a:effectRef idx="2">
+            <a:schemeClr val="accent1"/>
+          </a:effectRef>
+          <a:fontRef idx="minor">
+            <a:schemeClr val="lt1"/>
+          </a:fontRef>
+        </p:style>
+        <p:txBody>
+          <a:bodyPr rtlCol="0" anchor="ctr" wrap="square" lIns="127000" rIns="127000" tIns="101600" bIns="101600"/>
+          <a:lstStyle/>
+          <a:p>
+            <a:pPr algn="ctr"/>
+            <a:r>
+              <a:rPr b="1" sz="1300">
+                <a:solidFill>
+                  <a:srgbClr val="254128"/>
+                </a:solidFill>
+                <a:latin typeface="Calibri"/>
+              </a:rPr>
+              <a:t>Analysis</a:t>
+            </a:r>
+          </a:p>
+          <a:p>
+            <a:r>
+              <a:rPr sz="1050">
+                <a:solidFill>
+                  <a:srgbClr val="20291F"/>
+                </a:solidFill>
+                <a:latin typeface="Calibri"/>
+              </a:rPr>
+              <a:t>Purpose, audience, elements/principles, materials, context.</a:t>
+            </a:r>
+          </a:p>
+        </p:txBody>
+      </p:sp>
+      <p:sp>
+        <p:nvSpPr>
+          <p:cNvPr id="5" name="Rounded Rectangle 4"/>
+          <p:cNvSpPr/>
+          <p:nvPr/>
+        </p:nvSpPr>
+        <p:spPr>
+          <a:xfrm>
+            <a:off x="3387852" y="1874519"/>
+            <a:ext cx="2500884" cy="1554480"/>
+          </a:xfrm>
+          <a:prstGeom prst="roundRect">
+            <a:avLst>
+              <a:gd name="adj" fmla="val 12000"/>
+            </a:avLst>
+          </a:prstGeom>
+          <a:solidFill>
+            <a:srgbClr val="F6EAE1"/>
+          </a:solidFill>
+          <a:ln>
+            <a:noFill/>
+          </a:ln>
+          <a:effectLst/>
+        </p:spPr>
+        <p:style>
+          <a:lnRef idx="1">
+            <a:schemeClr val="accent1"/>
+          </a:lnRef>
+          <a:fillRef idx="3">
+            <a:schemeClr val="accent1"/>
+          </a:fillRef>
+          <a:effectRef idx="2">
+            <a:schemeClr val="accent1"/>
+          </a:effectRef>
+          <a:fontRef idx="minor">
+            <a:schemeClr val="lt1"/>
+          </a:fontRef>
+        </p:style>
+        <p:txBody>
+          <a:bodyPr rtlCol="0" anchor="ctr" wrap="square" lIns="127000" rIns="127000" tIns="101600" bIns="101600"/>
+          <a:lstStyle/>
+          <a:p>
+            <a:pPr algn="ctr"/>
+            <a:r>
+              <a:rPr b="1" sz="1300">
+                <a:solidFill>
+                  <a:srgbClr val="A05C30"/>
+                </a:solidFill>
+                <a:latin typeface="Calibri"/>
+              </a:rPr>
+              <a:t>Reconceptualise</a:t>
+            </a:r>
+          </a:p>
+          <a:p>
+            <a:r>
+              <a:rPr sz="1050">
+                <a:solidFill>
+                  <a:srgbClr val="20291F"/>
+                </a:solidFill>
+                <a:latin typeface="Calibri"/>
+              </a:rPr>
+              <a:t>Same core identity, new audience/purpose.</a:t>
+            </a:r>
+          </a:p>
+        </p:txBody>
+      </p:sp>
+      <p:sp>
+        <p:nvSpPr>
+          <p:cNvPr id="6" name="Rounded Rectangle 5"/>
+          <p:cNvSpPr/>
+          <p:nvPr/>
+        </p:nvSpPr>
+        <p:spPr>
+          <a:xfrm>
+            <a:off x="6089904" y="1874519"/>
+            <a:ext cx="2500884" cy="1554480"/>
+          </a:xfrm>
+          <a:prstGeom prst="roundRect">
+            <a:avLst>
+              <a:gd name="adj" fmla="val 12000"/>
+            </a:avLst>
+          </a:prstGeom>
+          <a:solidFill>
+            <a:srgbClr val="EBF1F3"/>
+          </a:solidFill>
+          <a:ln>
+            <a:noFill/>
+          </a:ln>
+          <a:effectLst/>
+        </p:spPr>
+        <p:style>
+          <a:lnRef idx="1">
+            <a:schemeClr val="accent1"/>
+          </a:lnRef>
+          <a:fillRef idx="3">
+            <a:schemeClr val="accent1"/>
+          </a:fillRef>
+          <a:effectRef idx="2">
+            <a:schemeClr val="accent1"/>
+          </a:effectRef>
+          <a:fontRef idx="minor">
+            <a:schemeClr val="lt1"/>
+          </a:fontRef>
+        </p:style>
+        <p:txBody>
+          <a:bodyPr rtlCol="0" anchor="ctr" wrap="square" lIns="127000" rIns="127000" tIns="101600" bIns="101600"/>
+          <a:lstStyle/>
+          <a:p>
+            <a:pPr algn="ctr"/>
+            <a:r>
+              <a:rPr b="1" sz="1300">
+                <a:solidFill>
+                  <a:srgbClr val="65828C"/>
+                </a:solidFill>
+                <a:latin typeface="Calibri"/>
+              </a:rPr>
+              <a:t>Reinvent</a:t>
+            </a:r>
+          </a:p>
+          <a:p>
+            <a:r>
+              <a:rPr sz="1050">
+                <a:solidFill>
+                  <a:srgbClr val="20291F"/>
+                </a:solidFill>
+                <a:latin typeface="Calibri"/>
+              </a:rPr>
+              <a:t>Radical transformation of form/medium.</a:t>
+            </a:r>
+          </a:p>
+        </p:txBody>
+      </p:sp>
+      <p:sp>
+        <p:nvSpPr>
+          <p:cNvPr id="7" name="Rounded Rectangle 6"/>
+          <p:cNvSpPr/>
+          <p:nvPr/>
+        </p:nvSpPr>
+        <p:spPr>
+          <a:xfrm>
+            <a:off x="8791956" y="1874519"/>
+            <a:ext cx="2500884" cy="1554480"/>
+          </a:xfrm>
+          <a:prstGeom prst="roundRect">
+            <a:avLst>
+              <a:gd name="adj" fmla="val 12000"/>
+            </a:avLst>
+          </a:prstGeom>
+          <a:solidFill>
+            <a:srgbClr val="DFE5E0"/>
+          </a:solidFill>
+          <a:ln>
+            <a:noFill/>
+          </a:ln>
+          <a:effectLst/>
+        </p:spPr>
+        <p:style>
+          <a:lnRef idx="1">
+            <a:schemeClr val="accent1"/>
+          </a:lnRef>
+          <a:fillRef idx="3">
+            <a:schemeClr val="accent1"/>
+          </a:fillRef>
+          <a:effectRef idx="2">
+            <a:schemeClr val="accent1"/>
+          </a:effectRef>
+          <a:fontRef idx="minor">
+            <a:schemeClr val="lt1"/>
+          </a:fontRef>
+        </p:style>
+        <p:txBody>
+          <a:bodyPr rtlCol="0" anchor="ctr" wrap="square" lIns="127000" rIns="127000" tIns="101600" bIns="101600"/>
+          <a:lstStyle/>
+          <a:p>
+            <a:pPr algn="ctr"/>
+            <a:r>
+              <a:rPr b="1" sz="1300">
+                <a:solidFill>
+                  <a:srgbClr val="254128"/>
+                </a:solidFill>
+                <a:latin typeface="Calibri"/>
+              </a:rPr>
+              <a:t>Justify</a:t>
+            </a:r>
+          </a:p>
+          <a:p>
+            <a:r>
+              <a:rPr sz="1050">
+                <a:solidFill>
+                  <a:srgbClr val="20291F"/>
+                </a:solidFill>
+                <a:latin typeface="Calibri"/>
+              </a:rPr>
+              <a:t>Always explain why the change suits the new context.</a:t>
+            </a:r>
+          </a:p>
+        </p:txBody>
+      </p:sp>
+      <p:sp>
+        <p:nvSpPr>
+          <p:cNvPr id="8" name="Rounded Rectangle 7"/>
+          <p:cNvSpPr/>
+          <p:nvPr/>
+        </p:nvSpPr>
+        <p:spPr>
+          <a:xfrm>
+            <a:off x="685800" y="3675887"/>
+            <a:ext cx="10607040" cy="2862073"/>
+          </a:xfrm>
+          <a:prstGeom prst="roundRect">
+            <a:avLst>
+              <a:gd name="adj" fmla="val 10000"/>
+            </a:avLst>
+          </a:prstGeom>
+          <a:solidFill>
+            <a:srgbClr val="F6EAE1"/>
+          </a:solidFill>
+          <a:ln>
+            <a:noFill/>
+          </a:ln>
+          <a:effectLst/>
+        </p:spPr>
+        <p:style>
+          <a:lnRef idx="1">
+            <a:schemeClr val="accent1"/>
+          </a:lnRef>
+          <a:fillRef idx="3">
+            <a:schemeClr val="accent1"/>
+          </a:fillRef>
+          <a:effectRef idx="2">
+            <a:schemeClr val="accent1"/>
+          </a:effectRef>
+          <a:fontRef idx="minor">
+            <a:schemeClr val="lt1"/>
+          </a:fontRef>
+        </p:style>
+        <p:txBody>
+          <a:bodyPr rtlCol="0" anchor="ctr" lIns="203200" rIns="203200" tIns="101600" bIns="101600" wrap="square"/>
+          <a:lstStyle/>
+          <a:p>
+            <a:pPr algn="ctr" indent="-203200" marL="203200">
+              <a:spcAft>
+                <a:spcPts val="900"/>
+              </a:spcAft>
+              <a:buClr>
+                <a:srgbClr val="C9743D"/>
+              </a:buClr>
+              <a:buSzPct val="90000"/>
+              <a:buFont typeface="Arial"/>
+              <a:buChar char="●"/>
+            </a:pPr>
+            <a:r>
+              <a:rPr sz="1200" b="0" i="0">
+                <a:solidFill>
+                  <a:srgbClr val="20291F"/>
+                </a:solidFill>
+                <a:latin typeface="Calibri"/>
+              </a:rPr>
+              <a:t> Reminder: this analysis directly feeds into the </a:t>
+            </a:r>
+            <a:r>
+              <a:rPr sz="1200" b="1" i="0">
+                <a:solidFill>
+                  <a:srgbClr val="AA6233"/>
+                </a:solidFill>
+                <a:latin typeface="Calibri"/>
+              </a:rPr>
+              <a:t>brief you write for your own folio work</a:t>
+            </a:r>
+            <a:r>
+              <a:rPr sz="1200" b="0" i="0">
+                <a:solidFill>
+                  <a:srgbClr val="20291F"/>
+                </a:solidFill>
+                <a:latin typeface="Calibri"/>
+              </a:rPr>
+              <a:t> in AOS 2. </a:t>
+            </a:r>
           </a:p>
         </p:txBody>
       </p:sp>
@@ -6455,7 +9115,7 @@
     <p:bg>
       <p:bgPr>
         <a:solidFill>
-          <a:srgbClr val="1F4B3F"/>
+          <a:srgbClr val="2F5233"/>
         </a:solidFill>
         <a:effectLst/>
       </p:bgPr>
@@ -6469,23 +9129,220 @@
       <p:grpSpPr/>
       <p:sp>
         <p:nvSpPr>
-          <p:cNvPr id="2" name="Title 1"/>
-          <p:cNvSpPr>
-            <a:spLocks noGrp="1"/>
-          </p:cNvSpPr>
-          <p:nvPr>
-            <p:ph type="title"/>
-          </p:nvPr>
-        </p:nvSpPr>
-        <p:spPr/>
-        <p:txBody>
-          <a:bodyPr/>
-          <a:lstStyle/>
-          <a:p>
-            <a:r>
-              <a:rPr sz="4000" b="1">
-                <a:solidFill>
-                  <a:srgbClr val="FFFFFF"/>
+          <p:cNvPr id="2" name="Oval 1"/>
+          <p:cNvSpPr/>
+          <p:nvPr/>
+        </p:nvSpPr>
+        <p:spPr>
+          <a:xfrm>
+            <a:off x="9692640" y="-914400"/>
+            <a:ext cx="2926080" cy="2926080"/>
+          </a:xfrm>
+          <a:prstGeom prst="ellipse">
+            <a:avLst/>
+          </a:prstGeom>
+          <a:solidFill>
+            <a:srgbClr val="29482C"/>
+          </a:solidFill>
+          <a:ln>
+            <a:noFill/>
+          </a:ln>
+          <a:effectLst/>
+        </p:spPr>
+        <p:style>
+          <a:lnRef idx="1">
+            <a:schemeClr val="accent1"/>
+          </a:lnRef>
+          <a:fillRef idx="3">
+            <a:schemeClr val="accent1"/>
+          </a:fillRef>
+          <a:effectRef idx="2">
+            <a:schemeClr val="accent1"/>
+          </a:effectRef>
+          <a:fontRef idx="minor">
+            <a:schemeClr val="lt1"/>
+          </a:fontRef>
+        </p:style>
+        <p:txBody>
+          <a:bodyPr rtlCol="0" anchor="ctr"/>
+          <a:lstStyle/>
+          <a:p>
+            <a:pPr algn="ctr"/>
+          </a:p>
+        </p:txBody>
+      </p:sp>
+      <p:sp>
+        <p:nvSpPr>
+          <p:cNvPr id="3" name="Oval 2"/>
+          <p:cNvSpPr/>
+          <p:nvPr/>
+        </p:nvSpPr>
+        <p:spPr>
+          <a:xfrm>
+            <a:off x="-914400" y="4937760"/>
+            <a:ext cx="2377440" cy="2377440"/>
+          </a:xfrm>
+          <a:prstGeom prst="ellipse">
+            <a:avLst/>
+          </a:prstGeom>
+          <a:solidFill>
+            <a:srgbClr val="29482C"/>
+          </a:solidFill>
+          <a:ln>
+            <a:noFill/>
+          </a:ln>
+          <a:effectLst/>
+        </p:spPr>
+        <p:style>
+          <a:lnRef idx="1">
+            <a:schemeClr val="accent1"/>
+          </a:lnRef>
+          <a:fillRef idx="3">
+            <a:schemeClr val="accent1"/>
+          </a:fillRef>
+          <a:effectRef idx="2">
+            <a:schemeClr val="accent1"/>
+          </a:effectRef>
+          <a:fontRef idx="minor">
+            <a:schemeClr val="lt1"/>
+          </a:fontRef>
+        </p:style>
+        <p:txBody>
+          <a:bodyPr rtlCol="0" anchor="ctr"/>
+          <a:lstStyle/>
+          <a:p>
+            <a:pPr algn="ctr"/>
+          </a:p>
+        </p:txBody>
+      </p:sp>
+      <p:sp>
+        <p:nvSpPr>
+          <p:cNvPr id="4" name="Rounded Rectangle 3"/>
+          <p:cNvSpPr/>
+          <p:nvPr/>
+        </p:nvSpPr>
+        <p:spPr>
+          <a:xfrm>
+            <a:off x="822960" y="1051560"/>
+            <a:ext cx="1188720" cy="502920"/>
+          </a:xfrm>
+          <a:prstGeom prst="roundRect">
+            <a:avLst>
+              <a:gd name="adj" fmla="val 50000"/>
+            </a:avLst>
+          </a:prstGeom>
+          <a:solidFill>
+            <a:srgbClr val="FFFFFF"/>
+          </a:solidFill>
+          <a:ln>
+            <a:noFill/>
+          </a:ln>
+          <a:effectLst/>
+        </p:spPr>
+        <p:style>
+          <a:lnRef idx="1">
+            <a:schemeClr val="accent1"/>
+          </a:lnRef>
+          <a:fillRef idx="3">
+            <a:schemeClr val="accent1"/>
+          </a:fillRef>
+          <a:effectRef idx="2">
+            <a:schemeClr val="accent1"/>
+          </a:effectRef>
+          <a:fontRef idx="minor">
+            <a:schemeClr val="lt1"/>
+          </a:fontRef>
+        </p:style>
+        <p:txBody>
+          <a:bodyPr rtlCol="0" anchor="ctr" wrap="none" lIns="50800" rIns="50800"/>
+          <a:lstStyle/>
+          <a:p>
+            <a:pPr algn="ctr"/>
+            <a:r>
+              <a:rPr sz="1400" b="1">
+                <a:solidFill>
+                  <a:srgbClr val="254128"/>
+                </a:solidFill>
+                <a:latin typeface="Calibri"/>
+              </a:rPr>
+              <a:t>02</a:t>
+            </a:r>
+          </a:p>
+        </p:txBody>
+      </p:sp>
+      <p:sp>
+        <p:nvSpPr>
+          <p:cNvPr id="5" name="Rounded Rectangle 4"/>
+          <p:cNvSpPr/>
+          <p:nvPr/>
+        </p:nvSpPr>
+        <p:spPr>
+          <a:xfrm>
+            <a:off x="822960" y="2011680"/>
+            <a:ext cx="10515600" cy="2834640"/>
+          </a:xfrm>
+          <a:prstGeom prst="roundRect">
+            <a:avLst>
+              <a:gd name="adj" fmla="val 18000"/>
+            </a:avLst>
+          </a:prstGeom>
+          <a:solidFill>
+            <a:srgbClr val="FFFFFF"/>
+          </a:solidFill>
+          <a:ln>
+            <a:noFill/>
+          </a:ln>
+          <a:effectLst/>
+        </p:spPr>
+        <p:style>
+          <a:lnRef idx="1">
+            <a:schemeClr val="accent1"/>
+          </a:lnRef>
+          <a:fillRef idx="3">
+            <a:schemeClr val="accent1"/>
+          </a:fillRef>
+          <a:effectRef idx="2">
+            <a:schemeClr val="accent1"/>
+          </a:effectRef>
+          <a:fontRef idx="minor">
+            <a:schemeClr val="lt1"/>
+          </a:fontRef>
+        </p:style>
+        <p:txBody>
+          <a:bodyPr rtlCol="0" anchor="ctr"/>
+          <a:lstStyle/>
+          <a:p>
+            <a:pPr algn="ctr"/>
+          </a:p>
+        </p:txBody>
+      </p:sp>
+      <p:sp>
+        <p:nvSpPr>
+          <p:cNvPr id="6" name="TextBox 5"/>
+          <p:cNvSpPr txBox="1"/>
+          <p:nvPr/>
+        </p:nvSpPr>
+        <p:spPr>
+          <a:xfrm>
+            <a:off x="1280160" y="2697480"/>
+            <a:ext cx="9601200" cy="1097280"/>
+          </a:xfrm>
+          <a:prstGeom prst="rect">
+            <a:avLst/>
+          </a:prstGeom>
+          <a:noFill/>
+        </p:spPr>
+        <p:txBody>
+          <a:bodyPr wrap="square" anchor="t">
+            <a:spAutoFit/>
+          </a:bodyPr>
+          <a:lstStyle/>
+          <a:p>
+            <a:pPr algn="l"/>
+            <a:r>
+              <a:rPr sz="3400" b="1" i="0">
+                <a:solidFill>
+                  <a:srgbClr val="27452B"/>
                 </a:solidFill>
                 <a:latin typeface="Cambria"/>
               </a:rPr>
@@ -6496,27 +9353,35 @@
       </p:sp>
       <p:sp>
         <p:nvSpPr>
-          <p:cNvPr id="3" name="Text Placeholder 2"/>
-          <p:cNvSpPr>
-            <a:spLocks noGrp="1"/>
-          </p:cNvSpPr>
-          <p:nvPr>
-            <p:ph type="body" idx="1"/>
-          </p:nvPr>
-        </p:nvSpPr>
-        <p:spPr/>
-        <p:txBody>
-          <a:bodyPr/>
-          <a:lstStyle/>
-          <a:p>
-            <a:r>
-              <a:rPr sz="1800">
-                <a:solidFill>
-                  <a:srgbClr val="E5E5E5"/>
-                </a:solidFill>
-                <a:latin typeface="Calibri"/>
-              </a:rPr>
-              <a:t>AOS 2 · Design Industry Practice</a:t>
+          <p:cNvPr id="7" name="TextBox 6"/>
+          <p:cNvSpPr txBox="1"/>
+          <p:nvPr/>
+        </p:nvSpPr>
+        <p:spPr>
+          <a:xfrm>
+            <a:off x="1280160" y="3657600"/>
+            <a:ext cx="9601200" cy="548640"/>
+          </a:xfrm>
+          <a:prstGeom prst="rect">
+            <a:avLst/>
+          </a:prstGeom>
+          <a:noFill/>
+        </p:spPr>
+        <p:txBody>
+          <a:bodyPr wrap="square" anchor="t">
+            <a:spAutoFit/>
+          </a:bodyPr>
+          <a:lstStyle/>
+          <a:p>
+            <a:pPr algn="l"/>
+            <a:r>
+              <a:rPr sz="1500" b="0" i="0">
+                <a:solidFill>
+                  <a:srgbClr val="6B6B6B"/>
+                </a:solidFill>
+                <a:latin typeface="Calibri"/>
+              </a:rPr>
+              <a:t>AOS 2 - Design Industry Practice</a:t>
             </a:r>
           </a:p>
         </p:txBody>

--- a/teaching-materials/vcd-vce/powerpoint/Unit3-Reconceptualisation-and-Reinvention.pptx
+++ b/teaching-materials/vcd-vce/powerpoint/Unit3-Reconceptualisation-and-Reinvention.pptx
@@ -21,6 +21,16 @@
     <p:sldId id="269" r:id="rId20"/>
     <p:sldId id="270" r:id="rId21"/>
     <p:sldId id="271" r:id="rId22"/>
+    <p:sldId id="272" r:id="rId23"/>
+    <p:sldId id="273" r:id="rId24"/>
+    <p:sldId id="274" r:id="rId25"/>
+    <p:sldId id="275" r:id="rId26"/>
+    <p:sldId id="276" r:id="rId27"/>
+    <p:sldId id="277" r:id="rId28"/>
+    <p:sldId id="278" r:id="rId29"/>
+    <p:sldId id="279" r:id="rId30"/>
+    <p:sldId id="280" r:id="rId31"/>
+    <p:sldId id="281" r:id="rId32"/>
   </p:sldIdLst>
   <p:sldSz cx="12191695" cy="6858000" type="screen4x3"/>
   <p:notesSz cx="6858000" cy="9144000"/>
@@ -6030,7 +6040,7 @@
     <p:bg>
       <p:bgPr>
         <a:solidFill>
-          <a:srgbClr val="2F5233"/>
+          <a:srgbClr val="C9743D"/>
         </a:solidFill>
         <a:effectLst/>
       </p:bgPr>
@@ -6050,14 +6060,14 @@
         </p:nvSpPr>
         <p:spPr>
           <a:xfrm>
-            <a:off x="-1097280" y="4114800"/>
-            <a:ext cx="3108960" cy="3108960"/>
+            <a:off x="9692640" y="-914400"/>
+            <a:ext cx="2926080" cy="2926080"/>
           </a:xfrm>
           <a:prstGeom prst="ellipse">
             <a:avLst/>
           </a:prstGeom>
           <a:solidFill>
-            <a:srgbClr val="29482C"/>
+            <a:srgbClr val="B06635"/>
           </a:solidFill>
           <a:ln>
             <a:noFill/>
@@ -6094,14 +6104,14 @@
         </p:nvSpPr>
         <p:spPr>
           <a:xfrm>
-            <a:off x="9875520" y="-1188720"/>
-            <a:ext cx="2743200" cy="2743200"/>
+            <a:off x="-914400" y="4937760"/>
+            <a:ext cx="2377440" cy="2377440"/>
           </a:xfrm>
           <a:prstGeom prst="ellipse">
             <a:avLst/>
           </a:prstGeom>
           <a:solidFill>
-            <a:srgbClr val="C9743D"/>
+            <a:srgbClr val="B06635"/>
           </a:solidFill>
           <a:ln>
             <a:noFill/>
@@ -6138,12 +6148,12 @@
         </p:nvSpPr>
         <p:spPr>
           <a:xfrm>
-            <a:off x="1920240" y="2286000"/>
-            <a:ext cx="8321040" cy="2377440"/>
+            <a:off x="822960" y="1051560"/>
+            <a:ext cx="1188720" cy="502920"/>
           </a:xfrm>
           <a:prstGeom prst="roundRect">
             <a:avLst>
-              <a:gd name="adj" fmla="val 20000"/>
+              <a:gd name="adj" fmla="val 50000"/>
             </a:avLst>
           </a:prstGeom>
           <a:solidFill>
@@ -6169,30 +6179,1096 @@
           </a:fontRef>
         </p:style>
         <p:txBody>
+          <a:bodyPr rtlCol="0" anchor="ctr" wrap="none" lIns="50800" rIns="50800"/>
+          <a:lstStyle/>
+          <a:p>
+            <a:pPr algn="ctr"/>
+            <a:r>
+              <a:rPr sz="1400" b="1">
+                <a:solidFill>
+                  <a:srgbClr val="A05C30"/>
+                </a:solidFill>
+                <a:latin typeface="Calibri"/>
+              </a:rPr>
+              <a:t>03</a:t>
+            </a:r>
+          </a:p>
+        </p:txBody>
+      </p:sp>
+      <p:sp>
+        <p:nvSpPr>
+          <p:cNvPr id="5" name="Rounded Rectangle 4"/>
+          <p:cNvSpPr/>
+          <p:nvPr/>
+        </p:nvSpPr>
+        <p:spPr>
+          <a:xfrm>
+            <a:off x="822960" y="2011680"/>
+            <a:ext cx="10515600" cy="2834640"/>
+          </a:xfrm>
+          <a:prstGeom prst="roundRect">
+            <a:avLst>
+              <a:gd name="adj" fmla="val 18000"/>
+            </a:avLst>
+          </a:prstGeom>
+          <a:solidFill>
+            <a:srgbClr val="FFFFFF"/>
+          </a:solidFill>
+          <a:ln>
+            <a:noFill/>
+          </a:ln>
+          <a:effectLst/>
+        </p:spPr>
+        <p:style>
+          <a:lnRef idx="1">
+            <a:schemeClr val="accent1"/>
+          </a:lnRef>
+          <a:fillRef idx="3">
+            <a:schemeClr val="accent1"/>
+          </a:fillRef>
+          <a:effectRef idx="2">
+            <a:schemeClr val="accent1"/>
+          </a:effectRef>
+          <a:fontRef idx="minor">
+            <a:schemeClr val="lt1"/>
+          </a:fontRef>
+        </p:style>
+        <p:txBody>
           <a:bodyPr rtlCol="0" anchor="ctr"/>
           <a:lstStyle/>
           <a:p>
             <a:pPr algn="ctr"/>
-            <a:r>
-              <a:rPr b="1" sz="3000">
-                <a:solidFill>
-                  <a:srgbClr val="2F5233"/>
+          </a:p>
+        </p:txBody>
+      </p:sp>
+      <p:sp>
+        <p:nvSpPr>
+          <p:cNvPr id="6" name="TextBox 5"/>
+          <p:cNvSpPr txBox="1"/>
+          <p:nvPr/>
+        </p:nvSpPr>
+        <p:spPr>
+          <a:xfrm>
+            <a:off x="1280160" y="2697480"/>
+            <a:ext cx="9601200" cy="1097280"/>
+          </a:xfrm>
+          <a:prstGeom prst="rect">
+            <a:avLst/>
+          </a:prstGeom>
+          <a:noFill/>
+        </p:spPr>
+        <p:txBody>
+          <a:bodyPr wrap="square" anchor="t">
+            <a:spAutoFit/>
+          </a:bodyPr>
+          <a:lstStyle/>
+          <a:p>
+            <a:pPr algn="l"/>
+            <a:r>
+              <a:rPr sz="3400" b="1" i="0">
+                <a:solidFill>
+                  <a:srgbClr val="AA6233"/>
                 </a:solidFill>
                 <a:latin typeface="Cambria"/>
               </a:rPr>
-              <a:t>End of Unit 3</a:t>
-            </a:r>
-          </a:p>
+              <a:t>Extended Knowledge</a:t>
+            </a:r>
+          </a:p>
+        </p:txBody>
+      </p:sp>
+      <p:sp>
+        <p:nvSpPr>
+          <p:cNvPr id="7" name="TextBox 6"/>
+          <p:cNvSpPr txBox="1"/>
+          <p:nvPr/>
+        </p:nvSpPr>
+        <p:spPr>
+          <a:xfrm>
+            <a:off x="1280160" y="3657600"/>
+            <a:ext cx="9601200" cy="548640"/>
+          </a:xfrm>
+          <a:prstGeom prst="rect">
+            <a:avLst/>
+          </a:prstGeom>
+          <a:noFill/>
+        </p:spPr>
+        <p:txBody>
+          <a:bodyPr wrap="square" anchor="t">
+            <a:spAutoFit/>
+          </a:bodyPr>
+          <a:lstStyle/>
+          <a:p>
+            <a:pPr algn="l"/>
+            <a:r>
+              <a:rPr sz="1500" b="0" i="0">
+                <a:solidFill>
+                  <a:srgbClr val="6B6B6B"/>
+                </a:solidFill>
+                <a:latin typeface="Calibri"/>
+              </a:rPr>
+              <a:t>Beyond the study design</a:t>
+            </a:r>
+          </a:p>
+        </p:txBody>
+      </p:sp>
+    </p:spTree>
+  </p:cSld>
+  <p:clrMapOvr>
+    <a:masterClrMapping/>
+  </p:clrMapOvr>
+</p:sld>
+</file>
+
+<file path=ppt/slides/slide17.xml><?xml version="1.0" encoding="utf-8"?>
+<p:sld xmlns:a="http://schemas.openxmlformats.org/drawingml/2006/main" xmlns:p="http://schemas.openxmlformats.org/presentationml/2006/main" xmlns:r="http://schemas.openxmlformats.org/officeDocument/2006/relationships">
+  <p:cSld>
+    <p:bg>
+      <p:bgPr>
+        <a:solidFill>
+          <a:srgbClr val="F7F5EC"/>
+        </a:solidFill>
+        <a:effectLst/>
+      </p:bgPr>
+    </p:bg>
+    <p:spTree>
+      <p:nvGrpSpPr>
+        <p:cNvPr id="1" name=""/>
+        <p:cNvGrpSpPr/>
+        <p:nvPr/>
+      </p:nvGrpSpPr>
+      <p:grpSpPr/>
+      <p:sp>
+        <p:nvSpPr>
+          <p:cNvPr id="2" name="Rounded Rectangle 1"/>
+          <p:cNvSpPr/>
+          <p:nvPr/>
+        </p:nvSpPr>
+        <p:spPr>
+          <a:xfrm>
+            <a:off x="685800" y="502920"/>
+            <a:ext cx="3291840" cy="457200"/>
+          </a:xfrm>
+          <a:prstGeom prst="roundRect">
+            <a:avLst>
+              <a:gd name="adj" fmla="val 50000"/>
+            </a:avLst>
+          </a:prstGeom>
+          <a:solidFill>
+            <a:srgbClr val="2F5233"/>
+          </a:solidFill>
+          <a:ln>
+            <a:noFill/>
+          </a:ln>
+          <a:effectLst/>
+        </p:spPr>
+        <p:style>
+          <a:lnRef idx="1">
+            <a:schemeClr val="accent1"/>
+          </a:lnRef>
+          <a:fillRef idx="3">
+            <a:schemeClr val="accent1"/>
+          </a:fillRef>
+          <a:effectRef idx="2">
+            <a:schemeClr val="accent1"/>
+          </a:effectRef>
+          <a:fontRef idx="minor">
+            <a:schemeClr val="lt1"/>
+          </a:fontRef>
+        </p:style>
+        <p:txBody>
+          <a:bodyPr rtlCol="0" anchor="ctr" wrap="none" lIns="50800" rIns="50800"/>
+          <a:lstStyle/>
           <a:p>
             <a:pPr algn="ctr"/>
             <a:r>
-              <a:rPr sz="1400">
-                <a:solidFill>
-                  <a:srgbClr val="595959"/>
-                </a:solidFill>
-              </a:rPr>
-              <a:t>Review the matching workbook to consolidate what you have learnt.</a:t>
-            </a:r>
+              <a:rPr sz="1100" b="1">
+                <a:solidFill>
+                  <a:srgbClr val="FFFFFF"/>
+                </a:solidFill>
+                <a:latin typeface="Calibri"/>
+              </a:rPr>
+              <a:t>EXTENDED KNOWLEDGE</a:t>
+            </a:r>
+          </a:p>
+        </p:txBody>
+      </p:sp>
+      <p:sp>
+        <p:nvSpPr>
+          <p:cNvPr id="3" name="TextBox 2"/>
+          <p:cNvSpPr txBox="1"/>
+          <p:nvPr/>
+        </p:nvSpPr>
+        <p:spPr>
+          <a:xfrm>
+            <a:off x="685800" y="1051560"/>
+            <a:ext cx="10607040" cy="822960"/>
+          </a:xfrm>
+          <a:prstGeom prst="rect">
+            <a:avLst/>
+          </a:prstGeom>
+          <a:noFill/>
+        </p:spPr>
+        <p:txBody>
+          <a:bodyPr wrap="square" anchor="t">
+            <a:spAutoFit/>
+          </a:bodyPr>
+          <a:lstStyle/>
+          <a:p>
+            <a:pPr algn="l"/>
+            <a:r>
+              <a:rPr sz="2700" b="1" i="0">
+                <a:solidFill>
+                  <a:srgbClr val="20291F"/>
+                </a:solidFill>
+                <a:latin typeface="Cambria"/>
+              </a:rPr>
+              <a:t>Semiotics and Visual Rhetoric</a:t>
+            </a:r>
+          </a:p>
+        </p:txBody>
+      </p:sp>
+      <p:sp>
+        <p:nvSpPr>
+          <p:cNvPr id="4" name="Rounded Rectangle 3"/>
+          <p:cNvSpPr/>
+          <p:nvPr/>
+        </p:nvSpPr>
+        <p:spPr>
+          <a:xfrm>
+            <a:off x="685800" y="1874519"/>
+            <a:ext cx="10607040" cy="4526280"/>
+          </a:xfrm>
+          <a:prstGeom prst="roundRect">
+            <a:avLst>
+              <a:gd name="adj" fmla="val 6000"/>
+            </a:avLst>
+          </a:prstGeom>
+          <a:solidFill>
+            <a:srgbClr val="EAEDEA"/>
+          </a:solidFill>
+          <a:ln>
+            <a:noFill/>
+          </a:ln>
+          <a:effectLst/>
+        </p:spPr>
+        <p:style>
+          <a:lnRef idx="1">
+            <a:schemeClr val="accent1"/>
+          </a:lnRef>
+          <a:fillRef idx="3">
+            <a:schemeClr val="accent1"/>
+          </a:fillRef>
+          <a:effectRef idx="2">
+            <a:schemeClr val="accent1"/>
+          </a:effectRef>
+          <a:fontRef idx="minor">
+            <a:schemeClr val="lt1"/>
+          </a:fontRef>
+        </p:style>
+        <p:txBody>
+          <a:bodyPr rtlCol="0" anchor="ctr" lIns="330200" rIns="330200" tIns="254000" bIns="254000" wrap="square"/>
+          <a:lstStyle/>
+          <a:p>
+            <a:pPr algn="ctr" indent="-203200" marL="203200">
+              <a:spcAft>
+                <a:spcPts val="900"/>
+              </a:spcAft>
+              <a:buClr>
+                <a:srgbClr val="2F5233"/>
+              </a:buClr>
+              <a:buSzPct val="90000"/>
+              <a:buFont typeface="Arial"/>
+              <a:buChar char="●"/>
+            </a:pPr>
+            <a:r>
+              <a:rPr sz="1500" b="1" i="0">
+                <a:solidFill>
+                  <a:srgbClr val="27452B"/>
+                </a:solidFill>
+                <a:latin typeface="Calibri"/>
+              </a:rPr>
+              <a:t>Beyond icon/index/symbol</a:t>
+            </a:r>
+          </a:p>
+          <a:p>
+            <a:pPr indent="-203200" marL="203200">
+              <a:spcAft>
+                <a:spcPts val="900"/>
+              </a:spcAft>
+              <a:buClr>
+                <a:srgbClr val="2F5233"/>
+              </a:buClr>
+              <a:buSzPct val="90000"/>
+              <a:buFont typeface="Arial"/>
+              <a:buChar char="–"/>
+            </a:pPr>
+            <a:r>
+              <a:rPr sz="1350" b="0" i="0">
+                <a:solidFill>
+                  <a:srgbClr val="20291F"/>
+                </a:solidFill>
+                <a:latin typeface="Calibri"/>
+              </a:rPr>
+              <a:t>Visual metaphor — representing one concept through the image of another (a lightbulb for an idea)</a:t>
+            </a:r>
+          </a:p>
+          <a:p>
+            <a:pPr indent="-203200" marL="203200">
+              <a:spcAft>
+                <a:spcPts val="900"/>
+              </a:spcAft>
+              <a:buClr>
+                <a:srgbClr val="2F5233"/>
+              </a:buClr>
+              <a:buSzPct val="90000"/>
+              <a:buFont typeface="Arial"/>
+              <a:buChar char="–"/>
+            </a:pPr>
+            <a:r>
+              <a:rPr sz="1350" b="0" i="0">
+                <a:solidFill>
+                  <a:srgbClr val="20291F"/>
+                </a:solidFill>
+                <a:latin typeface="Calibri"/>
+              </a:rPr>
+              <a:t>Visual metonymy — representing a whole through a closely associated part (a crown for royalty)</a:t>
+            </a:r>
+          </a:p>
+          <a:p>
+            <a:pPr indent="-203200" marL="203200">
+              <a:spcAft>
+                <a:spcPts val="900"/>
+              </a:spcAft>
+              <a:buClr>
+                <a:srgbClr val="2F5233"/>
+              </a:buClr>
+              <a:buSzPct val="90000"/>
+              <a:buFont typeface="Arial"/>
+              <a:buChar char="–"/>
+            </a:pPr>
+            <a:r>
+              <a:rPr sz="1350" b="0" i="0">
+                <a:solidFill>
+                  <a:srgbClr val="20291F"/>
+                </a:solidFill>
+                <a:latin typeface="Calibri"/>
+              </a:rPr>
+              <a:t>Myth and connotation (Roland Barthes) — how repeated cultural use makes a sign feel 'natural' or self-evident, when it is in fact culturally constructed</a:t>
+            </a:r>
+          </a:p>
+        </p:txBody>
+      </p:sp>
+      <p:sp>
+        <p:nvSpPr>
+          <p:cNvPr id="5" name="Oval 4"/>
+          <p:cNvSpPr/>
+          <p:nvPr/>
+        </p:nvSpPr>
+        <p:spPr>
+          <a:xfrm>
+            <a:off x="10881360" y="5943600"/>
+            <a:ext cx="1005840" cy="1005840"/>
+          </a:xfrm>
+          <a:prstGeom prst="ellipse">
+            <a:avLst/>
+          </a:prstGeom>
+          <a:solidFill>
+            <a:srgbClr val="C5D5DB"/>
+          </a:solidFill>
+          <a:ln>
+            <a:noFill/>
+          </a:ln>
+          <a:effectLst/>
+        </p:spPr>
+        <p:style>
+          <a:lnRef idx="1">
+            <a:schemeClr val="accent1"/>
+          </a:lnRef>
+          <a:fillRef idx="3">
+            <a:schemeClr val="accent1"/>
+          </a:fillRef>
+          <a:effectRef idx="2">
+            <a:schemeClr val="accent1"/>
+          </a:effectRef>
+          <a:fontRef idx="minor">
+            <a:schemeClr val="lt1"/>
+          </a:fontRef>
+        </p:style>
+        <p:txBody>
+          <a:bodyPr rtlCol="0" anchor="ctr"/>
+          <a:lstStyle/>
+          <a:p>
+            <a:pPr algn="ctr"/>
+          </a:p>
+        </p:txBody>
+      </p:sp>
+    </p:spTree>
+  </p:cSld>
+  <p:clrMapOvr>
+    <a:masterClrMapping/>
+  </p:clrMapOvr>
+</p:sld>
+</file>
+
+<file path=ppt/slides/slide18.xml><?xml version="1.0" encoding="utf-8"?>
+<p:sld xmlns:a="http://schemas.openxmlformats.org/drawingml/2006/main" xmlns:p="http://schemas.openxmlformats.org/presentationml/2006/main" xmlns:r="http://schemas.openxmlformats.org/officeDocument/2006/relationships">
+  <p:cSld>
+    <p:bg>
+      <p:bgPr>
+        <a:solidFill>
+          <a:srgbClr val="F7F5EC"/>
+        </a:solidFill>
+        <a:effectLst/>
+      </p:bgPr>
+    </p:bg>
+    <p:spTree>
+      <p:nvGrpSpPr>
+        <p:cNvPr id="1" name=""/>
+        <p:cNvGrpSpPr/>
+        <p:nvPr/>
+      </p:nvGrpSpPr>
+      <p:grpSpPr/>
+      <p:sp>
+        <p:nvSpPr>
+          <p:cNvPr id="2" name="Rounded Rectangle 1"/>
+          <p:cNvSpPr/>
+          <p:nvPr/>
+        </p:nvSpPr>
+        <p:spPr>
+          <a:xfrm>
+            <a:off x="685800" y="502920"/>
+            <a:ext cx="3291840" cy="457200"/>
+          </a:xfrm>
+          <a:prstGeom prst="roundRect">
+            <a:avLst>
+              <a:gd name="adj" fmla="val 50000"/>
+            </a:avLst>
+          </a:prstGeom>
+          <a:solidFill>
+            <a:srgbClr val="2F5233"/>
+          </a:solidFill>
+          <a:ln>
+            <a:noFill/>
+          </a:ln>
+          <a:effectLst/>
+        </p:spPr>
+        <p:style>
+          <a:lnRef idx="1">
+            <a:schemeClr val="accent1"/>
+          </a:lnRef>
+          <a:fillRef idx="3">
+            <a:schemeClr val="accent1"/>
+          </a:fillRef>
+          <a:effectRef idx="2">
+            <a:schemeClr val="accent1"/>
+          </a:effectRef>
+          <a:fontRef idx="minor">
+            <a:schemeClr val="lt1"/>
+          </a:fontRef>
+        </p:style>
+        <p:txBody>
+          <a:bodyPr rtlCol="0" anchor="ctr" wrap="none" lIns="50800" rIns="50800"/>
+          <a:lstStyle/>
+          <a:p>
+            <a:pPr algn="ctr"/>
+            <a:r>
+              <a:rPr sz="1100" b="1">
+                <a:solidFill>
+                  <a:srgbClr val="FFFFFF"/>
+                </a:solidFill>
+                <a:latin typeface="Calibri"/>
+              </a:rPr>
+              <a:t>EXTENDED KNOWLEDGE</a:t>
+            </a:r>
+          </a:p>
+        </p:txBody>
+      </p:sp>
+      <p:sp>
+        <p:nvSpPr>
+          <p:cNvPr id="3" name="TextBox 2"/>
+          <p:cNvSpPr txBox="1"/>
+          <p:nvPr/>
+        </p:nvSpPr>
+        <p:spPr>
+          <a:xfrm>
+            <a:off x="685800" y="1051560"/>
+            <a:ext cx="10607040" cy="822960"/>
+          </a:xfrm>
+          <a:prstGeom prst="rect">
+            <a:avLst/>
+          </a:prstGeom>
+          <a:noFill/>
+        </p:spPr>
+        <p:txBody>
+          <a:bodyPr wrap="square" anchor="t">
+            <a:spAutoFit/>
+          </a:bodyPr>
+          <a:lstStyle/>
+          <a:p>
+            <a:pPr algn="l"/>
+            <a:r>
+              <a:rPr sz="2700" b="1" i="0">
+                <a:solidFill>
+                  <a:srgbClr val="20291F"/>
+                </a:solidFill>
+                <a:latin typeface="Cambria"/>
+              </a:rPr>
+              <a:t>Grid Systems and Layout Theory</a:t>
+            </a:r>
+          </a:p>
+        </p:txBody>
+      </p:sp>
+      <p:sp>
+        <p:nvSpPr>
+          <p:cNvPr id="4" name="Rounded Rectangle 3"/>
+          <p:cNvSpPr/>
+          <p:nvPr/>
+        </p:nvSpPr>
+        <p:spPr>
+          <a:xfrm>
+            <a:off x="685800" y="1874519"/>
+            <a:ext cx="10607040" cy="4526280"/>
+          </a:xfrm>
+          <a:prstGeom prst="roundRect">
+            <a:avLst>
+              <a:gd name="adj" fmla="val 6000"/>
+            </a:avLst>
+          </a:prstGeom>
+          <a:solidFill>
+            <a:srgbClr val="EAEDEA"/>
+          </a:solidFill>
+          <a:ln>
+            <a:noFill/>
+          </a:ln>
+          <a:effectLst/>
+        </p:spPr>
+        <p:style>
+          <a:lnRef idx="1">
+            <a:schemeClr val="accent1"/>
+          </a:lnRef>
+          <a:fillRef idx="3">
+            <a:schemeClr val="accent1"/>
+          </a:fillRef>
+          <a:effectRef idx="2">
+            <a:schemeClr val="accent1"/>
+          </a:effectRef>
+          <a:fontRef idx="minor">
+            <a:schemeClr val="lt1"/>
+          </a:fontRef>
+        </p:style>
+        <p:txBody>
+          <a:bodyPr rtlCol="0" anchor="ctr" lIns="330200" rIns="330200" tIns="254000" bIns="254000" wrap="square"/>
+          <a:lstStyle/>
+          <a:p>
+            <a:pPr algn="ctr" indent="-203200" marL="203200">
+              <a:spcAft>
+                <a:spcPts val="900"/>
+              </a:spcAft>
+              <a:buClr>
+                <a:srgbClr val="2F5233"/>
+              </a:buClr>
+              <a:buSzPct val="90000"/>
+              <a:buFont typeface="Arial"/>
+              <a:buChar char="●"/>
+            </a:pPr>
+            <a:r>
+              <a:rPr sz="1500" b="1" i="0">
+                <a:solidFill>
+                  <a:srgbClr val="27452B"/>
+                </a:solidFill>
+                <a:latin typeface="Calibri"/>
+              </a:rPr>
+              <a:t>Types of grid</a:t>
+            </a:r>
+          </a:p>
+          <a:p>
+            <a:pPr indent="-203200" marL="203200">
+              <a:spcAft>
+                <a:spcPts val="900"/>
+              </a:spcAft>
+              <a:buClr>
+                <a:srgbClr val="2F5233"/>
+              </a:buClr>
+              <a:buSzPct val="90000"/>
+              <a:buFont typeface="Arial"/>
+              <a:buChar char="–"/>
+            </a:pPr>
+            <a:r>
+              <a:rPr sz="1350" b="0" i="0">
+                <a:solidFill>
+                  <a:srgbClr val="20291F"/>
+                </a:solidFill>
+                <a:latin typeface="Calibri"/>
+              </a:rPr>
+              <a:t>Column grid — vertical divisions for text-heavy layouts (newspapers, editorial)</a:t>
+            </a:r>
+          </a:p>
+          <a:p>
+            <a:pPr indent="-203200" marL="203200">
+              <a:spcAft>
+                <a:spcPts val="900"/>
+              </a:spcAft>
+              <a:buClr>
+                <a:srgbClr val="2F5233"/>
+              </a:buClr>
+              <a:buSzPct val="90000"/>
+              <a:buFont typeface="Arial"/>
+              <a:buChar char="–"/>
+            </a:pPr>
+            <a:r>
+              <a:rPr sz="1350" b="0" i="0">
+                <a:solidFill>
+                  <a:srgbClr val="20291F"/>
+                </a:solidFill>
+                <a:latin typeface="Calibri"/>
+              </a:rPr>
+              <a:t>Modular grid — a grid of consistent modules/cells for complex data-rich layouts</a:t>
+            </a:r>
+          </a:p>
+          <a:p>
+            <a:pPr indent="-203200" marL="203200">
+              <a:spcAft>
+                <a:spcPts val="900"/>
+              </a:spcAft>
+              <a:buClr>
+                <a:srgbClr val="2F5233"/>
+              </a:buClr>
+              <a:buSzPct val="90000"/>
+              <a:buFont typeface="Arial"/>
+              <a:buChar char="–"/>
+            </a:pPr>
+            <a:r>
+              <a:rPr sz="1350" b="0" i="0">
+                <a:solidFill>
+                  <a:srgbClr val="20291F"/>
+                </a:solidFill>
+                <a:latin typeface="Calibri"/>
+              </a:rPr>
+              <a:t>Baseline grid — horizontal lines ensuring consistent vertical rhythm of text across a page</a:t>
+            </a:r>
+          </a:p>
+          <a:p>
+            <a:pPr indent="-203200" marL="203200">
+              <a:spcAft>
+                <a:spcPts val="900"/>
+              </a:spcAft>
+              <a:buClr>
+                <a:srgbClr val="2F5233"/>
+              </a:buClr>
+              <a:buSzPct val="90000"/>
+              <a:buFont typeface="Arial"/>
+              <a:buChar char="●"/>
+            </a:pPr>
+            <a:r>
+              <a:rPr sz="1500" b="1" i="0">
+                <a:solidFill>
+                  <a:srgbClr val="27452B"/>
+                </a:solidFill>
+                <a:latin typeface="Calibri"/>
+              </a:rPr>
+              <a:t>The Swiss grid legacy</a:t>
+            </a:r>
+          </a:p>
+          <a:p>
+            <a:pPr indent="-203200" marL="203200">
+              <a:spcAft>
+                <a:spcPts val="900"/>
+              </a:spcAft>
+              <a:buClr>
+                <a:srgbClr val="2F5233"/>
+              </a:buClr>
+              <a:buSzPct val="90000"/>
+              <a:buFont typeface="Arial"/>
+              <a:buChar char="–"/>
+            </a:pPr>
+            <a:r>
+              <a:rPr sz="1350" b="0" i="0">
+                <a:solidFill>
+                  <a:srgbClr val="20291F"/>
+                </a:solidFill>
+                <a:latin typeface="Calibri"/>
+              </a:rPr>
+              <a:t>The International Typographic Style formalised mathematical grid systems as a tool for objective, universal communication — still the basis of most professional layout software and responsive web design grids today.</a:t>
+            </a:r>
+          </a:p>
+          <a:p>
+            <a:pPr indent="-203200" marL="203200">
+              <a:spcAft>
+                <a:spcPts val="900"/>
+              </a:spcAft>
+              <a:buClr>
+                <a:srgbClr val="2F5233"/>
+              </a:buClr>
+              <a:buSzPct val="90000"/>
+              <a:buFont typeface="Arial"/>
+              <a:buChar char="●"/>
+            </a:pPr>
+            <a:r>
+              <a:rPr sz="1500" b="1" i="0">
+                <a:solidFill>
+                  <a:srgbClr val="27452B"/>
+                </a:solidFill>
+                <a:latin typeface="Calibri"/>
+              </a:rPr>
+              <a:t>Proportion systems</a:t>
+            </a:r>
+          </a:p>
+          <a:p>
+            <a:pPr indent="-203200" marL="203200">
+              <a:spcAft>
+                <a:spcPts val="900"/>
+              </a:spcAft>
+              <a:buClr>
+                <a:srgbClr val="2F5233"/>
+              </a:buClr>
+              <a:buSzPct val="90000"/>
+              <a:buFont typeface="Arial"/>
+              <a:buChar char="–"/>
+            </a:pPr>
+            <a:r>
+              <a:rPr sz="1350" b="0" i="0">
+                <a:solidFill>
+                  <a:srgbClr val="20291F"/>
+                </a:solidFill>
+                <a:latin typeface="Calibri"/>
+              </a:rPr>
+              <a:t>The golden ratio (1:1.618) and the rule of thirds are classical tools for dividing a composition in a way the eye finds naturally balanced — useful vocabulary when analysing or justifying a layout decision.</a:t>
+            </a:r>
+          </a:p>
+        </p:txBody>
+      </p:sp>
+      <p:sp>
+        <p:nvSpPr>
+          <p:cNvPr id="5" name="Oval 4"/>
+          <p:cNvSpPr/>
+          <p:nvPr/>
+        </p:nvSpPr>
+        <p:spPr>
+          <a:xfrm>
+            <a:off x="10881360" y="5943600"/>
+            <a:ext cx="1005840" cy="1005840"/>
+          </a:xfrm>
+          <a:prstGeom prst="ellipse">
+            <a:avLst/>
+          </a:prstGeom>
+          <a:solidFill>
+            <a:srgbClr val="C5D5DB"/>
+          </a:solidFill>
+          <a:ln>
+            <a:noFill/>
+          </a:ln>
+          <a:effectLst/>
+        </p:spPr>
+        <p:style>
+          <a:lnRef idx="1">
+            <a:schemeClr val="accent1"/>
+          </a:lnRef>
+          <a:fillRef idx="3">
+            <a:schemeClr val="accent1"/>
+          </a:fillRef>
+          <a:effectRef idx="2">
+            <a:schemeClr val="accent1"/>
+          </a:effectRef>
+          <a:fontRef idx="minor">
+            <a:schemeClr val="lt1"/>
+          </a:fontRef>
+        </p:style>
+        <p:txBody>
+          <a:bodyPr rtlCol="0" anchor="ctr"/>
+          <a:lstStyle/>
+          <a:p>
+            <a:pPr algn="ctr"/>
+          </a:p>
+        </p:txBody>
+      </p:sp>
+    </p:spTree>
+  </p:cSld>
+  <p:clrMapOvr>
+    <a:masterClrMapping/>
+  </p:clrMapOvr>
+</p:sld>
+</file>
+
+<file path=ppt/slides/slide19.xml><?xml version="1.0" encoding="utf-8"?>
+<p:sld xmlns:a="http://schemas.openxmlformats.org/drawingml/2006/main" xmlns:p="http://schemas.openxmlformats.org/presentationml/2006/main" xmlns:r="http://schemas.openxmlformats.org/officeDocument/2006/relationships">
+  <p:cSld>
+    <p:bg>
+      <p:bgPr>
+        <a:solidFill>
+          <a:srgbClr val="F7F5EC"/>
+        </a:solidFill>
+        <a:effectLst/>
+      </p:bgPr>
+    </p:bg>
+    <p:spTree>
+      <p:nvGrpSpPr>
+        <p:cNvPr id="1" name=""/>
+        <p:cNvGrpSpPr/>
+        <p:nvPr/>
+      </p:nvGrpSpPr>
+      <p:grpSpPr/>
+      <p:sp>
+        <p:nvSpPr>
+          <p:cNvPr id="2" name="Rounded Rectangle 1"/>
+          <p:cNvSpPr/>
+          <p:nvPr/>
+        </p:nvSpPr>
+        <p:spPr>
+          <a:xfrm>
+            <a:off x="685800" y="502920"/>
+            <a:ext cx="3291840" cy="457200"/>
+          </a:xfrm>
+          <a:prstGeom prst="roundRect">
+            <a:avLst>
+              <a:gd name="adj" fmla="val 50000"/>
+            </a:avLst>
+          </a:prstGeom>
+          <a:solidFill>
+            <a:srgbClr val="2F5233"/>
+          </a:solidFill>
+          <a:ln>
+            <a:noFill/>
+          </a:ln>
+          <a:effectLst/>
+        </p:spPr>
+        <p:style>
+          <a:lnRef idx="1">
+            <a:schemeClr val="accent1"/>
+          </a:lnRef>
+          <a:fillRef idx="3">
+            <a:schemeClr val="accent1"/>
+          </a:fillRef>
+          <a:effectRef idx="2">
+            <a:schemeClr val="accent1"/>
+          </a:effectRef>
+          <a:fontRef idx="minor">
+            <a:schemeClr val="lt1"/>
+          </a:fontRef>
+        </p:style>
+        <p:txBody>
+          <a:bodyPr rtlCol="0" anchor="ctr" wrap="none" lIns="50800" rIns="50800"/>
+          <a:lstStyle/>
+          <a:p>
+            <a:pPr algn="ctr"/>
+            <a:r>
+              <a:rPr sz="1100" b="1">
+                <a:solidFill>
+                  <a:srgbClr val="FFFFFF"/>
+                </a:solidFill>
+                <a:latin typeface="Calibri"/>
+              </a:rPr>
+              <a:t>EXTENDED KNOWLEDGE</a:t>
+            </a:r>
+          </a:p>
+        </p:txBody>
+      </p:sp>
+      <p:sp>
+        <p:nvSpPr>
+          <p:cNvPr id="3" name="TextBox 2"/>
+          <p:cNvSpPr txBox="1"/>
+          <p:nvPr/>
+        </p:nvSpPr>
+        <p:spPr>
+          <a:xfrm>
+            <a:off x="685800" y="1051560"/>
+            <a:ext cx="10607040" cy="822960"/>
+          </a:xfrm>
+          <a:prstGeom prst="rect">
+            <a:avLst/>
+          </a:prstGeom>
+          <a:noFill/>
+        </p:spPr>
+        <p:txBody>
+          <a:bodyPr wrap="square" anchor="t">
+            <a:spAutoFit/>
+          </a:bodyPr>
+          <a:lstStyle/>
+          <a:p>
+            <a:pPr algn="l"/>
+            <a:r>
+              <a:rPr sz="2700" b="1" i="0">
+                <a:solidFill>
+                  <a:srgbClr val="20291F"/>
+                </a:solidFill>
+                <a:latin typeface="Cambria"/>
+              </a:rPr>
+              <a:t>Cross-Cultural Design Considerations</a:t>
+            </a:r>
+          </a:p>
+        </p:txBody>
+      </p:sp>
+      <p:sp>
+        <p:nvSpPr>
+          <p:cNvPr id="4" name="Rounded Rectangle 3"/>
+          <p:cNvSpPr/>
+          <p:nvPr/>
+        </p:nvSpPr>
+        <p:spPr>
+          <a:xfrm>
+            <a:off x="685800" y="1874519"/>
+            <a:ext cx="10607040" cy="4526280"/>
+          </a:xfrm>
+          <a:prstGeom prst="roundRect">
+            <a:avLst>
+              <a:gd name="adj" fmla="val 6000"/>
+            </a:avLst>
+          </a:prstGeom>
+          <a:solidFill>
+            <a:srgbClr val="EAEDEA"/>
+          </a:solidFill>
+          <a:ln>
+            <a:noFill/>
+          </a:ln>
+          <a:effectLst/>
+        </p:spPr>
+        <p:style>
+          <a:lnRef idx="1">
+            <a:schemeClr val="accent1"/>
+          </a:lnRef>
+          <a:fillRef idx="3">
+            <a:schemeClr val="accent1"/>
+          </a:fillRef>
+          <a:effectRef idx="2">
+            <a:schemeClr val="accent1"/>
+          </a:effectRef>
+          <a:fontRef idx="minor">
+            <a:schemeClr val="lt1"/>
+          </a:fontRef>
+        </p:style>
+        <p:txBody>
+          <a:bodyPr rtlCol="0" anchor="ctr" lIns="330200" rIns="330200" tIns="254000" bIns="254000" wrap="square"/>
+          <a:lstStyle/>
+          <a:p>
+            <a:pPr algn="ctr" indent="-203200" marL="203200">
+              <a:spcAft>
+                <a:spcPts val="900"/>
+              </a:spcAft>
+              <a:buClr>
+                <a:srgbClr val="2F5233"/>
+              </a:buClr>
+              <a:buSzPct val="90000"/>
+              <a:buFont typeface="Arial"/>
+              <a:buChar char="●"/>
+            </a:pPr>
+            <a:r>
+              <a:rPr sz="1500" b="1" i="0">
+                <a:solidFill>
+                  <a:srgbClr val="27452B"/>
+                </a:solidFill>
+                <a:latin typeface="Calibri"/>
+              </a:rPr>
+              <a:t>Designing for global audiences</a:t>
+            </a:r>
+          </a:p>
+          <a:p>
+            <a:pPr indent="-203200" marL="203200">
+              <a:spcAft>
+                <a:spcPts val="900"/>
+              </a:spcAft>
+              <a:buClr>
+                <a:srgbClr val="2F5233"/>
+              </a:buClr>
+              <a:buSzPct val="90000"/>
+              <a:buFont typeface="Arial"/>
+              <a:buChar char="–"/>
+            </a:pPr>
+            <a:r>
+              <a:rPr sz="1350" b="0" i="0">
+                <a:solidFill>
+                  <a:srgbClr val="20291F"/>
+                </a:solidFill>
+                <a:latin typeface="Calibri"/>
+              </a:rPr>
+              <a:t>Localisation — adapting a design for a specific market (language, imagery, colour meaning)</a:t>
+            </a:r>
+          </a:p>
+          <a:p>
+            <a:pPr indent="-203200" marL="203200">
+              <a:spcAft>
+                <a:spcPts val="900"/>
+              </a:spcAft>
+              <a:buClr>
+                <a:srgbClr val="2F5233"/>
+              </a:buClr>
+              <a:buSzPct val="90000"/>
+              <a:buFont typeface="Arial"/>
+              <a:buChar char="–"/>
+            </a:pPr>
+            <a:r>
+              <a:rPr sz="1350" b="0" i="0">
+                <a:solidFill>
+                  <a:srgbClr val="20291F"/>
+                </a:solidFill>
+                <a:latin typeface="Calibri"/>
+              </a:rPr>
+              <a:t>Internationalisation — designing a flexible system that can be localised efficiently</a:t>
+            </a:r>
+          </a:p>
+          <a:p>
+            <a:pPr indent="-203200" marL="203200">
+              <a:spcAft>
+                <a:spcPts val="900"/>
+              </a:spcAft>
+              <a:buClr>
+                <a:srgbClr val="2F5233"/>
+              </a:buClr>
+              <a:buSzPct val="90000"/>
+              <a:buFont typeface="Arial"/>
+              <a:buChar char="–"/>
+            </a:pPr>
+            <a:r>
+              <a:rPr sz="1350" b="0" i="0">
+                <a:solidFill>
+                  <a:srgbClr val="20291F"/>
+                </a:solidFill>
+                <a:latin typeface="Calibri"/>
+              </a:rPr>
+              <a:t>Symbol meaning varies by culture — always research target-market conventions before reusing a symbol or gesture in a new context</a:t>
+            </a:r>
+          </a:p>
+        </p:txBody>
+      </p:sp>
+      <p:sp>
+        <p:nvSpPr>
+          <p:cNvPr id="5" name="Oval 4"/>
+          <p:cNvSpPr/>
+          <p:nvPr/>
+        </p:nvSpPr>
+        <p:spPr>
+          <a:xfrm>
+            <a:off x="10881360" y="5943600"/>
+            <a:ext cx="1005840" cy="1005840"/>
+          </a:xfrm>
+          <a:prstGeom prst="ellipse">
+            <a:avLst/>
+          </a:prstGeom>
+          <a:solidFill>
+            <a:srgbClr val="C5D5DB"/>
+          </a:solidFill>
+          <a:ln>
+            <a:noFill/>
+          </a:ln>
+          <a:effectLst/>
+        </p:spPr>
+        <p:style>
+          <a:lnRef idx="1">
+            <a:schemeClr val="accent1"/>
+          </a:lnRef>
+          <a:fillRef idx="3">
+            <a:schemeClr val="accent1"/>
+          </a:fillRef>
+          <a:effectRef idx="2">
+            <a:schemeClr val="accent1"/>
+          </a:effectRef>
+          <a:fontRef idx="minor">
+            <a:schemeClr val="lt1"/>
+          </a:fontRef>
+        </p:style>
+        <p:txBody>
+          <a:bodyPr rtlCol="0" anchor="ctr"/>
+          <a:lstStyle/>
+          <a:p>
+            <a:pPr algn="ctr"/>
           </a:p>
         </p:txBody>
       </p:sp>
@@ -6477,6 +7553,2278 @@
                 <a:latin typeface="Calibri"/>
               </a:rPr>
               <a:t>AOS 1 - Analysis and Practice in Context</a:t>
+            </a:r>
+          </a:p>
+        </p:txBody>
+      </p:sp>
+    </p:spTree>
+  </p:cSld>
+  <p:clrMapOvr>
+    <a:masterClrMapping/>
+  </p:clrMapOvr>
+</p:sld>
+</file>
+
+<file path=ppt/slides/slide20.xml><?xml version="1.0" encoding="utf-8"?>
+<p:sld xmlns:a="http://schemas.openxmlformats.org/drawingml/2006/main" xmlns:p="http://schemas.openxmlformats.org/presentationml/2006/main" xmlns:r="http://schemas.openxmlformats.org/officeDocument/2006/relationships">
+  <p:cSld>
+    <p:bg>
+      <p:bgPr>
+        <a:solidFill>
+          <a:srgbClr val="F7F5EC"/>
+        </a:solidFill>
+        <a:effectLst/>
+      </p:bgPr>
+    </p:bg>
+    <p:spTree>
+      <p:nvGrpSpPr>
+        <p:cNvPr id="1" name=""/>
+        <p:cNvGrpSpPr/>
+        <p:nvPr/>
+      </p:nvGrpSpPr>
+      <p:grpSpPr/>
+      <p:sp>
+        <p:nvSpPr>
+          <p:cNvPr id="2" name="Rounded Rectangle 1"/>
+          <p:cNvSpPr/>
+          <p:nvPr/>
+        </p:nvSpPr>
+        <p:spPr>
+          <a:xfrm>
+            <a:off x="685800" y="502920"/>
+            <a:ext cx="3291840" cy="457200"/>
+          </a:xfrm>
+          <a:prstGeom prst="roundRect">
+            <a:avLst>
+              <a:gd name="adj" fmla="val 50000"/>
+            </a:avLst>
+          </a:prstGeom>
+          <a:solidFill>
+            <a:srgbClr val="2F5233"/>
+          </a:solidFill>
+          <a:ln>
+            <a:noFill/>
+          </a:ln>
+          <a:effectLst/>
+        </p:spPr>
+        <p:style>
+          <a:lnRef idx="1">
+            <a:schemeClr val="accent1"/>
+          </a:lnRef>
+          <a:fillRef idx="3">
+            <a:schemeClr val="accent1"/>
+          </a:fillRef>
+          <a:effectRef idx="2">
+            <a:schemeClr val="accent1"/>
+          </a:effectRef>
+          <a:fontRef idx="minor">
+            <a:schemeClr val="lt1"/>
+          </a:fontRef>
+        </p:style>
+        <p:txBody>
+          <a:bodyPr rtlCol="0" anchor="ctr" wrap="none" lIns="50800" rIns="50800"/>
+          <a:lstStyle/>
+          <a:p>
+            <a:pPr algn="ctr"/>
+            <a:r>
+              <a:rPr sz="1100" b="1">
+                <a:solidFill>
+                  <a:srgbClr val="FFFFFF"/>
+                </a:solidFill>
+                <a:latin typeface="Calibri"/>
+              </a:rPr>
+              <a:t>EXTENDED KNOWLEDGE</a:t>
+            </a:r>
+          </a:p>
+        </p:txBody>
+      </p:sp>
+      <p:sp>
+        <p:nvSpPr>
+          <p:cNvPr id="3" name="TextBox 2"/>
+          <p:cNvSpPr txBox="1"/>
+          <p:nvPr/>
+        </p:nvSpPr>
+        <p:spPr>
+          <a:xfrm>
+            <a:off x="685800" y="1051560"/>
+            <a:ext cx="10607040" cy="822960"/>
+          </a:xfrm>
+          <a:prstGeom prst="rect">
+            <a:avLst/>
+          </a:prstGeom>
+          <a:noFill/>
+        </p:spPr>
+        <p:txBody>
+          <a:bodyPr wrap="square" anchor="t">
+            <a:spAutoFit/>
+          </a:bodyPr>
+          <a:lstStyle/>
+          <a:p>
+            <a:pPr algn="l"/>
+            <a:r>
+              <a:rPr sz="2700" b="1" i="0">
+                <a:solidFill>
+                  <a:srgbClr val="20291F"/>
+                </a:solidFill>
+                <a:latin typeface="Cambria"/>
+              </a:rPr>
+              <a:t>Research Methods for Designers</a:t>
+            </a:r>
+          </a:p>
+        </p:txBody>
+      </p:sp>
+      <p:sp>
+        <p:nvSpPr>
+          <p:cNvPr id="4" name="Rounded Rectangle 3"/>
+          <p:cNvSpPr/>
+          <p:nvPr/>
+        </p:nvSpPr>
+        <p:spPr>
+          <a:xfrm>
+            <a:off x="685800" y="1874519"/>
+            <a:ext cx="10607040" cy="4526280"/>
+          </a:xfrm>
+          <a:prstGeom prst="roundRect">
+            <a:avLst>
+              <a:gd name="adj" fmla="val 6000"/>
+            </a:avLst>
+          </a:prstGeom>
+          <a:solidFill>
+            <a:srgbClr val="EAEDEA"/>
+          </a:solidFill>
+          <a:ln>
+            <a:noFill/>
+          </a:ln>
+          <a:effectLst/>
+        </p:spPr>
+        <p:style>
+          <a:lnRef idx="1">
+            <a:schemeClr val="accent1"/>
+          </a:lnRef>
+          <a:fillRef idx="3">
+            <a:schemeClr val="accent1"/>
+          </a:fillRef>
+          <a:effectRef idx="2">
+            <a:schemeClr val="accent1"/>
+          </a:effectRef>
+          <a:fontRef idx="minor">
+            <a:schemeClr val="lt1"/>
+          </a:fontRef>
+        </p:style>
+        <p:txBody>
+          <a:bodyPr rtlCol="0" anchor="ctr" lIns="330200" rIns="330200" tIns="254000" bIns="254000" wrap="square"/>
+          <a:lstStyle/>
+          <a:p>
+            <a:pPr algn="ctr" indent="-203200" marL="203200">
+              <a:spcAft>
+                <a:spcPts val="900"/>
+              </a:spcAft>
+              <a:buClr>
+                <a:srgbClr val="2F5233"/>
+              </a:buClr>
+              <a:buSzPct val="90000"/>
+              <a:buFont typeface="Arial"/>
+              <a:buChar char="●"/>
+            </a:pPr>
+            <a:r>
+              <a:rPr sz="1500" b="1" i="0">
+                <a:solidFill>
+                  <a:srgbClr val="27452B"/>
+                </a:solidFill>
+                <a:latin typeface="Calibri"/>
+              </a:rPr>
+              <a:t>Qualitative vs quantitative</a:t>
+            </a:r>
+          </a:p>
+          <a:p>
+            <a:pPr indent="-203200" marL="203200">
+              <a:spcAft>
+                <a:spcPts val="900"/>
+              </a:spcAft>
+              <a:buClr>
+                <a:srgbClr val="2F5233"/>
+              </a:buClr>
+              <a:buSzPct val="90000"/>
+              <a:buFont typeface="Arial"/>
+              <a:buChar char="–"/>
+            </a:pPr>
+            <a:r>
+              <a:rPr sz="1350" b="0" i="0">
+                <a:solidFill>
+                  <a:srgbClr val="20291F"/>
+                </a:solidFill>
+                <a:latin typeface="Calibri"/>
+              </a:rPr>
+              <a:t>Qualitative research (interviews, observation) reveals why users behave a certain way; quantitative research (surveys, analytics) reveals how many/how often. Strong design research typically combines both.</a:t>
+            </a:r>
+          </a:p>
+          <a:p>
+            <a:pPr indent="-203200" marL="203200">
+              <a:spcAft>
+                <a:spcPts val="900"/>
+              </a:spcAft>
+              <a:buClr>
+                <a:srgbClr val="2F5233"/>
+              </a:buClr>
+              <a:buSzPct val="90000"/>
+              <a:buFont typeface="Arial"/>
+              <a:buChar char="●"/>
+            </a:pPr>
+            <a:r>
+              <a:rPr sz="1500" b="1" i="0">
+                <a:solidFill>
+                  <a:srgbClr val="27452B"/>
+                </a:solidFill>
+                <a:latin typeface="Calibri"/>
+              </a:rPr>
+              <a:t>Other useful methods</a:t>
+            </a:r>
+          </a:p>
+          <a:p>
+            <a:pPr indent="-203200" marL="203200">
+              <a:spcAft>
+                <a:spcPts val="900"/>
+              </a:spcAft>
+              <a:buClr>
+                <a:srgbClr val="2F5233"/>
+              </a:buClr>
+              <a:buSzPct val="90000"/>
+              <a:buFont typeface="Arial"/>
+              <a:buChar char="–"/>
+            </a:pPr>
+            <a:r>
+              <a:rPr sz="1350" b="0" i="0">
+                <a:solidFill>
+                  <a:srgbClr val="20291F"/>
+                </a:solidFill>
+                <a:latin typeface="Calibri"/>
+              </a:rPr>
+              <a:t>Empathy mapping — documenting what a user says, thinks, feels and does</a:t>
+            </a:r>
+          </a:p>
+          <a:p>
+            <a:pPr indent="-203200" marL="203200">
+              <a:spcAft>
+                <a:spcPts val="900"/>
+              </a:spcAft>
+              <a:buClr>
+                <a:srgbClr val="2F5233"/>
+              </a:buClr>
+              <a:buSzPct val="90000"/>
+              <a:buFont typeface="Arial"/>
+              <a:buChar char="–"/>
+            </a:pPr>
+            <a:r>
+              <a:rPr sz="1350" b="0" i="0">
+                <a:solidFill>
+                  <a:srgbClr val="20291F"/>
+                </a:solidFill>
+                <a:latin typeface="Calibri"/>
+              </a:rPr>
+              <a:t>Competitive analysis — reviewing existing solutions to identify gaps and opportunities</a:t>
+            </a:r>
+          </a:p>
+          <a:p>
+            <a:pPr indent="-203200" marL="203200">
+              <a:spcAft>
+                <a:spcPts val="900"/>
+              </a:spcAft>
+              <a:buClr>
+                <a:srgbClr val="2F5233"/>
+              </a:buClr>
+              <a:buSzPct val="90000"/>
+              <a:buFont typeface="Arial"/>
+              <a:buChar char="–"/>
+            </a:pPr>
+            <a:r>
+              <a:rPr sz="1350" b="0" i="0">
+                <a:solidFill>
+                  <a:srgbClr val="20291F"/>
+                </a:solidFill>
+                <a:latin typeface="Calibri"/>
+              </a:rPr>
+              <a:t>Mood boards — curated visual references establishing tone, palette and style direction</a:t>
+            </a:r>
+          </a:p>
+        </p:txBody>
+      </p:sp>
+      <p:sp>
+        <p:nvSpPr>
+          <p:cNvPr id="5" name="Oval 4"/>
+          <p:cNvSpPr/>
+          <p:nvPr/>
+        </p:nvSpPr>
+        <p:spPr>
+          <a:xfrm>
+            <a:off x="10881360" y="5943600"/>
+            <a:ext cx="1005840" cy="1005840"/>
+          </a:xfrm>
+          <a:prstGeom prst="ellipse">
+            <a:avLst/>
+          </a:prstGeom>
+          <a:solidFill>
+            <a:srgbClr val="C5D5DB"/>
+          </a:solidFill>
+          <a:ln>
+            <a:noFill/>
+          </a:ln>
+          <a:effectLst/>
+        </p:spPr>
+        <p:style>
+          <a:lnRef idx="1">
+            <a:schemeClr val="accent1"/>
+          </a:lnRef>
+          <a:fillRef idx="3">
+            <a:schemeClr val="accent1"/>
+          </a:fillRef>
+          <a:effectRef idx="2">
+            <a:schemeClr val="accent1"/>
+          </a:effectRef>
+          <a:fontRef idx="minor">
+            <a:schemeClr val="lt1"/>
+          </a:fontRef>
+        </p:style>
+        <p:txBody>
+          <a:bodyPr rtlCol="0" anchor="ctr"/>
+          <a:lstStyle/>
+          <a:p>
+            <a:pPr algn="ctr"/>
+          </a:p>
+        </p:txBody>
+      </p:sp>
+    </p:spTree>
+  </p:cSld>
+  <p:clrMapOvr>
+    <a:masterClrMapping/>
+  </p:clrMapOvr>
+</p:sld>
+</file>
+
+<file path=ppt/slides/slide21.xml><?xml version="1.0" encoding="utf-8"?>
+<p:sld xmlns:a="http://schemas.openxmlformats.org/drawingml/2006/main" xmlns:p="http://schemas.openxmlformats.org/presentationml/2006/main" xmlns:r="http://schemas.openxmlformats.org/officeDocument/2006/relationships">
+  <p:cSld>
+    <p:bg>
+      <p:bgPr>
+        <a:solidFill>
+          <a:srgbClr val="F7F5EC"/>
+        </a:solidFill>
+        <a:effectLst/>
+      </p:bgPr>
+    </p:bg>
+    <p:spTree>
+      <p:nvGrpSpPr>
+        <p:cNvPr id="1" name=""/>
+        <p:cNvGrpSpPr/>
+        <p:nvPr/>
+      </p:nvGrpSpPr>
+      <p:grpSpPr/>
+      <p:sp>
+        <p:nvSpPr>
+          <p:cNvPr id="2" name="Rounded Rectangle 1"/>
+          <p:cNvSpPr/>
+          <p:nvPr/>
+        </p:nvSpPr>
+        <p:spPr>
+          <a:xfrm>
+            <a:off x="685800" y="502920"/>
+            <a:ext cx="3291840" cy="457200"/>
+          </a:xfrm>
+          <a:prstGeom prst="roundRect">
+            <a:avLst>
+              <a:gd name="adj" fmla="val 50000"/>
+            </a:avLst>
+          </a:prstGeom>
+          <a:solidFill>
+            <a:srgbClr val="2F5233"/>
+          </a:solidFill>
+          <a:ln>
+            <a:noFill/>
+          </a:ln>
+          <a:effectLst/>
+        </p:spPr>
+        <p:style>
+          <a:lnRef idx="1">
+            <a:schemeClr val="accent1"/>
+          </a:lnRef>
+          <a:fillRef idx="3">
+            <a:schemeClr val="accent1"/>
+          </a:fillRef>
+          <a:effectRef idx="2">
+            <a:schemeClr val="accent1"/>
+          </a:effectRef>
+          <a:fontRef idx="minor">
+            <a:schemeClr val="lt1"/>
+          </a:fontRef>
+        </p:style>
+        <p:txBody>
+          <a:bodyPr rtlCol="0" anchor="ctr" wrap="none" lIns="50800" rIns="50800"/>
+          <a:lstStyle/>
+          <a:p>
+            <a:pPr algn="ctr"/>
+            <a:r>
+              <a:rPr sz="1100" b="1">
+                <a:solidFill>
+                  <a:srgbClr val="FFFFFF"/>
+                </a:solidFill>
+                <a:latin typeface="Calibri"/>
+              </a:rPr>
+              <a:t>EXTENDED KNOWLEDGE</a:t>
+            </a:r>
+          </a:p>
+        </p:txBody>
+      </p:sp>
+      <p:sp>
+        <p:nvSpPr>
+          <p:cNvPr id="3" name="TextBox 2"/>
+          <p:cNvSpPr txBox="1"/>
+          <p:nvPr/>
+        </p:nvSpPr>
+        <p:spPr>
+          <a:xfrm>
+            <a:off x="685800" y="1051560"/>
+            <a:ext cx="10607040" cy="822960"/>
+          </a:xfrm>
+          <a:prstGeom prst="rect">
+            <a:avLst/>
+          </a:prstGeom>
+          <a:noFill/>
+        </p:spPr>
+        <p:txBody>
+          <a:bodyPr wrap="square" anchor="t">
+            <a:spAutoFit/>
+          </a:bodyPr>
+          <a:lstStyle/>
+          <a:p>
+            <a:pPr algn="l"/>
+            <a:r>
+              <a:rPr sz="2700" b="1" i="0">
+                <a:solidFill>
+                  <a:srgbClr val="20291F"/>
+                </a:solidFill>
+                <a:latin typeface="Cambria"/>
+              </a:rPr>
+              <a:t>Ideation Techniques Beyond Brainstorming</a:t>
+            </a:r>
+          </a:p>
+        </p:txBody>
+      </p:sp>
+      <p:sp>
+        <p:nvSpPr>
+          <p:cNvPr id="4" name="Rounded Rectangle 3"/>
+          <p:cNvSpPr/>
+          <p:nvPr/>
+        </p:nvSpPr>
+        <p:spPr>
+          <a:xfrm>
+            <a:off x="685800" y="1874519"/>
+            <a:ext cx="10607040" cy="4526280"/>
+          </a:xfrm>
+          <a:prstGeom prst="roundRect">
+            <a:avLst>
+              <a:gd name="adj" fmla="val 6000"/>
+            </a:avLst>
+          </a:prstGeom>
+          <a:solidFill>
+            <a:srgbClr val="EAEDEA"/>
+          </a:solidFill>
+          <a:ln>
+            <a:noFill/>
+          </a:ln>
+          <a:effectLst/>
+        </p:spPr>
+        <p:style>
+          <a:lnRef idx="1">
+            <a:schemeClr val="accent1"/>
+          </a:lnRef>
+          <a:fillRef idx="3">
+            <a:schemeClr val="accent1"/>
+          </a:fillRef>
+          <a:effectRef idx="2">
+            <a:schemeClr val="accent1"/>
+          </a:effectRef>
+          <a:fontRef idx="minor">
+            <a:schemeClr val="lt1"/>
+          </a:fontRef>
+        </p:style>
+        <p:txBody>
+          <a:bodyPr rtlCol="0" anchor="ctr" lIns="330200" rIns="330200" tIns="254000" bIns="254000" wrap="square"/>
+          <a:lstStyle/>
+          <a:p>
+            <a:pPr algn="ctr" indent="-203200" marL="203200">
+              <a:spcAft>
+                <a:spcPts val="900"/>
+              </a:spcAft>
+              <a:buClr>
+                <a:srgbClr val="2F5233"/>
+              </a:buClr>
+              <a:buSzPct val="90000"/>
+              <a:buFont typeface="Arial"/>
+              <a:buChar char="●"/>
+            </a:pPr>
+            <a:r>
+              <a:rPr sz="1500" b="1" i="0">
+                <a:solidFill>
+                  <a:srgbClr val="27452B"/>
+                </a:solidFill>
+                <a:latin typeface="Calibri"/>
+              </a:rPr>
+              <a:t>Structured ideation methods</a:t>
+            </a:r>
+          </a:p>
+          <a:p>
+            <a:pPr indent="-203200" marL="203200">
+              <a:spcAft>
+                <a:spcPts val="900"/>
+              </a:spcAft>
+              <a:buClr>
+                <a:srgbClr val="2F5233"/>
+              </a:buClr>
+              <a:buSzPct val="90000"/>
+              <a:buFont typeface="Arial"/>
+              <a:buChar char="–"/>
+            </a:pPr>
+            <a:r>
+              <a:rPr sz="1350" b="0" i="0">
+                <a:solidFill>
+                  <a:srgbClr val="20291F"/>
+                </a:solidFill>
+                <a:latin typeface="Calibri"/>
+              </a:rPr>
+              <a:t>SCAMPER — Substitute, Combine, Adapt, Modify, Put to other use, Eliminate, Reverse</a:t>
+            </a:r>
+          </a:p>
+          <a:p>
+            <a:pPr indent="-203200" marL="203200">
+              <a:spcAft>
+                <a:spcPts val="900"/>
+              </a:spcAft>
+              <a:buClr>
+                <a:srgbClr val="2F5233"/>
+              </a:buClr>
+              <a:buSzPct val="90000"/>
+              <a:buFont typeface="Arial"/>
+              <a:buChar char="–"/>
+            </a:pPr>
+            <a:r>
+              <a:rPr sz="1350" b="0" i="0">
+                <a:solidFill>
+                  <a:srgbClr val="20291F"/>
+                </a:solidFill>
+                <a:latin typeface="Calibri"/>
+              </a:rPr>
+              <a:t>Crazy 8s — sketch 8 distinct ideas in 8 minutes to force rapid divergent thinking</a:t>
+            </a:r>
+          </a:p>
+          <a:p>
+            <a:pPr indent="-203200" marL="203200">
+              <a:spcAft>
+                <a:spcPts val="900"/>
+              </a:spcAft>
+              <a:buClr>
+                <a:srgbClr val="2F5233"/>
+              </a:buClr>
+              <a:buSzPct val="90000"/>
+              <a:buFont typeface="Arial"/>
+              <a:buChar char="–"/>
+            </a:pPr>
+            <a:r>
+              <a:rPr sz="1350" b="0" i="0">
+                <a:solidFill>
+                  <a:srgbClr val="20291F"/>
+                </a:solidFill>
+                <a:latin typeface="Calibri"/>
+              </a:rPr>
+              <a:t>Worst possible idea — deliberately generating bad ideas to break fixation and spark humour-led insight</a:t>
+            </a:r>
+          </a:p>
+          <a:p>
+            <a:pPr indent="-203200" marL="203200">
+              <a:spcAft>
+                <a:spcPts val="900"/>
+              </a:spcAft>
+              <a:buClr>
+                <a:srgbClr val="2F5233"/>
+              </a:buClr>
+              <a:buSzPct val="90000"/>
+              <a:buFont typeface="Arial"/>
+              <a:buChar char="–"/>
+            </a:pPr>
+            <a:r>
+              <a:rPr sz="1350" b="0" i="0">
+                <a:solidFill>
+                  <a:srgbClr val="20291F"/>
+                </a:solidFill>
+                <a:latin typeface="Calibri"/>
+              </a:rPr>
+              <a:t>Biomimicry as ideation — asking 'how would nature solve this?'</a:t>
+            </a:r>
+          </a:p>
+        </p:txBody>
+      </p:sp>
+      <p:sp>
+        <p:nvSpPr>
+          <p:cNvPr id="5" name="Oval 4"/>
+          <p:cNvSpPr/>
+          <p:nvPr/>
+        </p:nvSpPr>
+        <p:spPr>
+          <a:xfrm>
+            <a:off x="10881360" y="5943600"/>
+            <a:ext cx="1005840" cy="1005840"/>
+          </a:xfrm>
+          <a:prstGeom prst="ellipse">
+            <a:avLst/>
+          </a:prstGeom>
+          <a:solidFill>
+            <a:srgbClr val="C5D5DB"/>
+          </a:solidFill>
+          <a:ln>
+            <a:noFill/>
+          </a:ln>
+          <a:effectLst/>
+        </p:spPr>
+        <p:style>
+          <a:lnRef idx="1">
+            <a:schemeClr val="accent1"/>
+          </a:lnRef>
+          <a:fillRef idx="3">
+            <a:schemeClr val="accent1"/>
+          </a:fillRef>
+          <a:effectRef idx="2">
+            <a:schemeClr val="accent1"/>
+          </a:effectRef>
+          <a:fontRef idx="minor">
+            <a:schemeClr val="lt1"/>
+          </a:fontRef>
+        </p:style>
+        <p:txBody>
+          <a:bodyPr rtlCol="0" anchor="ctr"/>
+          <a:lstStyle/>
+          <a:p>
+            <a:pPr algn="ctr"/>
+          </a:p>
+        </p:txBody>
+      </p:sp>
+    </p:spTree>
+  </p:cSld>
+  <p:clrMapOvr>
+    <a:masterClrMapping/>
+  </p:clrMapOvr>
+</p:sld>
+</file>
+
+<file path=ppt/slides/slide22.xml><?xml version="1.0" encoding="utf-8"?>
+<p:sld xmlns:a="http://schemas.openxmlformats.org/drawingml/2006/main" xmlns:p="http://schemas.openxmlformats.org/presentationml/2006/main" xmlns:r="http://schemas.openxmlformats.org/officeDocument/2006/relationships">
+  <p:cSld>
+    <p:bg>
+      <p:bgPr>
+        <a:solidFill>
+          <a:srgbClr val="F7F5EC"/>
+        </a:solidFill>
+        <a:effectLst/>
+      </p:bgPr>
+    </p:bg>
+    <p:spTree>
+      <p:nvGrpSpPr>
+        <p:cNvPr id="1" name=""/>
+        <p:cNvGrpSpPr/>
+        <p:nvPr/>
+      </p:nvGrpSpPr>
+      <p:grpSpPr/>
+      <p:sp>
+        <p:nvSpPr>
+          <p:cNvPr id="2" name="Rounded Rectangle 1"/>
+          <p:cNvSpPr/>
+          <p:nvPr/>
+        </p:nvSpPr>
+        <p:spPr>
+          <a:xfrm>
+            <a:off x="685800" y="502920"/>
+            <a:ext cx="3291840" cy="457200"/>
+          </a:xfrm>
+          <a:prstGeom prst="roundRect">
+            <a:avLst>
+              <a:gd name="adj" fmla="val 50000"/>
+            </a:avLst>
+          </a:prstGeom>
+          <a:solidFill>
+            <a:srgbClr val="2F5233"/>
+          </a:solidFill>
+          <a:ln>
+            <a:noFill/>
+          </a:ln>
+          <a:effectLst/>
+        </p:spPr>
+        <p:style>
+          <a:lnRef idx="1">
+            <a:schemeClr val="accent1"/>
+          </a:lnRef>
+          <a:fillRef idx="3">
+            <a:schemeClr val="accent1"/>
+          </a:fillRef>
+          <a:effectRef idx="2">
+            <a:schemeClr val="accent1"/>
+          </a:effectRef>
+          <a:fontRef idx="minor">
+            <a:schemeClr val="lt1"/>
+          </a:fontRef>
+        </p:style>
+        <p:txBody>
+          <a:bodyPr rtlCol="0" anchor="ctr" wrap="none" lIns="50800" rIns="50800"/>
+          <a:lstStyle/>
+          <a:p>
+            <a:pPr algn="ctr"/>
+            <a:r>
+              <a:rPr sz="1100" b="1">
+                <a:solidFill>
+                  <a:srgbClr val="FFFFFF"/>
+                </a:solidFill>
+                <a:latin typeface="Calibri"/>
+              </a:rPr>
+              <a:t>EXTENDED KNOWLEDGE</a:t>
+            </a:r>
+          </a:p>
+        </p:txBody>
+      </p:sp>
+      <p:sp>
+        <p:nvSpPr>
+          <p:cNvPr id="3" name="TextBox 2"/>
+          <p:cNvSpPr txBox="1"/>
+          <p:nvPr/>
+        </p:nvSpPr>
+        <p:spPr>
+          <a:xfrm>
+            <a:off x="685800" y="1051560"/>
+            <a:ext cx="10607040" cy="822960"/>
+          </a:xfrm>
+          <a:prstGeom prst="rect">
+            <a:avLst/>
+          </a:prstGeom>
+          <a:noFill/>
+        </p:spPr>
+        <p:txBody>
+          <a:bodyPr wrap="square" anchor="t">
+            <a:spAutoFit/>
+          </a:bodyPr>
+          <a:lstStyle/>
+          <a:p>
+            <a:pPr algn="l"/>
+            <a:r>
+              <a:rPr sz="2700" b="1" i="0">
+                <a:solidFill>
+                  <a:srgbClr val="20291F"/>
+                </a:solidFill>
+                <a:latin typeface="Cambria"/>
+              </a:rPr>
+              <a:t>Presenting and Pitching Design Concepts</a:t>
+            </a:r>
+          </a:p>
+        </p:txBody>
+      </p:sp>
+      <p:sp>
+        <p:nvSpPr>
+          <p:cNvPr id="4" name="Rounded Rectangle 3"/>
+          <p:cNvSpPr/>
+          <p:nvPr/>
+        </p:nvSpPr>
+        <p:spPr>
+          <a:xfrm>
+            <a:off x="685800" y="1874519"/>
+            <a:ext cx="10607040" cy="4526280"/>
+          </a:xfrm>
+          <a:prstGeom prst="roundRect">
+            <a:avLst>
+              <a:gd name="adj" fmla="val 6000"/>
+            </a:avLst>
+          </a:prstGeom>
+          <a:solidFill>
+            <a:srgbClr val="EAEDEA"/>
+          </a:solidFill>
+          <a:ln>
+            <a:noFill/>
+          </a:ln>
+          <a:effectLst/>
+        </p:spPr>
+        <p:style>
+          <a:lnRef idx="1">
+            <a:schemeClr val="accent1"/>
+          </a:lnRef>
+          <a:fillRef idx="3">
+            <a:schemeClr val="accent1"/>
+          </a:fillRef>
+          <a:effectRef idx="2">
+            <a:schemeClr val="accent1"/>
+          </a:effectRef>
+          <a:fontRef idx="minor">
+            <a:schemeClr val="lt1"/>
+          </a:fontRef>
+        </p:style>
+        <p:txBody>
+          <a:bodyPr rtlCol="0" anchor="ctr" lIns="330200" rIns="330200" tIns="254000" bIns="254000" wrap="square"/>
+          <a:lstStyle/>
+          <a:p>
+            <a:pPr algn="ctr" indent="-203200" marL="203200">
+              <a:spcAft>
+                <a:spcPts val="900"/>
+              </a:spcAft>
+              <a:buClr>
+                <a:srgbClr val="2F5233"/>
+              </a:buClr>
+              <a:buSzPct val="90000"/>
+              <a:buFont typeface="Arial"/>
+              <a:buChar char="●"/>
+            </a:pPr>
+            <a:r>
+              <a:rPr sz="1500" b="1" i="0">
+                <a:solidFill>
+                  <a:srgbClr val="27452B"/>
+                </a:solidFill>
+                <a:latin typeface="Calibri"/>
+              </a:rPr>
+              <a:t>Communicating design decisions</a:t>
+            </a:r>
+          </a:p>
+          <a:p>
+            <a:pPr indent="-203200" marL="203200">
+              <a:spcAft>
+                <a:spcPts val="900"/>
+              </a:spcAft>
+              <a:buClr>
+                <a:srgbClr val="2F5233"/>
+              </a:buClr>
+              <a:buSzPct val="90000"/>
+              <a:buFont typeface="Arial"/>
+              <a:buChar char="–"/>
+            </a:pPr>
+            <a:r>
+              <a:rPr sz="1350" b="0" i="0">
+                <a:solidFill>
+                  <a:srgbClr val="20291F"/>
+                </a:solidFill>
+                <a:latin typeface="Calibri"/>
+              </a:rPr>
+              <a:t>Professional designers frame concepts as a story: the problem, the insight, the solution, the expected impact — rather than simply describing what was made. Practising this framing strengthens folio annotations and oral presentation of concepts.</a:t>
+            </a:r>
+          </a:p>
+        </p:txBody>
+      </p:sp>
+      <p:sp>
+        <p:nvSpPr>
+          <p:cNvPr id="5" name="Oval 4"/>
+          <p:cNvSpPr/>
+          <p:nvPr/>
+        </p:nvSpPr>
+        <p:spPr>
+          <a:xfrm>
+            <a:off x="10881360" y="5943600"/>
+            <a:ext cx="1005840" cy="1005840"/>
+          </a:xfrm>
+          <a:prstGeom prst="ellipse">
+            <a:avLst/>
+          </a:prstGeom>
+          <a:solidFill>
+            <a:srgbClr val="C5D5DB"/>
+          </a:solidFill>
+          <a:ln>
+            <a:noFill/>
+          </a:ln>
+          <a:effectLst/>
+        </p:spPr>
+        <p:style>
+          <a:lnRef idx="1">
+            <a:schemeClr val="accent1"/>
+          </a:lnRef>
+          <a:fillRef idx="3">
+            <a:schemeClr val="accent1"/>
+          </a:fillRef>
+          <a:effectRef idx="2">
+            <a:schemeClr val="accent1"/>
+          </a:effectRef>
+          <a:fontRef idx="minor">
+            <a:schemeClr val="lt1"/>
+          </a:fontRef>
+        </p:style>
+        <p:txBody>
+          <a:bodyPr rtlCol="0" anchor="ctr"/>
+          <a:lstStyle/>
+          <a:p>
+            <a:pPr algn="ctr"/>
+          </a:p>
+        </p:txBody>
+      </p:sp>
+    </p:spTree>
+  </p:cSld>
+  <p:clrMapOvr>
+    <a:masterClrMapping/>
+  </p:clrMapOvr>
+</p:sld>
+</file>
+
+<file path=ppt/slides/slide23.xml><?xml version="1.0" encoding="utf-8"?>
+<p:sld xmlns:a="http://schemas.openxmlformats.org/drawingml/2006/main" xmlns:p="http://schemas.openxmlformats.org/presentationml/2006/main" xmlns:r="http://schemas.openxmlformats.org/officeDocument/2006/relationships">
+  <p:cSld>
+    <p:bg>
+      <p:bgPr>
+        <a:solidFill>
+          <a:srgbClr val="2F5233"/>
+        </a:solidFill>
+        <a:effectLst/>
+      </p:bgPr>
+    </p:bg>
+    <p:spTree>
+      <p:nvGrpSpPr>
+        <p:cNvPr id="1" name=""/>
+        <p:cNvGrpSpPr/>
+        <p:nvPr/>
+      </p:nvGrpSpPr>
+      <p:grpSpPr/>
+      <p:sp>
+        <p:nvSpPr>
+          <p:cNvPr id="2" name="Oval 1"/>
+          <p:cNvSpPr/>
+          <p:nvPr/>
+        </p:nvSpPr>
+        <p:spPr>
+          <a:xfrm>
+            <a:off x="9692640" y="-914400"/>
+            <a:ext cx="2926080" cy="2926080"/>
+          </a:xfrm>
+          <a:prstGeom prst="ellipse">
+            <a:avLst/>
+          </a:prstGeom>
+          <a:solidFill>
+            <a:srgbClr val="29482C"/>
+          </a:solidFill>
+          <a:ln>
+            <a:noFill/>
+          </a:ln>
+          <a:effectLst/>
+        </p:spPr>
+        <p:style>
+          <a:lnRef idx="1">
+            <a:schemeClr val="accent1"/>
+          </a:lnRef>
+          <a:fillRef idx="3">
+            <a:schemeClr val="accent1"/>
+          </a:fillRef>
+          <a:effectRef idx="2">
+            <a:schemeClr val="accent1"/>
+          </a:effectRef>
+          <a:fontRef idx="minor">
+            <a:schemeClr val="lt1"/>
+          </a:fontRef>
+        </p:style>
+        <p:txBody>
+          <a:bodyPr rtlCol="0" anchor="ctr"/>
+          <a:lstStyle/>
+          <a:p>
+            <a:pPr algn="ctr"/>
+          </a:p>
+        </p:txBody>
+      </p:sp>
+      <p:sp>
+        <p:nvSpPr>
+          <p:cNvPr id="3" name="Oval 2"/>
+          <p:cNvSpPr/>
+          <p:nvPr/>
+        </p:nvSpPr>
+        <p:spPr>
+          <a:xfrm>
+            <a:off x="-914400" y="4937760"/>
+            <a:ext cx="2377440" cy="2377440"/>
+          </a:xfrm>
+          <a:prstGeom prst="ellipse">
+            <a:avLst/>
+          </a:prstGeom>
+          <a:solidFill>
+            <a:srgbClr val="29482C"/>
+          </a:solidFill>
+          <a:ln>
+            <a:noFill/>
+          </a:ln>
+          <a:effectLst/>
+        </p:spPr>
+        <p:style>
+          <a:lnRef idx="1">
+            <a:schemeClr val="accent1"/>
+          </a:lnRef>
+          <a:fillRef idx="3">
+            <a:schemeClr val="accent1"/>
+          </a:fillRef>
+          <a:effectRef idx="2">
+            <a:schemeClr val="accent1"/>
+          </a:effectRef>
+          <a:fontRef idx="minor">
+            <a:schemeClr val="lt1"/>
+          </a:fontRef>
+        </p:style>
+        <p:txBody>
+          <a:bodyPr rtlCol="0" anchor="ctr"/>
+          <a:lstStyle/>
+          <a:p>
+            <a:pPr algn="ctr"/>
+          </a:p>
+        </p:txBody>
+      </p:sp>
+      <p:sp>
+        <p:nvSpPr>
+          <p:cNvPr id="4" name="Rounded Rectangle 3"/>
+          <p:cNvSpPr/>
+          <p:nvPr/>
+        </p:nvSpPr>
+        <p:spPr>
+          <a:xfrm>
+            <a:off x="822960" y="1051560"/>
+            <a:ext cx="1188720" cy="502920"/>
+          </a:xfrm>
+          <a:prstGeom prst="roundRect">
+            <a:avLst>
+              <a:gd name="adj" fmla="val 50000"/>
+            </a:avLst>
+          </a:prstGeom>
+          <a:solidFill>
+            <a:srgbClr val="FFFFFF"/>
+          </a:solidFill>
+          <a:ln>
+            <a:noFill/>
+          </a:ln>
+          <a:effectLst/>
+        </p:spPr>
+        <p:style>
+          <a:lnRef idx="1">
+            <a:schemeClr val="accent1"/>
+          </a:lnRef>
+          <a:fillRef idx="3">
+            <a:schemeClr val="accent1"/>
+          </a:fillRef>
+          <a:effectRef idx="2">
+            <a:schemeClr val="accent1"/>
+          </a:effectRef>
+          <a:fontRef idx="minor">
+            <a:schemeClr val="lt1"/>
+          </a:fontRef>
+        </p:style>
+        <p:txBody>
+          <a:bodyPr rtlCol="0" anchor="ctr" wrap="none" lIns="50800" rIns="50800"/>
+          <a:lstStyle/>
+          <a:p>
+            <a:pPr algn="ctr"/>
+            <a:r>
+              <a:rPr sz="1400" b="1">
+                <a:solidFill>
+                  <a:srgbClr val="254128"/>
+                </a:solidFill>
+                <a:latin typeface="Calibri"/>
+              </a:rPr>
+              <a:t>04</a:t>
+            </a:r>
+          </a:p>
+        </p:txBody>
+      </p:sp>
+      <p:sp>
+        <p:nvSpPr>
+          <p:cNvPr id="5" name="Rounded Rectangle 4"/>
+          <p:cNvSpPr/>
+          <p:nvPr/>
+        </p:nvSpPr>
+        <p:spPr>
+          <a:xfrm>
+            <a:off x="822960" y="2011680"/>
+            <a:ext cx="10515600" cy="2834640"/>
+          </a:xfrm>
+          <a:prstGeom prst="roundRect">
+            <a:avLst>
+              <a:gd name="adj" fmla="val 18000"/>
+            </a:avLst>
+          </a:prstGeom>
+          <a:solidFill>
+            <a:srgbClr val="FFFFFF"/>
+          </a:solidFill>
+          <a:ln>
+            <a:noFill/>
+          </a:ln>
+          <a:effectLst/>
+        </p:spPr>
+        <p:style>
+          <a:lnRef idx="1">
+            <a:schemeClr val="accent1"/>
+          </a:lnRef>
+          <a:fillRef idx="3">
+            <a:schemeClr val="accent1"/>
+          </a:fillRef>
+          <a:effectRef idx="2">
+            <a:schemeClr val="accent1"/>
+          </a:effectRef>
+          <a:fontRef idx="minor">
+            <a:schemeClr val="lt1"/>
+          </a:fontRef>
+        </p:style>
+        <p:txBody>
+          <a:bodyPr rtlCol="0" anchor="ctr"/>
+          <a:lstStyle/>
+          <a:p>
+            <a:pPr algn="ctr"/>
+          </a:p>
+        </p:txBody>
+      </p:sp>
+      <p:sp>
+        <p:nvSpPr>
+          <p:cNvPr id="6" name="TextBox 5"/>
+          <p:cNvSpPr txBox="1"/>
+          <p:nvPr/>
+        </p:nvSpPr>
+        <p:spPr>
+          <a:xfrm>
+            <a:off x="1280160" y="2697480"/>
+            <a:ext cx="9601200" cy="1097280"/>
+          </a:xfrm>
+          <a:prstGeom prst="rect">
+            <a:avLst/>
+          </a:prstGeom>
+          <a:noFill/>
+        </p:spPr>
+        <p:txBody>
+          <a:bodyPr wrap="square" anchor="t">
+            <a:spAutoFit/>
+          </a:bodyPr>
+          <a:lstStyle/>
+          <a:p>
+            <a:pPr algn="l"/>
+            <a:r>
+              <a:rPr sz="3400" b="1" i="0">
+                <a:solidFill>
+                  <a:srgbClr val="27452B"/>
+                </a:solidFill>
+                <a:latin typeface="Cambria"/>
+              </a:rPr>
+              <a:t>SAC Briefing</a:t>
+            </a:r>
+          </a:p>
+        </p:txBody>
+      </p:sp>
+      <p:sp>
+        <p:nvSpPr>
+          <p:cNvPr id="7" name="TextBox 6"/>
+          <p:cNvSpPr txBox="1"/>
+          <p:nvPr/>
+        </p:nvSpPr>
+        <p:spPr>
+          <a:xfrm>
+            <a:off x="1280160" y="3657600"/>
+            <a:ext cx="9601200" cy="548640"/>
+          </a:xfrm>
+          <a:prstGeom prst="rect">
+            <a:avLst/>
+          </a:prstGeom>
+          <a:noFill/>
+        </p:spPr>
+        <p:txBody>
+          <a:bodyPr wrap="square" anchor="t">
+            <a:spAutoFit/>
+          </a:bodyPr>
+          <a:lstStyle/>
+          <a:p>
+            <a:pPr algn="l"/>
+            <a:r>
+              <a:rPr sz="1500" b="0" i="0">
+                <a:solidFill>
+                  <a:srgbClr val="6B6B6B"/>
+                </a:solidFill>
+                <a:latin typeface="Calibri"/>
+              </a:rPr>
+              <a:t>Draft — confirm against your school’s SAC schedule</a:t>
+            </a:r>
+          </a:p>
+        </p:txBody>
+      </p:sp>
+    </p:spTree>
+  </p:cSld>
+  <p:clrMapOvr>
+    <a:masterClrMapping/>
+  </p:clrMapOvr>
+</p:sld>
+</file>
+
+<file path=ppt/slides/slide24.xml><?xml version="1.0" encoding="utf-8"?>
+<p:sld xmlns:a="http://schemas.openxmlformats.org/drawingml/2006/main" xmlns:p="http://schemas.openxmlformats.org/presentationml/2006/main" xmlns:r="http://schemas.openxmlformats.org/officeDocument/2006/relationships">
+  <p:cSld>
+    <p:bg>
+      <p:bgPr>
+        <a:solidFill>
+          <a:srgbClr val="F7F5EC"/>
+        </a:solidFill>
+        <a:effectLst/>
+      </p:bgPr>
+    </p:bg>
+    <p:spTree>
+      <p:nvGrpSpPr>
+        <p:cNvPr id="1" name=""/>
+        <p:cNvGrpSpPr/>
+        <p:nvPr/>
+      </p:nvGrpSpPr>
+      <p:grpSpPr/>
+      <p:sp>
+        <p:nvSpPr>
+          <p:cNvPr id="2" name="Rounded Rectangle 1"/>
+          <p:cNvSpPr/>
+          <p:nvPr/>
+        </p:nvSpPr>
+        <p:spPr>
+          <a:xfrm>
+            <a:off x="685800" y="502920"/>
+            <a:ext cx="3291840" cy="457200"/>
+          </a:xfrm>
+          <a:prstGeom prst="roundRect">
+            <a:avLst>
+              <a:gd name="adj" fmla="val 50000"/>
+            </a:avLst>
+          </a:prstGeom>
+          <a:solidFill>
+            <a:srgbClr val="2F5233"/>
+          </a:solidFill>
+          <a:ln>
+            <a:noFill/>
+          </a:ln>
+          <a:effectLst/>
+        </p:spPr>
+        <p:style>
+          <a:lnRef idx="1">
+            <a:schemeClr val="accent1"/>
+          </a:lnRef>
+          <a:fillRef idx="3">
+            <a:schemeClr val="accent1"/>
+          </a:fillRef>
+          <a:effectRef idx="2">
+            <a:schemeClr val="accent1"/>
+          </a:effectRef>
+          <a:fontRef idx="minor">
+            <a:schemeClr val="lt1"/>
+          </a:fontRef>
+        </p:style>
+        <p:txBody>
+          <a:bodyPr rtlCol="0" anchor="ctr" wrap="none" lIns="50800" rIns="50800"/>
+          <a:lstStyle/>
+          <a:p>
+            <a:pPr algn="ctr"/>
+            <a:r>
+              <a:rPr sz="1100" b="1">
+                <a:solidFill>
+                  <a:srgbClr val="FFFFFF"/>
+                </a:solidFill>
+                <a:latin typeface="Calibri"/>
+              </a:rPr>
+              <a:t>SAC BRIEFING</a:t>
+            </a:r>
+          </a:p>
+        </p:txBody>
+      </p:sp>
+      <p:sp>
+        <p:nvSpPr>
+          <p:cNvPr id="3" name="TextBox 2"/>
+          <p:cNvSpPr txBox="1"/>
+          <p:nvPr/>
+        </p:nvSpPr>
+        <p:spPr>
+          <a:xfrm>
+            <a:off x="685800" y="1051560"/>
+            <a:ext cx="10607040" cy="822960"/>
+          </a:xfrm>
+          <a:prstGeom prst="rect">
+            <a:avLst/>
+          </a:prstGeom>
+          <a:noFill/>
+        </p:spPr>
+        <p:txBody>
+          <a:bodyPr wrap="square" anchor="t">
+            <a:spAutoFit/>
+          </a:bodyPr>
+          <a:lstStyle/>
+          <a:p>
+            <a:pPr algn="l"/>
+            <a:r>
+              <a:rPr sz="2700" b="1" i="0">
+                <a:solidFill>
+                  <a:srgbClr val="20291F"/>
+                </a:solidFill>
+                <a:latin typeface="Cambria"/>
+              </a:rPr>
+              <a:t>Outcome 1 (AOS 1) — Analysis and Reinterpretation</a:t>
+            </a:r>
+          </a:p>
+        </p:txBody>
+      </p:sp>
+      <p:sp>
+        <p:nvSpPr>
+          <p:cNvPr id="4" name="Rounded Rectangle 3"/>
+          <p:cNvSpPr/>
+          <p:nvPr/>
+        </p:nvSpPr>
+        <p:spPr>
+          <a:xfrm>
+            <a:off x="685800" y="1874519"/>
+            <a:ext cx="10607040" cy="4526280"/>
+          </a:xfrm>
+          <a:prstGeom prst="roundRect">
+            <a:avLst>
+              <a:gd name="adj" fmla="val 6000"/>
+            </a:avLst>
+          </a:prstGeom>
+          <a:solidFill>
+            <a:srgbClr val="EAEDEA"/>
+          </a:solidFill>
+          <a:ln>
+            <a:noFill/>
+          </a:ln>
+          <a:effectLst/>
+        </p:spPr>
+        <p:style>
+          <a:lnRef idx="1">
+            <a:schemeClr val="accent1"/>
+          </a:lnRef>
+          <a:fillRef idx="3">
+            <a:schemeClr val="accent1"/>
+          </a:fillRef>
+          <a:effectRef idx="2">
+            <a:schemeClr val="accent1"/>
+          </a:effectRef>
+          <a:fontRef idx="minor">
+            <a:schemeClr val="lt1"/>
+          </a:fontRef>
+        </p:style>
+        <p:txBody>
+          <a:bodyPr rtlCol="0" anchor="ctr" lIns="330200" rIns="330200" tIns="254000" bIns="254000" wrap="square"/>
+          <a:lstStyle/>
+          <a:p>
+            <a:pPr algn="ctr" indent="-203200" marL="203200">
+              <a:spcAft>
+                <a:spcPts val="900"/>
+              </a:spcAft>
+              <a:buClr>
+                <a:srgbClr val="2F5233"/>
+              </a:buClr>
+              <a:buSzPct val="90000"/>
+              <a:buFont typeface="Arial"/>
+              <a:buChar char="●"/>
+            </a:pPr>
+            <a:r>
+              <a:rPr sz="1500" b="1" i="0">
+                <a:solidFill>
+                  <a:srgbClr val="27452B"/>
+                </a:solidFill>
+                <a:latin typeface="Calibri"/>
+              </a:rPr>
+              <a:t>Task</a:t>
+            </a:r>
+          </a:p>
+          <a:p>
+            <a:pPr indent="-203200" marL="203200">
+              <a:spcAft>
+                <a:spcPts val="900"/>
+              </a:spcAft>
+              <a:buClr>
+                <a:srgbClr val="2F5233"/>
+              </a:buClr>
+              <a:buSzPct val="90000"/>
+              <a:buFont typeface="Arial"/>
+              <a:buChar char="–"/>
+            </a:pPr>
+            <a:r>
+              <a:rPr sz="1350" b="0" i="0">
+                <a:solidFill>
+                  <a:srgbClr val="20291F"/>
+                </a:solidFill>
+                <a:latin typeface="Calibri"/>
+              </a:rPr>
+              <a:t>Select an existing visual communication. Analyse it in depth (purpose, audience, elements and principles, materials and methods, context), then propose a reconceptualisation or reinvention for a new audience or context, justifying the approach in an annotated visual submission with a supporting written justification of approximately 400-600 words.</a:t>
+            </a:r>
+          </a:p>
+          <a:p>
+            <a:pPr indent="-203200" marL="203200">
+              <a:spcAft>
+                <a:spcPts val="900"/>
+              </a:spcAft>
+              <a:buClr>
+                <a:srgbClr val="2F5233"/>
+              </a:buClr>
+              <a:buSzPct val="90000"/>
+              <a:buFont typeface="Arial"/>
+              <a:buChar char="●"/>
+            </a:pPr>
+            <a:r>
+              <a:rPr sz="1500" b="1" i="0">
+                <a:solidFill>
+                  <a:srgbClr val="27452B"/>
+                </a:solidFill>
+                <a:latin typeface="Calibri"/>
+              </a:rPr>
+              <a:t>Conditions</a:t>
+            </a:r>
+          </a:p>
+          <a:p>
+            <a:pPr indent="-203200" marL="203200">
+              <a:spcAft>
+                <a:spcPts val="900"/>
+              </a:spcAft>
+              <a:buClr>
+                <a:srgbClr val="2F5233"/>
+              </a:buClr>
+              <a:buSzPct val="90000"/>
+              <a:buFont typeface="Arial"/>
+              <a:buChar char="–"/>
+            </a:pPr>
+            <a:r>
+              <a:rPr sz="1350" b="0" i="0">
+                <a:solidFill>
+                  <a:srgbClr val="20291F"/>
+                </a:solidFill>
+                <a:latin typeface="Calibri"/>
+              </a:rPr>
+              <a:t>Completed over approximately 2-3 weeks</a:t>
+            </a:r>
+          </a:p>
+          <a:p>
+            <a:pPr indent="-203200" marL="203200">
+              <a:spcAft>
+                <a:spcPts val="900"/>
+              </a:spcAft>
+              <a:buClr>
+                <a:srgbClr val="2F5233"/>
+              </a:buClr>
+              <a:buSzPct val="90000"/>
+              <a:buFont typeface="Arial"/>
+              <a:buChar char="–"/>
+            </a:pPr>
+            <a:r>
+              <a:rPr sz="1350" b="0" i="0">
+                <a:solidFill>
+                  <a:srgbClr val="20291F"/>
+                </a:solidFill>
+                <a:latin typeface="Calibri"/>
+              </a:rPr>
+              <a:t>Submitted as folio pages (visual and annotation) plus a short written justification</a:t>
+            </a:r>
+          </a:p>
+          <a:p>
+            <a:pPr indent="-203200" marL="203200">
+              <a:spcAft>
+                <a:spcPts val="900"/>
+              </a:spcAft>
+              <a:buClr>
+                <a:srgbClr val="2F5233"/>
+              </a:buClr>
+              <a:buSzPct val="90000"/>
+              <a:buFont typeface="Arial"/>
+              <a:buChar char="–"/>
+            </a:pPr>
+            <a:r>
+              <a:rPr sz="1350" b="0" i="0">
+                <a:solidFill>
+                  <a:srgbClr val="20291F"/>
+                </a:solidFill>
+                <a:latin typeface="Calibri"/>
+              </a:rPr>
+              <a:t>Individual work</a:t>
+            </a:r>
+          </a:p>
+          <a:p>
+            <a:pPr indent="-203200" marL="203200">
+              <a:spcAft>
+                <a:spcPts val="900"/>
+              </a:spcAft>
+              <a:buClr>
+                <a:srgbClr val="2F5233"/>
+              </a:buClr>
+              <a:buSzPct val="90000"/>
+              <a:buFont typeface="Arial"/>
+              <a:buChar char="●"/>
+            </a:pPr>
+            <a:r>
+              <a:rPr sz="1500" b="1" i="0">
+                <a:solidFill>
+                  <a:srgbClr val="27452B"/>
+                </a:solidFill>
+                <a:latin typeface="Calibri"/>
+              </a:rPr>
+              <a:t>Assessment Criteria (/40)</a:t>
+            </a:r>
+          </a:p>
+          <a:p>
+            <a:pPr indent="-203200" marL="203200">
+              <a:spcAft>
+                <a:spcPts val="900"/>
+              </a:spcAft>
+              <a:buClr>
+                <a:srgbClr val="2F5233"/>
+              </a:buClr>
+              <a:buSzPct val="90000"/>
+              <a:buFont typeface="Arial"/>
+              <a:buChar char="–"/>
+            </a:pPr>
+            <a:r>
+              <a:rPr sz="1350" b="0" i="0">
+                <a:solidFill>
+                  <a:srgbClr val="20291F"/>
+                </a:solidFill>
+                <a:latin typeface="Calibri"/>
+              </a:rPr>
+              <a:t>Depth of analysis of the original design — 15 marks</a:t>
+            </a:r>
+          </a:p>
+          <a:p>
+            <a:pPr indent="-203200" marL="203200">
+              <a:spcAft>
+                <a:spcPts val="900"/>
+              </a:spcAft>
+              <a:buClr>
+                <a:srgbClr val="2F5233"/>
+              </a:buClr>
+              <a:buSzPct val="90000"/>
+              <a:buFont typeface="Arial"/>
+              <a:buChar char="–"/>
+            </a:pPr>
+            <a:r>
+              <a:rPr sz="1350" b="0" i="0">
+                <a:solidFill>
+                  <a:srgbClr val="20291F"/>
+                </a:solidFill>
+                <a:latin typeface="Calibri"/>
+              </a:rPr>
+              <a:t>Quality and originality of the reinterpretation proposal — 10 marks</a:t>
+            </a:r>
+          </a:p>
+          <a:p>
+            <a:pPr indent="-203200" marL="203200">
+              <a:spcAft>
+                <a:spcPts val="900"/>
+              </a:spcAft>
+              <a:buClr>
+                <a:srgbClr val="2F5233"/>
+              </a:buClr>
+              <a:buSzPct val="90000"/>
+              <a:buFont typeface="Arial"/>
+              <a:buChar char="–"/>
+            </a:pPr>
+            <a:r>
+              <a:rPr sz="1350" b="0" i="0">
+                <a:solidFill>
+                  <a:srgbClr val="20291F"/>
+                </a:solidFill>
+                <a:latin typeface="Calibri"/>
+              </a:rPr>
+              <a:t>Justification and links to the new context — 10 marks</a:t>
+            </a:r>
+          </a:p>
+          <a:p>
+            <a:pPr indent="-203200" marL="203200">
+              <a:spcAft>
+                <a:spcPts val="900"/>
+              </a:spcAft>
+              <a:buClr>
+                <a:srgbClr val="2F5233"/>
+              </a:buClr>
+              <a:buSzPct val="90000"/>
+              <a:buFont typeface="Arial"/>
+              <a:buChar char="–"/>
+            </a:pPr>
+            <a:r>
+              <a:rPr sz="1350" b="0" i="0">
+                <a:solidFill>
+                  <a:srgbClr val="20291F"/>
+                </a:solidFill>
+                <a:latin typeface="Calibri"/>
+              </a:rPr>
+              <a:t>Presentation of folio pages — 5 marks</a:t>
+            </a:r>
+          </a:p>
+        </p:txBody>
+      </p:sp>
+      <p:sp>
+        <p:nvSpPr>
+          <p:cNvPr id="5" name="Oval 4"/>
+          <p:cNvSpPr/>
+          <p:nvPr/>
+        </p:nvSpPr>
+        <p:spPr>
+          <a:xfrm>
+            <a:off x="10881360" y="5943600"/>
+            <a:ext cx="1005840" cy="1005840"/>
+          </a:xfrm>
+          <a:prstGeom prst="ellipse">
+            <a:avLst/>
+          </a:prstGeom>
+          <a:solidFill>
+            <a:srgbClr val="C5D5DB"/>
+          </a:solidFill>
+          <a:ln>
+            <a:noFill/>
+          </a:ln>
+          <a:effectLst/>
+        </p:spPr>
+        <p:style>
+          <a:lnRef idx="1">
+            <a:schemeClr val="accent1"/>
+          </a:lnRef>
+          <a:fillRef idx="3">
+            <a:schemeClr val="accent1"/>
+          </a:fillRef>
+          <a:effectRef idx="2">
+            <a:schemeClr val="accent1"/>
+          </a:effectRef>
+          <a:fontRef idx="minor">
+            <a:schemeClr val="lt1"/>
+          </a:fontRef>
+        </p:style>
+        <p:txBody>
+          <a:bodyPr rtlCol="0" anchor="ctr"/>
+          <a:lstStyle/>
+          <a:p>
+            <a:pPr algn="ctr"/>
+          </a:p>
+        </p:txBody>
+      </p:sp>
+    </p:spTree>
+  </p:cSld>
+  <p:clrMapOvr>
+    <a:masterClrMapping/>
+  </p:clrMapOvr>
+</p:sld>
+</file>
+
+<file path=ppt/slides/slide25.xml><?xml version="1.0" encoding="utf-8"?>
+<p:sld xmlns:a="http://schemas.openxmlformats.org/drawingml/2006/main" xmlns:p="http://schemas.openxmlformats.org/presentationml/2006/main" xmlns:r="http://schemas.openxmlformats.org/officeDocument/2006/relationships">
+  <p:cSld>
+    <p:bg>
+      <p:bgPr>
+        <a:solidFill>
+          <a:srgbClr val="F7F5EC"/>
+        </a:solidFill>
+        <a:effectLst/>
+      </p:bgPr>
+    </p:bg>
+    <p:spTree>
+      <p:nvGrpSpPr>
+        <p:cNvPr id="1" name=""/>
+        <p:cNvGrpSpPr/>
+        <p:nvPr/>
+      </p:nvGrpSpPr>
+      <p:grpSpPr/>
+      <p:sp>
+        <p:nvSpPr>
+          <p:cNvPr id="2" name="Rounded Rectangle 1"/>
+          <p:cNvSpPr/>
+          <p:nvPr/>
+        </p:nvSpPr>
+        <p:spPr>
+          <a:xfrm>
+            <a:off x="685800" y="502920"/>
+            <a:ext cx="3291840" cy="457200"/>
+          </a:xfrm>
+          <a:prstGeom prst="roundRect">
+            <a:avLst>
+              <a:gd name="adj" fmla="val 50000"/>
+            </a:avLst>
+          </a:prstGeom>
+          <a:solidFill>
+            <a:srgbClr val="2F5233"/>
+          </a:solidFill>
+          <a:ln>
+            <a:noFill/>
+          </a:ln>
+          <a:effectLst/>
+        </p:spPr>
+        <p:style>
+          <a:lnRef idx="1">
+            <a:schemeClr val="accent1"/>
+          </a:lnRef>
+          <a:fillRef idx="3">
+            <a:schemeClr val="accent1"/>
+          </a:fillRef>
+          <a:effectRef idx="2">
+            <a:schemeClr val="accent1"/>
+          </a:effectRef>
+          <a:fontRef idx="minor">
+            <a:schemeClr val="lt1"/>
+          </a:fontRef>
+        </p:style>
+        <p:txBody>
+          <a:bodyPr rtlCol="0" anchor="ctr" wrap="none" lIns="50800" rIns="50800"/>
+          <a:lstStyle/>
+          <a:p>
+            <a:pPr algn="ctr"/>
+            <a:r>
+              <a:rPr sz="1100" b="1">
+                <a:solidFill>
+                  <a:srgbClr val="FFFFFF"/>
+                </a:solidFill>
+                <a:latin typeface="Calibri"/>
+              </a:rPr>
+              <a:t>SAC BRIEFING</a:t>
+            </a:r>
+          </a:p>
+        </p:txBody>
+      </p:sp>
+      <p:sp>
+        <p:nvSpPr>
+          <p:cNvPr id="3" name="TextBox 2"/>
+          <p:cNvSpPr txBox="1"/>
+          <p:nvPr/>
+        </p:nvSpPr>
+        <p:spPr>
+          <a:xfrm>
+            <a:off x="685800" y="1051560"/>
+            <a:ext cx="10607040" cy="822960"/>
+          </a:xfrm>
+          <a:prstGeom prst="rect">
+            <a:avLst/>
+          </a:prstGeom>
+          <a:noFill/>
+        </p:spPr>
+        <p:txBody>
+          <a:bodyPr wrap="square" anchor="t">
+            <a:spAutoFit/>
+          </a:bodyPr>
+          <a:lstStyle/>
+          <a:p>
+            <a:pPr algn="l"/>
+            <a:r>
+              <a:rPr sz="2700" b="1" i="0">
+                <a:solidFill>
+                  <a:srgbClr val="20291F"/>
+                </a:solidFill>
+                <a:latin typeface="Cambria"/>
+              </a:rPr>
+              <a:t>Outcome 2 (AOS 2) — The Brief and Range of Ideas</a:t>
+            </a:r>
+          </a:p>
+        </p:txBody>
+      </p:sp>
+      <p:sp>
+        <p:nvSpPr>
+          <p:cNvPr id="4" name="Rounded Rectangle 3"/>
+          <p:cNvSpPr/>
+          <p:nvPr/>
+        </p:nvSpPr>
+        <p:spPr>
+          <a:xfrm>
+            <a:off x="685800" y="1874519"/>
+            <a:ext cx="10607040" cy="4526280"/>
+          </a:xfrm>
+          <a:prstGeom prst="roundRect">
+            <a:avLst>
+              <a:gd name="adj" fmla="val 6000"/>
+            </a:avLst>
+          </a:prstGeom>
+          <a:solidFill>
+            <a:srgbClr val="EAEDEA"/>
+          </a:solidFill>
+          <a:ln>
+            <a:noFill/>
+          </a:ln>
+          <a:effectLst/>
+        </p:spPr>
+        <p:style>
+          <a:lnRef idx="1">
+            <a:schemeClr val="accent1"/>
+          </a:lnRef>
+          <a:fillRef idx="3">
+            <a:schemeClr val="accent1"/>
+          </a:fillRef>
+          <a:effectRef idx="2">
+            <a:schemeClr val="accent1"/>
+          </a:effectRef>
+          <a:fontRef idx="minor">
+            <a:schemeClr val="lt1"/>
+          </a:fontRef>
+        </p:style>
+        <p:txBody>
+          <a:bodyPr rtlCol="0" anchor="ctr" lIns="330200" rIns="330200" tIns="254000" bIns="254000" wrap="square"/>
+          <a:lstStyle/>
+          <a:p>
+            <a:pPr algn="ctr" indent="-203200" marL="203200">
+              <a:spcAft>
+                <a:spcPts val="900"/>
+              </a:spcAft>
+              <a:buClr>
+                <a:srgbClr val="2F5233"/>
+              </a:buClr>
+              <a:buSzPct val="90000"/>
+              <a:buFont typeface="Arial"/>
+              <a:buChar char="●"/>
+            </a:pPr>
+            <a:r>
+              <a:rPr sz="1500" b="1" i="0">
+                <a:solidFill>
+                  <a:srgbClr val="27452B"/>
+                </a:solidFill>
+                <a:latin typeface="Calibri"/>
+              </a:rPr>
+              <a:t>Task</a:t>
+            </a:r>
+          </a:p>
+          <a:p>
+            <a:pPr indent="-203200" marL="203200">
+              <a:spcAft>
+                <a:spcPts val="900"/>
+              </a:spcAft>
+              <a:buClr>
+                <a:srgbClr val="2F5233"/>
+              </a:buClr>
+              <a:buSzPct val="90000"/>
+              <a:buFont typeface="Arial"/>
+              <a:buChar char="–"/>
+            </a:pPr>
+            <a:r>
+              <a:rPr sz="1350" b="0" i="0">
+                <a:solidFill>
+                  <a:srgbClr val="20291F"/>
+                </a:solidFill>
+                <a:latin typeface="Calibri"/>
+              </a:rPr>
+              <a:t>Write a design brief (informed by your Unit 3 AOS1 analysis and reinterpretation) and generate a wide range of ideas leading to two distinct concepts. Submit: the written brief, research documentation, generation of ideas (minimum 15 thumbnails/concepts), and two developed, distinct concepts with annotations.</a:t>
+            </a:r>
+          </a:p>
+          <a:p>
+            <a:pPr indent="-203200" marL="203200">
+              <a:spcAft>
+                <a:spcPts val="900"/>
+              </a:spcAft>
+              <a:buClr>
+                <a:srgbClr val="2F5233"/>
+              </a:buClr>
+              <a:buSzPct val="90000"/>
+              <a:buFont typeface="Arial"/>
+              <a:buChar char="●"/>
+            </a:pPr>
+            <a:r>
+              <a:rPr sz="1500" b="1" i="0">
+                <a:solidFill>
+                  <a:srgbClr val="27452B"/>
+                </a:solidFill>
+                <a:latin typeface="Calibri"/>
+              </a:rPr>
+              <a:t>Conditions</a:t>
+            </a:r>
+          </a:p>
+          <a:p>
+            <a:pPr indent="-203200" marL="203200">
+              <a:spcAft>
+                <a:spcPts val="900"/>
+              </a:spcAft>
+              <a:buClr>
+                <a:srgbClr val="2F5233"/>
+              </a:buClr>
+              <a:buSzPct val="90000"/>
+              <a:buFont typeface="Arial"/>
+              <a:buChar char="–"/>
+            </a:pPr>
+            <a:r>
+              <a:rPr sz="1350" b="0" i="0">
+                <a:solidFill>
+                  <a:srgbClr val="20291F"/>
+                </a:solidFill>
+                <a:latin typeface="Calibri"/>
+              </a:rPr>
+              <a:t>Completed over approximately 5-6 weeks — typically the largest SAC of the year</a:t>
+            </a:r>
+          </a:p>
+          <a:p>
+            <a:pPr indent="-203200" marL="203200">
+              <a:spcAft>
+                <a:spcPts val="900"/>
+              </a:spcAft>
+              <a:buClr>
+                <a:srgbClr val="2F5233"/>
+              </a:buClr>
+              <a:buSzPct val="90000"/>
+              <a:buFont typeface="Arial"/>
+              <a:buChar char="–"/>
+            </a:pPr>
+            <a:r>
+              <a:rPr sz="1350" b="0" i="0">
+                <a:solidFill>
+                  <a:srgbClr val="20291F"/>
+                </a:solidFill>
+                <a:latin typeface="Calibri"/>
+              </a:rPr>
+              <a:t>Folio submission</a:t>
+            </a:r>
+          </a:p>
+          <a:p>
+            <a:pPr indent="-203200" marL="203200">
+              <a:spcAft>
+                <a:spcPts val="900"/>
+              </a:spcAft>
+              <a:buClr>
+                <a:srgbClr val="2F5233"/>
+              </a:buClr>
+              <a:buSzPct val="90000"/>
+              <a:buFont typeface="Arial"/>
+              <a:buChar char="–"/>
+            </a:pPr>
+            <a:r>
+              <a:rPr sz="1350" b="0" i="0">
+                <a:solidFill>
+                  <a:srgbClr val="20291F"/>
+                </a:solidFill>
+                <a:latin typeface="Calibri"/>
+              </a:rPr>
+              <a:t>Individual work</a:t>
+            </a:r>
+          </a:p>
+          <a:p>
+            <a:pPr indent="-203200" marL="203200">
+              <a:spcAft>
+                <a:spcPts val="900"/>
+              </a:spcAft>
+              <a:buClr>
+                <a:srgbClr val="2F5233"/>
+              </a:buClr>
+              <a:buSzPct val="90000"/>
+              <a:buFont typeface="Arial"/>
+              <a:buChar char="●"/>
+            </a:pPr>
+            <a:r>
+              <a:rPr sz="1500" b="1" i="0">
+                <a:solidFill>
+                  <a:srgbClr val="27452B"/>
+                </a:solidFill>
+                <a:latin typeface="Calibri"/>
+              </a:rPr>
+              <a:t>Assessment Criteria (/70)</a:t>
+            </a:r>
+          </a:p>
+          <a:p>
+            <a:pPr indent="-203200" marL="203200">
+              <a:spcAft>
+                <a:spcPts val="900"/>
+              </a:spcAft>
+              <a:buClr>
+                <a:srgbClr val="2F5233"/>
+              </a:buClr>
+              <a:buSzPct val="90000"/>
+              <a:buFont typeface="Arial"/>
+              <a:buChar char="–"/>
+            </a:pPr>
+            <a:r>
+              <a:rPr sz="1350" b="0" i="0">
+                <a:solidFill>
+                  <a:srgbClr val="20291F"/>
+                </a:solidFill>
+                <a:latin typeface="Calibri"/>
+              </a:rPr>
+              <a:t>Quality and clarity of the brief — 10 marks</a:t>
+            </a:r>
+          </a:p>
+          <a:p>
+            <a:pPr indent="-203200" marL="203200">
+              <a:spcAft>
+                <a:spcPts val="900"/>
+              </a:spcAft>
+              <a:buClr>
+                <a:srgbClr val="2F5233"/>
+              </a:buClr>
+              <a:buSzPct val="90000"/>
+              <a:buFont typeface="Arial"/>
+              <a:buChar char="–"/>
+            </a:pPr>
+            <a:r>
+              <a:rPr sz="1350" b="0" i="0">
+                <a:solidFill>
+                  <a:srgbClr val="20291F"/>
+                </a:solidFill>
+                <a:latin typeface="Calibri"/>
+              </a:rPr>
+              <a:t>Relevance of research — 10 marks</a:t>
+            </a:r>
+          </a:p>
+          <a:p>
+            <a:pPr indent="-203200" marL="203200">
+              <a:spcAft>
+                <a:spcPts val="900"/>
+              </a:spcAft>
+              <a:buClr>
+                <a:srgbClr val="2F5233"/>
+              </a:buClr>
+              <a:buSzPct val="90000"/>
+              <a:buFont typeface="Arial"/>
+              <a:buChar char="–"/>
+            </a:pPr>
+            <a:r>
+              <a:rPr sz="1350" b="0" i="0">
+                <a:solidFill>
+                  <a:srgbClr val="20291F"/>
+                </a:solidFill>
+                <a:latin typeface="Calibri"/>
+              </a:rPr>
+              <a:t>Range and quantity of ideas generated — 15 marks</a:t>
+            </a:r>
+          </a:p>
+          <a:p>
+            <a:pPr indent="-203200" marL="203200">
+              <a:spcAft>
+                <a:spcPts val="900"/>
+              </a:spcAft>
+              <a:buClr>
+                <a:srgbClr val="2F5233"/>
+              </a:buClr>
+              <a:buSzPct val="90000"/>
+              <a:buFont typeface="Arial"/>
+              <a:buChar char="–"/>
+            </a:pPr>
+            <a:r>
+              <a:rPr sz="1350" b="0" i="0">
+                <a:solidFill>
+                  <a:srgbClr val="20291F"/>
+                </a:solidFill>
+                <a:latin typeface="Calibri"/>
+              </a:rPr>
+              <a:t>Distinctiveness and quality of the two concepts — 20 marks</a:t>
+            </a:r>
+          </a:p>
+          <a:p>
+            <a:pPr indent="-203200" marL="203200">
+              <a:spcAft>
+                <a:spcPts val="900"/>
+              </a:spcAft>
+              <a:buClr>
+                <a:srgbClr val="2F5233"/>
+              </a:buClr>
+              <a:buSzPct val="90000"/>
+              <a:buFont typeface="Arial"/>
+              <a:buChar char="–"/>
+            </a:pPr>
+            <a:r>
+              <a:rPr sz="1350" b="0" i="0">
+                <a:solidFill>
+                  <a:srgbClr val="20291F"/>
+                </a:solidFill>
+                <a:latin typeface="Calibri"/>
+              </a:rPr>
+              <a:t>Annotation and documentation of design thinking — 15 marks</a:t>
+            </a:r>
+          </a:p>
+        </p:txBody>
+      </p:sp>
+      <p:sp>
+        <p:nvSpPr>
+          <p:cNvPr id="5" name="Oval 4"/>
+          <p:cNvSpPr/>
+          <p:nvPr/>
+        </p:nvSpPr>
+        <p:spPr>
+          <a:xfrm>
+            <a:off x="10881360" y="5943600"/>
+            <a:ext cx="1005840" cy="1005840"/>
+          </a:xfrm>
+          <a:prstGeom prst="ellipse">
+            <a:avLst/>
+          </a:prstGeom>
+          <a:solidFill>
+            <a:srgbClr val="C5D5DB"/>
+          </a:solidFill>
+          <a:ln>
+            <a:noFill/>
+          </a:ln>
+          <a:effectLst/>
+        </p:spPr>
+        <p:style>
+          <a:lnRef idx="1">
+            <a:schemeClr val="accent1"/>
+          </a:lnRef>
+          <a:fillRef idx="3">
+            <a:schemeClr val="accent1"/>
+          </a:fillRef>
+          <a:effectRef idx="2">
+            <a:schemeClr val="accent1"/>
+          </a:effectRef>
+          <a:fontRef idx="minor">
+            <a:schemeClr val="lt1"/>
+          </a:fontRef>
+        </p:style>
+        <p:txBody>
+          <a:bodyPr rtlCol="0" anchor="ctr"/>
+          <a:lstStyle/>
+          <a:p>
+            <a:pPr algn="ctr"/>
+          </a:p>
+        </p:txBody>
+      </p:sp>
+    </p:spTree>
+  </p:cSld>
+  <p:clrMapOvr>
+    <a:masterClrMapping/>
+  </p:clrMapOvr>
+</p:sld>
+</file>
+
+<file path=ppt/slides/slide26.xml><?xml version="1.0" encoding="utf-8"?>
+<p:sld xmlns:a="http://schemas.openxmlformats.org/drawingml/2006/main" xmlns:p="http://schemas.openxmlformats.org/presentationml/2006/main" xmlns:r="http://schemas.openxmlformats.org/officeDocument/2006/relationships">
+  <p:cSld>
+    <p:bg>
+      <p:bgPr>
+        <a:solidFill>
+          <a:srgbClr val="2F5233"/>
+        </a:solidFill>
+        <a:effectLst/>
+      </p:bgPr>
+    </p:bg>
+    <p:spTree>
+      <p:nvGrpSpPr>
+        <p:cNvPr id="1" name=""/>
+        <p:cNvGrpSpPr/>
+        <p:nvPr/>
+      </p:nvGrpSpPr>
+      <p:grpSpPr/>
+      <p:sp>
+        <p:nvSpPr>
+          <p:cNvPr id="2" name="Oval 1"/>
+          <p:cNvSpPr/>
+          <p:nvPr/>
+        </p:nvSpPr>
+        <p:spPr>
+          <a:xfrm>
+            <a:off x="-1097280" y="4114800"/>
+            <a:ext cx="3108960" cy="3108960"/>
+          </a:xfrm>
+          <a:prstGeom prst="ellipse">
+            <a:avLst/>
+          </a:prstGeom>
+          <a:solidFill>
+            <a:srgbClr val="29482C"/>
+          </a:solidFill>
+          <a:ln>
+            <a:noFill/>
+          </a:ln>
+          <a:effectLst/>
+        </p:spPr>
+        <p:style>
+          <a:lnRef idx="1">
+            <a:schemeClr val="accent1"/>
+          </a:lnRef>
+          <a:fillRef idx="3">
+            <a:schemeClr val="accent1"/>
+          </a:fillRef>
+          <a:effectRef idx="2">
+            <a:schemeClr val="accent1"/>
+          </a:effectRef>
+          <a:fontRef idx="minor">
+            <a:schemeClr val="lt1"/>
+          </a:fontRef>
+        </p:style>
+        <p:txBody>
+          <a:bodyPr rtlCol="0" anchor="ctr"/>
+          <a:lstStyle/>
+          <a:p>
+            <a:pPr algn="ctr"/>
+          </a:p>
+        </p:txBody>
+      </p:sp>
+      <p:sp>
+        <p:nvSpPr>
+          <p:cNvPr id="3" name="Oval 2"/>
+          <p:cNvSpPr/>
+          <p:nvPr/>
+        </p:nvSpPr>
+        <p:spPr>
+          <a:xfrm>
+            <a:off x="9875520" y="-1188720"/>
+            <a:ext cx="2743200" cy="2743200"/>
+          </a:xfrm>
+          <a:prstGeom prst="ellipse">
+            <a:avLst/>
+          </a:prstGeom>
+          <a:solidFill>
+            <a:srgbClr val="C9743D"/>
+          </a:solidFill>
+          <a:ln>
+            <a:noFill/>
+          </a:ln>
+          <a:effectLst/>
+        </p:spPr>
+        <p:style>
+          <a:lnRef idx="1">
+            <a:schemeClr val="accent1"/>
+          </a:lnRef>
+          <a:fillRef idx="3">
+            <a:schemeClr val="accent1"/>
+          </a:fillRef>
+          <a:effectRef idx="2">
+            <a:schemeClr val="accent1"/>
+          </a:effectRef>
+          <a:fontRef idx="minor">
+            <a:schemeClr val="lt1"/>
+          </a:fontRef>
+        </p:style>
+        <p:txBody>
+          <a:bodyPr rtlCol="0" anchor="ctr"/>
+          <a:lstStyle/>
+          <a:p>
+            <a:pPr algn="ctr"/>
+          </a:p>
+        </p:txBody>
+      </p:sp>
+      <p:sp>
+        <p:nvSpPr>
+          <p:cNvPr id="4" name="Rounded Rectangle 3"/>
+          <p:cNvSpPr/>
+          <p:nvPr/>
+        </p:nvSpPr>
+        <p:spPr>
+          <a:xfrm>
+            <a:off x="1920240" y="2286000"/>
+            <a:ext cx="8321040" cy="2377440"/>
+          </a:xfrm>
+          <a:prstGeom prst="roundRect">
+            <a:avLst>
+              <a:gd name="adj" fmla="val 20000"/>
+            </a:avLst>
+          </a:prstGeom>
+          <a:solidFill>
+            <a:srgbClr val="FFFFFF"/>
+          </a:solidFill>
+          <a:ln>
+            <a:noFill/>
+          </a:ln>
+          <a:effectLst/>
+        </p:spPr>
+        <p:style>
+          <a:lnRef idx="1">
+            <a:schemeClr val="accent1"/>
+          </a:lnRef>
+          <a:fillRef idx="3">
+            <a:schemeClr val="accent1"/>
+          </a:fillRef>
+          <a:effectRef idx="2">
+            <a:schemeClr val="accent1"/>
+          </a:effectRef>
+          <a:fontRef idx="minor">
+            <a:schemeClr val="lt1"/>
+          </a:fontRef>
+        </p:style>
+        <p:txBody>
+          <a:bodyPr rtlCol="0" anchor="ctr"/>
+          <a:lstStyle/>
+          <a:p>
+            <a:pPr algn="ctr"/>
+            <a:r>
+              <a:rPr b="1" sz="3000">
+                <a:solidFill>
+                  <a:srgbClr val="2F5233"/>
+                </a:solidFill>
+                <a:latin typeface="Cambria"/>
+              </a:rPr>
+              <a:t>End of Unit 3</a:t>
+            </a:r>
+          </a:p>
+          <a:p>
+            <a:pPr algn="ctr"/>
+            <a:r>
+              <a:rPr sz="1400">
+                <a:solidFill>
+                  <a:srgbClr val="595959"/>
+                </a:solidFill>
+              </a:rPr>
+              <a:t>Review the matching workbook to consolidate what you have learnt.</a:t>
             </a:r>
           </a:p>
         </p:txBody>

--- a/teaching-materials/vcd-vce/powerpoint/Unit3-Reconceptualisation-and-Reinvention.pptx
+++ b/teaching-materials/vcd-vce/powerpoint/Unit3-Reconceptualisation-and-Reinvention.pptx
@@ -31,6 +31,12 @@
     <p:sldId id="279" r:id="rId30"/>
     <p:sldId id="280" r:id="rId31"/>
     <p:sldId id="281" r:id="rId32"/>
+    <p:sldId id="282" r:id="rId33"/>
+    <p:sldId id="283" r:id="rId34"/>
+    <p:sldId id="284" r:id="rId35"/>
+    <p:sldId id="285" r:id="rId36"/>
+    <p:sldId id="286" r:id="rId37"/>
+    <p:sldId id="287" r:id="rId38"/>
   </p:sldIdLst>
   <p:sldSz cx="12191695" cy="6858000" type="screen4x3"/>
   <p:notesSz cx="6858000" cy="9144000"/>
@@ -3429,7 +3435,7 @@
     <p:bg>
       <p:bgPr>
         <a:solidFill>
-          <a:srgbClr val="F7F5EC"/>
+          <a:srgbClr val="7FA3B0"/>
         </a:solidFill>
         <a:effectLst/>
       </p:bgPr>
@@ -3443,22 +3449,20 @@
       <p:grpSpPr/>
       <p:sp>
         <p:nvSpPr>
-          <p:cNvPr id="2" name="Rounded Rectangle 1"/>
+          <p:cNvPr id="2" name="Oval 1"/>
           <p:cNvSpPr/>
           <p:nvPr/>
         </p:nvSpPr>
         <p:spPr>
           <a:xfrm>
-            <a:off x="685800" y="502920"/>
-            <a:ext cx="3291840" cy="457200"/>
-          </a:xfrm>
-          <a:prstGeom prst="roundRect">
-            <a:avLst>
-              <a:gd name="adj" fmla="val 50000"/>
-            </a:avLst>
-          </a:prstGeom>
-          <a:solidFill>
-            <a:srgbClr val="2F5233"/>
+            <a:off x="-914400" y="-914400"/>
+            <a:ext cx="2103120" cy="2103120"/>
+          </a:xfrm>
+          <a:prstGeom prst="ellipse">
+            <a:avLst/>
+          </a:prstGeom>
+          <a:solidFill>
+            <a:srgbClr val="6F8F9A"/>
           </a:solidFill>
           <a:ln>
             <a:noFill/>
@@ -3480,75 +3484,29 @@
           </a:fontRef>
         </p:style>
         <p:txBody>
-          <a:bodyPr rtlCol="0" anchor="ctr" wrap="none" lIns="50800" rIns="50800"/>
+          <a:bodyPr rtlCol="0" anchor="ctr"/>
           <a:lstStyle/>
           <a:p>
             <a:pPr algn="ctr"/>
-            <a:r>
-              <a:rPr sz="1100" b="1">
-                <a:solidFill>
-                  <a:srgbClr val="FFFFFF"/>
-                </a:solidFill>
-                <a:latin typeface="Calibri"/>
-              </a:rPr>
-              <a:t>THE BRIEF &amp; IDEATION</a:t>
-            </a:r>
-          </a:p>
-        </p:txBody>
-      </p:sp>
-      <p:sp>
-        <p:nvSpPr>
-          <p:cNvPr id="3" name="TextBox 2"/>
-          <p:cNvSpPr txBox="1"/>
-          <p:nvPr/>
-        </p:nvSpPr>
-        <p:spPr>
-          <a:xfrm>
-            <a:off x="685800" y="1051560"/>
-            <a:ext cx="10607040" cy="822960"/>
-          </a:xfrm>
-          <a:prstGeom prst="rect">
+          </a:p>
+        </p:txBody>
+      </p:sp>
+      <p:sp>
+        <p:nvSpPr>
+          <p:cNvPr id="3" name="Oval 2"/>
+          <p:cNvSpPr/>
+          <p:nvPr/>
+        </p:nvSpPr>
+        <p:spPr>
+          <a:xfrm>
+            <a:off x="11064240" y="5852160"/>
+            <a:ext cx="1737360" cy="1737360"/>
+          </a:xfrm>
+          <a:prstGeom prst="ellipse">
             <a:avLst/>
           </a:prstGeom>
-          <a:noFill/>
-        </p:spPr>
-        <p:txBody>
-          <a:bodyPr wrap="square" anchor="t">
-            <a:spAutoFit/>
-          </a:bodyPr>
-          <a:lstStyle/>
-          <a:p>
-            <a:pPr algn="l"/>
-            <a:r>
-              <a:rPr sz="2700" b="1" i="0">
-                <a:solidFill>
-                  <a:srgbClr val="20291F"/>
-                </a:solidFill>
-                <a:latin typeface="Cambria"/>
-              </a:rPr>
-              <a:t>Writing Your Own Brief</a:t>
-            </a:r>
-          </a:p>
-        </p:txBody>
-      </p:sp>
-      <p:sp>
-        <p:nvSpPr>
-          <p:cNvPr id="4" name="Rounded Rectangle 3"/>
-          <p:cNvSpPr/>
-          <p:nvPr/>
-        </p:nvSpPr>
-        <p:spPr>
-          <a:xfrm>
-            <a:off x="685800" y="1874519"/>
-            <a:ext cx="5166360" cy="4526280"/>
-          </a:xfrm>
-          <a:prstGeom prst="roundRect">
-            <a:avLst>
-              <a:gd name="adj" fmla="val 6000"/>
-            </a:avLst>
-          </a:prstGeom>
-          <a:solidFill>
-            <a:srgbClr val="E6EAE6"/>
+          <a:solidFill>
+            <a:srgbClr val="6F8F9A"/>
           </a:solidFill>
           <a:ln>
             <a:noFill/>
@@ -3570,90 +3528,31 @@
           </a:fontRef>
         </p:style>
         <p:txBody>
-          <a:bodyPr rtlCol="0" anchor="ctr" lIns="279400" rIns="279400" tIns="228600" bIns="228600" wrap="square"/>
-          <a:lstStyle/>
-          <a:p>
-            <a:pPr algn="ctr" indent="-203200" marL="203200">
-              <a:spcAft>
-                <a:spcPts val="900"/>
-              </a:spcAft>
-              <a:buClr>
-                <a:srgbClr val="2F5233"/>
-              </a:buClr>
-              <a:buSzPct val="90000"/>
-              <a:buFont typeface="Arial"/>
-              <a:buChar char="●"/>
-            </a:pPr>
-            <a:r>
-              <a:rPr sz="1400" b="0" i="0">
-                <a:solidFill>
-                  <a:srgbClr val="20291F"/>
-                </a:solidFill>
-                <a:latin typeface="Calibri"/>
-              </a:rPr>
-              <a:t>Using your Unit 3 AOS 1 analysis and reinterpretation, you write a </a:t>
-            </a:r>
-            <a:r>
-              <a:rPr sz="1400" b="1" i="0">
-                <a:solidFill>
-                  <a:srgbClr val="27452B"/>
-                </a:solidFill>
-                <a:latin typeface="Calibri"/>
-              </a:rPr>
-              <a:t>design brief</a:t>
-            </a:r>
-            <a:r>
-              <a:rPr sz="1400" b="0" i="0">
-                <a:solidFill>
-                  <a:srgbClr val="20291F"/>
-                </a:solidFill>
-                <a:latin typeface="Calibri"/>
-              </a:rPr>
-              <a:t> that will guide your folio work across Units 3 and 4.</a:t>
-            </a:r>
-          </a:p>
-          <a:p>
-            <a:pPr indent="-203200" marL="203200">
-              <a:spcAft>
-                <a:spcPts val="900"/>
-              </a:spcAft>
-              <a:buClr>
-                <a:srgbClr val="2F5233"/>
-              </a:buClr>
-              <a:buSzPct val="90000"/>
-              <a:buFont typeface="Arial"/>
-              <a:buChar char="●"/>
-            </a:pPr>
-            <a:r>
-              <a:rPr sz="1400" b="0" i="0">
-                <a:solidFill>
-                  <a:srgbClr val="20291F"/>
-                </a:solidFill>
-                <a:latin typeface="Calibri"/>
-              </a:rPr>
-              <a:t>This brief must be specific enough to guide two distinct concepts, but open enough to allow genuine creative exploration.</a:t>
-            </a:r>
-          </a:p>
-        </p:txBody>
-      </p:sp>
-      <p:sp>
-        <p:nvSpPr>
-          <p:cNvPr id="5" name="Rounded Rectangle 4"/>
+          <a:bodyPr rtlCol="0" anchor="ctr"/>
+          <a:lstStyle/>
+          <a:p>
+            <a:pPr algn="ctr"/>
+          </a:p>
+        </p:txBody>
+      </p:sp>
+      <p:sp>
+        <p:nvSpPr>
+          <p:cNvPr id="4" name="Rounded Rectangle 3"/>
           <p:cNvSpPr/>
           <p:nvPr/>
         </p:nvSpPr>
         <p:spPr>
           <a:xfrm>
-            <a:off x="6080760" y="1874519"/>
-            <a:ext cx="5166360" cy="4526280"/>
+            <a:off x="685800" y="457200"/>
+            <a:ext cx="1033271" cy="502920"/>
           </a:xfrm>
           <a:prstGeom prst="roundRect">
             <a:avLst>
-              <a:gd name="adj" fmla="val 6000"/>
+              <a:gd name="adj" fmla="val 50000"/>
             </a:avLst>
           </a:prstGeom>
           <a:solidFill>
-            <a:srgbClr val="DBE5E8"/>
+            <a:srgbClr val="FFFFFF"/>
           </a:solidFill>
           <a:ln>
             <a:noFill/>
@@ -3675,7 +3574,207 @@
           </a:fontRef>
         </p:style>
         <p:txBody>
-          <a:bodyPr rtlCol="0" anchor="ctr" lIns="279400" rIns="279400" tIns="228600" bIns="228600" wrap="square"/>
+          <a:bodyPr rtlCol="0" anchor="ctr"/>
+          <a:lstStyle/>
+          <a:p>
+            <a:pPr algn="ctr"/>
+            <a:r>
+              <a:rPr b="1" sz="1400">
+                <a:solidFill>
+                  <a:srgbClr val="526972"/>
+                </a:solidFill>
+                <a:latin typeface="Calibri"/>
+              </a:rPr>
+              <a:t>GAME</a:t>
+            </a:r>
+          </a:p>
+        </p:txBody>
+      </p:sp>
+      <p:sp>
+        <p:nvSpPr>
+          <p:cNvPr id="5" name="TextBox 4"/>
+          <p:cNvSpPr txBox="1"/>
+          <p:nvPr/>
+        </p:nvSpPr>
+        <p:spPr>
+          <a:xfrm>
+            <a:off x="685800" y="1143000"/>
+            <a:ext cx="10607040" cy="914400"/>
+          </a:xfrm>
+          <a:prstGeom prst="rect">
+            <a:avLst/>
+          </a:prstGeom>
+          <a:noFill/>
+        </p:spPr>
+        <p:txBody>
+          <a:bodyPr wrap="square" anchor="t">
+            <a:spAutoFit/>
+          </a:bodyPr>
+          <a:lstStyle/>
+          <a:p>
+            <a:pPr algn="l"/>
+            <a:r>
+              <a:rPr sz="3000" b="1" i="0">
+                <a:solidFill>
+                  <a:srgbClr val="FFFFFF"/>
+                </a:solidFill>
+                <a:latin typeface="Cambria"/>
+              </a:rPr>
+              <a:t>Reinvent This!</a:t>
+            </a:r>
+          </a:p>
+        </p:txBody>
+      </p:sp>
+      <p:sp>
+        <p:nvSpPr>
+          <p:cNvPr id="6" name="Rounded Rectangle 5"/>
+          <p:cNvSpPr/>
+          <p:nvPr/>
+        </p:nvSpPr>
+        <p:spPr>
+          <a:xfrm>
+            <a:off x="685800" y="2148840"/>
+            <a:ext cx="960120" cy="411480"/>
+          </a:xfrm>
+          <a:prstGeom prst="roundRect">
+            <a:avLst>
+              <a:gd name="adj" fmla="val 50000"/>
+            </a:avLst>
+          </a:prstGeom>
+          <a:solidFill>
+            <a:srgbClr val="5F7A84"/>
+          </a:solidFill>
+          <a:ln>
+            <a:noFill/>
+          </a:ln>
+          <a:effectLst/>
+        </p:spPr>
+        <p:style>
+          <a:lnRef idx="1">
+            <a:schemeClr val="accent1"/>
+          </a:lnRef>
+          <a:fillRef idx="3">
+            <a:schemeClr val="accent1"/>
+          </a:fillRef>
+          <a:effectRef idx="2">
+            <a:schemeClr val="accent1"/>
+          </a:effectRef>
+          <a:fontRef idx="minor">
+            <a:schemeClr val="lt1"/>
+          </a:fontRef>
+        </p:style>
+        <p:txBody>
+          <a:bodyPr rtlCol="0" anchor="ctr" wrap="none" lIns="50800" rIns="50800"/>
+          <a:lstStyle/>
+          <a:p>
+            <a:pPr algn="ctr"/>
+            <a:r>
+              <a:rPr sz="1050" b="1">
+                <a:solidFill>
+                  <a:srgbClr val="FFFFFF"/>
+                </a:solidFill>
+                <a:latin typeface="Calibri"/>
+              </a:rPr>
+              <a:t>5 MIN</a:t>
+            </a:r>
+          </a:p>
+        </p:txBody>
+      </p:sp>
+      <p:sp>
+        <p:nvSpPr>
+          <p:cNvPr id="7" name="Rounded Rectangle 6"/>
+          <p:cNvSpPr/>
+          <p:nvPr/>
+        </p:nvSpPr>
+        <p:spPr>
+          <a:xfrm>
+            <a:off x="1783080" y="2148840"/>
+            <a:ext cx="960120" cy="411480"/>
+          </a:xfrm>
+          <a:prstGeom prst="roundRect">
+            <a:avLst>
+              <a:gd name="adj" fmla="val 50000"/>
+            </a:avLst>
+          </a:prstGeom>
+          <a:solidFill>
+            <a:srgbClr val="5F7A84"/>
+          </a:solidFill>
+          <a:ln>
+            <a:noFill/>
+          </a:ln>
+          <a:effectLst/>
+        </p:spPr>
+        <p:style>
+          <a:lnRef idx="1">
+            <a:schemeClr val="accent1"/>
+          </a:lnRef>
+          <a:fillRef idx="3">
+            <a:schemeClr val="accent1"/>
+          </a:fillRef>
+          <a:effectRef idx="2">
+            <a:schemeClr val="accent1"/>
+          </a:effectRef>
+          <a:fontRef idx="minor">
+            <a:schemeClr val="lt1"/>
+          </a:fontRef>
+        </p:style>
+        <p:txBody>
+          <a:bodyPr rtlCol="0" anchor="ctr" wrap="none" lIns="50800" rIns="50800"/>
+          <a:lstStyle/>
+          <a:p>
+            <a:pPr algn="ctr"/>
+            <a:r>
+              <a:rPr sz="1050" b="1">
+                <a:solidFill>
+                  <a:srgbClr val="FFFFFF"/>
+                </a:solidFill>
+                <a:latin typeface="Calibri"/>
+              </a:rPr>
+              <a:t>PAIRS</a:t>
+            </a:r>
+          </a:p>
+        </p:txBody>
+      </p:sp>
+      <p:sp>
+        <p:nvSpPr>
+          <p:cNvPr id="8" name="Rounded Rectangle 7"/>
+          <p:cNvSpPr/>
+          <p:nvPr/>
+        </p:nvSpPr>
+        <p:spPr>
+          <a:xfrm>
+            <a:off x="685800" y="2788920"/>
+            <a:ext cx="10607040" cy="3246120"/>
+          </a:xfrm>
+          <a:prstGeom prst="roundRect">
+            <a:avLst>
+              <a:gd name="adj" fmla="val 8000"/>
+            </a:avLst>
+          </a:prstGeom>
+          <a:solidFill>
+            <a:srgbClr val="FFFFFF"/>
+          </a:solidFill>
+          <a:ln>
+            <a:noFill/>
+          </a:ln>
+          <a:effectLst/>
+        </p:spPr>
+        <p:style>
+          <a:lnRef idx="1">
+            <a:schemeClr val="accent1"/>
+          </a:lnRef>
+          <a:fillRef idx="3">
+            <a:schemeClr val="accent1"/>
+          </a:fillRef>
+          <a:effectRef idx="2">
+            <a:schemeClr val="accent1"/>
+          </a:effectRef>
+          <a:fontRef idx="minor">
+            <a:schemeClr val="lt1"/>
+          </a:fontRef>
+        </p:style>
+        <p:txBody>
+          <a:bodyPr rtlCol="0" anchor="ctr" lIns="304800" rIns="304800" tIns="203200" bIns="203200" wrap="square"/>
           <a:lstStyle/>
           <a:p>
             <a:pPr algn="ctr" indent="-203200" marL="203200">
@@ -3690,13 +3789,13 @@
               <a:buChar char="●"/>
             </a:pPr>
             <a:r>
-              <a:rPr sz="1400" b="0" i="0">
-                <a:solidFill>
-                  <a:srgbClr val="20291F"/>
-                </a:solidFill>
-                <a:latin typeface="Calibri"/>
-              </a:rPr>
-              <a:t>Your Brief Must State</a:t>
+              <a:rPr sz="1450" b="0" i="0">
+                <a:solidFill>
+                  <a:srgbClr val="20291F"/>
+                </a:solidFill>
+                <a:latin typeface="Calibri"/>
+              </a:rPr>
+              <a:t>Pick any everyday object in the room.</a:t>
             </a:r>
           </a:p>
           <a:p>
@@ -3709,16 +3808,16 @@
               </a:buClr>
               <a:buSzPct val="90000"/>
               <a:buFont typeface="Arial"/>
-              <a:buChar char="–"/>
+              <a:buChar char="●"/>
             </a:pPr>
             <a:r>
-              <a:rPr sz="1250" b="0" i="0">
-                <a:solidFill>
-                  <a:srgbClr val="20291F"/>
-                </a:solidFill>
-                <a:latin typeface="Calibri"/>
-              </a:rPr>
-              <a:t>Client / context</a:t>
+              <a:rPr sz="1450" b="0" i="0">
+                <a:solidFill>
+                  <a:srgbClr val="20291F"/>
+                </a:solidFill>
+                <a:latin typeface="Calibri"/>
+              </a:rPr>
+              <a:t>In your pair, brainstorm one way you could reconceptualise it and one way you could reinvent it.</a:t>
             </a:r>
           </a:p>
           <a:p>
@@ -3731,127 +3830,52 @@
               </a:buClr>
               <a:buSzPct val="90000"/>
               <a:buFont typeface="Arial"/>
-              <a:buChar char="–"/>
+              <a:buChar char="●"/>
             </a:pPr>
             <a:r>
-              <a:rPr sz="1250" b="0" i="0">
-                <a:solidFill>
-                  <a:srgbClr val="20291F"/>
-                </a:solidFill>
-                <a:latin typeface="Calibri"/>
-              </a:rPr>
-              <a:t>Target audience</a:t>
-            </a:r>
-          </a:p>
-          <a:p>
-            <a:pPr indent="-203200" marL="203200">
-              <a:spcAft>
-                <a:spcPts val="900"/>
-              </a:spcAft>
-              <a:buClr>
-                <a:srgbClr val="7FA3B0"/>
-              </a:buClr>
-              <a:buSzPct val="90000"/>
-              <a:buFont typeface="Arial"/>
-              <a:buChar char="–"/>
-            </a:pPr>
-            <a:r>
-              <a:rPr sz="1250" b="0" i="0">
-                <a:solidFill>
-                  <a:srgbClr val="20291F"/>
-                </a:solidFill>
-                <a:latin typeface="Calibri"/>
-              </a:rPr>
-              <a:t>Purpose &amp; communication objectives</a:t>
-            </a:r>
-          </a:p>
-          <a:p>
-            <a:pPr indent="-203200" marL="203200">
-              <a:spcAft>
-                <a:spcPts val="900"/>
-              </a:spcAft>
-              <a:buClr>
-                <a:srgbClr val="7FA3B0"/>
-              </a:buClr>
-              <a:buSzPct val="90000"/>
-              <a:buFont typeface="Arial"/>
-              <a:buChar char="–"/>
-            </a:pPr>
-            <a:r>
-              <a:rPr sz="1250" b="0" i="0">
-                <a:solidFill>
-                  <a:srgbClr val="20291F"/>
-                </a:solidFill>
-                <a:latin typeface="Calibri"/>
-              </a:rPr>
-              <a:t>Constraints (time, materials, format)</a:t>
-            </a:r>
-          </a:p>
-          <a:p>
-            <a:pPr indent="-203200" marL="203200">
-              <a:spcAft>
-                <a:spcPts val="900"/>
-              </a:spcAft>
-              <a:buClr>
-                <a:srgbClr val="7FA3B0"/>
-              </a:buClr>
-              <a:buSzPct val="90000"/>
-              <a:buFont typeface="Arial"/>
-              <a:buChar char="–"/>
-            </a:pPr>
-            <a:r>
-              <a:rPr sz="1250" b="0" i="0">
-                <a:solidFill>
-                  <a:srgbClr val="20291F"/>
-                </a:solidFill>
-                <a:latin typeface="Calibri"/>
-              </a:rPr>
-              <a:t>Two (2) obligatory design fields/outcomes</a:t>
-            </a:r>
-          </a:p>
-        </p:txBody>
-      </p:sp>
-      <p:sp>
-        <p:nvSpPr>
-          <p:cNvPr id="6" name="Oval 5"/>
-          <p:cNvSpPr/>
-          <p:nvPr/>
-        </p:nvSpPr>
-        <p:spPr>
-          <a:xfrm>
-            <a:off x="5532120" y="3840480"/>
-            <a:ext cx="685800" cy="685800"/>
-          </a:xfrm>
-          <a:prstGeom prst="ellipse">
+              <a:rPr sz="1450" b="0" i="0">
+                <a:solidFill>
+                  <a:srgbClr val="20291F"/>
+                </a:solidFill>
+                <a:latin typeface="Calibri"/>
+              </a:rPr>
+              <a:t>Be ready to explain the difference between your two ideas.</a:t>
+            </a:r>
+          </a:p>
+        </p:txBody>
+      </p:sp>
+      <p:sp>
+        <p:nvSpPr>
+          <p:cNvPr id="9" name="TextBox 8"/>
+          <p:cNvSpPr txBox="1"/>
+          <p:nvPr/>
+        </p:nvSpPr>
+        <p:spPr>
+          <a:xfrm>
+            <a:off x="685800" y="6217920"/>
+            <a:ext cx="10607040" cy="502920"/>
+          </a:xfrm>
+          <a:prstGeom prst="rect">
             <a:avLst/>
           </a:prstGeom>
-          <a:solidFill>
-            <a:srgbClr val="C9743D"/>
-          </a:solidFill>
-          <a:ln>
-            <a:noFill/>
-          </a:ln>
-          <a:effectLst/>
-        </p:spPr>
-        <p:style>
-          <a:lnRef idx="1">
-            <a:schemeClr val="accent1"/>
-          </a:lnRef>
-          <a:fillRef idx="3">
-            <a:schemeClr val="accent1"/>
-          </a:fillRef>
-          <a:effectRef idx="2">
-            <a:schemeClr val="accent1"/>
-          </a:effectRef>
-          <a:fontRef idx="minor">
-            <a:schemeClr val="lt1"/>
-          </a:fontRef>
-        </p:style>
-        <p:txBody>
-          <a:bodyPr rtlCol="0" anchor="ctr"/>
-          <a:lstStyle/>
-          <a:p>
-            <a:pPr algn="ctr"/>
+          <a:noFill/>
+        </p:spPr>
+        <p:txBody>
+          <a:bodyPr wrap="square" anchor="t">
+            <a:spAutoFit/>
+          </a:bodyPr>
+          <a:lstStyle/>
+          <a:p>
+            <a:pPr algn="l"/>
+            <a:r>
+              <a:rPr sz="1250" b="0" i="1">
+                <a:solidFill>
+                  <a:srgbClr val="FFFFFF"/>
+                </a:solidFill>
+                <a:latin typeface="Calibri"/>
+              </a:rPr>
+              <a:t>Debrief: Which was harder to think of — the reconceptualisation or the reinvention?</a:t>
+            </a:r>
           </a:p>
         </p:txBody>
       </p:sp>
@@ -3869,7 +3893,7 @@
     <p:bg>
       <p:bgPr>
         <a:solidFill>
-          <a:srgbClr val="F7F5EC"/>
+          <a:srgbClr val="2F5233"/>
         </a:solidFill>
         <a:effectLst/>
       </p:bgPr>
@@ -3883,22 +3907,20 @@
       <p:grpSpPr/>
       <p:sp>
         <p:nvSpPr>
-          <p:cNvPr id="2" name="Rounded Rectangle 1"/>
+          <p:cNvPr id="2" name="Oval 1"/>
           <p:cNvSpPr/>
           <p:nvPr/>
         </p:nvSpPr>
         <p:spPr>
           <a:xfrm>
-            <a:off x="685800" y="502920"/>
-            <a:ext cx="3291840" cy="457200"/>
-          </a:xfrm>
-          <a:prstGeom prst="roundRect">
-            <a:avLst>
-              <a:gd name="adj" fmla="val 50000"/>
-            </a:avLst>
-          </a:prstGeom>
-          <a:solidFill>
-            <a:srgbClr val="2F5233"/>
+            <a:off x="9692640" y="-914400"/>
+            <a:ext cx="2926080" cy="2926080"/>
+          </a:xfrm>
+          <a:prstGeom prst="ellipse">
+            <a:avLst/>
+          </a:prstGeom>
+          <a:solidFill>
+            <a:srgbClr val="29482C"/>
           </a:solidFill>
           <a:ln>
             <a:noFill/>
@@ -3920,75 +3942,29 @@
           </a:fontRef>
         </p:style>
         <p:txBody>
-          <a:bodyPr rtlCol="0" anchor="ctr" wrap="none" lIns="50800" rIns="50800"/>
+          <a:bodyPr rtlCol="0" anchor="ctr"/>
           <a:lstStyle/>
           <a:p>
             <a:pPr algn="ctr"/>
-            <a:r>
-              <a:rPr sz="1100" b="1">
-                <a:solidFill>
-                  <a:srgbClr val="FFFFFF"/>
-                </a:solidFill>
-                <a:latin typeface="Calibri"/>
-              </a:rPr>
-              <a:t>THE BRIEF &amp; IDEATION</a:t>
-            </a:r>
-          </a:p>
-        </p:txBody>
-      </p:sp>
-      <p:sp>
-        <p:nvSpPr>
-          <p:cNvPr id="3" name="TextBox 2"/>
-          <p:cNvSpPr txBox="1"/>
-          <p:nvPr/>
-        </p:nvSpPr>
-        <p:spPr>
-          <a:xfrm>
-            <a:off x="685800" y="1051560"/>
-            <a:ext cx="10607040" cy="822960"/>
-          </a:xfrm>
-          <a:prstGeom prst="rect">
+          </a:p>
+        </p:txBody>
+      </p:sp>
+      <p:sp>
+        <p:nvSpPr>
+          <p:cNvPr id="3" name="Oval 2"/>
+          <p:cNvSpPr/>
+          <p:nvPr/>
+        </p:nvSpPr>
+        <p:spPr>
+          <a:xfrm>
+            <a:off x="-914400" y="4937760"/>
+            <a:ext cx="2377440" cy="2377440"/>
+          </a:xfrm>
+          <a:prstGeom prst="ellipse">
             <a:avLst/>
           </a:prstGeom>
-          <a:noFill/>
-        </p:spPr>
-        <p:txBody>
-          <a:bodyPr wrap="square" anchor="t">
-            <a:spAutoFit/>
-          </a:bodyPr>
-          <a:lstStyle/>
-          <a:p>
-            <a:pPr algn="l"/>
-            <a:r>
-              <a:rPr sz="2700" b="1" i="0">
-                <a:solidFill>
-                  <a:srgbClr val="20291F"/>
-                </a:solidFill>
-                <a:latin typeface="Cambria"/>
-              </a:rPr>
-              <a:t>Deconstructing a Brief</a:t>
-            </a:r>
-          </a:p>
-        </p:txBody>
-      </p:sp>
-      <p:sp>
-        <p:nvSpPr>
-          <p:cNvPr id="4" name="Rounded Rectangle 3"/>
-          <p:cNvSpPr/>
-          <p:nvPr/>
-        </p:nvSpPr>
-        <p:spPr>
-          <a:xfrm>
-            <a:off x="685800" y="1874519"/>
-            <a:ext cx="5166360" cy="4526280"/>
-          </a:xfrm>
-          <a:prstGeom prst="roundRect">
-            <a:avLst>
-              <a:gd name="adj" fmla="val 6000"/>
-            </a:avLst>
-          </a:prstGeom>
-          <a:solidFill>
-            <a:srgbClr val="E6EAE6"/>
+          <a:solidFill>
+            <a:srgbClr val="29482C"/>
           </a:solidFill>
           <a:ln>
             <a:noFill/>
@@ -4010,174 +3986,31 @@
           </a:fontRef>
         </p:style>
         <p:txBody>
-          <a:bodyPr rtlCol="0" anchor="ctr" lIns="279400" rIns="279400" tIns="228600" bIns="228600" wrap="square"/>
-          <a:lstStyle/>
-          <a:p>
-            <a:pPr algn="ctr" indent="-203200" marL="203200">
-              <a:spcAft>
-                <a:spcPts val="900"/>
-              </a:spcAft>
-              <a:buClr>
-                <a:srgbClr val="2F5233"/>
-              </a:buClr>
-              <a:buSzPct val="90000"/>
-              <a:buFont typeface="Arial"/>
-              <a:buChar char="●"/>
-            </a:pPr>
-            <a:r>
-              <a:rPr sz="1400" b="0" i="0">
-                <a:solidFill>
-                  <a:srgbClr val="20291F"/>
-                </a:solidFill>
-                <a:latin typeface="Calibri"/>
-              </a:rPr>
-              <a:t>Before generating ideas, break the brief into its component parts to ensure nothing is missed.</a:t>
-            </a:r>
-          </a:p>
-          <a:p>
-            <a:pPr indent="-203200" marL="203200">
-              <a:spcAft>
-                <a:spcPts val="900"/>
-              </a:spcAft>
-              <a:buClr>
-                <a:srgbClr val="2F5233"/>
-              </a:buClr>
-              <a:buSzPct val="90000"/>
-              <a:buFont typeface="Arial"/>
-              <a:buChar char="–"/>
-            </a:pPr>
-            <a:r>
-              <a:rPr sz="1250" b="1" i="0">
-                <a:solidFill>
-                  <a:srgbClr val="27452B"/>
-                </a:solidFill>
-                <a:latin typeface="Calibri"/>
-              </a:rPr>
-              <a:t>Who</a:t>
-            </a:r>
-            <a:r>
-              <a:rPr sz="1250" b="0" i="0">
-                <a:solidFill>
-                  <a:srgbClr val="20291F"/>
-                </a:solidFill>
-                <a:latin typeface="Calibri"/>
-              </a:rPr>
-              <a:t> — the target audience and their needs</a:t>
-            </a:r>
-          </a:p>
-          <a:p>
-            <a:pPr indent="-203200" marL="203200">
-              <a:spcAft>
-                <a:spcPts val="900"/>
-              </a:spcAft>
-              <a:buClr>
-                <a:srgbClr val="2F5233"/>
-              </a:buClr>
-              <a:buSzPct val="90000"/>
-              <a:buFont typeface="Arial"/>
-              <a:buChar char="–"/>
-            </a:pPr>
-            <a:r>
-              <a:rPr sz="1250" b="1" i="0">
-                <a:solidFill>
-                  <a:srgbClr val="27452B"/>
-                </a:solidFill>
-                <a:latin typeface="Calibri"/>
-              </a:rPr>
-              <a:t>What</a:t>
-            </a:r>
-            <a:r>
-              <a:rPr sz="1250" b="0" i="0">
-                <a:solidFill>
-                  <a:srgbClr val="20291F"/>
-                </a:solidFill>
-                <a:latin typeface="Calibri"/>
-              </a:rPr>
-              <a:t> — the required outcomes (obligatory design fields)</a:t>
-            </a:r>
-          </a:p>
-          <a:p>
-            <a:pPr indent="-203200" marL="203200">
-              <a:spcAft>
-                <a:spcPts val="900"/>
-              </a:spcAft>
-              <a:buClr>
-                <a:srgbClr val="2F5233"/>
-              </a:buClr>
-              <a:buSzPct val="90000"/>
-              <a:buFont typeface="Arial"/>
-              <a:buChar char="–"/>
-            </a:pPr>
-            <a:r>
-              <a:rPr sz="1250" b="1" i="0">
-                <a:solidFill>
-                  <a:srgbClr val="27452B"/>
-                </a:solidFill>
-                <a:latin typeface="Calibri"/>
-              </a:rPr>
-              <a:t>Why</a:t>
-            </a:r>
-            <a:r>
-              <a:rPr sz="1250" b="0" i="0">
-                <a:solidFill>
-                  <a:srgbClr val="20291F"/>
-                </a:solidFill>
-                <a:latin typeface="Calibri"/>
-              </a:rPr>
-              <a:t> — the purpose and desired effect</a:t>
-            </a:r>
-          </a:p>
-          <a:p>
-            <a:pPr indent="-203200" marL="203200">
-              <a:spcAft>
-                <a:spcPts val="900"/>
-              </a:spcAft>
-              <a:buClr>
-                <a:srgbClr val="2F5233"/>
-              </a:buClr>
-              <a:buSzPct val="90000"/>
-              <a:buFont typeface="Arial"/>
-              <a:buChar char="–"/>
-            </a:pPr>
-            <a:r>
-              <a:rPr sz="1250" b="1" i="0">
-                <a:solidFill>
-                  <a:srgbClr val="27452B"/>
-                </a:solidFill>
-                <a:latin typeface="Calibri"/>
-              </a:rPr>
-              <a:t>Constraints</a:t>
-            </a:r>
-            <a:r>
-              <a:rPr sz="1250" b="0" i="0">
-                <a:solidFill>
-                  <a:srgbClr val="20291F"/>
-                </a:solidFill>
-                <a:latin typeface="Calibri"/>
-              </a:rPr>
-              <a:t> — what limits the possible solutions</a:t>
-            </a:r>
-          </a:p>
-        </p:txBody>
-      </p:sp>
-      <p:sp>
-        <p:nvSpPr>
-          <p:cNvPr id="5" name="Rounded Rectangle 4"/>
+          <a:bodyPr rtlCol="0" anchor="ctr"/>
+          <a:lstStyle/>
+          <a:p>
+            <a:pPr algn="ctr"/>
+          </a:p>
+        </p:txBody>
+      </p:sp>
+      <p:sp>
+        <p:nvSpPr>
+          <p:cNvPr id="4" name="Rounded Rectangle 3"/>
           <p:cNvSpPr/>
           <p:nvPr/>
         </p:nvSpPr>
         <p:spPr>
           <a:xfrm>
-            <a:off x="6080760" y="1874519"/>
-            <a:ext cx="5166360" cy="4526280"/>
+            <a:off x="822960" y="1051560"/>
+            <a:ext cx="1188720" cy="502920"/>
           </a:xfrm>
           <a:prstGeom prst="roundRect">
             <a:avLst>
-              <a:gd name="adj" fmla="val 6000"/>
+              <a:gd name="adj" fmla="val 50000"/>
             </a:avLst>
           </a:prstGeom>
           <a:solidFill>
-            <a:srgbClr val="DBE5E8"/>
+            <a:srgbClr val="FFFFFF"/>
           </a:solidFill>
           <a:ln>
             <a:noFill/>
@@ -4199,106 +4032,40 @@
           </a:fontRef>
         </p:style>
         <p:txBody>
-          <a:bodyPr rtlCol="0" anchor="ctr" lIns="279400" rIns="279400" tIns="228600" bIns="228600" wrap="square"/>
-          <a:lstStyle/>
-          <a:p>
-            <a:pPr algn="ctr" indent="-203200" marL="203200">
-              <a:spcAft>
-                <a:spcPts val="900"/>
-              </a:spcAft>
-              <a:buClr>
-                <a:srgbClr val="7FA3B0"/>
-              </a:buClr>
-              <a:buSzPct val="90000"/>
-              <a:buFont typeface="Arial"/>
-              <a:buChar char="●"/>
-            </a:pPr>
-            <a:r>
-              <a:rPr sz="1400" b="0" i="0">
-                <a:solidFill>
-                  <a:srgbClr val="20291F"/>
-                </a:solidFill>
-                <a:latin typeface="Calibri"/>
-              </a:rPr>
-              <a:t>Exam Tip</a:t>
-            </a:r>
-          </a:p>
-          <a:p>
-            <a:pPr indent="-203200" marL="203200">
-              <a:spcAft>
-                <a:spcPts val="900"/>
-              </a:spcAft>
-              <a:buClr>
-                <a:srgbClr val="7FA3B0"/>
-              </a:buClr>
-              <a:buSzPct val="90000"/>
-              <a:buFont typeface="Arial"/>
-              <a:buChar char="●"/>
-            </a:pPr>
-            <a:r>
-              <a:rPr sz="1400" b="0" i="0">
-                <a:solidFill>
-                  <a:srgbClr val="20291F"/>
-                </a:solidFill>
-                <a:latin typeface="Calibri"/>
-              </a:rPr>
-              <a:t>Exam questions often ask you to identify a </a:t>
-            </a:r>
-            <a:r>
-              <a:rPr sz="1400" b="1" i="0">
-                <a:solidFill>
-                  <a:srgbClr val="6B8A95"/>
-                </a:solidFill>
-                <a:latin typeface="Calibri"/>
-              </a:rPr>
-              <a:t>missing</a:t>
-            </a:r>
-            <a:r>
-              <a:rPr sz="1400" b="0" i="0">
-                <a:solidFill>
-                  <a:srgbClr val="20291F"/>
-                </a:solidFill>
-                <a:latin typeface="Calibri"/>
-              </a:rPr>
-              <a:t> or </a:t>
-            </a:r>
-            <a:r>
-              <a:rPr sz="1400" b="1" i="0">
-                <a:solidFill>
-                  <a:srgbClr val="6B8A95"/>
-                </a:solidFill>
-                <a:latin typeface="Calibri"/>
-              </a:rPr>
-              <a:t>unclear</a:t>
-            </a:r>
-            <a:r>
-              <a:rPr sz="1400" b="0" i="0">
-                <a:solidFill>
-                  <a:srgbClr val="20291F"/>
-                </a:solidFill>
-                <a:latin typeface="Calibri"/>
-              </a:rPr>
-              <a:t> part of a given brief — practice spotting gaps in audience, purpose or constraints.</a:t>
-            </a:r>
-          </a:p>
-        </p:txBody>
-      </p:sp>
-      <p:sp>
-        <p:nvSpPr>
-          <p:cNvPr id="6" name="Oval 5"/>
+          <a:bodyPr rtlCol="0" anchor="ctr" wrap="none" lIns="50800" rIns="50800"/>
+          <a:lstStyle/>
+          <a:p>
+            <a:pPr algn="ctr"/>
+            <a:r>
+              <a:rPr sz="1400" b="1">
+                <a:solidFill>
+                  <a:srgbClr val="254128"/>
+                </a:solidFill>
+                <a:latin typeface="Calibri"/>
+              </a:rPr>
+              <a:t>02</a:t>
+            </a:r>
+          </a:p>
+        </p:txBody>
+      </p:sp>
+      <p:sp>
+        <p:nvSpPr>
+          <p:cNvPr id="5" name="Rounded Rectangle 4"/>
           <p:cNvSpPr/>
           <p:nvPr/>
         </p:nvSpPr>
         <p:spPr>
           <a:xfrm>
-            <a:off x="5532120" y="3840480"/>
-            <a:ext cx="685800" cy="685800"/>
-          </a:xfrm>
-          <a:prstGeom prst="ellipse">
-            <a:avLst/>
-          </a:prstGeom>
-          <a:solidFill>
-            <a:srgbClr val="C9743D"/>
+            <a:off x="822960" y="2011680"/>
+            <a:ext cx="10515600" cy="2834640"/>
+          </a:xfrm>
+          <a:prstGeom prst="roundRect">
+            <a:avLst>
+              <a:gd name="adj" fmla="val 18000"/>
+            </a:avLst>
+          </a:prstGeom>
+          <a:solidFill>
+            <a:srgbClr val="FFFFFF"/>
           </a:solidFill>
           <a:ln>
             <a:noFill/>
@@ -4324,6 +4091,76 @@
           <a:lstStyle/>
           <a:p>
             <a:pPr algn="ctr"/>
+          </a:p>
+        </p:txBody>
+      </p:sp>
+      <p:sp>
+        <p:nvSpPr>
+          <p:cNvPr id="6" name="TextBox 5"/>
+          <p:cNvSpPr txBox="1"/>
+          <p:nvPr/>
+        </p:nvSpPr>
+        <p:spPr>
+          <a:xfrm>
+            <a:off x="1280160" y="2697480"/>
+            <a:ext cx="9601200" cy="1097280"/>
+          </a:xfrm>
+          <a:prstGeom prst="rect">
+            <a:avLst/>
+          </a:prstGeom>
+          <a:noFill/>
+        </p:spPr>
+        <p:txBody>
+          <a:bodyPr wrap="square" anchor="t">
+            <a:spAutoFit/>
+          </a:bodyPr>
+          <a:lstStyle/>
+          <a:p>
+            <a:pPr algn="l"/>
+            <a:r>
+              <a:rPr sz="3400" b="1" i="0">
+                <a:solidFill>
+                  <a:srgbClr val="27452B"/>
+                </a:solidFill>
+                <a:latin typeface="Cambria"/>
+              </a:rPr>
+              <a:t>The Brief &amp; Ideation</a:t>
+            </a:r>
+          </a:p>
+        </p:txBody>
+      </p:sp>
+      <p:sp>
+        <p:nvSpPr>
+          <p:cNvPr id="7" name="TextBox 6"/>
+          <p:cNvSpPr txBox="1"/>
+          <p:nvPr/>
+        </p:nvSpPr>
+        <p:spPr>
+          <a:xfrm>
+            <a:off x="1280160" y="3657600"/>
+            <a:ext cx="9601200" cy="548640"/>
+          </a:xfrm>
+          <a:prstGeom prst="rect">
+            <a:avLst/>
+          </a:prstGeom>
+          <a:noFill/>
+        </p:spPr>
+        <p:txBody>
+          <a:bodyPr wrap="square" anchor="t">
+            <a:spAutoFit/>
+          </a:bodyPr>
+          <a:lstStyle/>
+          <a:p>
+            <a:pPr algn="l"/>
+            <a:r>
+              <a:rPr sz="1500" b="0" i="0">
+                <a:solidFill>
+                  <a:srgbClr val="6B6B6B"/>
+                </a:solidFill>
+                <a:latin typeface="Calibri"/>
+              </a:rPr>
+              <a:t>AOS 2 - Design Industry Practice</a:t>
+            </a:r>
           </a:p>
         </p:txBody>
       </p:sp>
@@ -4438,7 +4275,7 @@
                 </a:solidFill>
                 <a:latin typeface="Cambria"/>
               </a:rPr>
-              <a:t>Generating Two Distinct Concepts</a:t>
+              <a:t>Writing Your Own Brief</a:t>
             </a:r>
           </a:p>
         </p:txBody>
@@ -4503,7 +4340,7 @@
                 </a:solidFill>
                 <a:latin typeface="Calibri"/>
               </a:rPr>
-              <a:t>Your folio must show a genuine range of ideas — leading to </a:t>
+              <a:t>Using your Unit 3 AOS 1 analysis and reinterpretation, you write a </a:t>
             </a:r>
             <a:r>
               <a:rPr sz="1400" b="1" i="0">
@@ -4512,7 +4349,7 @@
                 </a:solidFill>
                 <a:latin typeface="Calibri"/>
               </a:rPr>
-              <a:t>two distinctly different concepts</a:t>
+              <a:t>design brief</a:t>
             </a:r>
             <a:r>
               <a:rPr sz="1400" b="0" i="0">
@@ -4521,7 +4358,7 @@
                 </a:solidFill>
                 <a:latin typeface="Calibri"/>
               </a:rPr>
-              <a:t> that will each be developed and refined in Unit 4.</a:t>
+              <a:t> that will guide your folio work across Units 3 and 4.</a:t>
             </a:r>
           </a:p>
           <a:p>
@@ -4543,73 +4380,7 @@
                 </a:solidFill>
                 <a:latin typeface="Calibri"/>
               </a:rPr>
-              <a:t>What Makes Concepts "Distinct"?</a:t>
-            </a:r>
-          </a:p>
-          <a:p>
-            <a:pPr indent="-203200" marL="203200">
-              <a:spcAft>
-                <a:spcPts val="900"/>
-              </a:spcAft>
-              <a:buClr>
-                <a:srgbClr val="2F5233"/>
-              </a:buClr>
-              <a:buSzPct val="90000"/>
-              <a:buFont typeface="Arial"/>
-              <a:buChar char="–"/>
-            </a:pPr>
-            <a:r>
-              <a:rPr sz="1250" b="0" i="0">
-                <a:solidFill>
-                  <a:srgbClr val="20291F"/>
-                </a:solidFill>
-                <a:latin typeface="Calibri"/>
-              </a:rPr>
-              <a:t>Different visual approach (not just colour changes)</a:t>
-            </a:r>
-          </a:p>
-          <a:p>
-            <a:pPr indent="-203200" marL="203200">
-              <a:spcAft>
-                <a:spcPts val="900"/>
-              </a:spcAft>
-              <a:buClr>
-                <a:srgbClr val="2F5233"/>
-              </a:buClr>
-              <a:buSzPct val="90000"/>
-              <a:buFont typeface="Arial"/>
-              <a:buChar char="–"/>
-            </a:pPr>
-            <a:r>
-              <a:rPr sz="1250" b="0" i="0">
-                <a:solidFill>
-                  <a:srgbClr val="20291F"/>
-                </a:solidFill>
-                <a:latin typeface="Calibri"/>
-              </a:rPr>
-              <a:t>Different treatment of elements/principles</a:t>
-            </a:r>
-          </a:p>
-          <a:p>
-            <a:pPr indent="-203200" marL="203200">
-              <a:spcAft>
-                <a:spcPts val="900"/>
-              </a:spcAft>
-              <a:buClr>
-                <a:srgbClr val="2F5233"/>
-              </a:buClr>
-              <a:buSzPct val="90000"/>
-              <a:buFont typeface="Arial"/>
-              <a:buChar char="–"/>
-            </a:pPr>
-            <a:r>
-              <a:rPr sz="1250" b="0" i="0">
-                <a:solidFill>
-                  <a:srgbClr val="20291F"/>
-                </a:solidFill>
-                <a:latin typeface="Calibri"/>
-              </a:rPr>
-              <a:t>Different overall style or design field emphasis</a:t>
+              <a:t>This brief must be specific enough to guide two distinct concepts, but open enough to allow genuine creative exploration.</a:t>
             </a:r>
           </a:p>
         </p:txBody>
@@ -4674,7 +4445,7 @@
                 </a:solidFill>
                 <a:latin typeface="Calibri"/>
               </a:rPr>
-              <a:t>Ideation Methods (recap)</a:t>
+              <a:t>Your Brief Must State</a:t>
             </a:r>
           </a:p>
           <a:p>
@@ -4687,16 +4458,104 @@
               </a:buClr>
               <a:buSzPct val="90000"/>
               <a:buFont typeface="Arial"/>
-              <a:buChar char="●"/>
+              <a:buChar char="–"/>
             </a:pPr>
             <a:r>
-              <a:rPr sz="1400" b="0" i="0">
-                <a:solidFill>
-                  <a:srgbClr val="20291F"/>
-                </a:solidFill>
-                <a:latin typeface="Calibri"/>
-              </a:rPr>
-              <a:t>Brainstorming, mind mapping, thumbnail sketches, mood boards, SCAMPER — see the Unit 1 AOS 2 Design Process materials for a full recap of these methods.</a:t>
+              <a:rPr sz="1250" b="0" i="0">
+                <a:solidFill>
+                  <a:srgbClr val="20291F"/>
+                </a:solidFill>
+                <a:latin typeface="Calibri"/>
+              </a:rPr>
+              <a:t>Client / context</a:t>
+            </a:r>
+          </a:p>
+          <a:p>
+            <a:pPr indent="-203200" marL="203200">
+              <a:spcAft>
+                <a:spcPts val="900"/>
+              </a:spcAft>
+              <a:buClr>
+                <a:srgbClr val="7FA3B0"/>
+              </a:buClr>
+              <a:buSzPct val="90000"/>
+              <a:buFont typeface="Arial"/>
+              <a:buChar char="–"/>
+            </a:pPr>
+            <a:r>
+              <a:rPr sz="1250" b="0" i="0">
+                <a:solidFill>
+                  <a:srgbClr val="20291F"/>
+                </a:solidFill>
+                <a:latin typeface="Calibri"/>
+              </a:rPr>
+              <a:t>Target audience</a:t>
+            </a:r>
+          </a:p>
+          <a:p>
+            <a:pPr indent="-203200" marL="203200">
+              <a:spcAft>
+                <a:spcPts val="900"/>
+              </a:spcAft>
+              <a:buClr>
+                <a:srgbClr val="7FA3B0"/>
+              </a:buClr>
+              <a:buSzPct val="90000"/>
+              <a:buFont typeface="Arial"/>
+              <a:buChar char="–"/>
+            </a:pPr>
+            <a:r>
+              <a:rPr sz="1250" b="0" i="0">
+                <a:solidFill>
+                  <a:srgbClr val="20291F"/>
+                </a:solidFill>
+                <a:latin typeface="Calibri"/>
+              </a:rPr>
+              <a:t>Purpose &amp; communication objectives</a:t>
+            </a:r>
+          </a:p>
+          <a:p>
+            <a:pPr indent="-203200" marL="203200">
+              <a:spcAft>
+                <a:spcPts val="900"/>
+              </a:spcAft>
+              <a:buClr>
+                <a:srgbClr val="7FA3B0"/>
+              </a:buClr>
+              <a:buSzPct val="90000"/>
+              <a:buFont typeface="Arial"/>
+              <a:buChar char="–"/>
+            </a:pPr>
+            <a:r>
+              <a:rPr sz="1250" b="0" i="0">
+                <a:solidFill>
+                  <a:srgbClr val="20291F"/>
+                </a:solidFill>
+                <a:latin typeface="Calibri"/>
+              </a:rPr>
+              <a:t>Constraints (time, materials, format)</a:t>
+            </a:r>
+          </a:p>
+          <a:p>
+            <a:pPr indent="-203200" marL="203200">
+              <a:spcAft>
+                <a:spcPts val="900"/>
+              </a:spcAft>
+              <a:buClr>
+                <a:srgbClr val="7FA3B0"/>
+              </a:buClr>
+              <a:buSzPct val="90000"/>
+              <a:buFont typeface="Arial"/>
+              <a:buChar char="–"/>
+            </a:pPr>
+            <a:r>
+              <a:rPr sz="1250" b="0" i="0">
+                <a:solidFill>
+                  <a:srgbClr val="20291F"/>
+                </a:solidFill>
+                <a:latin typeface="Calibri"/>
+              </a:rPr>
+              <a:t>Two (2) obligatory design fields/outcomes</a:t>
             </a:r>
           </a:p>
         </p:txBody>
@@ -4856,7 +4715,7 @@
                 </a:solidFill>
                 <a:latin typeface="Cambria"/>
               </a:rPr>
-              <a:t>Research to Support Ideation</a:t>
+              <a:t>Deconstructing a Brief</a:t>
             </a:r>
           </a:p>
         </p:txBody>
@@ -4921,7 +4780,7 @@
                 </a:solidFill>
                 <a:latin typeface="Calibri"/>
               </a:rPr>
-              <a:t>Targeted research ensures your ideas are grounded in the brief's real audience and context, not just personal preference.</a:t>
+              <a:t>Before generating ideas, break the brief into its component parts to ensure nothing is missed.</a:t>
             </a:r>
           </a:p>
           <a:p>
@@ -4943,7 +4802,7 @@
                 </a:solidFill>
                 <a:latin typeface="Calibri"/>
               </a:rPr>
-              <a:t>Audience research</a:t>
+              <a:t>Who</a:t>
             </a:r>
             <a:r>
               <a:rPr sz="1250" b="0" i="0">
@@ -4952,7 +4811,7 @@
                 </a:solidFill>
                 <a:latin typeface="Calibri"/>
               </a:rPr>
-              <a:t> — interviews, surveys of the target group</a:t>
+              <a:t> — the target audience and their needs</a:t>
             </a:r>
           </a:p>
           <a:p>
@@ -4974,7 +4833,7 @@
                 </a:solidFill>
                 <a:latin typeface="Calibri"/>
               </a:rPr>
-              <a:t>Visual research</a:t>
+              <a:t>What</a:t>
             </a:r>
             <a:r>
               <a:rPr sz="1250" b="0" i="0">
@@ -4983,7 +4842,7 @@
                 </a:solidFill>
                 <a:latin typeface="Calibri"/>
               </a:rPr>
-              <a:t> — mood boards, existing designs in the same field</a:t>
+              <a:t> — the required outcomes (obligatory design fields)</a:t>
             </a:r>
           </a:p>
           <a:p>
@@ -5005,7 +4864,7 @@
                 </a:solidFill>
                 <a:latin typeface="Calibri"/>
               </a:rPr>
-              <a:t>Contextual research</a:t>
+              <a:t>Why</a:t>
             </a:r>
             <a:r>
               <a:rPr sz="1250" b="0" i="0">
@@ -5014,7 +4873,38 @@
                 </a:solidFill>
                 <a:latin typeface="Calibri"/>
               </a:rPr>
-              <a:t> — relevant trends, industry practice, materials</a:t>
+              <a:t> — the purpose and desired effect</a:t>
+            </a:r>
+          </a:p>
+          <a:p>
+            <a:pPr indent="-203200" marL="203200">
+              <a:spcAft>
+                <a:spcPts val="900"/>
+              </a:spcAft>
+              <a:buClr>
+                <a:srgbClr val="2F5233"/>
+              </a:buClr>
+              <a:buSzPct val="90000"/>
+              <a:buFont typeface="Arial"/>
+              <a:buChar char="–"/>
+            </a:pPr>
+            <a:r>
+              <a:rPr sz="1250" b="1" i="0">
+                <a:solidFill>
+                  <a:srgbClr val="27452B"/>
+                </a:solidFill>
+                <a:latin typeface="Calibri"/>
+              </a:rPr>
+              <a:t>Constraints</a:t>
+            </a:r>
+            <a:r>
+              <a:rPr sz="1250" b="0" i="0">
+                <a:solidFill>
+                  <a:srgbClr val="20291F"/>
+                </a:solidFill>
+                <a:latin typeface="Calibri"/>
+              </a:rPr>
+              <a:t> — what limits the possible solutions</a:t>
             </a:r>
           </a:p>
         </p:txBody>
@@ -5079,7 +4969,29 @@
                 </a:solidFill>
                 <a:latin typeface="Calibri"/>
               </a:rPr>
-              <a:t>Link your research directly back to </a:t>
+              <a:t>Exam Tip</a:t>
+            </a:r>
+          </a:p>
+          <a:p>
+            <a:pPr indent="-203200" marL="203200">
+              <a:spcAft>
+                <a:spcPts val="900"/>
+              </a:spcAft>
+              <a:buClr>
+                <a:srgbClr val="7FA3B0"/>
+              </a:buClr>
+              <a:buSzPct val="90000"/>
+              <a:buFont typeface="Arial"/>
+              <a:buChar char="●"/>
+            </a:pPr>
+            <a:r>
+              <a:rPr sz="1400" b="0" i="0">
+                <a:solidFill>
+                  <a:srgbClr val="20291F"/>
+                </a:solidFill>
+                <a:latin typeface="Calibri"/>
+              </a:rPr>
+              <a:t>Exam questions often ask you to identify a </a:t>
             </a:r>
             <a:r>
               <a:rPr sz="1400" b="1" i="0">
@@ -5088,7 +5000,7 @@
                 </a:solidFill>
                 <a:latin typeface="Calibri"/>
               </a:rPr>
-              <a:t>Unit 2</a:t>
+              <a:t>missing</a:t>
             </a:r>
             <a:r>
               <a:rPr sz="1400" b="0" i="0">
@@ -5097,7 +5009,25 @@
                 </a:solidFill>
                 <a:latin typeface="Calibri"/>
               </a:rPr>
-              <a:t> concepts — current trends and industry connections should inform your ideas.</a:t>
+              <a:t> or </a:t>
+            </a:r>
+            <a:r>
+              <a:rPr sz="1400" b="1" i="0">
+                <a:solidFill>
+                  <a:srgbClr val="6B8A95"/>
+                </a:solidFill>
+                <a:latin typeface="Calibri"/>
+              </a:rPr>
+              <a:t>unclear</a:t>
+            </a:r>
+            <a:r>
+              <a:rPr sz="1400" b="0" i="0">
+                <a:solidFill>
+                  <a:srgbClr val="20291F"/>
+                </a:solidFill>
+                <a:latin typeface="Calibri"/>
+              </a:rPr>
+              <a:t> part of a given brief — practice spotting gaps in audience, purpose or constraints.</a:t>
             </a:r>
           </a:p>
         </p:txBody>
@@ -5257,7 +5187,7 @@
                 </a:solidFill>
                 <a:latin typeface="Cambria"/>
               </a:rPr>
-              <a:t>Answering Brief Questions</a:t>
+              <a:t>Generating Two Distinct Concepts</a:t>
             </a:r>
           </a:p>
         </p:txBody>
@@ -5313,16 +5243,56 @@
               </a:buClr>
               <a:buSzPct val="90000"/>
               <a:buFont typeface="Arial"/>
-              <a:buChar char="–"/>
+              <a:buChar char="●"/>
             </a:pPr>
             <a:r>
-              <a:rPr sz="1250" b="0" i="0">
-                <a:solidFill>
-                  <a:srgbClr val="20291F"/>
-                </a:solidFill>
-                <a:latin typeface="Calibri"/>
-              </a:rPr>
-              <a:t>Identify → Explain → Suggest</a:t>
+              <a:rPr sz="1400" b="0" i="0">
+                <a:solidFill>
+                  <a:srgbClr val="20291F"/>
+                </a:solidFill>
+                <a:latin typeface="Calibri"/>
+              </a:rPr>
+              <a:t>Your folio must show a genuine range of ideas — leading to </a:t>
+            </a:r>
+            <a:r>
+              <a:rPr sz="1400" b="1" i="0">
+                <a:solidFill>
+                  <a:srgbClr val="27452B"/>
+                </a:solidFill>
+                <a:latin typeface="Calibri"/>
+              </a:rPr>
+              <a:t>two distinctly different concepts</a:t>
+            </a:r>
+            <a:r>
+              <a:rPr sz="1400" b="0" i="0">
+                <a:solidFill>
+                  <a:srgbClr val="20291F"/>
+                </a:solidFill>
+                <a:latin typeface="Calibri"/>
+              </a:rPr>
+              <a:t> that will each be developed and refined in Unit 4.</a:t>
+            </a:r>
+          </a:p>
+          <a:p>
+            <a:pPr indent="-203200" marL="203200">
+              <a:spcAft>
+                <a:spcPts val="900"/>
+              </a:spcAft>
+              <a:buClr>
+                <a:srgbClr val="2F5233"/>
+              </a:buClr>
+              <a:buSzPct val="90000"/>
+              <a:buFont typeface="Arial"/>
+              <a:buChar char="●"/>
+            </a:pPr>
+            <a:r>
+              <a:rPr sz="1400" b="0" i="0">
+                <a:solidFill>
+                  <a:srgbClr val="20291F"/>
+                </a:solidFill>
+                <a:latin typeface="Calibri"/>
+              </a:rPr>
+              <a:t>What Makes Concepts "Distinct"?</a:t>
             </a:r>
           </a:p>
           <a:p>
@@ -5344,7 +5314,7 @@
                 </a:solidFill>
                 <a:latin typeface="Calibri"/>
               </a:rPr>
-              <a:t>1. Identify the missing/unclear brief element</a:t>
+              <a:t>Different visual approach (not just colour changes)</a:t>
             </a:r>
           </a:p>
           <a:p>
@@ -5366,7 +5336,7 @@
                 </a:solidFill>
                 <a:latin typeface="Calibri"/>
               </a:rPr>
-              <a:t>2. Explain why it matters for the design outcome</a:t>
+              <a:t>Different treatment of elements/principles</a:t>
             </a:r>
           </a:p>
           <a:p>
@@ -5388,7 +5358,7 @@
                 </a:solidFill>
                 <a:latin typeface="Calibri"/>
               </a:rPr>
-              <a:t>3. Suggest what information should be added</a:t>
+              <a:t>Different overall style or design field emphasis</a:t>
             </a:r>
           </a:p>
         </p:txBody>
@@ -5435,20 +5405,25 @@
           <a:bodyPr rtlCol="0" anchor="ctr" lIns="279400" rIns="279400" tIns="228600" bIns="228600" wrap="square"/>
           <a:lstStyle/>
           <a:p>
-            <a:pPr algn="ctr">
+            <a:pPr algn="ctr" indent="-203200" marL="203200">
               <a:spcAft>
                 <a:spcPts val="900"/>
               </a:spcAft>
-              <a:buNone/>
+              <a:buClr>
+                <a:srgbClr val="7FA3B0"/>
+              </a:buClr>
+              <a:buSzPct val="90000"/>
+              <a:buFont typeface="Arial"/>
+              <a:buChar char="●"/>
             </a:pPr>
             <a:r>
-              <a:rPr sz="1250" b="0" i="1">
-                <a:solidFill>
-                  <a:srgbClr val="20291F"/>
-                </a:solidFill>
-                <a:latin typeface="Calibri"/>
-              </a:rPr>
-              <a:t>Sentence Starters</a:t>
+              <a:rPr sz="1400" b="0" i="0">
+                <a:solidFill>
+                  <a:srgbClr val="20291F"/>
+                </a:solidFill>
+                <a:latin typeface="Calibri"/>
+              </a:rPr>
+              <a:t>Ideation Methods (recap)</a:t>
             </a:r>
           </a:p>
           <a:p>
@@ -5461,60 +5436,16 @@
               </a:buClr>
               <a:buSzPct val="90000"/>
               <a:buFont typeface="Arial"/>
-              <a:buChar char="–"/>
+              <a:buChar char="●"/>
             </a:pPr>
             <a:r>
-              <a:rPr sz="1250" b="0" i="0">
-                <a:solidFill>
-                  <a:srgbClr val="20291F"/>
-                </a:solidFill>
-                <a:latin typeface="Calibri"/>
-              </a:rPr>
-              <a:t>"The brief does not specify [element], which is important because..."</a:t>
-            </a:r>
-          </a:p>
-          <a:p>
-            <a:pPr indent="-203200" marL="203200">
-              <a:spcAft>
-                <a:spcPts val="900"/>
-              </a:spcAft>
-              <a:buClr>
-                <a:srgbClr val="7FA3B0"/>
-              </a:buClr>
-              <a:buSzPct val="90000"/>
-              <a:buFont typeface="Arial"/>
-              <a:buChar char="–"/>
-            </a:pPr>
-            <a:r>
-              <a:rPr sz="1250" b="0" i="0">
-                <a:solidFill>
-                  <a:srgbClr val="20291F"/>
-                </a:solidFill>
-                <a:latin typeface="Calibri"/>
-              </a:rPr>
-              <a:t>"To generate ideas, [method] could be used to..."</a:t>
-            </a:r>
-          </a:p>
-          <a:p>
-            <a:pPr indent="-203200" marL="203200">
-              <a:spcAft>
-                <a:spcPts val="900"/>
-              </a:spcAft>
-              <a:buClr>
-                <a:srgbClr val="7FA3B0"/>
-              </a:buClr>
-              <a:buSzPct val="90000"/>
-              <a:buFont typeface="Arial"/>
-              <a:buChar char="–"/>
-            </a:pPr>
-            <a:r>
-              <a:rPr sz="1250" b="0" i="0">
-                <a:solidFill>
-                  <a:srgbClr val="20291F"/>
-                </a:solidFill>
-                <a:latin typeface="Calibri"/>
-              </a:rPr>
-              <a:t>"These two concepts differ in that..."</a:t>
+              <a:rPr sz="1400" b="0" i="0">
+                <a:solidFill>
+                  <a:srgbClr val="20291F"/>
+                </a:solidFill>
+                <a:latin typeface="Calibri"/>
+              </a:rPr>
+              <a:t>Brainstorming, mind mapping, thumbnail sketches, mood boards, SCAMPER — see the Unit 1 AOS 2 Design Process materials for a full recap of these methods.</a:t>
             </a:r>
           </a:p>
         </p:txBody>
@@ -5674,7 +5605,7 @@
                 </a:solidFill>
                 <a:latin typeface="Cambria"/>
               </a:rPr>
-              <a:t>Brief &amp; Ideation — Quick Reference</a:t>
+              <a:t>Research to Support Ideation</a:t>
             </a:r>
           </a:p>
         </p:txBody>
@@ -5688,15 +5619,15 @@
         <p:spPr>
           <a:xfrm>
             <a:off x="685800" y="1874519"/>
-            <a:ext cx="2500884" cy="1554480"/>
+            <a:ext cx="5166360" cy="4526280"/>
           </a:xfrm>
           <a:prstGeom prst="roundRect">
             <a:avLst>
-              <a:gd name="adj" fmla="val 12000"/>
+              <a:gd name="adj" fmla="val 6000"/>
             </a:avLst>
           </a:prstGeom>
           <a:solidFill>
-            <a:srgbClr val="DFE5E0"/>
+            <a:srgbClr val="E6EAE6"/>
           </a:solidFill>
           <a:ln>
             <a:noFill/>
@@ -5718,29 +5649,121 @@
           </a:fontRef>
         </p:style>
         <p:txBody>
-          <a:bodyPr rtlCol="0" anchor="ctr" wrap="square" lIns="127000" rIns="127000" tIns="101600" bIns="101600"/>
-          <a:lstStyle/>
-          <a:p>
-            <a:pPr algn="ctr"/>
-            <a:r>
-              <a:rPr b="1" sz="1300">
-                <a:solidFill>
-                  <a:srgbClr val="254128"/>
-                </a:solidFill>
-                <a:latin typeface="Calibri"/>
-              </a:rPr>
-              <a:t>Brief Elements</a:t>
-            </a:r>
-          </a:p>
-          <a:p>
-            <a:r>
-              <a:rPr sz="1050">
-                <a:solidFill>
-                  <a:srgbClr val="20291F"/>
-                </a:solidFill>
-                <a:latin typeface="Calibri"/>
-              </a:rPr>
-              <a:t>Client, audience, purpose, constraints, obligatory fields.</a:t>
+          <a:bodyPr rtlCol="0" anchor="ctr" lIns="279400" rIns="279400" tIns="228600" bIns="228600" wrap="square"/>
+          <a:lstStyle/>
+          <a:p>
+            <a:pPr algn="ctr" indent="-203200" marL="203200">
+              <a:spcAft>
+                <a:spcPts val="900"/>
+              </a:spcAft>
+              <a:buClr>
+                <a:srgbClr val="2F5233"/>
+              </a:buClr>
+              <a:buSzPct val="90000"/>
+              <a:buFont typeface="Arial"/>
+              <a:buChar char="●"/>
+            </a:pPr>
+            <a:r>
+              <a:rPr sz="1400" b="0" i="0">
+                <a:solidFill>
+                  <a:srgbClr val="20291F"/>
+                </a:solidFill>
+                <a:latin typeface="Calibri"/>
+              </a:rPr>
+              <a:t>Targeted research ensures your ideas are grounded in the brief's real audience and context, not just personal preference.</a:t>
+            </a:r>
+          </a:p>
+          <a:p>
+            <a:pPr indent="-203200" marL="203200">
+              <a:spcAft>
+                <a:spcPts val="900"/>
+              </a:spcAft>
+              <a:buClr>
+                <a:srgbClr val="2F5233"/>
+              </a:buClr>
+              <a:buSzPct val="90000"/>
+              <a:buFont typeface="Arial"/>
+              <a:buChar char="–"/>
+            </a:pPr>
+            <a:r>
+              <a:rPr sz="1250" b="1" i="0">
+                <a:solidFill>
+                  <a:srgbClr val="27452B"/>
+                </a:solidFill>
+                <a:latin typeface="Calibri"/>
+              </a:rPr>
+              <a:t>Audience research</a:t>
+            </a:r>
+            <a:r>
+              <a:rPr sz="1250" b="0" i="0">
+                <a:solidFill>
+                  <a:srgbClr val="20291F"/>
+                </a:solidFill>
+                <a:latin typeface="Calibri"/>
+              </a:rPr>
+              <a:t> — interviews, surveys of the target group</a:t>
+            </a:r>
+          </a:p>
+          <a:p>
+            <a:pPr indent="-203200" marL="203200">
+              <a:spcAft>
+                <a:spcPts val="900"/>
+              </a:spcAft>
+              <a:buClr>
+                <a:srgbClr val="2F5233"/>
+              </a:buClr>
+              <a:buSzPct val="90000"/>
+              <a:buFont typeface="Arial"/>
+              <a:buChar char="–"/>
+            </a:pPr>
+            <a:r>
+              <a:rPr sz="1250" b="1" i="0">
+                <a:solidFill>
+                  <a:srgbClr val="27452B"/>
+                </a:solidFill>
+                <a:latin typeface="Calibri"/>
+              </a:rPr>
+              <a:t>Visual research</a:t>
+            </a:r>
+            <a:r>
+              <a:rPr sz="1250" b="0" i="0">
+                <a:solidFill>
+                  <a:srgbClr val="20291F"/>
+                </a:solidFill>
+                <a:latin typeface="Calibri"/>
+              </a:rPr>
+              <a:t> — mood boards, existing designs in the same field</a:t>
+            </a:r>
+          </a:p>
+          <a:p>
+            <a:pPr indent="-203200" marL="203200">
+              <a:spcAft>
+                <a:spcPts val="900"/>
+              </a:spcAft>
+              <a:buClr>
+                <a:srgbClr val="2F5233"/>
+              </a:buClr>
+              <a:buSzPct val="90000"/>
+              <a:buFont typeface="Arial"/>
+              <a:buChar char="–"/>
+            </a:pPr>
+            <a:r>
+              <a:rPr sz="1250" b="1" i="0">
+                <a:solidFill>
+                  <a:srgbClr val="27452B"/>
+                </a:solidFill>
+                <a:latin typeface="Calibri"/>
+              </a:rPr>
+              <a:t>Contextual research</a:t>
+            </a:r>
+            <a:r>
+              <a:rPr sz="1250" b="0" i="0">
+                <a:solidFill>
+                  <a:srgbClr val="20291F"/>
+                </a:solidFill>
+                <a:latin typeface="Calibri"/>
+              </a:rPr>
+              <a:t> — relevant trends, industry practice, materials</a:t>
             </a:r>
           </a:p>
         </p:txBody>
@@ -5753,16 +5776,16 @@
         </p:nvSpPr>
         <p:spPr>
           <a:xfrm>
-            <a:off x="3387852" y="1874519"/>
-            <a:ext cx="2500884" cy="1554480"/>
+            <a:off x="6080760" y="1874519"/>
+            <a:ext cx="5166360" cy="4526280"/>
           </a:xfrm>
           <a:prstGeom prst="roundRect">
             <a:avLst>
-              <a:gd name="adj" fmla="val 12000"/>
+              <a:gd name="adj" fmla="val 6000"/>
             </a:avLst>
           </a:prstGeom>
           <a:solidFill>
-            <a:srgbClr val="F6EAE1"/>
+            <a:srgbClr val="DBE5E8"/>
           </a:solidFill>
           <a:ln>
             <a:noFill/>
@@ -5784,51 +5807,66 @@
           </a:fontRef>
         </p:style>
         <p:txBody>
-          <a:bodyPr rtlCol="0" anchor="ctr" wrap="square" lIns="127000" rIns="127000" tIns="101600" bIns="101600"/>
-          <a:lstStyle/>
-          <a:p>
-            <a:pPr algn="ctr"/>
-            <a:r>
-              <a:rPr b="1" sz="1300">
-                <a:solidFill>
-                  <a:srgbClr val="A05C30"/>
-                </a:solidFill>
-                <a:latin typeface="Calibri"/>
-              </a:rPr>
-              <a:t>Deconstruct</a:t>
-            </a:r>
-          </a:p>
-          <a:p>
-            <a:r>
-              <a:rPr sz="1050">
-                <a:solidFill>
-                  <a:srgbClr val="20291F"/>
-                </a:solidFill>
-                <a:latin typeface="Calibri"/>
-              </a:rPr>
-              <a:t>Who, what, why, constraints.</a:t>
-            </a:r>
-          </a:p>
-        </p:txBody>
-      </p:sp>
-      <p:sp>
-        <p:nvSpPr>
-          <p:cNvPr id="6" name="Rounded Rectangle 5"/>
+          <a:bodyPr rtlCol="0" anchor="ctr" lIns="279400" rIns="279400" tIns="228600" bIns="228600" wrap="square"/>
+          <a:lstStyle/>
+          <a:p>
+            <a:pPr algn="ctr" indent="-203200" marL="203200">
+              <a:spcAft>
+                <a:spcPts val="900"/>
+              </a:spcAft>
+              <a:buClr>
+                <a:srgbClr val="7FA3B0"/>
+              </a:buClr>
+              <a:buSzPct val="90000"/>
+              <a:buFont typeface="Arial"/>
+              <a:buChar char="●"/>
+            </a:pPr>
+            <a:r>
+              <a:rPr sz="1400" b="0" i="0">
+                <a:solidFill>
+                  <a:srgbClr val="20291F"/>
+                </a:solidFill>
+                <a:latin typeface="Calibri"/>
+              </a:rPr>
+              <a:t>Link your research directly back to </a:t>
+            </a:r>
+            <a:r>
+              <a:rPr sz="1400" b="1" i="0">
+                <a:solidFill>
+                  <a:srgbClr val="6B8A95"/>
+                </a:solidFill>
+                <a:latin typeface="Calibri"/>
+              </a:rPr>
+              <a:t>Unit 2</a:t>
+            </a:r>
+            <a:r>
+              <a:rPr sz="1400" b="0" i="0">
+                <a:solidFill>
+                  <a:srgbClr val="20291F"/>
+                </a:solidFill>
+                <a:latin typeface="Calibri"/>
+              </a:rPr>
+              <a:t> concepts — current trends and industry connections should inform your ideas.</a:t>
+            </a:r>
+          </a:p>
+        </p:txBody>
+      </p:sp>
+      <p:sp>
+        <p:nvSpPr>
+          <p:cNvPr id="6" name="Oval 5"/>
           <p:cNvSpPr/>
           <p:nvPr/>
         </p:nvSpPr>
         <p:spPr>
           <a:xfrm>
-            <a:off x="6089904" y="1874519"/>
-            <a:ext cx="2500884" cy="1554480"/>
-          </a:xfrm>
-          <a:prstGeom prst="roundRect">
-            <a:avLst>
-              <a:gd name="adj" fmla="val 12000"/>
-            </a:avLst>
-          </a:prstGeom>
-          <a:solidFill>
-            <a:srgbClr val="EBF1F3"/>
+            <a:off x="5532120" y="3840480"/>
+            <a:ext cx="685800" cy="685800"/>
+          </a:xfrm>
+          <a:prstGeom prst="ellipse">
+            <a:avLst/>
+          </a:prstGeom>
+          <a:solidFill>
+            <a:srgbClr val="C9743D"/>
           </a:solidFill>
           <a:ln>
             <a:noFill/>
@@ -5850,179 +5888,10 @@
           </a:fontRef>
         </p:style>
         <p:txBody>
-          <a:bodyPr rtlCol="0" anchor="ctr" wrap="square" lIns="127000" rIns="127000" tIns="101600" bIns="101600"/>
+          <a:bodyPr rtlCol="0" anchor="ctr"/>
           <a:lstStyle/>
           <a:p>
             <a:pPr algn="ctr"/>
-            <a:r>
-              <a:rPr b="1" sz="1300">
-                <a:solidFill>
-                  <a:srgbClr val="65828C"/>
-                </a:solidFill>
-                <a:latin typeface="Calibri"/>
-              </a:rPr>
-              <a:t>Two Concepts</a:t>
-            </a:r>
-          </a:p>
-          <a:p>
-            <a:r>
-              <a:rPr sz="1050">
-                <a:solidFill>
-                  <a:srgbClr val="20291F"/>
-                </a:solidFill>
-                <a:latin typeface="Calibri"/>
-              </a:rPr>
-              <a:t>Must be genuinely distinct, not colour variants.</a:t>
-            </a:r>
-          </a:p>
-        </p:txBody>
-      </p:sp>
-      <p:sp>
-        <p:nvSpPr>
-          <p:cNvPr id="7" name="Rounded Rectangle 6"/>
-          <p:cNvSpPr/>
-          <p:nvPr/>
-        </p:nvSpPr>
-        <p:spPr>
-          <a:xfrm>
-            <a:off x="8791956" y="1874519"/>
-            <a:ext cx="2500884" cy="1554480"/>
-          </a:xfrm>
-          <a:prstGeom prst="roundRect">
-            <a:avLst>
-              <a:gd name="adj" fmla="val 12000"/>
-            </a:avLst>
-          </a:prstGeom>
-          <a:solidFill>
-            <a:srgbClr val="DFE5E0"/>
-          </a:solidFill>
-          <a:ln>
-            <a:noFill/>
-          </a:ln>
-          <a:effectLst/>
-        </p:spPr>
-        <p:style>
-          <a:lnRef idx="1">
-            <a:schemeClr val="accent1"/>
-          </a:lnRef>
-          <a:fillRef idx="3">
-            <a:schemeClr val="accent1"/>
-          </a:fillRef>
-          <a:effectRef idx="2">
-            <a:schemeClr val="accent1"/>
-          </a:effectRef>
-          <a:fontRef idx="minor">
-            <a:schemeClr val="lt1"/>
-          </a:fontRef>
-        </p:style>
-        <p:txBody>
-          <a:bodyPr rtlCol="0" anchor="ctr" wrap="square" lIns="127000" rIns="127000" tIns="101600" bIns="101600"/>
-          <a:lstStyle/>
-          <a:p>
-            <a:pPr algn="ctr"/>
-            <a:r>
-              <a:rPr b="1" sz="1300">
-                <a:solidFill>
-                  <a:srgbClr val="254128"/>
-                </a:solidFill>
-                <a:latin typeface="Calibri"/>
-              </a:rPr>
-              <a:t>Research</a:t>
-            </a:r>
-          </a:p>
-          <a:p>
-            <a:r>
-              <a:rPr sz="1050">
-                <a:solidFill>
-                  <a:srgbClr val="20291F"/>
-                </a:solidFill>
-                <a:latin typeface="Calibri"/>
-              </a:rPr>
-              <a:t>Audience, visual, contextual — links to Unit 2 trends.</a:t>
-            </a:r>
-          </a:p>
-        </p:txBody>
-      </p:sp>
-      <p:sp>
-        <p:nvSpPr>
-          <p:cNvPr id="8" name="Rounded Rectangle 7"/>
-          <p:cNvSpPr/>
-          <p:nvPr/>
-        </p:nvSpPr>
-        <p:spPr>
-          <a:xfrm>
-            <a:off x="685800" y="3675887"/>
-            <a:ext cx="10607040" cy="2862073"/>
-          </a:xfrm>
-          <a:prstGeom prst="roundRect">
-            <a:avLst>
-              <a:gd name="adj" fmla="val 10000"/>
-            </a:avLst>
-          </a:prstGeom>
-          <a:solidFill>
-            <a:srgbClr val="F6EAE1"/>
-          </a:solidFill>
-          <a:ln>
-            <a:noFill/>
-          </a:ln>
-          <a:effectLst/>
-        </p:spPr>
-        <p:style>
-          <a:lnRef idx="1">
-            <a:schemeClr val="accent1"/>
-          </a:lnRef>
-          <a:fillRef idx="3">
-            <a:schemeClr val="accent1"/>
-          </a:fillRef>
-          <a:effectRef idx="2">
-            <a:schemeClr val="accent1"/>
-          </a:effectRef>
-          <a:fontRef idx="minor">
-            <a:schemeClr val="lt1"/>
-          </a:fontRef>
-        </p:style>
-        <p:txBody>
-          <a:bodyPr rtlCol="0" anchor="ctr" lIns="203200" rIns="203200" tIns="101600" bIns="101600" wrap="square"/>
-          <a:lstStyle/>
-          <a:p>
-            <a:pPr algn="ctr" indent="-203200" marL="203200">
-              <a:spcAft>
-                <a:spcPts val="900"/>
-              </a:spcAft>
-              <a:buClr>
-                <a:srgbClr val="C9743D"/>
-              </a:buClr>
-              <a:buSzPct val="90000"/>
-              <a:buFont typeface="Arial"/>
-              <a:buChar char="●"/>
-            </a:pPr>
-            <a:r>
-              <a:rPr sz="1200" b="0" i="0">
-                <a:solidFill>
-                  <a:srgbClr val="20291F"/>
-                </a:solidFill>
-                <a:latin typeface="Calibri"/>
-              </a:rPr>
-              <a:t> Reminder: these two concepts carry forward into </a:t>
-            </a:r>
-            <a:r>
-              <a:rPr sz="1200" b="1" i="0">
-                <a:solidFill>
-                  <a:srgbClr val="AA6233"/>
-                </a:solidFill>
-                <a:latin typeface="Calibri"/>
-              </a:rPr>
-              <a:t>Unit 4</a:t>
-            </a:r>
-            <a:r>
-              <a:rPr sz="1200" b="0" i="0">
-                <a:solidFill>
-                  <a:srgbClr val="20291F"/>
-                </a:solidFill>
-                <a:latin typeface="Calibri"/>
-              </a:rPr>
-              <a:t>, where you develop and refine them. </a:t>
-            </a:r>
           </a:p>
         </p:txBody>
       </p:sp>
@@ -6040,7 +5909,7 @@
     <p:bg>
       <p:bgPr>
         <a:solidFill>
-          <a:srgbClr val="C9743D"/>
+          <a:srgbClr val="F7F5EC"/>
         </a:solidFill>
         <a:effectLst/>
       </p:bgPr>
@@ -6054,20 +5923,22 @@
       <p:grpSpPr/>
       <p:sp>
         <p:nvSpPr>
-          <p:cNvPr id="2" name="Oval 1"/>
+          <p:cNvPr id="2" name="Rounded Rectangle 1"/>
           <p:cNvSpPr/>
           <p:nvPr/>
         </p:nvSpPr>
         <p:spPr>
           <a:xfrm>
-            <a:off x="9692640" y="-914400"/>
-            <a:ext cx="2926080" cy="2926080"/>
-          </a:xfrm>
-          <a:prstGeom prst="ellipse">
-            <a:avLst/>
-          </a:prstGeom>
-          <a:solidFill>
-            <a:srgbClr val="B06635"/>
+            <a:off x="685800" y="502920"/>
+            <a:ext cx="3291840" cy="457200"/>
+          </a:xfrm>
+          <a:prstGeom prst="roundRect">
+            <a:avLst>
+              <a:gd name="adj" fmla="val 50000"/>
+            </a:avLst>
+          </a:prstGeom>
+          <a:solidFill>
+            <a:srgbClr val="2F5233"/>
           </a:solidFill>
           <a:ln>
             <a:noFill/>
@@ -6089,29 +5960,75 @@
           </a:fontRef>
         </p:style>
         <p:txBody>
-          <a:bodyPr rtlCol="0" anchor="ctr"/>
+          <a:bodyPr rtlCol="0" anchor="ctr" wrap="none" lIns="50800" rIns="50800"/>
           <a:lstStyle/>
           <a:p>
             <a:pPr algn="ctr"/>
-          </a:p>
-        </p:txBody>
-      </p:sp>
-      <p:sp>
-        <p:nvSpPr>
-          <p:cNvPr id="3" name="Oval 2"/>
+            <a:r>
+              <a:rPr sz="1100" b="1">
+                <a:solidFill>
+                  <a:srgbClr val="FFFFFF"/>
+                </a:solidFill>
+                <a:latin typeface="Calibri"/>
+              </a:rPr>
+              <a:t>THE BRIEF &amp; IDEATION</a:t>
+            </a:r>
+          </a:p>
+        </p:txBody>
+      </p:sp>
+      <p:sp>
+        <p:nvSpPr>
+          <p:cNvPr id="3" name="TextBox 2"/>
+          <p:cNvSpPr txBox="1"/>
+          <p:nvPr/>
+        </p:nvSpPr>
+        <p:spPr>
+          <a:xfrm>
+            <a:off x="685800" y="1051560"/>
+            <a:ext cx="10607040" cy="822960"/>
+          </a:xfrm>
+          <a:prstGeom prst="rect">
+            <a:avLst/>
+          </a:prstGeom>
+          <a:noFill/>
+        </p:spPr>
+        <p:txBody>
+          <a:bodyPr wrap="square" anchor="t">
+            <a:spAutoFit/>
+          </a:bodyPr>
+          <a:lstStyle/>
+          <a:p>
+            <a:pPr algn="l"/>
+            <a:r>
+              <a:rPr sz="2700" b="1" i="0">
+                <a:solidFill>
+                  <a:srgbClr val="20291F"/>
+                </a:solidFill>
+                <a:latin typeface="Cambria"/>
+              </a:rPr>
+              <a:t>Answering Brief Questions</a:t>
+            </a:r>
+          </a:p>
+        </p:txBody>
+      </p:sp>
+      <p:sp>
+        <p:nvSpPr>
+          <p:cNvPr id="4" name="Rounded Rectangle 3"/>
           <p:cNvSpPr/>
           <p:nvPr/>
         </p:nvSpPr>
         <p:spPr>
           <a:xfrm>
-            <a:off x="-914400" y="4937760"/>
-            <a:ext cx="2377440" cy="2377440"/>
-          </a:xfrm>
-          <a:prstGeom prst="ellipse">
-            <a:avLst/>
-          </a:prstGeom>
-          <a:solidFill>
-            <a:srgbClr val="B06635"/>
+            <a:off x="685800" y="1874519"/>
+            <a:ext cx="5166360" cy="4526280"/>
+          </a:xfrm>
+          <a:prstGeom prst="roundRect">
+            <a:avLst>
+              <a:gd name="adj" fmla="val 6000"/>
+            </a:avLst>
+          </a:prstGeom>
+          <a:solidFill>
+            <a:srgbClr val="E6EAE6"/>
           </a:solidFill>
           <a:ln>
             <a:noFill/>
@@ -6133,31 +6050,116 @@
           </a:fontRef>
         </p:style>
         <p:txBody>
-          <a:bodyPr rtlCol="0" anchor="ctr"/>
-          <a:lstStyle/>
-          <a:p>
-            <a:pPr algn="ctr"/>
-          </a:p>
-        </p:txBody>
-      </p:sp>
-      <p:sp>
-        <p:nvSpPr>
-          <p:cNvPr id="4" name="Rounded Rectangle 3"/>
+          <a:bodyPr rtlCol="0" anchor="ctr" lIns="279400" rIns="279400" tIns="228600" bIns="228600" wrap="square"/>
+          <a:lstStyle/>
+          <a:p>
+            <a:pPr algn="ctr" indent="-203200" marL="203200">
+              <a:spcAft>
+                <a:spcPts val="900"/>
+              </a:spcAft>
+              <a:buClr>
+                <a:srgbClr val="2F5233"/>
+              </a:buClr>
+              <a:buSzPct val="90000"/>
+              <a:buFont typeface="Arial"/>
+              <a:buChar char="–"/>
+            </a:pPr>
+            <a:r>
+              <a:rPr sz="1250" b="0" i="0">
+                <a:solidFill>
+                  <a:srgbClr val="20291F"/>
+                </a:solidFill>
+                <a:latin typeface="Calibri"/>
+              </a:rPr>
+              <a:t>Identify → Explain → Suggest</a:t>
+            </a:r>
+          </a:p>
+          <a:p>
+            <a:pPr indent="-203200" marL="203200">
+              <a:spcAft>
+                <a:spcPts val="900"/>
+              </a:spcAft>
+              <a:buClr>
+                <a:srgbClr val="2F5233"/>
+              </a:buClr>
+              <a:buSzPct val="90000"/>
+              <a:buFont typeface="Arial"/>
+              <a:buChar char="–"/>
+            </a:pPr>
+            <a:r>
+              <a:rPr sz="1250" b="0" i="0">
+                <a:solidFill>
+                  <a:srgbClr val="20291F"/>
+                </a:solidFill>
+                <a:latin typeface="Calibri"/>
+              </a:rPr>
+              <a:t>1. Identify the missing/unclear brief element</a:t>
+            </a:r>
+          </a:p>
+          <a:p>
+            <a:pPr indent="-203200" marL="203200">
+              <a:spcAft>
+                <a:spcPts val="900"/>
+              </a:spcAft>
+              <a:buClr>
+                <a:srgbClr val="2F5233"/>
+              </a:buClr>
+              <a:buSzPct val="90000"/>
+              <a:buFont typeface="Arial"/>
+              <a:buChar char="–"/>
+            </a:pPr>
+            <a:r>
+              <a:rPr sz="1250" b="0" i="0">
+                <a:solidFill>
+                  <a:srgbClr val="20291F"/>
+                </a:solidFill>
+                <a:latin typeface="Calibri"/>
+              </a:rPr>
+              <a:t>2. Explain why it matters for the design outcome</a:t>
+            </a:r>
+          </a:p>
+          <a:p>
+            <a:pPr indent="-203200" marL="203200">
+              <a:spcAft>
+                <a:spcPts val="900"/>
+              </a:spcAft>
+              <a:buClr>
+                <a:srgbClr val="2F5233"/>
+              </a:buClr>
+              <a:buSzPct val="90000"/>
+              <a:buFont typeface="Arial"/>
+              <a:buChar char="–"/>
+            </a:pPr>
+            <a:r>
+              <a:rPr sz="1250" b="0" i="0">
+                <a:solidFill>
+                  <a:srgbClr val="20291F"/>
+                </a:solidFill>
+                <a:latin typeface="Calibri"/>
+              </a:rPr>
+              <a:t>3. Suggest what information should be added</a:t>
+            </a:r>
+          </a:p>
+        </p:txBody>
+      </p:sp>
+      <p:sp>
+        <p:nvSpPr>
+          <p:cNvPr id="5" name="Rounded Rectangle 4"/>
           <p:cNvSpPr/>
           <p:nvPr/>
         </p:nvSpPr>
         <p:spPr>
           <a:xfrm>
-            <a:off x="822960" y="1051560"/>
-            <a:ext cx="1188720" cy="502920"/>
+            <a:off x="6080760" y="1874519"/>
+            <a:ext cx="5166360" cy="4526280"/>
           </a:xfrm>
           <a:prstGeom prst="roundRect">
             <a:avLst>
-              <a:gd name="adj" fmla="val 50000"/>
+              <a:gd name="adj" fmla="val 6000"/>
             </a:avLst>
           </a:prstGeom>
           <a:solidFill>
-            <a:srgbClr val="FFFFFF"/>
+            <a:srgbClr val="DBE5E8"/>
           </a:solidFill>
           <a:ln>
             <a:noFill/>
@@ -6179,40 +6181,109 @@
           </a:fontRef>
         </p:style>
         <p:txBody>
-          <a:bodyPr rtlCol="0" anchor="ctr" wrap="none" lIns="50800" rIns="50800"/>
-          <a:lstStyle/>
-          <a:p>
-            <a:pPr algn="ctr"/>
-            <a:r>
-              <a:rPr sz="1400" b="1">
-                <a:solidFill>
-                  <a:srgbClr val="A05C30"/>
-                </a:solidFill>
-                <a:latin typeface="Calibri"/>
-              </a:rPr>
-              <a:t>03</a:t>
-            </a:r>
-          </a:p>
-        </p:txBody>
-      </p:sp>
-      <p:sp>
-        <p:nvSpPr>
-          <p:cNvPr id="5" name="Rounded Rectangle 4"/>
+          <a:bodyPr rtlCol="0" anchor="ctr" lIns="279400" rIns="279400" tIns="228600" bIns="228600" wrap="square"/>
+          <a:lstStyle/>
+          <a:p>
+            <a:pPr algn="ctr">
+              <a:spcAft>
+                <a:spcPts val="900"/>
+              </a:spcAft>
+              <a:buNone/>
+            </a:pPr>
+            <a:r>
+              <a:rPr sz="1250" b="0" i="1">
+                <a:solidFill>
+                  <a:srgbClr val="20291F"/>
+                </a:solidFill>
+                <a:latin typeface="Calibri"/>
+              </a:rPr>
+              <a:t>Sentence Starters</a:t>
+            </a:r>
+          </a:p>
+          <a:p>
+            <a:pPr indent="-203200" marL="203200">
+              <a:spcAft>
+                <a:spcPts val="900"/>
+              </a:spcAft>
+              <a:buClr>
+                <a:srgbClr val="7FA3B0"/>
+              </a:buClr>
+              <a:buSzPct val="90000"/>
+              <a:buFont typeface="Arial"/>
+              <a:buChar char="–"/>
+            </a:pPr>
+            <a:r>
+              <a:rPr sz="1250" b="0" i="0">
+                <a:solidFill>
+                  <a:srgbClr val="20291F"/>
+                </a:solidFill>
+                <a:latin typeface="Calibri"/>
+              </a:rPr>
+              <a:t>"The brief does not specify [element], which is important because..."</a:t>
+            </a:r>
+          </a:p>
+          <a:p>
+            <a:pPr indent="-203200" marL="203200">
+              <a:spcAft>
+                <a:spcPts val="900"/>
+              </a:spcAft>
+              <a:buClr>
+                <a:srgbClr val="7FA3B0"/>
+              </a:buClr>
+              <a:buSzPct val="90000"/>
+              <a:buFont typeface="Arial"/>
+              <a:buChar char="–"/>
+            </a:pPr>
+            <a:r>
+              <a:rPr sz="1250" b="0" i="0">
+                <a:solidFill>
+                  <a:srgbClr val="20291F"/>
+                </a:solidFill>
+                <a:latin typeface="Calibri"/>
+              </a:rPr>
+              <a:t>"To generate ideas, [method] could be used to..."</a:t>
+            </a:r>
+          </a:p>
+          <a:p>
+            <a:pPr indent="-203200" marL="203200">
+              <a:spcAft>
+                <a:spcPts val="900"/>
+              </a:spcAft>
+              <a:buClr>
+                <a:srgbClr val="7FA3B0"/>
+              </a:buClr>
+              <a:buSzPct val="90000"/>
+              <a:buFont typeface="Arial"/>
+              <a:buChar char="–"/>
+            </a:pPr>
+            <a:r>
+              <a:rPr sz="1250" b="0" i="0">
+                <a:solidFill>
+                  <a:srgbClr val="20291F"/>
+                </a:solidFill>
+                <a:latin typeface="Calibri"/>
+              </a:rPr>
+              <a:t>"These two concepts differ in that..."</a:t>
+            </a:r>
+          </a:p>
+        </p:txBody>
+      </p:sp>
+      <p:sp>
+        <p:nvSpPr>
+          <p:cNvPr id="6" name="Oval 5"/>
           <p:cNvSpPr/>
           <p:nvPr/>
         </p:nvSpPr>
         <p:spPr>
           <a:xfrm>
-            <a:off x="822960" y="2011680"/>
-            <a:ext cx="10515600" cy="2834640"/>
-          </a:xfrm>
-          <a:prstGeom prst="roundRect">
-            <a:avLst>
-              <a:gd name="adj" fmla="val 18000"/>
-            </a:avLst>
-          </a:prstGeom>
-          <a:solidFill>
-            <a:srgbClr val="FFFFFF"/>
+            <a:off x="5532120" y="3840480"/>
+            <a:ext cx="685800" cy="685800"/>
+          </a:xfrm>
+          <a:prstGeom prst="ellipse">
+            <a:avLst/>
+          </a:prstGeom>
+          <a:solidFill>
+            <a:srgbClr val="C9743D"/>
           </a:solidFill>
           <a:ln>
             <a:noFill/>
@@ -6238,76 +6309,6 @@
           <a:lstStyle/>
           <a:p>
             <a:pPr algn="ctr"/>
-          </a:p>
-        </p:txBody>
-      </p:sp>
-      <p:sp>
-        <p:nvSpPr>
-          <p:cNvPr id="6" name="TextBox 5"/>
-          <p:cNvSpPr txBox="1"/>
-          <p:nvPr/>
-        </p:nvSpPr>
-        <p:spPr>
-          <a:xfrm>
-            <a:off x="1280160" y="2697480"/>
-            <a:ext cx="9601200" cy="1097280"/>
-          </a:xfrm>
-          <a:prstGeom prst="rect">
-            <a:avLst/>
-          </a:prstGeom>
-          <a:noFill/>
-        </p:spPr>
-        <p:txBody>
-          <a:bodyPr wrap="square" anchor="t">
-            <a:spAutoFit/>
-          </a:bodyPr>
-          <a:lstStyle/>
-          <a:p>
-            <a:pPr algn="l"/>
-            <a:r>
-              <a:rPr sz="3400" b="1" i="0">
-                <a:solidFill>
-                  <a:srgbClr val="AA6233"/>
-                </a:solidFill>
-                <a:latin typeface="Cambria"/>
-              </a:rPr>
-              <a:t>Extended Knowledge</a:t>
-            </a:r>
-          </a:p>
-        </p:txBody>
-      </p:sp>
-      <p:sp>
-        <p:nvSpPr>
-          <p:cNvPr id="7" name="TextBox 6"/>
-          <p:cNvSpPr txBox="1"/>
-          <p:nvPr/>
-        </p:nvSpPr>
-        <p:spPr>
-          <a:xfrm>
-            <a:off x="1280160" y="3657600"/>
-            <a:ext cx="9601200" cy="548640"/>
-          </a:xfrm>
-          <a:prstGeom prst="rect">
-            <a:avLst/>
-          </a:prstGeom>
-          <a:noFill/>
-        </p:spPr>
-        <p:txBody>
-          <a:bodyPr wrap="square" anchor="t">
-            <a:spAutoFit/>
-          </a:bodyPr>
-          <a:lstStyle/>
-          <a:p>
-            <a:pPr algn="l"/>
-            <a:r>
-              <a:rPr sz="1500" b="0" i="0">
-                <a:solidFill>
-                  <a:srgbClr val="6B6B6B"/>
-                </a:solidFill>
-                <a:latin typeface="Calibri"/>
-              </a:rPr>
-              <a:t>Beyond the study design</a:t>
-            </a:r>
           </a:p>
         </p:txBody>
       </p:sp>
@@ -6387,7 +6388,7 @@
                 </a:solidFill>
                 <a:latin typeface="Calibri"/>
               </a:rPr>
-              <a:t>EXTENDED KNOWLEDGE</a:t>
+              <a:t>THE BRIEF &amp; IDEATION</a:t>
             </a:r>
           </a:p>
         </p:txBody>
@@ -6422,7 +6423,7 @@
                 </a:solidFill>
                 <a:latin typeface="Cambria"/>
               </a:rPr>
-              <a:t>Semiotics and Visual Rhetoric</a:t>
+              <a:t>Brief &amp; Ideation — Quick Reference</a:t>
             </a:r>
           </a:p>
         </p:txBody>
@@ -6436,15 +6437,15 @@
         <p:spPr>
           <a:xfrm>
             <a:off x="685800" y="1874519"/>
-            <a:ext cx="10607040" cy="4526280"/>
+            <a:ext cx="2500884" cy="1554480"/>
           </a:xfrm>
           <a:prstGeom prst="roundRect">
             <a:avLst>
-              <a:gd name="adj" fmla="val 6000"/>
+              <a:gd name="adj" fmla="val 12000"/>
             </a:avLst>
           </a:prstGeom>
           <a:solidFill>
-            <a:srgbClr val="EAEDEA"/>
+            <a:srgbClr val="DFE5E0"/>
           </a:solidFill>
           <a:ln>
             <a:noFill/>
@@ -6466,7 +6467,271 @@
           </a:fontRef>
         </p:style>
         <p:txBody>
-          <a:bodyPr rtlCol="0" anchor="ctr" lIns="330200" rIns="330200" tIns="254000" bIns="254000" wrap="square"/>
+          <a:bodyPr rtlCol="0" anchor="ctr" wrap="square" lIns="127000" rIns="127000" tIns="101600" bIns="101600"/>
+          <a:lstStyle/>
+          <a:p>
+            <a:pPr algn="ctr"/>
+            <a:r>
+              <a:rPr b="1" sz="1300">
+                <a:solidFill>
+                  <a:srgbClr val="254128"/>
+                </a:solidFill>
+                <a:latin typeface="Calibri"/>
+              </a:rPr>
+              <a:t>Brief Elements</a:t>
+            </a:r>
+          </a:p>
+          <a:p>
+            <a:r>
+              <a:rPr sz="1050">
+                <a:solidFill>
+                  <a:srgbClr val="20291F"/>
+                </a:solidFill>
+                <a:latin typeface="Calibri"/>
+              </a:rPr>
+              <a:t>Client, audience, purpose, constraints, obligatory fields.</a:t>
+            </a:r>
+          </a:p>
+        </p:txBody>
+      </p:sp>
+      <p:sp>
+        <p:nvSpPr>
+          <p:cNvPr id="5" name="Rounded Rectangle 4"/>
+          <p:cNvSpPr/>
+          <p:nvPr/>
+        </p:nvSpPr>
+        <p:spPr>
+          <a:xfrm>
+            <a:off x="3387852" y="1874519"/>
+            <a:ext cx="2500884" cy="1554480"/>
+          </a:xfrm>
+          <a:prstGeom prst="roundRect">
+            <a:avLst>
+              <a:gd name="adj" fmla="val 12000"/>
+            </a:avLst>
+          </a:prstGeom>
+          <a:solidFill>
+            <a:srgbClr val="F6EAE1"/>
+          </a:solidFill>
+          <a:ln>
+            <a:noFill/>
+          </a:ln>
+          <a:effectLst/>
+        </p:spPr>
+        <p:style>
+          <a:lnRef idx="1">
+            <a:schemeClr val="accent1"/>
+          </a:lnRef>
+          <a:fillRef idx="3">
+            <a:schemeClr val="accent1"/>
+          </a:fillRef>
+          <a:effectRef idx="2">
+            <a:schemeClr val="accent1"/>
+          </a:effectRef>
+          <a:fontRef idx="minor">
+            <a:schemeClr val="lt1"/>
+          </a:fontRef>
+        </p:style>
+        <p:txBody>
+          <a:bodyPr rtlCol="0" anchor="ctr" wrap="square" lIns="127000" rIns="127000" tIns="101600" bIns="101600"/>
+          <a:lstStyle/>
+          <a:p>
+            <a:pPr algn="ctr"/>
+            <a:r>
+              <a:rPr b="1" sz="1300">
+                <a:solidFill>
+                  <a:srgbClr val="A05C30"/>
+                </a:solidFill>
+                <a:latin typeface="Calibri"/>
+              </a:rPr>
+              <a:t>Deconstruct</a:t>
+            </a:r>
+          </a:p>
+          <a:p>
+            <a:r>
+              <a:rPr sz="1050">
+                <a:solidFill>
+                  <a:srgbClr val="20291F"/>
+                </a:solidFill>
+                <a:latin typeface="Calibri"/>
+              </a:rPr>
+              <a:t>Who, what, why, constraints.</a:t>
+            </a:r>
+          </a:p>
+        </p:txBody>
+      </p:sp>
+      <p:sp>
+        <p:nvSpPr>
+          <p:cNvPr id="6" name="Rounded Rectangle 5"/>
+          <p:cNvSpPr/>
+          <p:nvPr/>
+        </p:nvSpPr>
+        <p:spPr>
+          <a:xfrm>
+            <a:off x="6089904" y="1874519"/>
+            <a:ext cx="2500884" cy="1554480"/>
+          </a:xfrm>
+          <a:prstGeom prst="roundRect">
+            <a:avLst>
+              <a:gd name="adj" fmla="val 12000"/>
+            </a:avLst>
+          </a:prstGeom>
+          <a:solidFill>
+            <a:srgbClr val="EBF1F3"/>
+          </a:solidFill>
+          <a:ln>
+            <a:noFill/>
+          </a:ln>
+          <a:effectLst/>
+        </p:spPr>
+        <p:style>
+          <a:lnRef idx="1">
+            <a:schemeClr val="accent1"/>
+          </a:lnRef>
+          <a:fillRef idx="3">
+            <a:schemeClr val="accent1"/>
+          </a:fillRef>
+          <a:effectRef idx="2">
+            <a:schemeClr val="accent1"/>
+          </a:effectRef>
+          <a:fontRef idx="minor">
+            <a:schemeClr val="lt1"/>
+          </a:fontRef>
+        </p:style>
+        <p:txBody>
+          <a:bodyPr rtlCol="0" anchor="ctr" wrap="square" lIns="127000" rIns="127000" tIns="101600" bIns="101600"/>
+          <a:lstStyle/>
+          <a:p>
+            <a:pPr algn="ctr"/>
+            <a:r>
+              <a:rPr b="1" sz="1300">
+                <a:solidFill>
+                  <a:srgbClr val="65828C"/>
+                </a:solidFill>
+                <a:latin typeface="Calibri"/>
+              </a:rPr>
+              <a:t>Two Concepts</a:t>
+            </a:r>
+          </a:p>
+          <a:p>
+            <a:r>
+              <a:rPr sz="1050">
+                <a:solidFill>
+                  <a:srgbClr val="20291F"/>
+                </a:solidFill>
+                <a:latin typeface="Calibri"/>
+              </a:rPr>
+              <a:t>Must be genuinely distinct, not colour variants.</a:t>
+            </a:r>
+          </a:p>
+        </p:txBody>
+      </p:sp>
+      <p:sp>
+        <p:nvSpPr>
+          <p:cNvPr id="7" name="Rounded Rectangle 6"/>
+          <p:cNvSpPr/>
+          <p:nvPr/>
+        </p:nvSpPr>
+        <p:spPr>
+          <a:xfrm>
+            <a:off x="8791956" y="1874519"/>
+            <a:ext cx="2500884" cy="1554480"/>
+          </a:xfrm>
+          <a:prstGeom prst="roundRect">
+            <a:avLst>
+              <a:gd name="adj" fmla="val 12000"/>
+            </a:avLst>
+          </a:prstGeom>
+          <a:solidFill>
+            <a:srgbClr val="DFE5E0"/>
+          </a:solidFill>
+          <a:ln>
+            <a:noFill/>
+          </a:ln>
+          <a:effectLst/>
+        </p:spPr>
+        <p:style>
+          <a:lnRef idx="1">
+            <a:schemeClr val="accent1"/>
+          </a:lnRef>
+          <a:fillRef idx="3">
+            <a:schemeClr val="accent1"/>
+          </a:fillRef>
+          <a:effectRef idx="2">
+            <a:schemeClr val="accent1"/>
+          </a:effectRef>
+          <a:fontRef idx="minor">
+            <a:schemeClr val="lt1"/>
+          </a:fontRef>
+        </p:style>
+        <p:txBody>
+          <a:bodyPr rtlCol="0" anchor="ctr" wrap="square" lIns="127000" rIns="127000" tIns="101600" bIns="101600"/>
+          <a:lstStyle/>
+          <a:p>
+            <a:pPr algn="ctr"/>
+            <a:r>
+              <a:rPr b="1" sz="1300">
+                <a:solidFill>
+                  <a:srgbClr val="254128"/>
+                </a:solidFill>
+                <a:latin typeface="Calibri"/>
+              </a:rPr>
+              <a:t>Research</a:t>
+            </a:r>
+          </a:p>
+          <a:p>
+            <a:r>
+              <a:rPr sz="1050">
+                <a:solidFill>
+                  <a:srgbClr val="20291F"/>
+                </a:solidFill>
+                <a:latin typeface="Calibri"/>
+              </a:rPr>
+              <a:t>Audience, visual, contextual — links to Unit 2 trends.</a:t>
+            </a:r>
+          </a:p>
+        </p:txBody>
+      </p:sp>
+      <p:sp>
+        <p:nvSpPr>
+          <p:cNvPr id="8" name="Rounded Rectangle 7"/>
+          <p:cNvSpPr/>
+          <p:nvPr/>
+        </p:nvSpPr>
+        <p:spPr>
+          <a:xfrm>
+            <a:off x="685800" y="3675887"/>
+            <a:ext cx="10607040" cy="2862073"/>
+          </a:xfrm>
+          <a:prstGeom prst="roundRect">
+            <a:avLst>
+              <a:gd name="adj" fmla="val 10000"/>
+            </a:avLst>
+          </a:prstGeom>
+          <a:solidFill>
+            <a:srgbClr val="F6EAE1"/>
+          </a:solidFill>
+          <a:ln>
+            <a:noFill/>
+          </a:ln>
+          <a:effectLst/>
+        </p:spPr>
+        <p:style>
+          <a:lnRef idx="1">
+            <a:schemeClr val="accent1"/>
+          </a:lnRef>
+          <a:fillRef idx="3">
+            <a:schemeClr val="accent1"/>
+          </a:fillRef>
+          <a:effectRef idx="2">
+            <a:schemeClr val="accent1"/>
+          </a:effectRef>
+          <a:fontRef idx="minor">
+            <a:schemeClr val="lt1"/>
+          </a:fontRef>
+        </p:style>
+        <p:txBody>
+          <a:bodyPr rtlCol="0" anchor="ctr" lIns="203200" rIns="203200" tIns="101600" bIns="101600" wrap="square"/>
           <a:lstStyle/>
           <a:p>
             <a:pPr algn="ctr" indent="-203200" marL="203200">
@@ -6474,131 +6739,39 @@
                 <a:spcPts val="900"/>
               </a:spcAft>
               <a:buClr>
-                <a:srgbClr val="2F5233"/>
+                <a:srgbClr val="C9743D"/>
               </a:buClr>
               <a:buSzPct val="90000"/>
               <a:buFont typeface="Arial"/>
               <a:buChar char="●"/>
             </a:pPr>
             <a:r>
-              <a:rPr sz="1500" b="1" i="0">
-                <a:solidFill>
-                  <a:srgbClr val="27452B"/>
-                </a:solidFill>
-                <a:latin typeface="Calibri"/>
-              </a:rPr>
-              <a:t>Beyond icon/index/symbol</a:t>
-            </a:r>
-          </a:p>
-          <a:p>
-            <a:pPr indent="-203200" marL="203200">
-              <a:spcAft>
-                <a:spcPts val="900"/>
-              </a:spcAft>
-              <a:buClr>
-                <a:srgbClr val="2F5233"/>
-              </a:buClr>
-              <a:buSzPct val="90000"/>
-              <a:buFont typeface="Arial"/>
-              <a:buChar char="–"/>
-            </a:pPr>
-            <a:r>
-              <a:rPr sz="1350" b="0" i="0">
-                <a:solidFill>
-                  <a:srgbClr val="20291F"/>
-                </a:solidFill>
-                <a:latin typeface="Calibri"/>
-              </a:rPr>
-              <a:t>Visual metaphor — representing one concept through the image of another (a lightbulb for an idea)</a:t>
-            </a:r>
-          </a:p>
-          <a:p>
-            <a:pPr indent="-203200" marL="203200">
-              <a:spcAft>
-                <a:spcPts val="900"/>
-              </a:spcAft>
-              <a:buClr>
-                <a:srgbClr val="2F5233"/>
-              </a:buClr>
-              <a:buSzPct val="90000"/>
-              <a:buFont typeface="Arial"/>
-              <a:buChar char="–"/>
-            </a:pPr>
-            <a:r>
-              <a:rPr sz="1350" b="0" i="0">
-                <a:solidFill>
-                  <a:srgbClr val="20291F"/>
-                </a:solidFill>
-                <a:latin typeface="Calibri"/>
-              </a:rPr>
-              <a:t>Visual metonymy — representing a whole through a closely associated part (a crown for royalty)</a:t>
-            </a:r>
-          </a:p>
-          <a:p>
-            <a:pPr indent="-203200" marL="203200">
-              <a:spcAft>
-                <a:spcPts val="900"/>
-              </a:spcAft>
-              <a:buClr>
-                <a:srgbClr val="2F5233"/>
-              </a:buClr>
-              <a:buSzPct val="90000"/>
-              <a:buFont typeface="Arial"/>
-              <a:buChar char="–"/>
-            </a:pPr>
-            <a:r>
-              <a:rPr sz="1350" b="0" i="0">
-                <a:solidFill>
-                  <a:srgbClr val="20291F"/>
-                </a:solidFill>
-                <a:latin typeface="Calibri"/>
-              </a:rPr>
-              <a:t>Myth and connotation (Roland Barthes) — how repeated cultural use makes a sign feel 'natural' or self-evident, when it is in fact culturally constructed</a:t>
-            </a:r>
-          </a:p>
-        </p:txBody>
-      </p:sp>
-      <p:sp>
-        <p:nvSpPr>
-          <p:cNvPr id="5" name="Oval 4"/>
-          <p:cNvSpPr/>
-          <p:nvPr/>
-        </p:nvSpPr>
-        <p:spPr>
-          <a:xfrm>
-            <a:off x="10881360" y="5943600"/>
-            <a:ext cx="1005840" cy="1005840"/>
-          </a:xfrm>
-          <a:prstGeom prst="ellipse">
-            <a:avLst/>
-          </a:prstGeom>
-          <a:solidFill>
-            <a:srgbClr val="C5D5DB"/>
-          </a:solidFill>
-          <a:ln>
-            <a:noFill/>
-          </a:ln>
-          <a:effectLst/>
-        </p:spPr>
-        <p:style>
-          <a:lnRef idx="1">
-            <a:schemeClr val="accent1"/>
-          </a:lnRef>
-          <a:fillRef idx="3">
-            <a:schemeClr val="accent1"/>
-          </a:fillRef>
-          <a:effectRef idx="2">
-            <a:schemeClr val="accent1"/>
-          </a:effectRef>
-          <a:fontRef idx="minor">
-            <a:schemeClr val="lt1"/>
-          </a:fontRef>
-        </p:style>
-        <p:txBody>
-          <a:bodyPr rtlCol="0" anchor="ctr"/>
-          <a:lstStyle/>
-          <a:p>
-            <a:pPr algn="ctr"/>
+              <a:rPr sz="1200" b="0" i="0">
+                <a:solidFill>
+                  <a:srgbClr val="20291F"/>
+                </a:solidFill>
+                <a:latin typeface="Calibri"/>
+              </a:rPr>
+              <a:t> Reminder: these two concepts carry forward into </a:t>
+            </a:r>
+            <a:r>
+              <a:rPr sz="1200" b="1" i="0">
+                <a:solidFill>
+                  <a:srgbClr val="AA6233"/>
+                </a:solidFill>
+                <a:latin typeface="Calibri"/>
+              </a:rPr>
+              <a:t>Unit 4</a:t>
+            </a:r>
+            <a:r>
+              <a:rPr sz="1200" b="0" i="0">
+                <a:solidFill>
+                  <a:srgbClr val="20291F"/>
+                </a:solidFill>
+                <a:latin typeface="Calibri"/>
+              </a:rPr>
+              <a:t>, where you develop and refine them. </a:t>
+            </a:r>
           </a:p>
         </p:txBody>
       </p:sp>
@@ -6616,7 +6789,7 @@
     <p:bg>
       <p:bgPr>
         <a:solidFill>
-          <a:srgbClr val="F7F5EC"/>
+          <a:srgbClr val="7FA3B0"/>
         </a:solidFill>
         <a:effectLst/>
       </p:bgPr>
@@ -6630,22 +6803,20 @@
       <p:grpSpPr/>
       <p:sp>
         <p:nvSpPr>
-          <p:cNvPr id="2" name="Rounded Rectangle 1"/>
+          <p:cNvPr id="2" name="Oval 1"/>
           <p:cNvSpPr/>
           <p:nvPr/>
         </p:nvSpPr>
         <p:spPr>
           <a:xfrm>
-            <a:off x="685800" y="502920"/>
-            <a:ext cx="3291840" cy="457200"/>
-          </a:xfrm>
-          <a:prstGeom prst="roundRect">
-            <a:avLst>
-              <a:gd name="adj" fmla="val 50000"/>
-            </a:avLst>
-          </a:prstGeom>
-          <a:solidFill>
-            <a:srgbClr val="2F5233"/>
+            <a:off x="-914400" y="-914400"/>
+            <a:ext cx="2103120" cy="2103120"/>
+          </a:xfrm>
+          <a:prstGeom prst="ellipse">
+            <a:avLst/>
+          </a:prstGeom>
+          <a:solidFill>
+            <a:srgbClr val="6F8F9A"/>
           </a:solidFill>
           <a:ln>
             <a:noFill/>
@@ -6667,75 +6838,29 @@
           </a:fontRef>
         </p:style>
         <p:txBody>
-          <a:bodyPr rtlCol="0" anchor="ctr" wrap="none" lIns="50800" rIns="50800"/>
+          <a:bodyPr rtlCol="0" anchor="ctr"/>
           <a:lstStyle/>
           <a:p>
             <a:pPr algn="ctr"/>
-            <a:r>
-              <a:rPr sz="1100" b="1">
-                <a:solidFill>
-                  <a:srgbClr val="FFFFFF"/>
-                </a:solidFill>
-                <a:latin typeface="Calibri"/>
-              </a:rPr>
-              <a:t>EXTENDED KNOWLEDGE</a:t>
-            </a:r>
-          </a:p>
-        </p:txBody>
-      </p:sp>
-      <p:sp>
-        <p:nvSpPr>
-          <p:cNvPr id="3" name="TextBox 2"/>
-          <p:cNvSpPr txBox="1"/>
-          <p:nvPr/>
-        </p:nvSpPr>
-        <p:spPr>
-          <a:xfrm>
-            <a:off x="685800" y="1051560"/>
-            <a:ext cx="10607040" cy="822960"/>
-          </a:xfrm>
-          <a:prstGeom prst="rect">
+          </a:p>
+        </p:txBody>
+      </p:sp>
+      <p:sp>
+        <p:nvSpPr>
+          <p:cNvPr id="3" name="Oval 2"/>
+          <p:cNvSpPr/>
+          <p:nvPr/>
+        </p:nvSpPr>
+        <p:spPr>
+          <a:xfrm>
+            <a:off x="11064240" y="5852160"/>
+            <a:ext cx="1737360" cy="1737360"/>
+          </a:xfrm>
+          <a:prstGeom prst="ellipse">
             <a:avLst/>
           </a:prstGeom>
-          <a:noFill/>
-        </p:spPr>
-        <p:txBody>
-          <a:bodyPr wrap="square" anchor="t">
-            <a:spAutoFit/>
-          </a:bodyPr>
-          <a:lstStyle/>
-          <a:p>
-            <a:pPr algn="l"/>
-            <a:r>
-              <a:rPr sz="2700" b="1" i="0">
-                <a:solidFill>
-                  <a:srgbClr val="20291F"/>
-                </a:solidFill>
-                <a:latin typeface="Cambria"/>
-              </a:rPr>
-              <a:t>Grid Systems and Layout Theory</a:t>
-            </a:r>
-          </a:p>
-        </p:txBody>
-      </p:sp>
-      <p:sp>
-        <p:nvSpPr>
-          <p:cNvPr id="4" name="Rounded Rectangle 3"/>
-          <p:cNvSpPr/>
-          <p:nvPr/>
-        </p:nvSpPr>
-        <p:spPr>
-          <a:xfrm>
-            <a:off x="685800" y="1874519"/>
-            <a:ext cx="10607040" cy="4526280"/>
-          </a:xfrm>
-          <a:prstGeom prst="roundRect">
-            <a:avLst>
-              <a:gd name="adj" fmla="val 6000"/>
-            </a:avLst>
-          </a:prstGeom>
-          <a:solidFill>
-            <a:srgbClr val="EAEDEA"/>
+          <a:solidFill>
+            <a:srgbClr val="6F8F9A"/>
           </a:solidFill>
           <a:ln>
             <a:noFill/>
@@ -6757,7 +6882,253 @@
           </a:fontRef>
         </p:style>
         <p:txBody>
-          <a:bodyPr rtlCol="0" anchor="ctr" lIns="330200" rIns="330200" tIns="254000" bIns="254000" wrap="square"/>
+          <a:bodyPr rtlCol="0" anchor="ctr"/>
+          <a:lstStyle/>
+          <a:p>
+            <a:pPr algn="ctr"/>
+          </a:p>
+        </p:txBody>
+      </p:sp>
+      <p:sp>
+        <p:nvSpPr>
+          <p:cNvPr id="4" name="Rounded Rectangle 3"/>
+          <p:cNvSpPr/>
+          <p:nvPr/>
+        </p:nvSpPr>
+        <p:spPr>
+          <a:xfrm>
+            <a:off x="685800" y="457200"/>
+            <a:ext cx="1696212" cy="502920"/>
+          </a:xfrm>
+          <a:prstGeom prst="roundRect">
+            <a:avLst>
+              <a:gd name="adj" fmla="val 50000"/>
+            </a:avLst>
+          </a:prstGeom>
+          <a:solidFill>
+            <a:srgbClr val="FFFFFF"/>
+          </a:solidFill>
+          <a:ln>
+            <a:noFill/>
+          </a:ln>
+          <a:effectLst/>
+        </p:spPr>
+        <p:style>
+          <a:lnRef idx="1">
+            <a:schemeClr val="accent1"/>
+          </a:lnRef>
+          <a:fillRef idx="3">
+            <a:schemeClr val="accent1"/>
+          </a:fillRef>
+          <a:effectRef idx="2">
+            <a:schemeClr val="accent1"/>
+          </a:effectRef>
+          <a:fontRef idx="minor">
+            <a:schemeClr val="lt1"/>
+          </a:fontRef>
+        </p:style>
+        <p:txBody>
+          <a:bodyPr rtlCol="0" anchor="ctr"/>
+          <a:lstStyle/>
+          <a:p>
+            <a:pPr algn="ctr"/>
+            <a:r>
+              <a:rPr b="1" sz="1400">
+                <a:solidFill>
+                  <a:srgbClr val="526972"/>
+                </a:solidFill>
+                <a:latin typeface="Calibri"/>
+              </a:rPr>
+              <a:t>CHALLENGE</a:t>
+            </a:r>
+          </a:p>
+        </p:txBody>
+      </p:sp>
+      <p:sp>
+        <p:nvSpPr>
+          <p:cNvPr id="5" name="TextBox 4"/>
+          <p:cNvSpPr txBox="1"/>
+          <p:nvPr/>
+        </p:nvSpPr>
+        <p:spPr>
+          <a:xfrm>
+            <a:off x="685800" y="1143000"/>
+            <a:ext cx="10607040" cy="914400"/>
+          </a:xfrm>
+          <a:prstGeom prst="rect">
+            <a:avLst/>
+          </a:prstGeom>
+          <a:noFill/>
+        </p:spPr>
+        <p:txBody>
+          <a:bodyPr wrap="square" anchor="t">
+            <a:spAutoFit/>
+          </a:bodyPr>
+          <a:lstStyle/>
+          <a:p>
+            <a:pPr algn="l"/>
+            <a:r>
+              <a:rPr sz="3000" b="1" i="0">
+                <a:solidFill>
+                  <a:srgbClr val="FFFFFF"/>
+                </a:solidFill>
+                <a:latin typeface="Cambria"/>
+              </a:rPr>
+              <a:t>Brief Doctor</a:t>
+            </a:r>
+          </a:p>
+        </p:txBody>
+      </p:sp>
+      <p:sp>
+        <p:nvSpPr>
+          <p:cNvPr id="6" name="Rounded Rectangle 5"/>
+          <p:cNvSpPr/>
+          <p:nvPr/>
+        </p:nvSpPr>
+        <p:spPr>
+          <a:xfrm>
+            <a:off x="685800" y="2148840"/>
+            <a:ext cx="960120" cy="411480"/>
+          </a:xfrm>
+          <a:prstGeom prst="roundRect">
+            <a:avLst>
+              <a:gd name="adj" fmla="val 50000"/>
+            </a:avLst>
+          </a:prstGeom>
+          <a:solidFill>
+            <a:srgbClr val="5F7A84"/>
+          </a:solidFill>
+          <a:ln>
+            <a:noFill/>
+          </a:ln>
+          <a:effectLst/>
+        </p:spPr>
+        <p:style>
+          <a:lnRef idx="1">
+            <a:schemeClr val="accent1"/>
+          </a:lnRef>
+          <a:fillRef idx="3">
+            <a:schemeClr val="accent1"/>
+          </a:fillRef>
+          <a:effectRef idx="2">
+            <a:schemeClr val="accent1"/>
+          </a:effectRef>
+          <a:fontRef idx="minor">
+            <a:schemeClr val="lt1"/>
+          </a:fontRef>
+        </p:style>
+        <p:txBody>
+          <a:bodyPr rtlCol="0" anchor="ctr" wrap="none" lIns="50800" rIns="50800"/>
+          <a:lstStyle/>
+          <a:p>
+            <a:pPr algn="ctr"/>
+            <a:r>
+              <a:rPr sz="1050" b="1">
+                <a:solidFill>
+                  <a:srgbClr val="FFFFFF"/>
+                </a:solidFill>
+                <a:latin typeface="Calibri"/>
+              </a:rPr>
+              <a:t>6 MIN</a:t>
+            </a:r>
+          </a:p>
+        </p:txBody>
+      </p:sp>
+      <p:sp>
+        <p:nvSpPr>
+          <p:cNvPr id="7" name="Rounded Rectangle 6"/>
+          <p:cNvSpPr/>
+          <p:nvPr/>
+        </p:nvSpPr>
+        <p:spPr>
+          <a:xfrm>
+            <a:off x="1783080" y="2148840"/>
+            <a:ext cx="1664208" cy="411480"/>
+          </a:xfrm>
+          <a:prstGeom prst="roundRect">
+            <a:avLst>
+              <a:gd name="adj" fmla="val 50000"/>
+            </a:avLst>
+          </a:prstGeom>
+          <a:solidFill>
+            <a:srgbClr val="5F7A84"/>
+          </a:solidFill>
+          <a:ln>
+            <a:noFill/>
+          </a:ln>
+          <a:effectLst/>
+        </p:spPr>
+        <p:style>
+          <a:lnRef idx="1">
+            <a:schemeClr val="accent1"/>
+          </a:lnRef>
+          <a:fillRef idx="3">
+            <a:schemeClr val="accent1"/>
+          </a:fillRef>
+          <a:effectRef idx="2">
+            <a:schemeClr val="accent1"/>
+          </a:effectRef>
+          <a:fontRef idx="minor">
+            <a:schemeClr val="lt1"/>
+          </a:fontRef>
+        </p:style>
+        <p:txBody>
+          <a:bodyPr rtlCol="0" anchor="ctr" wrap="none" lIns="50800" rIns="50800"/>
+          <a:lstStyle/>
+          <a:p>
+            <a:pPr algn="ctr"/>
+            <a:r>
+              <a:rPr sz="1050" b="1">
+                <a:solidFill>
+                  <a:srgbClr val="FFFFFF"/>
+                </a:solidFill>
+                <a:latin typeface="Calibri"/>
+              </a:rPr>
+              <a:t>SMALL GROUPS</a:t>
+            </a:r>
+          </a:p>
+        </p:txBody>
+      </p:sp>
+      <p:sp>
+        <p:nvSpPr>
+          <p:cNvPr id="8" name="Rounded Rectangle 7"/>
+          <p:cNvSpPr/>
+          <p:nvPr/>
+        </p:nvSpPr>
+        <p:spPr>
+          <a:xfrm>
+            <a:off x="685800" y="2788920"/>
+            <a:ext cx="10607040" cy="3246120"/>
+          </a:xfrm>
+          <a:prstGeom prst="roundRect">
+            <a:avLst>
+              <a:gd name="adj" fmla="val 8000"/>
+            </a:avLst>
+          </a:prstGeom>
+          <a:solidFill>
+            <a:srgbClr val="FFFFFF"/>
+          </a:solidFill>
+          <a:ln>
+            <a:noFill/>
+          </a:ln>
+          <a:effectLst/>
+        </p:spPr>
+        <p:style>
+          <a:lnRef idx="1">
+            <a:schemeClr val="accent1"/>
+          </a:lnRef>
+          <a:fillRef idx="3">
+            <a:schemeClr val="accent1"/>
+          </a:fillRef>
+          <a:effectRef idx="2">
+            <a:schemeClr val="accent1"/>
+          </a:effectRef>
+          <a:fontRef idx="minor">
+            <a:schemeClr val="lt1"/>
+          </a:fontRef>
+        </p:style>
+        <p:txBody>
+          <a:bodyPr rtlCol="0" anchor="ctr" lIns="304800" rIns="304800" tIns="203200" bIns="203200" wrap="square"/>
           <a:lstStyle/>
           <a:p>
             <a:pPr algn="ctr" indent="-203200" marL="203200">
@@ -6765,20 +7136,20 @@
                 <a:spcPts val="900"/>
               </a:spcAft>
               <a:buClr>
-                <a:srgbClr val="2F5233"/>
+                <a:srgbClr val="7FA3B0"/>
               </a:buClr>
               <a:buSzPct val="90000"/>
               <a:buFont typeface="Arial"/>
               <a:buChar char="●"/>
             </a:pPr>
             <a:r>
-              <a:rPr sz="1500" b="1" i="0">
-                <a:solidFill>
-                  <a:srgbClr val="27452B"/>
-                </a:solidFill>
-                <a:latin typeface="Calibri"/>
-              </a:rPr>
-              <a:t>Types of grid</a:t>
+              <a:rPr sz="1450" b="0" i="0">
+                <a:solidFill>
+                  <a:srgbClr val="20291F"/>
+                </a:solidFill>
+                <a:latin typeface="Calibri"/>
+              </a:rPr>
+              <a:t>You are given a deliberately vague or broken design brief.</a:t>
             </a:r>
           </a:p>
           <a:p>
@@ -6787,20 +7158,20 @@
                 <a:spcPts val="900"/>
               </a:spcAft>
               <a:buClr>
-                <a:srgbClr val="2F5233"/>
+                <a:srgbClr val="7FA3B0"/>
               </a:buClr>
               <a:buSzPct val="90000"/>
               <a:buFont typeface="Arial"/>
-              <a:buChar char="–"/>
+              <a:buChar char="●"/>
             </a:pPr>
             <a:r>
-              <a:rPr sz="1350" b="0" i="0">
-                <a:solidFill>
-                  <a:srgbClr val="20291F"/>
-                </a:solidFill>
-                <a:latin typeface="Calibri"/>
-              </a:rPr>
-              <a:t>Column grid — vertical divisions for text-heavy layouts (newspapers, editorial)</a:t>
+              <a:rPr sz="1450" b="0" i="0">
+                <a:solidFill>
+                  <a:srgbClr val="20291F"/>
+                </a:solidFill>
+                <a:latin typeface="Calibri"/>
+              </a:rPr>
+              <a:t>Diagnose what's missing: audience? purpose? constraints? obligatory fields?</a:t>
             </a:r>
           </a:p>
           <a:p>
@@ -6809,175 +7180,56 @@
                 <a:spcPts val="900"/>
               </a:spcAft>
               <a:buClr>
-                <a:srgbClr val="2F5233"/>
-              </a:buClr>
-              <a:buSzPct val="90000"/>
-              <a:buFont typeface="Arial"/>
-              <a:buChar char="–"/>
-            </a:pPr>
-            <a:r>
-              <a:rPr sz="1350" b="0" i="0">
-                <a:solidFill>
-                  <a:srgbClr val="20291F"/>
-                </a:solidFill>
-                <a:latin typeface="Calibri"/>
-              </a:rPr>
-              <a:t>Modular grid — a grid of consistent modules/cells for complex data-rich layouts</a:t>
-            </a:r>
-          </a:p>
-          <a:p>
-            <a:pPr indent="-203200" marL="203200">
-              <a:spcAft>
-                <a:spcPts val="900"/>
-              </a:spcAft>
-              <a:buClr>
-                <a:srgbClr val="2F5233"/>
-              </a:buClr>
-              <a:buSzPct val="90000"/>
-              <a:buFont typeface="Arial"/>
-              <a:buChar char="–"/>
-            </a:pPr>
-            <a:r>
-              <a:rPr sz="1350" b="0" i="0">
-                <a:solidFill>
-                  <a:srgbClr val="20291F"/>
-                </a:solidFill>
-                <a:latin typeface="Calibri"/>
-              </a:rPr>
-              <a:t>Baseline grid — horizontal lines ensuring consistent vertical rhythm of text across a page</a:t>
-            </a:r>
-          </a:p>
-          <a:p>
-            <a:pPr indent="-203200" marL="203200">
-              <a:spcAft>
-                <a:spcPts val="900"/>
-              </a:spcAft>
-              <a:buClr>
-                <a:srgbClr val="2F5233"/>
+                <a:srgbClr val="7FA3B0"/>
               </a:buClr>
               <a:buSzPct val="90000"/>
               <a:buFont typeface="Arial"/>
               <a:buChar char="●"/>
             </a:pPr>
             <a:r>
-              <a:rPr sz="1500" b="1" i="0">
-                <a:solidFill>
-                  <a:srgbClr val="27452B"/>
-                </a:solidFill>
-                <a:latin typeface="Calibri"/>
-              </a:rPr>
-              <a:t>The Swiss grid legacy</a:t>
-            </a:r>
-          </a:p>
-          <a:p>
-            <a:pPr indent="-203200" marL="203200">
-              <a:spcAft>
-                <a:spcPts val="900"/>
-              </a:spcAft>
-              <a:buClr>
-                <a:srgbClr val="2F5233"/>
-              </a:buClr>
-              <a:buSzPct val="90000"/>
-              <a:buFont typeface="Arial"/>
-              <a:buChar char="–"/>
-            </a:pPr>
-            <a:r>
-              <a:rPr sz="1350" b="0" i="0">
-                <a:solidFill>
-                  <a:srgbClr val="20291F"/>
-                </a:solidFill>
-                <a:latin typeface="Calibri"/>
-              </a:rPr>
-              <a:t>The International Typographic Style formalised mathematical grid systems as a tool for objective, universal communication — still the basis of most professional layout software and responsive web design grids today.</a:t>
-            </a:r>
-          </a:p>
-          <a:p>
-            <a:pPr indent="-203200" marL="203200">
-              <a:spcAft>
-                <a:spcPts val="900"/>
-              </a:spcAft>
-              <a:buClr>
-                <a:srgbClr val="2F5233"/>
-              </a:buClr>
-              <a:buSzPct val="90000"/>
-              <a:buFont typeface="Arial"/>
-              <a:buChar char="●"/>
-            </a:pPr>
-            <a:r>
-              <a:rPr sz="1500" b="1" i="0">
-                <a:solidFill>
-                  <a:srgbClr val="27452B"/>
-                </a:solidFill>
-                <a:latin typeface="Calibri"/>
-              </a:rPr>
-              <a:t>Proportion systems</a:t>
-            </a:r>
-          </a:p>
-          <a:p>
-            <a:pPr indent="-203200" marL="203200">
-              <a:spcAft>
-                <a:spcPts val="900"/>
-              </a:spcAft>
-              <a:buClr>
-                <a:srgbClr val="2F5233"/>
-              </a:buClr>
-              <a:buSzPct val="90000"/>
-              <a:buFont typeface="Arial"/>
-              <a:buChar char="–"/>
-            </a:pPr>
-            <a:r>
-              <a:rPr sz="1350" b="0" i="0">
-                <a:solidFill>
-                  <a:srgbClr val="20291F"/>
-                </a:solidFill>
-                <a:latin typeface="Calibri"/>
-              </a:rPr>
-              <a:t>The golden ratio (1:1.618) and the rule of thirds are classical tools for dividing a composition in a way the eye finds naturally balanced — useful vocabulary when analysing or justifying a layout decision.</a:t>
-            </a:r>
-          </a:p>
-        </p:txBody>
-      </p:sp>
-      <p:sp>
-        <p:nvSpPr>
-          <p:cNvPr id="5" name="Oval 4"/>
-          <p:cNvSpPr/>
-          <p:nvPr/>
-        </p:nvSpPr>
-        <p:spPr>
-          <a:xfrm>
-            <a:off x="10881360" y="5943600"/>
-            <a:ext cx="1005840" cy="1005840"/>
-          </a:xfrm>
-          <a:prstGeom prst="ellipse">
+              <a:rPr sz="1450" b="0" i="0">
+                <a:solidFill>
+                  <a:srgbClr val="20291F"/>
+                </a:solidFill>
+                <a:latin typeface="Calibri"/>
+              </a:rPr>
+              <a:t>Rewrite the brief as a group to fix the gaps.</a:t>
+            </a:r>
+          </a:p>
+        </p:txBody>
+      </p:sp>
+      <p:sp>
+        <p:nvSpPr>
+          <p:cNvPr id="9" name="TextBox 8"/>
+          <p:cNvSpPr txBox="1"/>
+          <p:nvPr/>
+        </p:nvSpPr>
+        <p:spPr>
+          <a:xfrm>
+            <a:off x="685800" y="6217920"/>
+            <a:ext cx="10607040" cy="502920"/>
+          </a:xfrm>
+          <a:prstGeom prst="rect">
             <a:avLst/>
           </a:prstGeom>
-          <a:solidFill>
-            <a:srgbClr val="C5D5DB"/>
-          </a:solidFill>
-          <a:ln>
-            <a:noFill/>
-          </a:ln>
-          <a:effectLst/>
-        </p:spPr>
-        <p:style>
-          <a:lnRef idx="1">
-            <a:schemeClr val="accent1"/>
-          </a:lnRef>
-          <a:fillRef idx="3">
-            <a:schemeClr val="accent1"/>
-          </a:fillRef>
-          <a:effectRef idx="2">
-            <a:schemeClr val="accent1"/>
-          </a:effectRef>
-          <a:fontRef idx="minor">
-            <a:schemeClr val="lt1"/>
-          </a:fontRef>
-        </p:style>
-        <p:txBody>
-          <a:bodyPr rtlCol="0" anchor="ctr"/>
-          <a:lstStyle/>
-          <a:p>
-            <a:pPr algn="ctr"/>
+          <a:noFill/>
+        </p:spPr>
+        <p:txBody>
+          <a:bodyPr wrap="square" anchor="t">
+            <a:spAutoFit/>
+          </a:bodyPr>
+          <a:lstStyle/>
+          <a:p>
+            <a:pPr algn="l"/>
+            <a:r>
+              <a:rPr sz="1250" b="0" i="1">
+                <a:solidFill>
+                  <a:srgbClr val="FFFFFF"/>
+                </a:solidFill>
+                <a:latin typeface="Calibri"/>
+              </a:rPr>
+              <a:t>Debrief: Which missing element would have caused the biggest problem if unnoticed?</a:t>
+            </a:r>
           </a:p>
         </p:txBody>
       </p:sp>
@@ -6995,7 +7247,7 @@
     <p:bg>
       <p:bgPr>
         <a:solidFill>
-          <a:srgbClr val="F7F5EC"/>
+          <a:srgbClr val="7FA3B0"/>
         </a:solidFill>
         <a:effectLst/>
       </p:bgPr>
@@ -7009,22 +7261,20 @@
       <p:grpSpPr/>
       <p:sp>
         <p:nvSpPr>
-          <p:cNvPr id="2" name="Rounded Rectangle 1"/>
+          <p:cNvPr id="2" name="Oval 1"/>
           <p:cNvSpPr/>
           <p:nvPr/>
         </p:nvSpPr>
         <p:spPr>
           <a:xfrm>
-            <a:off x="685800" y="502920"/>
-            <a:ext cx="3291840" cy="457200"/>
-          </a:xfrm>
-          <a:prstGeom prst="roundRect">
-            <a:avLst>
-              <a:gd name="adj" fmla="val 50000"/>
-            </a:avLst>
-          </a:prstGeom>
-          <a:solidFill>
-            <a:srgbClr val="2F5233"/>
+            <a:off x="-914400" y="-914400"/>
+            <a:ext cx="2103120" cy="2103120"/>
+          </a:xfrm>
+          <a:prstGeom prst="ellipse">
+            <a:avLst/>
+          </a:prstGeom>
+          <a:solidFill>
+            <a:srgbClr val="6F8F9A"/>
           </a:solidFill>
           <a:ln>
             <a:noFill/>
@@ -7046,75 +7296,29 @@
           </a:fontRef>
         </p:style>
         <p:txBody>
-          <a:bodyPr rtlCol="0" anchor="ctr" wrap="none" lIns="50800" rIns="50800"/>
+          <a:bodyPr rtlCol="0" anchor="ctr"/>
           <a:lstStyle/>
           <a:p>
             <a:pPr algn="ctr"/>
-            <a:r>
-              <a:rPr sz="1100" b="1">
-                <a:solidFill>
-                  <a:srgbClr val="FFFFFF"/>
-                </a:solidFill>
-                <a:latin typeface="Calibri"/>
-              </a:rPr>
-              <a:t>EXTENDED KNOWLEDGE</a:t>
-            </a:r>
-          </a:p>
-        </p:txBody>
-      </p:sp>
-      <p:sp>
-        <p:nvSpPr>
-          <p:cNvPr id="3" name="TextBox 2"/>
-          <p:cNvSpPr txBox="1"/>
-          <p:nvPr/>
-        </p:nvSpPr>
-        <p:spPr>
-          <a:xfrm>
-            <a:off x="685800" y="1051560"/>
-            <a:ext cx="10607040" cy="822960"/>
-          </a:xfrm>
-          <a:prstGeom prst="rect">
+          </a:p>
+        </p:txBody>
+      </p:sp>
+      <p:sp>
+        <p:nvSpPr>
+          <p:cNvPr id="3" name="Oval 2"/>
+          <p:cNvSpPr/>
+          <p:nvPr/>
+        </p:nvSpPr>
+        <p:spPr>
+          <a:xfrm>
+            <a:off x="11064240" y="5852160"/>
+            <a:ext cx="1737360" cy="1737360"/>
+          </a:xfrm>
+          <a:prstGeom prst="ellipse">
             <a:avLst/>
           </a:prstGeom>
-          <a:noFill/>
-        </p:spPr>
-        <p:txBody>
-          <a:bodyPr wrap="square" anchor="t">
-            <a:spAutoFit/>
-          </a:bodyPr>
-          <a:lstStyle/>
-          <a:p>
-            <a:pPr algn="l"/>
-            <a:r>
-              <a:rPr sz="2700" b="1" i="0">
-                <a:solidFill>
-                  <a:srgbClr val="20291F"/>
-                </a:solidFill>
-                <a:latin typeface="Cambria"/>
-              </a:rPr>
-              <a:t>Cross-Cultural Design Considerations</a:t>
-            </a:r>
-          </a:p>
-        </p:txBody>
-      </p:sp>
-      <p:sp>
-        <p:nvSpPr>
-          <p:cNvPr id="4" name="Rounded Rectangle 3"/>
-          <p:cNvSpPr/>
-          <p:nvPr/>
-        </p:nvSpPr>
-        <p:spPr>
-          <a:xfrm>
-            <a:off x="685800" y="1874519"/>
-            <a:ext cx="10607040" cy="4526280"/>
-          </a:xfrm>
-          <a:prstGeom prst="roundRect">
-            <a:avLst>
-              <a:gd name="adj" fmla="val 6000"/>
-            </a:avLst>
-          </a:prstGeom>
-          <a:solidFill>
-            <a:srgbClr val="EAEDEA"/>
+          <a:solidFill>
+            <a:srgbClr val="6F8F9A"/>
           </a:solidFill>
           <a:ln>
             <a:noFill/>
@@ -7136,7 +7340,253 @@
           </a:fontRef>
         </p:style>
         <p:txBody>
-          <a:bodyPr rtlCol="0" anchor="ctr" lIns="330200" rIns="330200" tIns="254000" bIns="254000" wrap="square"/>
+          <a:bodyPr rtlCol="0" anchor="ctr"/>
+          <a:lstStyle/>
+          <a:p>
+            <a:pPr algn="ctr"/>
+          </a:p>
+        </p:txBody>
+      </p:sp>
+      <p:sp>
+        <p:nvSpPr>
+          <p:cNvPr id="4" name="Rounded Rectangle 3"/>
+          <p:cNvSpPr/>
+          <p:nvPr/>
+        </p:nvSpPr>
+        <p:spPr>
+          <a:xfrm>
+            <a:off x="685800" y="457200"/>
+            <a:ext cx="1696212" cy="502920"/>
+          </a:xfrm>
+          <a:prstGeom prst="roundRect">
+            <a:avLst>
+              <a:gd name="adj" fmla="val 50000"/>
+            </a:avLst>
+          </a:prstGeom>
+          <a:solidFill>
+            <a:srgbClr val="FFFFFF"/>
+          </a:solidFill>
+          <a:ln>
+            <a:noFill/>
+          </a:ln>
+          <a:effectLst/>
+        </p:spPr>
+        <p:style>
+          <a:lnRef idx="1">
+            <a:schemeClr val="accent1"/>
+          </a:lnRef>
+          <a:fillRef idx="3">
+            <a:schemeClr val="accent1"/>
+          </a:fillRef>
+          <a:effectRef idx="2">
+            <a:schemeClr val="accent1"/>
+          </a:effectRef>
+          <a:fontRef idx="minor">
+            <a:schemeClr val="lt1"/>
+          </a:fontRef>
+        </p:style>
+        <p:txBody>
+          <a:bodyPr rtlCol="0" anchor="ctr"/>
+          <a:lstStyle/>
+          <a:p>
+            <a:pPr algn="ctr"/>
+            <a:r>
+              <a:rPr b="1" sz="1400">
+                <a:solidFill>
+                  <a:srgbClr val="526972"/>
+                </a:solidFill>
+                <a:latin typeface="Calibri"/>
+              </a:rPr>
+              <a:t>CHALLENGE</a:t>
+            </a:r>
+          </a:p>
+        </p:txBody>
+      </p:sp>
+      <p:sp>
+        <p:nvSpPr>
+          <p:cNvPr id="5" name="TextBox 4"/>
+          <p:cNvSpPr txBox="1"/>
+          <p:nvPr/>
+        </p:nvSpPr>
+        <p:spPr>
+          <a:xfrm>
+            <a:off x="685800" y="1143000"/>
+            <a:ext cx="10607040" cy="914400"/>
+          </a:xfrm>
+          <a:prstGeom prst="rect">
+            <a:avLst/>
+          </a:prstGeom>
+          <a:noFill/>
+        </p:spPr>
+        <p:txBody>
+          <a:bodyPr wrap="square" anchor="t">
+            <a:spAutoFit/>
+          </a:bodyPr>
+          <a:lstStyle/>
+          <a:p>
+            <a:pPr algn="l"/>
+            <a:r>
+              <a:rPr sz="3000" b="1" i="0">
+                <a:solidFill>
+                  <a:srgbClr val="FFFFFF"/>
+                </a:solidFill>
+                <a:latin typeface="Cambria"/>
+              </a:rPr>
+              <a:t>Crazy 8s Sprint</a:t>
+            </a:r>
+          </a:p>
+        </p:txBody>
+      </p:sp>
+      <p:sp>
+        <p:nvSpPr>
+          <p:cNvPr id="6" name="Rounded Rectangle 5"/>
+          <p:cNvSpPr/>
+          <p:nvPr/>
+        </p:nvSpPr>
+        <p:spPr>
+          <a:xfrm>
+            <a:off x="685800" y="2148840"/>
+            <a:ext cx="960120" cy="411480"/>
+          </a:xfrm>
+          <a:prstGeom prst="roundRect">
+            <a:avLst>
+              <a:gd name="adj" fmla="val 50000"/>
+            </a:avLst>
+          </a:prstGeom>
+          <a:solidFill>
+            <a:srgbClr val="5F7A84"/>
+          </a:solidFill>
+          <a:ln>
+            <a:noFill/>
+          </a:ln>
+          <a:effectLst/>
+        </p:spPr>
+        <p:style>
+          <a:lnRef idx="1">
+            <a:schemeClr val="accent1"/>
+          </a:lnRef>
+          <a:fillRef idx="3">
+            <a:schemeClr val="accent1"/>
+          </a:fillRef>
+          <a:effectRef idx="2">
+            <a:schemeClr val="accent1"/>
+          </a:effectRef>
+          <a:fontRef idx="minor">
+            <a:schemeClr val="lt1"/>
+          </a:fontRef>
+        </p:style>
+        <p:txBody>
+          <a:bodyPr rtlCol="0" anchor="ctr" wrap="none" lIns="50800" rIns="50800"/>
+          <a:lstStyle/>
+          <a:p>
+            <a:pPr algn="ctr"/>
+            <a:r>
+              <a:rPr sz="1050" b="1">
+                <a:solidFill>
+                  <a:srgbClr val="FFFFFF"/>
+                </a:solidFill>
+                <a:latin typeface="Calibri"/>
+              </a:rPr>
+              <a:t>8 MIN</a:t>
+            </a:r>
+          </a:p>
+        </p:txBody>
+      </p:sp>
+      <p:sp>
+        <p:nvSpPr>
+          <p:cNvPr id="7" name="Rounded Rectangle 6"/>
+          <p:cNvSpPr/>
+          <p:nvPr/>
+        </p:nvSpPr>
+        <p:spPr>
+          <a:xfrm>
+            <a:off x="1783080" y="2148840"/>
+            <a:ext cx="1463040" cy="411480"/>
+          </a:xfrm>
+          <a:prstGeom prst="roundRect">
+            <a:avLst>
+              <a:gd name="adj" fmla="val 50000"/>
+            </a:avLst>
+          </a:prstGeom>
+          <a:solidFill>
+            <a:srgbClr val="5F7A84"/>
+          </a:solidFill>
+          <a:ln>
+            <a:noFill/>
+          </a:ln>
+          <a:effectLst/>
+        </p:spPr>
+        <p:style>
+          <a:lnRef idx="1">
+            <a:schemeClr val="accent1"/>
+          </a:lnRef>
+          <a:fillRef idx="3">
+            <a:schemeClr val="accent1"/>
+          </a:fillRef>
+          <a:effectRef idx="2">
+            <a:schemeClr val="accent1"/>
+          </a:effectRef>
+          <a:fontRef idx="minor">
+            <a:schemeClr val="lt1"/>
+          </a:fontRef>
+        </p:style>
+        <p:txBody>
+          <a:bodyPr rtlCol="0" anchor="ctr" wrap="none" lIns="50800" rIns="50800"/>
+          <a:lstStyle/>
+          <a:p>
+            <a:pPr algn="ctr"/>
+            <a:r>
+              <a:rPr sz="1050" b="1">
+                <a:solidFill>
+                  <a:srgbClr val="FFFFFF"/>
+                </a:solidFill>
+                <a:latin typeface="Calibri"/>
+              </a:rPr>
+              <a:t>INDIVIDUAL</a:t>
+            </a:r>
+          </a:p>
+        </p:txBody>
+      </p:sp>
+      <p:sp>
+        <p:nvSpPr>
+          <p:cNvPr id="8" name="Rounded Rectangle 7"/>
+          <p:cNvSpPr/>
+          <p:nvPr/>
+        </p:nvSpPr>
+        <p:spPr>
+          <a:xfrm>
+            <a:off x="685800" y="2788920"/>
+            <a:ext cx="10607040" cy="3246120"/>
+          </a:xfrm>
+          <a:prstGeom prst="roundRect">
+            <a:avLst>
+              <a:gd name="adj" fmla="val 8000"/>
+            </a:avLst>
+          </a:prstGeom>
+          <a:solidFill>
+            <a:srgbClr val="FFFFFF"/>
+          </a:solidFill>
+          <a:ln>
+            <a:noFill/>
+          </a:ln>
+          <a:effectLst/>
+        </p:spPr>
+        <p:style>
+          <a:lnRef idx="1">
+            <a:schemeClr val="accent1"/>
+          </a:lnRef>
+          <a:fillRef idx="3">
+            <a:schemeClr val="accent1"/>
+          </a:fillRef>
+          <a:effectRef idx="2">
+            <a:schemeClr val="accent1"/>
+          </a:effectRef>
+          <a:fontRef idx="minor">
+            <a:schemeClr val="lt1"/>
+          </a:fontRef>
+        </p:style>
+        <p:txBody>
+          <a:bodyPr rtlCol="0" anchor="ctr" lIns="304800" rIns="304800" tIns="203200" bIns="203200" wrap="square"/>
           <a:lstStyle/>
           <a:p>
             <a:pPr algn="ctr" indent="-203200" marL="203200">
@@ -7144,20 +7594,20 @@
                 <a:spcPts val="900"/>
               </a:spcAft>
               <a:buClr>
-                <a:srgbClr val="2F5233"/>
+                <a:srgbClr val="7FA3B0"/>
               </a:buClr>
               <a:buSzPct val="90000"/>
               <a:buFont typeface="Arial"/>
               <a:buChar char="●"/>
             </a:pPr>
             <a:r>
-              <a:rPr sz="1500" b="1" i="0">
-                <a:solidFill>
-                  <a:srgbClr val="27452B"/>
-                </a:solidFill>
-                <a:latin typeface="Calibri"/>
-              </a:rPr>
-              <a:t>Designing for global audiences</a:t>
+              <a:rPr sz="1450" b="0" i="0">
+                <a:solidFill>
+                  <a:srgbClr val="20291F"/>
+                </a:solidFill>
+                <a:latin typeface="Calibri"/>
+              </a:rPr>
+              <a:t>Fold or divide a page into 8 sections.</a:t>
             </a:r>
           </a:p>
           <a:p>
@@ -7166,20 +7616,20 @@
                 <a:spcPts val="900"/>
               </a:spcAft>
               <a:buClr>
-                <a:srgbClr val="2F5233"/>
+                <a:srgbClr val="7FA3B0"/>
               </a:buClr>
               <a:buSzPct val="90000"/>
               <a:buFont typeface="Arial"/>
-              <a:buChar char="–"/>
+              <a:buChar char="●"/>
             </a:pPr>
             <a:r>
-              <a:rPr sz="1350" b="0" i="0">
-                <a:solidFill>
-                  <a:srgbClr val="20291F"/>
-                </a:solidFill>
-                <a:latin typeface="Calibri"/>
-              </a:rPr>
-              <a:t>Localisation — adapting a design for a specific market (language, imagery, colour meaning)</a:t>
+              <a:rPr sz="1450" b="0" i="0">
+                <a:solidFill>
+                  <a:srgbClr val="20291F"/>
+                </a:solidFill>
+                <a:latin typeface="Calibri"/>
+              </a:rPr>
+              <a:t>Sketch 8 genuinely different thumbnail ideas for a given prompt — one per section, one minute each.</a:t>
             </a:r>
           </a:p>
           <a:p>
@@ -7188,87 +7638,56 @@
                 <a:spcPts val="900"/>
               </a:spcAft>
               <a:buClr>
-                <a:srgbClr val="2F5233"/>
+                <a:srgbClr val="7FA3B0"/>
               </a:buClr>
               <a:buSzPct val="90000"/>
               <a:buFont typeface="Arial"/>
-              <a:buChar char="–"/>
+              <a:buChar char="●"/>
             </a:pPr>
             <a:r>
-              <a:rPr sz="1350" b="0" i="0">
-                <a:solidFill>
-                  <a:srgbClr val="20291F"/>
-                </a:solidFill>
-                <a:latin typeface="Calibri"/>
-              </a:rPr>
-              <a:t>Internationalisation — designing a flexible system that can be localised efficiently</a:t>
-            </a:r>
-          </a:p>
-          <a:p>
-            <a:pPr indent="-203200" marL="203200">
-              <a:spcAft>
-                <a:spcPts val="900"/>
-              </a:spcAft>
-              <a:buClr>
-                <a:srgbClr val="2F5233"/>
-              </a:buClr>
-              <a:buSzPct val="90000"/>
-              <a:buFont typeface="Arial"/>
-              <a:buChar char="–"/>
-            </a:pPr>
-            <a:r>
-              <a:rPr sz="1350" b="0" i="0">
-                <a:solidFill>
-                  <a:srgbClr val="20291F"/>
-                </a:solidFill>
-                <a:latin typeface="Calibri"/>
-              </a:rPr>
-              <a:t>Symbol meaning varies by culture — always research target-market conventions before reusing a symbol or gesture in a new context</a:t>
-            </a:r>
-          </a:p>
-        </p:txBody>
-      </p:sp>
-      <p:sp>
-        <p:nvSpPr>
-          <p:cNvPr id="5" name="Oval 4"/>
-          <p:cNvSpPr/>
-          <p:nvPr/>
-        </p:nvSpPr>
-        <p:spPr>
-          <a:xfrm>
-            <a:off x="10881360" y="5943600"/>
-            <a:ext cx="1005840" cy="1005840"/>
-          </a:xfrm>
-          <a:prstGeom prst="ellipse">
+              <a:rPr sz="1450" b="0" i="0">
+                <a:solidFill>
+                  <a:srgbClr val="20291F"/>
+                </a:solidFill>
+                <a:latin typeface="Calibri"/>
+              </a:rPr>
+              <a:t>No erasing, no perfecting — keep moving to the next box.</a:t>
+            </a:r>
+          </a:p>
+        </p:txBody>
+      </p:sp>
+      <p:sp>
+        <p:nvSpPr>
+          <p:cNvPr id="9" name="TextBox 8"/>
+          <p:cNvSpPr txBox="1"/>
+          <p:nvPr/>
+        </p:nvSpPr>
+        <p:spPr>
+          <a:xfrm>
+            <a:off x="685800" y="6217920"/>
+            <a:ext cx="10607040" cy="502920"/>
+          </a:xfrm>
+          <a:prstGeom prst="rect">
             <a:avLst/>
           </a:prstGeom>
-          <a:solidFill>
-            <a:srgbClr val="C5D5DB"/>
-          </a:solidFill>
-          <a:ln>
-            <a:noFill/>
-          </a:ln>
-          <a:effectLst/>
-        </p:spPr>
-        <p:style>
-          <a:lnRef idx="1">
-            <a:schemeClr val="accent1"/>
-          </a:lnRef>
-          <a:fillRef idx="3">
-            <a:schemeClr val="accent1"/>
-          </a:fillRef>
-          <a:effectRef idx="2">
-            <a:schemeClr val="accent1"/>
-          </a:effectRef>
-          <a:fontRef idx="minor">
-            <a:schemeClr val="lt1"/>
-          </a:fontRef>
-        </p:style>
-        <p:txBody>
-          <a:bodyPr rtlCol="0" anchor="ctr"/>
-          <a:lstStyle/>
-          <a:p>
-            <a:pPr algn="ctr"/>
+          <a:noFill/>
+        </p:spPr>
+        <p:txBody>
+          <a:bodyPr wrap="square" anchor="t">
+            <a:spAutoFit/>
+          </a:bodyPr>
+          <a:lstStyle/>
+          <a:p>
+            <a:pPr algn="l"/>
+            <a:r>
+              <a:rPr sz="1250" b="0" i="1">
+                <a:solidFill>
+                  <a:srgbClr val="FFFFFF"/>
+                </a:solidFill>
+                <a:latin typeface="Calibri"/>
+              </a:rPr>
+              <a:t>Debrief: Which of your 8 ideas would you develop further, and why?</a:t>
+            </a:r>
           </a:p>
         </p:txBody>
       </p:sp>
@@ -7571,7 +7990,7 @@
     <p:bg>
       <p:bgPr>
         <a:solidFill>
-          <a:srgbClr val="F7F5EC"/>
+          <a:srgbClr val="C9743D"/>
         </a:solidFill>
         <a:effectLst/>
       </p:bgPr>
@@ -7585,22 +8004,20 @@
       <p:grpSpPr/>
       <p:sp>
         <p:nvSpPr>
-          <p:cNvPr id="2" name="Rounded Rectangle 1"/>
+          <p:cNvPr id="2" name="Oval 1"/>
           <p:cNvSpPr/>
           <p:nvPr/>
         </p:nvSpPr>
         <p:spPr>
           <a:xfrm>
-            <a:off x="685800" y="502920"/>
-            <a:ext cx="3291840" cy="457200"/>
-          </a:xfrm>
-          <a:prstGeom prst="roundRect">
-            <a:avLst>
-              <a:gd name="adj" fmla="val 50000"/>
-            </a:avLst>
-          </a:prstGeom>
-          <a:solidFill>
-            <a:srgbClr val="2F5233"/>
+            <a:off x="9692640" y="-914400"/>
+            <a:ext cx="2926080" cy="2926080"/>
+          </a:xfrm>
+          <a:prstGeom prst="ellipse">
+            <a:avLst/>
+          </a:prstGeom>
+          <a:solidFill>
+            <a:srgbClr val="B06635"/>
           </a:solidFill>
           <a:ln>
             <a:noFill/>
@@ -7622,75 +8039,29 @@
           </a:fontRef>
         </p:style>
         <p:txBody>
-          <a:bodyPr rtlCol="0" anchor="ctr" wrap="none" lIns="50800" rIns="50800"/>
+          <a:bodyPr rtlCol="0" anchor="ctr"/>
           <a:lstStyle/>
           <a:p>
             <a:pPr algn="ctr"/>
-            <a:r>
-              <a:rPr sz="1100" b="1">
-                <a:solidFill>
-                  <a:srgbClr val="FFFFFF"/>
-                </a:solidFill>
-                <a:latin typeface="Calibri"/>
-              </a:rPr>
-              <a:t>EXTENDED KNOWLEDGE</a:t>
-            </a:r>
-          </a:p>
-        </p:txBody>
-      </p:sp>
-      <p:sp>
-        <p:nvSpPr>
-          <p:cNvPr id="3" name="TextBox 2"/>
-          <p:cNvSpPr txBox="1"/>
-          <p:nvPr/>
-        </p:nvSpPr>
-        <p:spPr>
-          <a:xfrm>
-            <a:off x="685800" y="1051560"/>
-            <a:ext cx="10607040" cy="822960"/>
-          </a:xfrm>
-          <a:prstGeom prst="rect">
+          </a:p>
+        </p:txBody>
+      </p:sp>
+      <p:sp>
+        <p:nvSpPr>
+          <p:cNvPr id="3" name="Oval 2"/>
+          <p:cNvSpPr/>
+          <p:nvPr/>
+        </p:nvSpPr>
+        <p:spPr>
+          <a:xfrm>
+            <a:off x="-914400" y="4937760"/>
+            <a:ext cx="2377440" cy="2377440"/>
+          </a:xfrm>
+          <a:prstGeom prst="ellipse">
             <a:avLst/>
           </a:prstGeom>
-          <a:noFill/>
-        </p:spPr>
-        <p:txBody>
-          <a:bodyPr wrap="square" anchor="t">
-            <a:spAutoFit/>
-          </a:bodyPr>
-          <a:lstStyle/>
-          <a:p>
-            <a:pPr algn="l"/>
-            <a:r>
-              <a:rPr sz="2700" b="1" i="0">
-                <a:solidFill>
-                  <a:srgbClr val="20291F"/>
-                </a:solidFill>
-                <a:latin typeface="Cambria"/>
-              </a:rPr>
-              <a:t>Research Methods for Designers</a:t>
-            </a:r>
-          </a:p>
-        </p:txBody>
-      </p:sp>
-      <p:sp>
-        <p:nvSpPr>
-          <p:cNvPr id="4" name="Rounded Rectangle 3"/>
-          <p:cNvSpPr/>
-          <p:nvPr/>
-        </p:nvSpPr>
-        <p:spPr>
-          <a:xfrm>
-            <a:off x="685800" y="1874519"/>
-            <a:ext cx="10607040" cy="4526280"/>
-          </a:xfrm>
-          <a:prstGeom prst="roundRect">
-            <a:avLst>
-              <a:gd name="adj" fmla="val 6000"/>
-            </a:avLst>
-          </a:prstGeom>
-          <a:solidFill>
-            <a:srgbClr val="EAEDEA"/>
+          <a:solidFill>
+            <a:srgbClr val="B06635"/>
           </a:solidFill>
           <a:ln>
             <a:noFill/>
@@ -7712,158 +8083,31 @@
           </a:fontRef>
         </p:style>
         <p:txBody>
-          <a:bodyPr rtlCol="0" anchor="ctr" lIns="330200" rIns="330200" tIns="254000" bIns="254000" wrap="square"/>
-          <a:lstStyle/>
-          <a:p>
-            <a:pPr algn="ctr" indent="-203200" marL="203200">
-              <a:spcAft>
-                <a:spcPts val="900"/>
-              </a:spcAft>
-              <a:buClr>
-                <a:srgbClr val="2F5233"/>
-              </a:buClr>
-              <a:buSzPct val="90000"/>
-              <a:buFont typeface="Arial"/>
-              <a:buChar char="●"/>
-            </a:pPr>
-            <a:r>
-              <a:rPr sz="1500" b="1" i="0">
-                <a:solidFill>
-                  <a:srgbClr val="27452B"/>
-                </a:solidFill>
-                <a:latin typeface="Calibri"/>
-              </a:rPr>
-              <a:t>Qualitative vs quantitative</a:t>
-            </a:r>
-          </a:p>
-          <a:p>
-            <a:pPr indent="-203200" marL="203200">
-              <a:spcAft>
-                <a:spcPts val="900"/>
-              </a:spcAft>
-              <a:buClr>
-                <a:srgbClr val="2F5233"/>
-              </a:buClr>
-              <a:buSzPct val="90000"/>
-              <a:buFont typeface="Arial"/>
-              <a:buChar char="–"/>
-            </a:pPr>
-            <a:r>
-              <a:rPr sz="1350" b="0" i="0">
-                <a:solidFill>
-                  <a:srgbClr val="20291F"/>
-                </a:solidFill>
-                <a:latin typeface="Calibri"/>
-              </a:rPr>
-              <a:t>Qualitative research (interviews, observation) reveals why users behave a certain way; quantitative research (surveys, analytics) reveals how many/how often. Strong design research typically combines both.</a:t>
-            </a:r>
-          </a:p>
-          <a:p>
-            <a:pPr indent="-203200" marL="203200">
-              <a:spcAft>
-                <a:spcPts val="900"/>
-              </a:spcAft>
-              <a:buClr>
-                <a:srgbClr val="2F5233"/>
-              </a:buClr>
-              <a:buSzPct val="90000"/>
-              <a:buFont typeface="Arial"/>
-              <a:buChar char="●"/>
-            </a:pPr>
-            <a:r>
-              <a:rPr sz="1500" b="1" i="0">
-                <a:solidFill>
-                  <a:srgbClr val="27452B"/>
-                </a:solidFill>
-                <a:latin typeface="Calibri"/>
-              </a:rPr>
-              <a:t>Other useful methods</a:t>
-            </a:r>
-          </a:p>
-          <a:p>
-            <a:pPr indent="-203200" marL="203200">
-              <a:spcAft>
-                <a:spcPts val="900"/>
-              </a:spcAft>
-              <a:buClr>
-                <a:srgbClr val="2F5233"/>
-              </a:buClr>
-              <a:buSzPct val="90000"/>
-              <a:buFont typeface="Arial"/>
-              <a:buChar char="–"/>
-            </a:pPr>
-            <a:r>
-              <a:rPr sz="1350" b="0" i="0">
-                <a:solidFill>
-                  <a:srgbClr val="20291F"/>
-                </a:solidFill>
-                <a:latin typeface="Calibri"/>
-              </a:rPr>
-              <a:t>Empathy mapping — documenting what a user says, thinks, feels and does</a:t>
-            </a:r>
-          </a:p>
-          <a:p>
-            <a:pPr indent="-203200" marL="203200">
-              <a:spcAft>
-                <a:spcPts val="900"/>
-              </a:spcAft>
-              <a:buClr>
-                <a:srgbClr val="2F5233"/>
-              </a:buClr>
-              <a:buSzPct val="90000"/>
-              <a:buFont typeface="Arial"/>
-              <a:buChar char="–"/>
-            </a:pPr>
-            <a:r>
-              <a:rPr sz="1350" b="0" i="0">
-                <a:solidFill>
-                  <a:srgbClr val="20291F"/>
-                </a:solidFill>
-                <a:latin typeface="Calibri"/>
-              </a:rPr>
-              <a:t>Competitive analysis — reviewing existing solutions to identify gaps and opportunities</a:t>
-            </a:r>
-          </a:p>
-          <a:p>
-            <a:pPr indent="-203200" marL="203200">
-              <a:spcAft>
-                <a:spcPts val="900"/>
-              </a:spcAft>
-              <a:buClr>
-                <a:srgbClr val="2F5233"/>
-              </a:buClr>
-              <a:buSzPct val="90000"/>
-              <a:buFont typeface="Arial"/>
-              <a:buChar char="–"/>
-            </a:pPr>
-            <a:r>
-              <a:rPr sz="1350" b="0" i="0">
-                <a:solidFill>
-                  <a:srgbClr val="20291F"/>
-                </a:solidFill>
-                <a:latin typeface="Calibri"/>
-              </a:rPr>
-              <a:t>Mood boards — curated visual references establishing tone, palette and style direction</a:t>
-            </a:r>
-          </a:p>
-        </p:txBody>
-      </p:sp>
-      <p:sp>
-        <p:nvSpPr>
-          <p:cNvPr id="5" name="Oval 4"/>
+          <a:bodyPr rtlCol="0" anchor="ctr"/>
+          <a:lstStyle/>
+          <a:p>
+            <a:pPr algn="ctr"/>
+          </a:p>
+        </p:txBody>
+      </p:sp>
+      <p:sp>
+        <p:nvSpPr>
+          <p:cNvPr id="4" name="Rounded Rectangle 3"/>
           <p:cNvSpPr/>
           <p:nvPr/>
         </p:nvSpPr>
         <p:spPr>
           <a:xfrm>
-            <a:off x="10881360" y="5943600"/>
-            <a:ext cx="1005840" cy="1005840"/>
-          </a:xfrm>
-          <a:prstGeom prst="ellipse">
-            <a:avLst/>
-          </a:prstGeom>
-          <a:solidFill>
-            <a:srgbClr val="C5D5DB"/>
+            <a:off x="822960" y="1051560"/>
+            <a:ext cx="1188720" cy="502920"/>
+          </a:xfrm>
+          <a:prstGeom prst="roundRect">
+            <a:avLst>
+              <a:gd name="adj" fmla="val 50000"/>
+            </a:avLst>
+          </a:prstGeom>
+          <a:solidFill>
+            <a:srgbClr val="FFFFFF"/>
           </a:solidFill>
           <a:ln>
             <a:noFill/>
@@ -7885,10 +8129,135 @@
           </a:fontRef>
         </p:style>
         <p:txBody>
+          <a:bodyPr rtlCol="0" anchor="ctr" wrap="none" lIns="50800" rIns="50800"/>
+          <a:lstStyle/>
+          <a:p>
+            <a:pPr algn="ctr"/>
+            <a:r>
+              <a:rPr sz="1400" b="1">
+                <a:solidFill>
+                  <a:srgbClr val="A05C30"/>
+                </a:solidFill>
+                <a:latin typeface="Calibri"/>
+              </a:rPr>
+              <a:t>03</a:t>
+            </a:r>
+          </a:p>
+        </p:txBody>
+      </p:sp>
+      <p:sp>
+        <p:nvSpPr>
+          <p:cNvPr id="5" name="Rounded Rectangle 4"/>
+          <p:cNvSpPr/>
+          <p:nvPr/>
+        </p:nvSpPr>
+        <p:spPr>
+          <a:xfrm>
+            <a:off x="822960" y="2011680"/>
+            <a:ext cx="10515600" cy="2834640"/>
+          </a:xfrm>
+          <a:prstGeom prst="roundRect">
+            <a:avLst>
+              <a:gd name="adj" fmla="val 18000"/>
+            </a:avLst>
+          </a:prstGeom>
+          <a:solidFill>
+            <a:srgbClr val="FFFFFF"/>
+          </a:solidFill>
+          <a:ln>
+            <a:noFill/>
+          </a:ln>
+          <a:effectLst/>
+        </p:spPr>
+        <p:style>
+          <a:lnRef idx="1">
+            <a:schemeClr val="accent1"/>
+          </a:lnRef>
+          <a:fillRef idx="3">
+            <a:schemeClr val="accent1"/>
+          </a:fillRef>
+          <a:effectRef idx="2">
+            <a:schemeClr val="accent1"/>
+          </a:effectRef>
+          <a:fontRef idx="minor">
+            <a:schemeClr val="lt1"/>
+          </a:fontRef>
+        </p:style>
+        <p:txBody>
           <a:bodyPr rtlCol="0" anchor="ctr"/>
           <a:lstStyle/>
           <a:p>
             <a:pPr algn="ctr"/>
+          </a:p>
+        </p:txBody>
+      </p:sp>
+      <p:sp>
+        <p:nvSpPr>
+          <p:cNvPr id="6" name="TextBox 5"/>
+          <p:cNvSpPr txBox="1"/>
+          <p:nvPr/>
+        </p:nvSpPr>
+        <p:spPr>
+          <a:xfrm>
+            <a:off x="1280160" y="2697480"/>
+            <a:ext cx="9601200" cy="1097280"/>
+          </a:xfrm>
+          <a:prstGeom prst="rect">
+            <a:avLst/>
+          </a:prstGeom>
+          <a:noFill/>
+        </p:spPr>
+        <p:txBody>
+          <a:bodyPr wrap="square" anchor="t">
+            <a:spAutoFit/>
+          </a:bodyPr>
+          <a:lstStyle/>
+          <a:p>
+            <a:pPr algn="l"/>
+            <a:r>
+              <a:rPr sz="3400" b="1" i="0">
+                <a:solidFill>
+                  <a:srgbClr val="AA6233"/>
+                </a:solidFill>
+                <a:latin typeface="Cambria"/>
+              </a:rPr>
+              <a:t>Extended Knowledge</a:t>
+            </a:r>
+          </a:p>
+        </p:txBody>
+      </p:sp>
+      <p:sp>
+        <p:nvSpPr>
+          <p:cNvPr id="7" name="TextBox 6"/>
+          <p:cNvSpPr txBox="1"/>
+          <p:nvPr/>
+        </p:nvSpPr>
+        <p:spPr>
+          <a:xfrm>
+            <a:off x="1280160" y="3657600"/>
+            <a:ext cx="9601200" cy="548640"/>
+          </a:xfrm>
+          <a:prstGeom prst="rect">
+            <a:avLst/>
+          </a:prstGeom>
+          <a:noFill/>
+        </p:spPr>
+        <p:txBody>
+          <a:bodyPr wrap="square" anchor="t">
+            <a:spAutoFit/>
+          </a:bodyPr>
+          <a:lstStyle/>
+          <a:p>
+            <a:pPr algn="l"/>
+            <a:r>
+              <a:rPr sz="1500" b="0" i="0">
+                <a:solidFill>
+                  <a:srgbClr val="6B6B6B"/>
+                </a:solidFill>
+                <a:latin typeface="Calibri"/>
+              </a:rPr>
+              <a:t>Beyond the study design</a:t>
+            </a:r>
           </a:p>
         </p:txBody>
       </p:sp>
@@ -8003,7 +8372,7 @@
                 </a:solidFill>
                 <a:latin typeface="Cambria"/>
               </a:rPr>
-              <a:t>Ideation Techniques Beyond Brainstorming</a:t>
+              <a:t>Semiotics and Visual Rhetoric</a:t>
             </a:r>
           </a:p>
         </p:txBody>
@@ -8068,7 +8437,7 @@
                 </a:solidFill>
                 <a:latin typeface="Calibri"/>
               </a:rPr>
-              <a:t>Structured ideation methods</a:t>
+              <a:t>Beyond icon/index/symbol</a:t>
             </a:r>
           </a:p>
           <a:p>
@@ -8090,7 +8459,7 @@
                 </a:solidFill>
                 <a:latin typeface="Calibri"/>
               </a:rPr>
-              <a:t>SCAMPER — Substitute, Combine, Adapt, Modify, Put to other use, Eliminate, Reverse</a:t>
+              <a:t>Visual metaphor — representing one concept through the image of another (a lightbulb for an idea)</a:t>
             </a:r>
           </a:p>
           <a:p>
@@ -8112,7 +8481,7 @@
                 </a:solidFill>
                 <a:latin typeface="Calibri"/>
               </a:rPr>
-              <a:t>Crazy 8s — sketch 8 distinct ideas in 8 minutes to force rapid divergent thinking</a:t>
+              <a:t>Visual metonymy — representing a whole through a closely associated part (a crown for royalty)</a:t>
             </a:r>
           </a:p>
           <a:p>
@@ -8134,29 +8503,7 @@
                 </a:solidFill>
                 <a:latin typeface="Calibri"/>
               </a:rPr>
-              <a:t>Worst possible idea — deliberately generating bad ideas to break fixation and spark humour-led insight</a:t>
-            </a:r>
-          </a:p>
-          <a:p>
-            <a:pPr indent="-203200" marL="203200">
-              <a:spcAft>
-                <a:spcPts val="900"/>
-              </a:spcAft>
-              <a:buClr>
-                <a:srgbClr val="2F5233"/>
-              </a:buClr>
-              <a:buSzPct val="90000"/>
-              <a:buFont typeface="Arial"/>
-              <a:buChar char="–"/>
-            </a:pPr>
-            <a:r>
-              <a:rPr sz="1350" b="0" i="0">
-                <a:solidFill>
-                  <a:srgbClr val="20291F"/>
-                </a:solidFill>
-                <a:latin typeface="Calibri"/>
-              </a:rPr>
-              <a:t>Biomimicry as ideation — asking 'how would nature solve this?'</a:t>
+              <a:t>Myth and connotation (Roland Barthes) — how repeated cultural use makes a sign feel 'natural' or self-evident, when it is in fact culturally constructed</a:t>
             </a:r>
           </a:p>
         </p:txBody>
@@ -8316,7 +8663,7 @@
                 </a:solidFill>
                 <a:latin typeface="Cambria"/>
               </a:rPr>
-              <a:t>Presenting and Pitching Design Concepts</a:t>
+              <a:t>Grid Systems and Layout Theory</a:t>
             </a:r>
           </a:p>
         </p:txBody>
@@ -8381,7 +8728,7 @@
                 </a:solidFill>
                 <a:latin typeface="Calibri"/>
               </a:rPr>
-              <a:t>Communicating design decisions</a:t>
+              <a:t>Types of grid</a:t>
             </a:r>
           </a:p>
           <a:p>
@@ -8403,7 +8750,139 @@
                 </a:solidFill>
                 <a:latin typeface="Calibri"/>
               </a:rPr>
-              <a:t>Professional designers frame concepts as a story: the problem, the insight, the solution, the expected impact — rather than simply describing what was made. Practising this framing strengthens folio annotations and oral presentation of concepts.</a:t>
+              <a:t>Column grid — vertical divisions for text-heavy layouts (newspapers, editorial)</a:t>
+            </a:r>
+          </a:p>
+          <a:p>
+            <a:pPr indent="-203200" marL="203200">
+              <a:spcAft>
+                <a:spcPts val="900"/>
+              </a:spcAft>
+              <a:buClr>
+                <a:srgbClr val="2F5233"/>
+              </a:buClr>
+              <a:buSzPct val="90000"/>
+              <a:buFont typeface="Arial"/>
+              <a:buChar char="–"/>
+            </a:pPr>
+            <a:r>
+              <a:rPr sz="1350" b="0" i="0">
+                <a:solidFill>
+                  <a:srgbClr val="20291F"/>
+                </a:solidFill>
+                <a:latin typeface="Calibri"/>
+              </a:rPr>
+              <a:t>Modular grid — a grid of consistent modules/cells for complex data-rich layouts</a:t>
+            </a:r>
+          </a:p>
+          <a:p>
+            <a:pPr indent="-203200" marL="203200">
+              <a:spcAft>
+                <a:spcPts val="900"/>
+              </a:spcAft>
+              <a:buClr>
+                <a:srgbClr val="2F5233"/>
+              </a:buClr>
+              <a:buSzPct val="90000"/>
+              <a:buFont typeface="Arial"/>
+              <a:buChar char="–"/>
+            </a:pPr>
+            <a:r>
+              <a:rPr sz="1350" b="0" i="0">
+                <a:solidFill>
+                  <a:srgbClr val="20291F"/>
+                </a:solidFill>
+                <a:latin typeface="Calibri"/>
+              </a:rPr>
+              <a:t>Baseline grid — horizontal lines ensuring consistent vertical rhythm of text across a page</a:t>
+            </a:r>
+          </a:p>
+          <a:p>
+            <a:pPr indent="-203200" marL="203200">
+              <a:spcAft>
+                <a:spcPts val="900"/>
+              </a:spcAft>
+              <a:buClr>
+                <a:srgbClr val="2F5233"/>
+              </a:buClr>
+              <a:buSzPct val="90000"/>
+              <a:buFont typeface="Arial"/>
+              <a:buChar char="●"/>
+            </a:pPr>
+            <a:r>
+              <a:rPr sz="1500" b="1" i="0">
+                <a:solidFill>
+                  <a:srgbClr val="27452B"/>
+                </a:solidFill>
+                <a:latin typeface="Calibri"/>
+              </a:rPr>
+              <a:t>The Swiss grid legacy</a:t>
+            </a:r>
+          </a:p>
+          <a:p>
+            <a:pPr indent="-203200" marL="203200">
+              <a:spcAft>
+                <a:spcPts val="900"/>
+              </a:spcAft>
+              <a:buClr>
+                <a:srgbClr val="2F5233"/>
+              </a:buClr>
+              <a:buSzPct val="90000"/>
+              <a:buFont typeface="Arial"/>
+              <a:buChar char="–"/>
+            </a:pPr>
+            <a:r>
+              <a:rPr sz="1350" b="0" i="0">
+                <a:solidFill>
+                  <a:srgbClr val="20291F"/>
+                </a:solidFill>
+                <a:latin typeface="Calibri"/>
+              </a:rPr>
+              <a:t>The International Typographic Style formalised mathematical grid systems as a tool for objective, universal communication — still the basis of most professional layout software and responsive web design grids today.</a:t>
+            </a:r>
+          </a:p>
+          <a:p>
+            <a:pPr indent="-203200" marL="203200">
+              <a:spcAft>
+                <a:spcPts val="900"/>
+              </a:spcAft>
+              <a:buClr>
+                <a:srgbClr val="2F5233"/>
+              </a:buClr>
+              <a:buSzPct val="90000"/>
+              <a:buFont typeface="Arial"/>
+              <a:buChar char="●"/>
+            </a:pPr>
+            <a:r>
+              <a:rPr sz="1500" b="1" i="0">
+                <a:solidFill>
+                  <a:srgbClr val="27452B"/>
+                </a:solidFill>
+                <a:latin typeface="Calibri"/>
+              </a:rPr>
+              <a:t>Proportion systems</a:t>
+            </a:r>
+          </a:p>
+          <a:p>
+            <a:pPr indent="-203200" marL="203200">
+              <a:spcAft>
+                <a:spcPts val="900"/>
+              </a:spcAft>
+              <a:buClr>
+                <a:srgbClr val="2F5233"/>
+              </a:buClr>
+              <a:buSzPct val="90000"/>
+              <a:buFont typeface="Arial"/>
+              <a:buChar char="–"/>
+            </a:pPr>
+            <a:r>
+              <a:rPr sz="1350" b="0" i="0">
+                <a:solidFill>
+                  <a:srgbClr val="20291F"/>
+                </a:solidFill>
+                <a:latin typeface="Calibri"/>
+              </a:rPr>
+              <a:t>The golden ratio (1:1.618) and the rule of thirds are classical tools for dividing a composition in a way the eye finds naturally balanced — useful vocabulary when analysing or justifying a layout decision.</a:t>
             </a:r>
           </a:p>
         </p:txBody>
@@ -8466,7 +8945,7 @@
     <p:bg>
       <p:bgPr>
         <a:solidFill>
-          <a:srgbClr val="2F5233"/>
+          <a:srgbClr val="F7F5EC"/>
         </a:solidFill>
         <a:effectLst/>
       </p:bgPr>
@@ -8480,20 +8959,22 @@
       <p:grpSpPr/>
       <p:sp>
         <p:nvSpPr>
-          <p:cNvPr id="2" name="Oval 1"/>
+          <p:cNvPr id="2" name="Rounded Rectangle 1"/>
           <p:cNvSpPr/>
           <p:nvPr/>
         </p:nvSpPr>
         <p:spPr>
           <a:xfrm>
-            <a:off x="9692640" y="-914400"/>
-            <a:ext cx="2926080" cy="2926080"/>
-          </a:xfrm>
-          <a:prstGeom prst="ellipse">
-            <a:avLst/>
-          </a:prstGeom>
-          <a:solidFill>
-            <a:srgbClr val="29482C"/>
+            <a:off x="685800" y="502920"/>
+            <a:ext cx="3291840" cy="457200"/>
+          </a:xfrm>
+          <a:prstGeom prst="roundRect">
+            <a:avLst>
+              <a:gd name="adj" fmla="val 50000"/>
+            </a:avLst>
+          </a:prstGeom>
+          <a:solidFill>
+            <a:srgbClr val="2F5233"/>
           </a:solidFill>
           <a:ln>
             <a:noFill/>
@@ -8515,29 +8996,75 @@
           </a:fontRef>
         </p:style>
         <p:txBody>
-          <a:bodyPr rtlCol="0" anchor="ctr"/>
+          <a:bodyPr rtlCol="0" anchor="ctr" wrap="none" lIns="50800" rIns="50800"/>
           <a:lstStyle/>
           <a:p>
             <a:pPr algn="ctr"/>
-          </a:p>
-        </p:txBody>
-      </p:sp>
-      <p:sp>
-        <p:nvSpPr>
-          <p:cNvPr id="3" name="Oval 2"/>
+            <a:r>
+              <a:rPr sz="1100" b="1">
+                <a:solidFill>
+                  <a:srgbClr val="FFFFFF"/>
+                </a:solidFill>
+                <a:latin typeface="Calibri"/>
+              </a:rPr>
+              <a:t>EXTENDED KNOWLEDGE</a:t>
+            </a:r>
+          </a:p>
+        </p:txBody>
+      </p:sp>
+      <p:sp>
+        <p:nvSpPr>
+          <p:cNvPr id="3" name="TextBox 2"/>
+          <p:cNvSpPr txBox="1"/>
+          <p:nvPr/>
+        </p:nvSpPr>
+        <p:spPr>
+          <a:xfrm>
+            <a:off x="685800" y="1051560"/>
+            <a:ext cx="10607040" cy="822960"/>
+          </a:xfrm>
+          <a:prstGeom prst="rect">
+            <a:avLst/>
+          </a:prstGeom>
+          <a:noFill/>
+        </p:spPr>
+        <p:txBody>
+          <a:bodyPr wrap="square" anchor="t">
+            <a:spAutoFit/>
+          </a:bodyPr>
+          <a:lstStyle/>
+          <a:p>
+            <a:pPr algn="l"/>
+            <a:r>
+              <a:rPr sz="2700" b="1" i="0">
+                <a:solidFill>
+                  <a:srgbClr val="20291F"/>
+                </a:solidFill>
+                <a:latin typeface="Cambria"/>
+              </a:rPr>
+              <a:t>Cross-Cultural Design Considerations</a:t>
+            </a:r>
+          </a:p>
+        </p:txBody>
+      </p:sp>
+      <p:sp>
+        <p:nvSpPr>
+          <p:cNvPr id="4" name="Rounded Rectangle 3"/>
           <p:cNvSpPr/>
           <p:nvPr/>
         </p:nvSpPr>
         <p:spPr>
           <a:xfrm>
-            <a:off x="-914400" y="4937760"/>
-            <a:ext cx="2377440" cy="2377440"/>
-          </a:xfrm>
-          <a:prstGeom prst="ellipse">
-            <a:avLst/>
-          </a:prstGeom>
-          <a:solidFill>
-            <a:srgbClr val="29482C"/>
+            <a:off x="685800" y="1874519"/>
+            <a:ext cx="10607040" cy="4526280"/>
+          </a:xfrm>
+          <a:prstGeom prst="roundRect">
+            <a:avLst>
+              <a:gd name="adj" fmla="val 6000"/>
+            </a:avLst>
+          </a:prstGeom>
+          <a:solidFill>
+            <a:srgbClr val="EAEDEA"/>
           </a:solidFill>
           <a:ln>
             <a:noFill/>
@@ -8559,31 +9086,114 @@
           </a:fontRef>
         </p:style>
         <p:txBody>
-          <a:bodyPr rtlCol="0" anchor="ctr"/>
-          <a:lstStyle/>
-          <a:p>
-            <a:pPr algn="ctr"/>
-          </a:p>
-        </p:txBody>
-      </p:sp>
-      <p:sp>
-        <p:nvSpPr>
-          <p:cNvPr id="4" name="Rounded Rectangle 3"/>
+          <a:bodyPr rtlCol="0" anchor="ctr" lIns="330200" rIns="330200" tIns="254000" bIns="254000" wrap="square"/>
+          <a:lstStyle/>
+          <a:p>
+            <a:pPr algn="ctr" indent="-203200" marL="203200">
+              <a:spcAft>
+                <a:spcPts val="900"/>
+              </a:spcAft>
+              <a:buClr>
+                <a:srgbClr val="2F5233"/>
+              </a:buClr>
+              <a:buSzPct val="90000"/>
+              <a:buFont typeface="Arial"/>
+              <a:buChar char="●"/>
+            </a:pPr>
+            <a:r>
+              <a:rPr sz="1500" b="1" i="0">
+                <a:solidFill>
+                  <a:srgbClr val="27452B"/>
+                </a:solidFill>
+                <a:latin typeface="Calibri"/>
+              </a:rPr>
+              <a:t>Designing for global audiences</a:t>
+            </a:r>
+          </a:p>
+          <a:p>
+            <a:pPr indent="-203200" marL="203200">
+              <a:spcAft>
+                <a:spcPts val="900"/>
+              </a:spcAft>
+              <a:buClr>
+                <a:srgbClr val="2F5233"/>
+              </a:buClr>
+              <a:buSzPct val="90000"/>
+              <a:buFont typeface="Arial"/>
+              <a:buChar char="–"/>
+            </a:pPr>
+            <a:r>
+              <a:rPr sz="1350" b="0" i="0">
+                <a:solidFill>
+                  <a:srgbClr val="20291F"/>
+                </a:solidFill>
+                <a:latin typeface="Calibri"/>
+              </a:rPr>
+              <a:t>Localisation — adapting a design for a specific market (language, imagery, colour meaning)</a:t>
+            </a:r>
+          </a:p>
+          <a:p>
+            <a:pPr indent="-203200" marL="203200">
+              <a:spcAft>
+                <a:spcPts val="900"/>
+              </a:spcAft>
+              <a:buClr>
+                <a:srgbClr val="2F5233"/>
+              </a:buClr>
+              <a:buSzPct val="90000"/>
+              <a:buFont typeface="Arial"/>
+              <a:buChar char="–"/>
+            </a:pPr>
+            <a:r>
+              <a:rPr sz="1350" b="0" i="0">
+                <a:solidFill>
+                  <a:srgbClr val="20291F"/>
+                </a:solidFill>
+                <a:latin typeface="Calibri"/>
+              </a:rPr>
+              <a:t>Internationalisation — designing a flexible system that can be localised efficiently</a:t>
+            </a:r>
+          </a:p>
+          <a:p>
+            <a:pPr indent="-203200" marL="203200">
+              <a:spcAft>
+                <a:spcPts val="900"/>
+              </a:spcAft>
+              <a:buClr>
+                <a:srgbClr val="2F5233"/>
+              </a:buClr>
+              <a:buSzPct val="90000"/>
+              <a:buFont typeface="Arial"/>
+              <a:buChar char="–"/>
+            </a:pPr>
+            <a:r>
+              <a:rPr sz="1350" b="0" i="0">
+                <a:solidFill>
+                  <a:srgbClr val="20291F"/>
+                </a:solidFill>
+                <a:latin typeface="Calibri"/>
+              </a:rPr>
+              <a:t>Symbol meaning varies by culture — always research target-market conventions before reusing a symbol or gesture in a new context</a:t>
+            </a:r>
+          </a:p>
+        </p:txBody>
+      </p:sp>
+      <p:sp>
+        <p:nvSpPr>
+          <p:cNvPr id="5" name="Oval 4"/>
           <p:cNvSpPr/>
           <p:nvPr/>
         </p:nvSpPr>
         <p:spPr>
           <a:xfrm>
-            <a:off x="822960" y="1051560"/>
-            <a:ext cx="1188720" cy="502920"/>
-          </a:xfrm>
-          <a:prstGeom prst="roundRect">
-            <a:avLst>
-              <a:gd name="adj" fmla="val 50000"/>
-            </a:avLst>
-          </a:prstGeom>
-          <a:solidFill>
-            <a:srgbClr val="FFFFFF"/>
+            <a:off x="10881360" y="5943600"/>
+            <a:ext cx="1005840" cy="1005840"/>
+          </a:xfrm>
+          <a:prstGeom prst="ellipse">
+            <a:avLst/>
+          </a:prstGeom>
+          <a:solidFill>
+            <a:srgbClr val="C5D5DB"/>
           </a:solidFill>
           <a:ln>
             <a:noFill/>
@@ -8605,135 +9215,10 @@
           </a:fontRef>
         </p:style>
         <p:txBody>
-          <a:bodyPr rtlCol="0" anchor="ctr" wrap="none" lIns="50800" rIns="50800"/>
+          <a:bodyPr rtlCol="0" anchor="ctr"/>
           <a:lstStyle/>
           <a:p>
             <a:pPr algn="ctr"/>
-            <a:r>
-              <a:rPr sz="1400" b="1">
-                <a:solidFill>
-                  <a:srgbClr val="254128"/>
-                </a:solidFill>
-                <a:latin typeface="Calibri"/>
-              </a:rPr>
-              <a:t>04</a:t>
-            </a:r>
-          </a:p>
-        </p:txBody>
-      </p:sp>
-      <p:sp>
-        <p:nvSpPr>
-          <p:cNvPr id="5" name="Rounded Rectangle 4"/>
-          <p:cNvSpPr/>
-          <p:nvPr/>
-        </p:nvSpPr>
-        <p:spPr>
-          <a:xfrm>
-            <a:off x="822960" y="2011680"/>
-            <a:ext cx="10515600" cy="2834640"/>
-          </a:xfrm>
-          <a:prstGeom prst="roundRect">
-            <a:avLst>
-              <a:gd name="adj" fmla="val 18000"/>
-            </a:avLst>
-          </a:prstGeom>
-          <a:solidFill>
-            <a:srgbClr val="FFFFFF"/>
-          </a:solidFill>
-          <a:ln>
-            <a:noFill/>
-          </a:ln>
-          <a:effectLst/>
-        </p:spPr>
-        <p:style>
-          <a:lnRef idx="1">
-            <a:schemeClr val="accent1"/>
-          </a:lnRef>
-          <a:fillRef idx="3">
-            <a:schemeClr val="accent1"/>
-          </a:fillRef>
-          <a:effectRef idx="2">
-            <a:schemeClr val="accent1"/>
-          </a:effectRef>
-          <a:fontRef idx="minor">
-            <a:schemeClr val="lt1"/>
-          </a:fontRef>
-        </p:style>
-        <p:txBody>
-          <a:bodyPr rtlCol="0" anchor="ctr"/>
-          <a:lstStyle/>
-          <a:p>
-            <a:pPr algn="ctr"/>
-          </a:p>
-        </p:txBody>
-      </p:sp>
-      <p:sp>
-        <p:nvSpPr>
-          <p:cNvPr id="6" name="TextBox 5"/>
-          <p:cNvSpPr txBox="1"/>
-          <p:nvPr/>
-        </p:nvSpPr>
-        <p:spPr>
-          <a:xfrm>
-            <a:off x="1280160" y="2697480"/>
-            <a:ext cx="9601200" cy="1097280"/>
-          </a:xfrm>
-          <a:prstGeom prst="rect">
-            <a:avLst/>
-          </a:prstGeom>
-          <a:noFill/>
-        </p:spPr>
-        <p:txBody>
-          <a:bodyPr wrap="square" anchor="t">
-            <a:spAutoFit/>
-          </a:bodyPr>
-          <a:lstStyle/>
-          <a:p>
-            <a:pPr algn="l"/>
-            <a:r>
-              <a:rPr sz="3400" b="1" i="0">
-                <a:solidFill>
-                  <a:srgbClr val="27452B"/>
-                </a:solidFill>
-                <a:latin typeface="Cambria"/>
-              </a:rPr>
-              <a:t>SAC Briefing</a:t>
-            </a:r>
-          </a:p>
-        </p:txBody>
-      </p:sp>
-      <p:sp>
-        <p:nvSpPr>
-          <p:cNvPr id="7" name="TextBox 6"/>
-          <p:cNvSpPr txBox="1"/>
-          <p:nvPr/>
-        </p:nvSpPr>
-        <p:spPr>
-          <a:xfrm>
-            <a:off x="1280160" y="3657600"/>
-            <a:ext cx="9601200" cy="548640"/>
-          </a:xfrm>
-          <a:prstGeom prst="rect">
-            <a:avLst/>
-          </a:prstGeom>
-          <a:noFill/>
-        </p:spPr>
-        <p:txBody>
-          <a:bodyPr wrap="square" anchor="t">
-            <a:spAutoFit/>
-          </a:bodyPr>
-          <a:lstStyle/>
-          <a:p>
-            <a:pPr algn="l"/>
-            <a:r>
-              <a:rPr sz="1500" b="0" i="0">
-                <a:solidFill>
-                  <a:srgbClr val="6B6B6B"/>
-                </a:solidFill>
-                <a:latin typeface="Calibri"/>
-              </a:rPr>
-              <a:t>Draft — confirm against your school’s SAC schedule</a:t>
-            </a:r>
           </a:p>
         </p:txBody>
       </p:sp>
@@ -8813,7 +9298,7 @@
                 </a:solidFill>
                 <a:latin typeface="Calibri"/>
               </a:rPr>
-              <a:t>SAC BRIEFING</a:t>
+              <a:t>EXTENDED KNOWLEDGE</a:t>
             </a:r>
           </a:p>
         </p:txBody>
@@ -8848,7 +9333,7 @@
                 </a:solidFill>
                 <a:latin typeface="Cambria"/>
               </a:rPr>
-              <a:t>Outcome 1 (AOS 1) — Analysis and Reinterpretation</a:t>
+              <a:t>Research Methods for Designers</a:t>
             </a:r>
           </a:p>
         </p:txBody>
@@ -8913,7 +9398,7 @@
                 </a:solidFill>
                 <a:latin typeface="Calibri"/>
               </a:rPr>
-              <a:t>Task</a:t>
+              <a:t>Qualitative vs quantitative</a:t>
             </a:r>
           </a:p>
           <a:p>
@@ -8935,7 +9420,7 @@
                 </a:solidFill>
                 <a:latin typeface="Calibri"/>
               </a:rPr>
-              <a:t>Select an existing visual communication. Analyse it in depth (purpose, audience, elements and principles, materials and methods, context), then propose a reconceptualisation or reinvention for a new audience or context, justifying the approach in an annotated visual submission with a supporting written justification of approximately 400-600 words.</a:t>
+              <a:t>Qualitative research (interviews, observation) reveals why users behave a certain way; quantitative research (surveys, analytics) reveals how many/how often. Strong design research typically combines both.</a:t>
             </a:r>
           </a:p>
           <a:p>
@@ -8957,7 +9442,7 @@
                 </a:solidFill>
                 <a:latin typeface="Calibri"/>
               </a:rPr>
-              <a:t>Conditions</a:t>
+              <a:t>Other useful methods</a:t>
             </a:r>
           </a:p>
           <a:p>
@@ -8979,7 +9464,7 @@
                 </a:solidFill>
                 <a:latin typeface="Calibri"/>
               </a:rPr>
-              <a:t>Completed over approximately 2-3 weeks</a:t>
+              <a:t>Empathy mapping — documenting what a user says, thinks, feels and does</a:t>
             </a:r>
           </a:p>
           <a:p>
@@ -9001,7 +9486,7 @@
                 </a:solidFill>
                 <a:latin typeface="Calibri"/>
               </a:rPr>
-              <a:t>Submitted as folio pages (visual and annotation) plus a short written justification</a:t>
+              <a:t>Competitive analysis — reviewing existing solutions to identify gaps and opportunities</a:t>
             </a:r>
           </a:p>
           <a:p>
@@ -9023,117 +9508,7 @@
                 </a:solidFill>
                 <a:latin typeface="Calibri"/>
               </a:rPr>
-              <a:t>Individual work</a:t>
-            </a:r>
-          </a:p>
-          <a:p>
-            <a:pPr indent="-203200" marL="203200">
-              <a:spcAft>
-                <a:spcPts val="900"/>
-              </a:spcAft>
-              <a:buClr>
-                <a:srgbClr val="2F5233"/>
-              </a:buClr>
-              <a:buSzPct val="90000"/>
-              <a:buFont typeface="Arial"/>
-              <a:buChar char="●"/>
-            </a:pPr>
-            <a:r>
-              <a:rPr sz="1500" b="1" i="0">
-                <a:solidFill>
-                  <a:srgbClr val="27452B"/>
-                </a:solidFill>
-                <a:latin typeface="Calibri"/>
-              </a:rPr>
-              <a:t>Assessment Criteria (/40)</a:t>
-            </a:r>
-          </a:p>
-          <a:p>
-            <a:pPr indent="-203200" marL="203200">
-              <a:spcAft>
-                <a:spcPts val="900"/>
-              </a:spcAft>
-              <a:buClr>
-                <a:srgbClr val="2F5233"/>
-              </a:buClr>
-              <a:buSzPct val="90000"/>
-              <a:buFont typeface="Arial"/>
-              <a:buChar char="–"/>
-            </a:pPr>
-            <a:r>
-              <a:rPr sz="1350" b="0" i="0">
-                <a:solidFill>
-                  <a:srgbClr val="20291F"/>
-                </a:solidFill>
-                <a:latin typeface="Calibri"/>
-              </a:rPr>
-              <a:t>Depth of analysis of the original design — 15 marks</a:t>
-            </a:r>
-          </a:p>
-          <a:p>
-            <a:pPr indent="-203200" marL="203200">
-              <a:spcAft>
-                <a:spcPts val="900"/>
-              </a:spcAft>
-              <a:buClr>
-                <a:srgbClr val="2F5233"/>
-              </a:buClr>
-              <a:buSzPct val="90000"/>
-              <a:buFont typeface="Arial"/>
-              <a:buChar char="–"/>
-            </a:pPr>
-            <a:r>
-              <a:rPr sz="1350" b="0" i="0">
-                <a:solidFill>
-                  <a:srgbClr val="20291F"/>
-                </a:solidFill>
-                <a:latin typeface="Calibri"/>
-              </a:rPr>
-              <a:t>Quality and originality of the reinterpretation proposal — 10 marks</a:t>
-            </a:r>
-          </a:p>
-          <a:p>
-            <a:pPr indent="-203200" marL="203200">
-              <a:spcAft>
-                <a:spcPts val="900"/>
-              </a:spcAft>
-              <a:buClr>
-                <a:srgbClr val="2F5233"/>
-              </a:buClr>
-              <a:buSzPct val="90000"/>
-              <a:buFont typeface="Arial"/>
-              <a:buChar char="–"/>
-            </a:pPr>
-            <a:r>
-              <a:rPr sz="1350" b="0" i="0">
-                <a:solidFill>
-                  <a:srgbClr val="20291F"/>
-                </a:solidFill>
-                <a:latin typeface="Calibri"/>
-              </a:rPr>
-              <a:t>Justification and links to the new context — 10 marks</a:t>
-            </a:r>
-          </a:p>
-          <a:p>
-            <a:pPr indent="-203200" marL="203200">
-              <a:spcAft>
-                <a:spcPts val="900"/>
-              </a:spcAft>
-              <a:buClr>
-                <a:srgbClr val="2F5233"/>
-              </a:buClr>
-              <a:buSzPct val="90000"/>
-              <a:buFont typeface="Arial"/>
-              <a:buChar char="–"/>
-            </a:pPr>
-            <a:r>
-              <a:rPr sz="1350" b="0" i="0">
-                <a:solidFill>
-                  <a:srgbClr val="20291F"/>
-                </a:solidFill>
-                <a:latin typeface="Calibri"/>
-              </a:rPr>
-              <a:t>Presentation of folio pages — 5 marks</a:t>
+              <a:t>Mood boards — curated visual references establishing tone, palette and style direction</a:t>
             </a:r>
           </a:p>
         </p:txBody>
@@ -9258,7 +9633,7 @@
                 </a:solidFill>
                 <a:latin typeface="Calibri"/>
               </a:rPr>
-              <a:t>SAC BRIEFING</a:t>
+              <a:t>EXTENDED KNOWLEDGE</a:t>
             </a:r>
           </a:p>
         </p:txBody>
@@ -9293,7 +9668,7 @@
                 </a:solidFill>
                 <a:latin typeface="Cambria"/>
               </a:rPr>
-              <a:t>Outcome 2 (AOS 2) — The Brief and Range of Ideas</a:t>
+              <a:t>Ideation Techniques Beyond Brainstorming</a:t>
             </a:r>
           </a:p>
         </p:txBody>
@@ -9358,7 +9733,7 @@
                 </a:solidFill>
                 <a:latin typeface="Calibri"/>
               </a:rPr>
-              <a:t>Task</a:t>
+              <a:t>Structured ideation methods</a:t>
             </a:r>
           </a:p>
           <a:p>
@@ -9380,29 +9755,7 @@
                 </a:solidFill>
                 <a:latin typeface="Calibri"/>
               </a:rPr>
-              <a:t>Write a design brief (informed by your Unit 3 AOS1 analysis and reinterpretation) and generate a wide range of ideas leading to two distinct concepts. Submit: the written brief, research documentation, generation of ideas (minimum 15 thumbnails/concepts), and two developed, distinct concepts with annotations.</a:t>
-            </a:r>
-          </a:p>
-          <a:p>
-            <a:pPr indent="-203200" marL="203200">
-              <a:spcAft>
-                <a:spcPts val="900"/>
-              </a:spcAft>
-              <a:buClr>
-                <a:srgbClr val="2F5233"/>
-              </a:buClr>
-              <a:buSzPct val="90000"/>
-              <a:buFont typeface="Arial"/>
-              <a:buChar char="●"/>
-            </a:pPr>
-            <a:r>
-              <a:rPr sz="1500" b="1" i="0">
-                <a:solidFill>
-                  <a:srgbClr val="27452B"/>
-                </a:solidFill>
-                <a:latin typeface="Calibri"/>
-              </a:rPr>
-              <a:t>Conditions</a:t>
+              <a:t>SCAMPER — Substitute, Combine, Adapt, Modify, Put to other use, Eliminate, Reverse</a:t>
             </a:r>
           </a:p>
           <a:p>
@@ -9424,7 +9777,7 @@
                 </a:solidFill>
                 <a:latin typeface="Calibri"/>
               </a:rPr>
-              <a:t>Completed over approximately 5-6 weeks — typically the largest SAC of the year</a:t>
+              <a:t>Crazy 8s — sketch 8 distinct ideas in 8 minutes to force rapid divergent thinking</a:t>
             </a:r>
           </a:p>
           <a:p>
@@ -9446,7 +9799,7 @@
                 </a:solidFill>
                 <a:latin typeface="Calibri"/>
               </a:rPr>
-              <a:t>Folio submission</a:t>
+              <a:t>Worst possible idea — deliberately generating bad ideas to break fixation and spark humour-led insight</a:t>
             </a:r>
           </a:p>
           <a:p>
@@ -9468,11 +9821,214 @@
                 </a:solidFill>
                 <a:latin typeface="Calibri"/>
               </a:rPr>
-              <a:t>Individual work</a:t>
-            </a:r>
-          </a:p>
-          <a:p>
-            <a:pPr indent="-203200" marL="203200">
+              <a:t>Biomimicry as ideation — asking 'how would nature solve this?'</a:t>
+            </a:r>
+          </a:p>
+        </p:txBody>
+      </p:sp>
+      <p:sp>
+        <p:nvSpPr>
+          <p:cNvPr id="5" name="Oval 4"/>
+          <p:cNvSpPr/>
+          <p:nvPr/>
+        </p:nvSpPr>
+        <p:spPr>
+          <a:xfrm>
+            <a:off x="10881360" y="5943600"/>
+            <a:ext cx="1005840" cy="1005840"/>
+          </a:xfrm>
+          <a:prstGeom prst="ellipse">
+            <a:avLst/>
+          </a:prstGeom>
+          <a:solidFill>
+            <a:srgbClr val="C5D5DB"/>
+          </a:solidFill>
+          <a:ln>
+            <a:noFill/>
+          </a:ln>
+          <a:effectLst/>
+        </p:spPr>
+        <p:style>
+          <a:lnRef idx="1">
+            <a:schemeClr val="accent1"/>
+          </a:lnRef>
+          <a:fillRef idx="3">
+            <a:schemeClr val="accent1"/>
+          </a:fillRef>
+          <a:effectRef idx="2">
+            <a:schemeClr val="accent1"/>
+          </a:effectRef>
+          <a:fontRef idx="minor">
+            <a:schemeClr val="lt1"/>
+          </a:fontRef>
+        </p:style>
+        <p:txBody>
+          <a:bodyPr rtlCol="0" anchor="ctr"/>
+          <a:lstStyle/>
+          <a:p>
+            <a:pPr algn="ctr"/>
+          </a:p>
+        </p:txBody>
+      </p:sp>
+    </p:spTree>
+  </p:cSld>
+  <p:clrMapOvr>
+    <a:masterClrMapping/>
+  </p:clrMapOvr>
+</p:sld>
+</file>
+
+<file path=ppt/slides/slide26.xml><?xml version="1.0" encoding="utf-8"?>
+<p:sld xmlns:a="http://schemas.openxmlformats.org/drawingml/2006/main" xmlns:p="http://schemas.openxmlformats.org/presentationml/2006/main" xmlns:r="http://schemas.openxmlformats.org/officeDocument/2006/relationships">
+  <p:cSld>
+    <p:bg>
+      <p:bgPr>
+        <a:solidFill>
+          <a:srgbClr val="F7F5EC"/>
+        </a:solidFill>
+        <a:effectLst/>
+      </p:bgPr>
+    </p:bg>
+    <p:spTree>
+      <p:nvGrpSpPr>
+        <p:cNvPr id="1" name=""/>
+        <p:cNvGrpSpPr/>
+        <p:nvPr/>
+      </p:nvGrpSpPr>
+      <p:grpSpPr/>
+      <p:sp>
+        <p:nvSpPr>
+          <p:cNvPr id="2" name="Rounded Rectangle 1"/>
+          <p:cNvSpPr/>
+          <p:nvPr/>
+        </p:nvSpPr>
+        <p:spPr>
+          <a:xfrm>
+            <a:off x="685800" y="502920"/>
+            <a:ext cx="3291840" cy="457200"/>
+          </a:xfrm>
+          <a:prstGeom prst="roundRect">
+            <a:avLst>
+              <a:gd name="adj" fmla="val 50000"/>
+            </a:avLst>
+          </a:prstGeom>
+          <a:solidFill>
+            <a:srgbClr val="2F5233"/>
+          </a:solidFill>
+          <a:ln>
+            <a:noFill/>
+          </a:ln>
+          <a:effectLst/>
+        </p:spPr>
+        <p:style>
+          <a:lnRef idx="1">
+            <a:schemeClr val="accent1"/>
+          </a:lnRef>
+          <a:fillRef idx="3">
+            <a:schemeClr val="accent1"/>
+          </a:fillRef>
+          <a:effectRef idx="2">
+            <a:schemeClr val="accent1"/>
+          </a:effectRef>
+          <a:fontRef idx="minor">
+            <a:schemeClr val="lt1"/>
+          </a:fontRef>
+        </p:style>
+        <p:txBody>
+          <a:bodyPr rtlCol="0" anchor="ctr" wrap="none" lIns="50800" rIns="50800"/>
+          <a:lstStyle/>
+          <a:p>
+            <a:pPr algn="ctr"/>
+            <a:r>
+              <a:rPr sz="1100" b="1">
+                <a:solidFill>
+                  <a:srgbClr val="FFFFFF"/>
+                </a:solidFill>
+                <a:latin typeface="Calibri"/>
+              </a:rPr>
+              <a:t>EXTENDED KNOWLEDGE</a:t>
+            </a:r>
+          </a:p>
+        </p:txBody>
+      </p:sp>
+      <p:sp>
+        <p:nvSpPr>
+          <p:cNvPr id="3" name="TextBox 2"/>
+          <p:cNvSpPr txBox="1"/>
+          <p:nvPr/>
+        </p:nvSpPr>
+        <p:spPr>
+          <a:xfrm>
+            <a:off x="685800" y="1051560"/>
+            <a:ext cx="10607040" cy="822960"/>
+          </a:xfrm>
+          <a:prstGeom prst="rect">
+            <a:avLst/>
+          </a:prstGeom>
+          <a:noFill/>
+        </p:spPr>
+        <p:txBody>
+          <a:bodyPr wrap="square" anchor="t">
+            <a:spAutoFit/>
+          </a:bodyPr>
+          <a:lstStyle/>
+          <a:p>
+            <a:pPr algn="l"/>
+            <a:r>
+              <a:rPr sz="2700" b="1" i="0">
+                <a:solidFill>
+                  <a:srgbClr val="20291F"/>
+                </a:solidFill>
+                <a:latin typeface="Cambria"/>
+              </a:rPr>
+              <a:t>Presenting and Pitching Design Concepts</a:t>
+            </a:r>
+          </a:p>
+        </p:txBody>
+      </p:sp>
+      <p:sp>
+        <p:nvSpPr>
+          <p:cNvPr id="4" name="Rounded Rectangle 3"/>
+          <p:cNvSpPr/>
+          <p:nvPr/>
+        </p:nvSpPr>
+        <p:spPr>
+          <a:xfrm>
+            <a:off x="685800" y="1874519"/>
+            <a:ext cx="10607040" cy="4526280"/>
+          </a:xfrm>
+          <a:prstGeom prst="roundRect">
+            <a:avLst>
+              <a:gd name="adj" fmla="val 6000"/>
+            </a:avLst>
+          </a:prstGeom>
+          <a:solidFill>
+            <a:srgbClr val="EAEDEA"/>
+          </a:solidFill>
+          <a:ln>
+            <a:noFill/>
+          </a:ln>
+          <a:effectLst/>
+        </p:spPr>
+        <p:style>
+          <a:lnRef idx="1">
+            <a:schemeClr val="accent1"/>
+          </a:lnRef>
+          <a:fillRef idx="3">
+            <a:schemeClr val="accent1"/>
+          </a:fillRef>
+          <a:effectRef idx="2">
+            <a:schemeClr val="accent1"/>
+          </a:effectRef>
+          <a:fontRef idx="minor">
+            <a:schemeClr val="lt1"/>
+          </a:fontRef>
+        </p:style>
+        <p:txBody>
+          <a:bodyPr rtlCol="0" anchor="ctr" lIns="330200" rIns="330200" tIns="254000" bIns="254000" wrap="square"/>
+          <a:lstStyle/>
+          <a:p>
+            <a:pPr algn="ctr" indent="-203200" marL="203200">
               <a:spcAft>
                 <a:spcPts val="900"/>
               </a:spcAft>
@@ -9490,7 +10046,7 @@
                 </a:solidFill>
                 <a:latin typeface="Calibri"/>
               </a:rPr>
-              <a:t>Assessment Criteria (/70)</a:t>
+              <a:t>Communicating design decisions</a:t>
             </a:r>
           </a:p>
           <a:p>
@@ -9512,95 +10068,7 @@
                 </a:solidFill>
                 <a:latin typeface="Calibri"/>
               </a:rPr>
-              <a:t>Quality and clarity of the brief — 10 marks</a:t>
-            </a:r>
-          </a:p>
-          <a:p>
-            <a:pPr indent="-203200" marL="203200">
-              <a:spcAft>
-                <a:spcPts val="900"/>
-              </a:spcAft>
-              <a:buClr>
-                <a:srgbClr val="2F5233"/>
-              </a:buClr>
-              <a:buSzPct val="90000"/>
-              <a:buFont typeface="Arial"/>
-              <a:buChar char="–"/>
-            </a:pPr>
-            <a:r>
-              <a:rPr sz="1350" b="0" i="0">
-                <a:solidFill>
-                  <a:srgbClr val="20291F"/>
-                </a:solidFill>
-                <a:latin typeface="Calibri"/>
-              </a:rPr>
-              <a:t>Relevance of research — 10 marks</a:t>
-            </a:r>
-          </a:p>
-          <a:p>
-            <a:pPr indent="-203200" marL="203200">
-              <a:spcAft>
-                <a:spcPts val="900"/>
-              </a:spcAft>
-              <a:buClr>
-                <a:srgbClr val="2F5233"/>
-              </a:buClr>
-              <a:buSzPct val="90000"/>
-              <a:buFont typeface="Arial"/>
-              <a:buChar char="–"/>
-            </a:pPr>
-            <a:r>
-              <a:rPr sz="1350" b="0" i="0">
-                <a:solidFill>
-                  <a:srgbClr val="20291F"/>
-                </a:solidFill>
-                <a:latin typeface="Calibri"/>
-              </a:rPr>
-              <a:t>Range and quantity of ideas generated — 15 marks</a:t>
-            </a:r>
-          </a:p>
-          <a:p>
-            <a:pPr indent="-203200" marL="203200">
-              <a:spcAft>
-                <a:spcPts val="900"/>
-              </a:spcAft>
-              <a:buClr>
-                <a:srgbClr val="2F5233"/>
-              </a:buClr>
-              <a:buSzPct val="90000"/>
-              <a:buFont typeface="Arial"/>
-              <a:buChar char="–"/>
-            </a:pPr>
-            <a:r>
-              <a:rPr sz="1350" b="0" i="0">
-                <a:solidFill>
-                  <a:srgbClr val="20291F"/>
-                </a:solidFill>
-                <a:latin typeface="Calibri"/>
-              </a:rPr>
-              <a:t>Distinctiveness and quality of the two concepts — 20 marks</a:t>
-            </a:r>
-          </a:p>
-          <a:p>
-            <a:pPr indent="-203200" marL="203200">
-              <a:spcAft>
-                <a:spcPts val="900"/>
-              </a:spcAft>
-              <a:buClr>
-                <a:srgbClr val="2F5233"/>
-              </a:buClr>
-              <a:buSzPct val="90000"/>
-              <a:buFont typeface="Arial"/>
-              <a:buChar char="–"/>
-            </a:pPr>
-            <a:r>
-              <a:rPr sz="1350" b="0" i="0">
-                <a:solidFill>
-                  <a:srgbClr val="20291F"/>
-                </a:solidFill>
-                <a:latin typeface="Calibri"/>
-              </a:rPr>
-              <a:t>Annotation and documentation of design thinking — 15 marks</a:t>
+              <a:t>Professional designers frame concepts as a story: the problem, the insight, the solution, the expected impact — rather than simply describing what was made. Practising this framing strengthens folio annotations and oral presentation of concepts.</a:t>
             </a:r>
           </a:p>
         </p:txBody>
@@ -9657,7 +10125,443 @@
 </p:sld>
 </file>
 
-<file path=ppt/slides/slide26.xml><?xml version="1.0" encoding="utf-8"?>
+<file path=ppt/slides/slide27.xml><?xml version="1.0" encoding="utf-8"?>
+<p:sld xmlns:a="http://schemas.openxmlformats.org/drawingml/2006/main" xmlns:p="http://schemas.openxmlformats.org/presentationml/2006/main" xmlns:r="http://schemas.openxmlformats.org/officeDocument/2006/relationships">
+  <p:cSld>
+    <p:bg>
+      <p:bgPr>
+        <a:solidFill>
+          <a:srgbClr val="7FA3B0"/>
+        </a:solidFill>
+        <a:effectLst/>
+      </p:bgPr>
+    </p:bg>
+    <p:spTree>
+      <p:nvGrpSpPr>
+        <p:cNvPr id="1" name=""/>
+        <p:cNvGrpSpPr/>
+        <p:nvPr/>
+      </p:nvGrpSpPr>
+      <p:grpSpPr/>
+      <p:sp>
+        <p:nvSpPr>
+          <p:cNvPr id="2" name="Oval 1"/>
+          <p:cNvSpPr/>
+          <p:nvPr/>
+        </p:nvSpPr>
+        <p:spPr>
+          <a:xfrm>
+            <a:off x="-914400" y="-914400"/>
+            <a:ext cx="2103120" cy="2103120"/>
+          </a:xfrm>
+          <a:prstGeom prst="ellipse">
+            <a:avLst/>
+          </a:prstGeom>
+          <a:solidFill>
+            <a:srgbClr val="6F8F9A"/>
+          </a:solidFill>
+          <a:ln>
+            <a:noFill/>
+          </a:ln>
+          <a:effectLst/>
+        </p:spPr>
+        <p:style>
+          <a:lnRef idx="1">
+            <a:schemeClr val="accent1"/>
+          </a:lnRef>
+          <a:fillRef idx="3">
+            <a:schemeClr val="accent1"/>
+          </a:fillRef>
+          <a:effectRef idx="2">
+            <a:schemeClr val="accent1"/>
+          </a:effectRef>
+          <a:fontRef idx="minor">
+            <a:schemeClr val="lt1"/>
+          </a:fontRef>
+        </p:style>
+        <p:txBody>
+          <a:bodyPr rtlCol="0" anchor="ctr"/>
+          <a:lstStyle/>
+          <a:p>
+            <a:pPr algn="ctr"/>
+          </a:p>
+        </p:txBody>
+      </p:sp>
+      <p:sp>
+        <p:nvSpPr>
+          <p:cNvPr id="3" name="Oval 2"/>
+          <p:cNvSpPr/>
+          <p:nvPr/>
+        </p:nvSpPr>
+        <p:spPr>
+          <a:xfrm>
+            <a:off x="11064240" y="5852160"/>
+            <a:ext cx="1737360" cy="1737360"/>
+          </a:xfrm>
+          <a:prstGeom prst="ellipse">
+            <a:avLst/>
+          </a:prstGeom>
+          <a:solidFill>
+            <a:srgbClr val="6F8F9A"/>
+          </a:solidFill>
+          <a:ln>
+            <a:noFill/>
+          </a:ln>
+          <a:effectLst/>
+        </p:spPr>
+        <p:style>
+          <a:lnRef idx="1">
+            <a:schemeClr val="accent1"/>
+          </a:lnRef>
+          <a:fillRef idx="3">
+            <a:schemeClr val="accent1"/>
+          </a:fillRef>
+          <a:effectRef idx="2">
+            <a:schemeClr val="accent1"/>
+          </a:effectRef>
+          <a:fontRef idx="minor">
+            <a:schemeClr val="lt1"/>
+          </a:fontRef>
+        </p:style>
+        <p:txBody>
+          <a:bodyPr rtlCol="0" anchor="ctr"/>
+          <a:lstStyle/>
+          <a:p>
+            <a:pPr algn="ctr"/>
+          </a:p>
+        </p:txBody>
+      </p:sp>
+      <p:sp>
+        <p:nvSpPr>
+          <p:cNvPr id="4" name="Rounded Rectangle 3"/>
+          <p:cNvSpPr/>
+          <p:nvPr/>
+        </p:nvSpPr>
+        <p:spPr>
+          <a:xfrm>
+            <a:off x="685800" y="457200"/>
+            <a:ext cx="1033271" cy="502920"/>
+          </a:xfrm>
+          <a:prstGeom prst="roundRect">
+            <a:avLst>
+              <a:gd name="adj" fmla="val 50000"/>
+            </a:avLst>
+          </a:prstGeom>
+          <a:solidFill>
+            <a:srgbClr val="FFFFFF"/>
+          </a:solidFill>
+          <a:ln>
+            <a:noFill/>
+          </a:ln>
+          <a:effectLst/>
+        </p:spPr>
+        <p:style>
+          <a:lnRef idx="1">
+            <a:schemeClr val="accent1"/>
+          </a:lnRef>
+          <a:fillRef idx="3">
+            <a:schemeClr val="accent1"/>
+          </a:fillRef>
+          <a:effectRef idx="2">
+            <a:schemeClr val="accent1"/>
+          </a:effectRef>
+          <a:fontRef idx="minor">
+            <a:schemeClr val="lt1"/>
+          </a:fontRef>
+        </p:style>
+        <p:txBody>
+          <a:bodyPr rtlCol="0" anchor="ctr"/>
+          <a:lstStyle/>
+          <a:p>
+            <a:pPr algn="ctr"/>
+            <a:r>
+              <a:rPr b="1" sz="1400">
+                <a:solidFill>
+                  <a:srgbClr val="526972"/>
+                </a:solidFill>
+                <a:latin typeface="Calibri"/>
+              </a:rPr>
+              <a:t>QUIZ</a:t>
+            </a:r>
+          </a:p>
+        </p:txBody>
+      </p:sp>
+      <p:sp>
+        <p:nvSpPr>
+          <p:cNvPr id="5" name="TextBox 4"/>
+          <p:cNvSpPr txBox="1"/>
+          <p:nvPr/>
+        </p:nvSpPr>
+        <p:spPr>
+          <a:xfrm>
+            <a:off x="685800" y="1143000"/>
+            <a:ext cx="10607040" cy="914400"/>
+          </a:xfrm>
+          <a:prstGeom prst="rect">
+            <a:avLst/>
+          </a:prstGeom>
+          <a:noFill/>
+        </p:spPr>
+        <p:txBody>
+          <a:bodyPr wrap="square" anchor="t">
+            <a:spAutoFit/>
+          </a:bodyPr>
+          <a:lstStyle/>
+          <a:p>
+            <a:pPr algn="l"/>
+            <a:r>
+              <a:rPr sz="3000" b="1" i="0">
+                <a:solidFill>
+                  <a:srgbClr val="FFFFFF"/>
+                </a:solidFill>
+                <a:latin typeface="Cambria"/>
+              </a:rPr>
+              <a:t>Semiotics Speed Round</a:t>
+            </a:r>
+          </a:p>
+        </p:txBody>
+      </p:sp>
+      <p:sp>
+        <p:nvSpPr>
+          <p:cNvPr id="6" name="Rounded Rectangle 5"/>
+          <p:cNvSpPr/>
+          <p:nvPr/>
+        </p:nvSpPr>
+        <p:spPr>
+          <a:xfrm>
+            <a:off x="685800" y="2148840"/>
+            <a:ext cx="960120" cy="411480"/>
+          </a:xfrm>
+          <a:prstGeom prst="roundRect">
+            <a:avLst>
+              <a:gd name="adj" fmla="val 50000"/>
+            </a:avLst>
+          </a:prstGeom>
+          <a:solidFill>
+            <a:srgbClr val="5F7A84"/>
+          </a:solidFill>
+          <a:ln>
+            <a:noFill/>
+          </a:ln>
+          <a:effectLst/>
+        </p:spPr>
+        <p:style>
+          <a:lnRef idx="1">
+            <a:schemeClr val="accent1"/>
+          </a:lnRef>
+          <a:fillRef idx="3">
+            <a:schemeClr val="accent1"/>
+          </a:fillRef>
+          <a:effectRef idx="2">
+            <a:schemeClr val="accent1"/>
+          </a:effectRef>
+          <a:fontRef idx="minor">
+            <a:schemeClr val="lt1"/>
+          </a:fontRef>
+        </p:style>
+        <p:txBody>
+          <a:bodyPr rtlCol="0" anchor="ctr" wrap="none" lIns="50800" rIns="50800"/>
+          <a:lstStyle/>
+          <a:p>
+            <a:pPr algn="ctr"/>
+            <a:r>
+              <a:rPr sz="1050" b="1">
+                <a:solidFill>
+                  <a:srgbClr val="FFFFFF"/>
+                </a:solidFill>
+                <a:latin typeface="Calibri"/>
+              </a:rPr>
+              <a:t>4 MIN</a:t>
+            </a:r>
+          </a:p>
+        </p:txBody>
+      </p:sp>
+      <p:sp>
+        <p:nvSpPr>
+          <p:cNvPr id="7" name="Rounded Rectangle 6"/>
+          <p:cNvSpPr/>
+          <p:nvPr/>
+        </p:nvSpPr>
+        <p:spPr>
+          <a:xfrm>
+            <a:off x="1783080" y="2148840"/>
+            <a:ext cx="1563624" cy="411480"/>
+          </a:xfrm>
+          <a:prstGeom prst="roundRect">
+            <a:avLst>
+              <a:gd name="adj" fmla="val 50000"/>
+            </a:avLst>
+          </a:prstGeom>
+          <a:solidFill>
+            <a:srgbClr val="5F7A84"/>
+          </a:solidFill>
+          <a:ln>
+            <a:noFill/>
+          </a:ln>
+          <a:effectLst/>
+        </p:spPr>
+        <p:style>
+          <a:lnRef idx="1">
+            <a:schemeClr val="accent1"/>
+          </a:lnRef>
+          <a:fillRef idx="3">
+            <a:schemeClr val="accent1"/>
+          </a:fillRef>
+          <a:effectRef idx="2">
+            <a:schemeClr val="accent1"/>
+          </a:effectRef>
+          <a:fontRef idx="minor">
+            <a:schemeClr val="lt1"/>
+          </a:fontRef>
+        </p:style>
+        <p:txBody>
+          <a:bodyPr rtlCol="0" anchor="ctr" wrap="none" lIns="50800" rIns="50800"/>
+          <a:lstStyle/>
+          <a:p>
+            <a:pPr algn="ctr"/>
+            <a:r>
+              <a:rPr sz="1050" b="1">
+                <a:solidFill>
+                  <a:srgbClr val="FFFFFF"/>
+                </a:solidFill>
+                <a:latin typeface="Calibri"/>
+              </a:rPr>
+              <a:t>WHOLE CLASS</a:t>
+            </a:r>
+          </a:p>
+        </p:txBody>
+      </p:sp>
+      <p:sp>
+        <p:nvSpPr>
+          <p:cNvPr id="8" name="Rounded Rectangle 7"/>
+          <p:cNvSpPr/>
+          <p:nvPr/>
+        </p:nvSpPr>
+        <p:spPr>
+          <a:xfrm>
+            <a:off x="685800" y="2788920"/>
+            <a:ext cx="10607040" cy="3246120"/>
+          </a:xfrm>
+          <a:prstGeom prst="roundRect">
+            <a:avLst>
+              <a:gd name="adj" fmla="val 8000"/>
+            </a:avLst>
+          </a:prstGeom>
+          <a:solidFill>
+            <a:srgbClr val="FFFFFF"/>
+          </a:solidFill>
+          <a:ln>
+            <a:noFill/>
+          </a:ln>
+          <a:effectLst/>
+        </p:spPr>
+        <p:style>
+          <a:lnRef idx="1">
+            <a:schemeClr val="accent1"/>
+          </a:lnRef>
+          <a:fillRef idx="3">
+            <a:schemeClr val="accent1"/>
+          </a:fillRef>
+          <a:effectRef idx="2">
+            <a:schemeClr val="accent1"/>
+          </a:effectRef>
+          <a:fontRef idx="minor">
+            <a:schemeClr val="lt1"/>
+          </a:fontRef>
+        </p:style>
+        <p:txBody>
+          <a:bodyPr rtlCol="0" anchor="ctr" lIns="304800" rIns="304800" tIns="203200" bIns="203200" wrap="square"/>
+          <a:lstStyle/>
+          <a:p>
+            <a:pPr algn="ctr" indent="-203200" marL="203200">
+              <a:spcAft>
+                <a:spcPts val="900"/>
+              </a:spcAft>
+              <a:buClr>
+                <a:srgbClr val="7FA3B0"/>
+              </a:buClr>
+              <a:buSzPct val="90000"/>
+              <a:buFont typeface="Arial"/>
+              <a:buChar char="●"/>
+            </a:pPr>
+            <a:r>
+              <a:rPr sz="1450" b="0" i="0">
+                <a:solidFill>
+                  <a:srgbClr val="20291F"/>
+                </a:solidFill>
+                <a:latin typeface="Calibri"/>
+              </a:rPr>
+              <a:t>Teacher shows an image; students call out whether it's functioning as an icon, index or symbol.</a:t>
+            </a:r>
+          </a:p>
+          <a:p>
+            <a:pPr indent="-203200" marL="203200">
+              <a:spcAft>
+                <a:spcPts val="900"/>
+              </a:spcAft>
+              <a:buClr>
+                <a:srgbClr val="7FA3B0"/>
+              </a:buClr>
+              <a:buSzPct val="90000"/>
+              <a:buFont typeface="Arial"/>
+              <a:buChar char="●"/>
+            </a:pPr>
+            <a:r>
+              <a:rPr sz="1450" b="0" i="0">
+                <a:solidFill>
+                  <a:srgbClr val="20291F"/>
+                </a:solidFill>
+                <a:latin typeface="Calibri"/>
+              </a:rPr>
+              <a:t>Example: a photograph of a dog (icon), smoke (index of fire), a red cross (symbol).</a:t>
+            </a:r>
+          </a:p>
+        </p:txBody>
+      </p:sp>
+      <p:sp>
+        <p:nvSpPr>
+          <p:cNvPr id="9" name="TextBox 8"/>
+          <p:cNvSpPr txBox="1"/>
+          <p:nvPr/>
+        </p:nvSpPr>
+        <p:spPr>
+          <a:xfrm>
+            <a:off x="685800" y="6217920"/>
+            <a:ext cx="10607040" cy="502920"/>
+          </a:xfrm>
+          <a:prstGeom prst="rect">
+            <a:avLst/>
+          </a:prstGeom>
+          <a:noFill/>
+        </p:spPr>
+        <p:txBody>
+          <a:bodyPr wrap="square" anchor="t">
+            <a:spAutoFit/>
+          </a:bodyPr>
+          <a:lstStyle/>
+          <a:p>
+            <a:pPr algn="l"/>
+            <a:r>
+              <a:rPr sz="1250" b="0" i="1">
+                <a:solidFill>
+                  <a:srgbClr val="FFFFFF"/>
+                </a:solidFill>
+                <a:latin typeface="Calibri"/>
+              </a:rPr>
+              <a:t>Debrief: Can a single image function as more than one of these at once?</a:t>
+            </a:r>
+          </a:p>
+        </p:txBody>
+      </p:sp>
+    </p:spTree>
+  </p:cSld>
+  <p:clrMapOvr>
+    <a:masterClrMapping/>
+  </p:clrMapOvr>
+</p:sld>
+</file>
+
+<file path=ppt/slides/slide28.xml><?xml version="1.0" encoding="utf-8"?>
 <p:sld xmlns:a="http://schemas.openxmlformats.org/drawingml/2006/main" xmlns:p="http://schemas.openxmlformats.org/presentationml/2006/main" xmlns:r="http://schemas.openxmlformats.org/officeDocument/2006/relationships">
   <p:cSld>
     <p:bg>
@@ -9683,8 +10587,8 @@
         </p:nvSpPr>
         <p:spPr>
           <a:xfrm>
-            <a:off x="-1097280" y="4114800"/>
-            <a:ext cx="3108960" cy="3108960"/>
+            <a:off x="9692640" y="-914400"/>
+            <a:ext cx="2926080" cy="2926080"/>
           </a:xfrm>
           <a:prstGeom prst="ellipse">
             <a:avLst/>
@@ -9727,14 +10631,14 @@
         </p:nvSpPr>
         <p:spPr>
           <a:xfrm>
-            <a:off x="9875520" y="-1188720"/>
-            <a:ext cx="2743200" cy="2743200"/>
+            <a:off x="-914400" y="4937760"/>
+            <a:ext cx="2377440" cy="2377440"/>
           </a:xfrm>
           <a:prstGeom prst="ellipse">
             <a:avLst/>
           </a:prstGeom>
           <a:solidFill>
-            <a:srgbClr val="C9743D"/>
+            <a:srgbClr val="29482C"/>
           </a:solidFill>
           <a:ln>
             <a:noFill/>
@@ -9771,12 +10675,12 @@
         </p:nvSpPr>
         <p:spPr>
           <a:xfrm>
-            <a:off x="1920240" y="2286000"/>
-            <a:ext cx="8321040" cy="2377440"/>
+            <a:off x="822960" y="1051560"/>
+            <a:ext cx="1188720" cy="502920"/>
           </a:xfrm>
           <a:prstGeom prst="roundRect">
             <a:avLst>
-              <a:gd name="adj" fmla="val 20000"/>
+              <a:gd name="adj" fmla="val 50000"/>
             </a:avLst>
           </a:prstGeom>
           <a:solidFill>
@@ -9802,30 +10706,580 @@
           </a:fontRef>
         </p:style>
         <p:txBody>
+          <a:bodyPr rtlCol="0" anchor="ctr" wrap="none" lIns="50800" rIns="50800"/>
+          <a:lstStyle/>
+          <a:p>
+            <a:pPr algn="ctr"/>
+            <a:r>
+              <a:rPr sz="1400" b="1">
+                <a:solidFill>
+                  <a:srgbClr val="254128"/>
+                </a:solidFill>
+                <a:latin typeface="Calibri"/>
+              </a:rPr>
+              <a:t>04</a:t>
+            </a:r>
+          </a:p>
+        </p:txBody>
+      </p:sp>
+      <p:sp>
+        <p:nvSpPr>
+          <p:cNvPr id="5" name="Rounded Rectangle 4"/>
+          <p:cNvSpPr/>
+          <p:nvPr/>
+        </p:nvSpPr>
+        <p:spPr>
+          <a:xfrm>
+            <a:off x="822960" y="2011680"/>
+            <a:ext cx="10515600" cy="2834640"/>
+          </a:xfrm>
+          <a:prstGeom prst="roundRect">
+            <a:avLst>
+              <a:gd name="adj" fmla="val 18000"/>
+            </a:avLst>
+          </a:prstGeom>
+          <a:solidFill>
+            <a:srgbClr val="FFFFFF"/>
+          </a:solidFill>
+          <a:ln>
+            <a:noFill/>
+          </a:ln>
+          <a:effectLst/>
+        </p:spPr>
+        <p:style>
+          <a:lnRef idx="1">
+            <a:schemeClr val="accent1"/>
+          </a:lnRef>
+          <a:fillRef idx="3">
+            <a:schemeClr val="accent1"/>
+          </a:fillRef>
+          <a:effectRef idx="2">
+            <a:schemeClr val="accent1"/>
+          </a:effectRef>
+          <a:fontRef idx="minor">
+            <a:schemeClr val="lt1"/>
+          </a:fontRef>
+        </p:style>
+        <p:txBody>
           <a:bodyPr rtlCol="0" anchor="ctr"/>
           <a:lstStyle/>
           <a:p>
             <a:pPr algn="ctr"/>
-            <a:r>
-              <a:rPr b="1" sz="3000">
-                <a:solidFill>
-                  <a:srgbClr val="2F5233"/>
+          </a:p>
+        </p:txBody>
+      </p:sp>
+      <p:sp>
+        <p:nvSpPr>
+          <p:cNvPr id="6" name="TextBox 5"/>
+          <p:cNvSpPr txBox="1"/>
+          <p:nvPr/>
+        </p:nvSpPr>
+        <p:spPr>
+          <a:xfrm>
+            <a:off x="1280160" y="2697480"/>
+            <a:ext cx="9601200" cy="1097280"/>
+          </a:xfrm>
+          <a:prstGeom prst="rect">
+            <a:avLst/>
+          </a:prstGeom>
+          <a:noFill/>
+        </p:spPr>
+        <p:txBody>
+          <a:bodyPr wrap="square" anchor="t">
+            <a:spAutoFit/>
+          </a:bodyPr>
+          <a:lstStyle/>
+          <a:p>
+            <a:pPr algn="l"/>
+            <a:r>
+              <a:rPr sz="3400" b="1" i="0">
+                <a:solidFill>
+                  <a:srgbClr val="27452B"/>
                 </a:solidFill>
                 <a:latin typeface="Cambria"/>
               </a:rPr>
-              <a:t>End of Unit 3</a:t>
-            </a:r>
-          </a:p>
+              <a:t>SAC Briefing</a:t>
+            </a:r>
+          </a:p>
+        </p:txBody>
+      </p:sp>
+      <p:sp>
+        <p:nvSpPr>
+          <p:cNvPr id="7" name="TextBox 6"/>
+          <p:cNvSpPr txBox="1"/>
+          <p:nvPr/>
+        </p:nvSpPr>
+        <p:spPr>
+          <a:xfrm>
+            <a:off x="1280160" y="3657600"/>
+            <a:ext cx="9601200" cy="548640"/>
+          </a:xfrm>
+          <a:prstGeom prst="rect">
+            <a:avLst/>
+          </a:prstGeom>
+          <a:noFill/>
+        </p:spPr>
+        <p:txBody>
+          <a:bodyPr wrap="square" anchor="t">
+            <a:spAutoFit/>
+          </a:bodyPr>
+          <a:lstStyle/>
+          <a:p>
+            <a:pPr algn="l"/>
+            <a:r>
+              <a:rPr sz="1500" b="0" i="0">
+                <a:solidFill>
+                  <a:srgbClr val="6B6B6B"/>
+                </a:solidFill>
+                <a:latin typeface="Calibri"/>
+              </a:rPr>
+              <a:t>Draft — confirm against your school’s SAC schedule</a:t>
+            </a:r>
+          </a:p>
+        </p:txBody>
+      </p:sp>
+    </p:spTree>
+  </p:cSld>
+  <p:clrMapOvr>
+    <a:masterClrMapping/>
+  </p:clrMapOvr>
+</p:sld>
+</file>
+
+<file path=ppt/slides/slide29.xml><?xml version="1.0" encoding="utf-8"?>
+<p:sld xmlns:a="http://schemas.openxmlformats.org/drawingml/2006/main" xmlns:p="http://schemas.openxmlformats.org/presentationml/2006/main" xmlns:r="http://schemas.openxmlformats.org/officeDocument/2006/relationships">
+  <p:cSld>
+    <p:bg>
+      <p:bgPr>
+        <a:solidFill>
+          <a:srgbClr val="F7F5EC"/>
+        </a:solidFill>
+        <a:effectLst/>
+      </p:bgPr>
+    </p:bg>
+    <p:spTree>
+      <p:nvGrpSpPr>
+        <p:cNvPr id="1" name=""/>
+        <p:cNvGrpSpPr/>
+        <p:nvPr/>
+      </p:nvGrpSpPr>
+      <p:grpSpPr/>
+      <p:sp>
+        <p:nvSpPr>
+          <p:cNvPr id="2" name="Rounded Rectangle 1"/>
+          <p:cNvSpPr/>
+          <p:nvPr/>
+        </p:nvSpPr>
+        <p:spPr>
+          <a:xfrm>
+            <a:off x="685800" y="502920"/>
+            <a:ext cx="3291840" cy="457200"/>
+          </a:xfrm>
+          <a:prstGeom prst="roundRect">
+            <a:avLst>
+              <a:gd name="adj" fmla="val 50000"/>
+            </a:avLst>
+          </a:prstGeom>
+          <a:solidFill>
+            <a:srgbClr val="2F5233"/>
+          </a:solidFill>
+          <a:ln>
+            <a:noFill/>
+          </a:ln>
+          <a:effectLst/>
+        </p:spPr>
+        <p:style>
+          <a:lnRef idx="1">
+            <a:schemeClr val="accent1"/>
+          </a:lnRef>
+          <a:fillRef idx="3">
+            <a:schemeClr val="accent1"/>
+          </a:fillRef>
+          <a:effectRef idx="2">
+            <a:schemeClr val="accent1"/>
+          </a:effectRef>
+          <a:fontRef idx="minor">
+            <a:schemeClr val="lt1"/>
+          </a:fontRef>
+        </p:style>
+        <p:txBody>
+          <a:bodyPr rtlCol="0" anchor="ctr" wrap="none" lIns="50800" rIns="50800"/>
+          <a:lstStyle/>
           <a:p>
             <a:pPr algn="ctr"/>
             <a:r>
-              <a:rPr sz="1400">
-                <a:solidFill>
-                  <a:srgbClr val="595959"/>
-                </a:solidFill>
-              </a:rPr>
-              <a:t>Review the matching workbook to consolidate what you have learnt.</a:t>
-            </a:r>
+              <a:rPr sz="1100" b="1">
+                <a:solidFill>
+                  <a:srgbClr val="FFFFFF"/>
+                </a:solidFill>
+                <a:latin typeface="Calibri"/>
+              </a:rPr>
+              <a:t>SAC BRIEFING</a:t>
+            </a:r>
+          </a:p>
+        </p:txBody>
+      </p:sp>
+      <p:sp>
+        <p:nvSpPr>
+          <p:cNvPr id="3" name="TextBox 2"/>
+          <p:cNvSpPr txBox="1"/>
+          <p:nvPr/>
+        </p:nvSpPr>
+        <p:spPr>
+          <a:xfrm>
+            <a:off x="685800" y="1051560"/>
+            <a:ext cx="10607040" cy="822960"/>
+          </a:xfrm>
+          <a:prstGeom prst="rect">
+            <a:avLst/>
+          </a:prstGeom>
+          <a:noFill/>
+        </p:spPr>
+        <p:txBody>
+          <a:bodyPr wrap="square" anchor="t">
+            <a:spAutoFit/>
+          </a:bodyPr>
+          <a:lstStyle/>
+          <a:p>
+            <a:pPr algn="l"/>
+            <a:r>
+              <a:rPr sz="2700" b="1" i="0">
+                <a:solidFill>
+                  <a:srgbClr val="20291F"/>
+                </a:solidFill>
+                <a:latin typeface="Cambria"/>
+              </a:rPr>
+              <a:t>Outcome 1 (AOS 1) — Analysis and Reinterpretation</a:t>
+            </a:r>
+          </a:p>
+        </p:txBody>
+      </p:sp>
+      <p:sp>
+        <p:nvSpPr>
+          <p:cNvPr id="4" name="Rounded Rectangle 3"/>
+          <p:cNvSpPr/>
+          <p:nvPr/>
+        </p:nvSpPr>
+        <p:spPr>
+          <a:xfrm>
+            <a:off x="685800" y="1874519"/>
+            <a:ext cx="10607040" cy="4526280"/>
+          </a:xfrm>
+          <a:prstGeom prst="roundRect">
+            <a:avLst>
+              <a:gd name="adj" fmla="val 6000"/>
+            </a:avLst>
+          </a:prstGeom>
+          <a:solidFill>
+            <a:srgbClr val="EAEDEA"/>
+          </a:solidFill>
+          <a:ln>
+            <a:noFill/>
+          </a:ln>
+          <a:effectLst/>
+        </p:spPr>
+        <p:style>
+          <a:lnRef idx="1">
+            <a:schemeClr val="accent1"/>
+          </a:lnRef>
+          <a:fillRef idx="3">
+            <a:schemeClr val="accent1"/>
+          </a:fillRef>
+          <a:effectRef idx="2">
+            <a:schemeClr val="accent1"/>
+          </a:effectRef>
+          <a:fontRef idx="minor">
+            <a:schemeClr val="lt1"/>
+          </a:fontRef>
+        </p:style>
+        <p:txBody>
+          <a:bodyPr rtlCol="0" anchor="ctr" lIns="330200" rIns="330200" tIns="254000" bIns="254000" wrap="square"/>
+          <a:lstStyle/>
+          <a:p>
+            <a:pPr algn="ctr" indent="-203200" marL="203200">
+              <a:spcAft>
+                <a:spcPts val="900"/>
+              </a:spcAft>
+              <a:buClr>
+                <a:srgbClr val="2F5233"/>
+              </a:buClr>
+              <a:buSzPct val="90000"/>
+              <a:buFont typeface="Arial"/>
+              <a:buChar char="●"/>
+            </a:pPr>
+            <a:r>
+              <a:rPr sz="1500" b="1" i="0">
+                <a:solidFill>
+                  <a:srgbClr val="27452B"/>
+                </a:solidFill>
+                <a:latin typeface="Calibri"/>
+              </a:rPr>
+              <a:t>Task</a:t>
+            </a:r>
+          </a:p>
+          <a:p>
+            <a:pPr indent="-203200" marL="203200">
+              <a:spcAft>
+                <a:spcPts val="900"/>
+              </a:spcAft>
+              <a:buClr>
+                <a:srgbClr val="2F5233"/>
+              </a:buClr>
+              <a:buSzPct val="90000"/>
+              <a:buFont typeface="Arial"/>
+              <a:buChar char="–"/>
+            </a:pPr>
+            <a:r>
+              <a:rPr sz="1350" b="0" i="0">
+                <a:solidFill>
+                  <a:srgbClr val="20291F"/>
+                </a:solidFill>
+                <a:latin typeface="Calibri"/>
+              </a:rPr>
+              <a:t>Select an existing visual communication. Analyse it in depth (purpose, audience, elements and principles, materials and methods, context), then propose a reconceptualisation or reinvention for a new audience or context, justifying the approach in an annotated visual submission with a supporting written justification of approximately 400-600 words.</a:t>
+            </a:r>
+          </a:p>
+          <a:p>
+            <a:pPr indent="-203200" marL="203200">
+              <a:spcAft>
+                <a:spcPts val="900"/>
+              </a:spcAft>
+              <a:buClr>
+                <a:srgbClr val="2F5233"/>
+              </a:buClr>
+              <a:buSzPct val="90000"/>
+              <a:buFont typeface="Arial"/>
+              <a:buChar char="●"/>
+            </a:pPr>
+            <a:r>
+              <a:rPr sz="1500" b="1" i="0">
+                <a:solidFill>
+                  <a:srgbClr val="27452B"/>
+                </a:solidFill>
+                <a:latin typeface="Calibri"/>
+              </a:rPr>
+              <a:t>Conditions</a:t>
+            </a:r>
+          </a:p>
+          <a:p>
+            <a:pPr indent="-203200" marL="203200">
+              <a:spcAft>
+                <a:spcPts val="900"/>
+              </a:spcAft>
+              <a:buClr>
+                <a:srgbClr val="2F5233"/>
+              </a:buClr>
+              <a:buSzPct val="90000"/>
+              <a:buFont typeface="Arial"/>
+              <a:buChar char="–"/>
+            </a:pPr>
+            <a:r>
+              <a:rPr sz="1350" b="0" i="0">
+                <a:solidFill>
+                  <a:srgbClr val="20291F"/>
+                </a:solidFill>
+                <a:latin typeface="Calibri"/>
+              </a:rPr>
+              <a:t>Completed over approximately 2-3 weeks</a:t>
+            </a:r>
+          </a:p>
+          <a:p>
+            <a:pPr indent="-203200" marL="203200">
+              <a:spcAft>
+                <a:spcPts val="900"/>
+              </a:spcAft>
+              <a:buClr>
+                <a:srgbClr val="2F5233"/>
+              </a:buClr>
+              <a:buSzPct val="90000"/>
+              <a:buFont typeface="Arial"/>
+              <a:buChar char="–"/>
+            </a:pPr>
+            <a:r>
+              <a:rPr sz="1350" b="0" i="0">
+                <a:solidFill>
+                  <a:srgbClr val="20291F"/>
+                </a:solidFill>
+                <a:latin typeface="Calibri"/>
+              </a:rPr>
+              <a:t>Submitted as folio pages (visual and annotation) plus a short written justification</a:t>
+            </a:r>
+          </a:p>
+          <a:p>
+            <a:pPr indent="-203200" marL="203200">
+              <a:spcAft>
+                <a:spcPts val="900"/>
+              </a:spcAft>
+              <a:buClr>
+                <a:srgbClr val="2F5233"/>
+              </a:buClr>
+              <a:buSzPct val="90000"/>
+              <a:buFont typeface="Arial"/>
+              <a:buChar char="–"/>
+            </a:pPr>
+            <a:r>
+              <a:rPr sz="1350" b="0" i="0">
+                <a:solidFill>
+                  <a:srgbClr val="20291F"/>
+                </a:solidFill>
+                <a:latin typeface="Calibri"/>
+              </a:rPr>
+              <a:t>Individual work</a:t>
+            </a:r>
+          </a:p>
+          <a:p>
+            <a:pPr indent="-203200" marL="203200">
+              <a:spcAft>
+                <a:spcPts val="900"/>
+              </a:spcAft>
+              <a:buClr>
+                <a:srgbClr val="2F5233"/>
+              </a:buClr>
+              <a:buSzPct val="90000"/>
+              <a:buFont typeface="Arial"/>
+              <a:buChar char="●"/>
+            </a:pPr>
+            <a:r>
+              <a:rPr sz="1500" b="1" i="0">
+                <a:solidFill>
+                  <a:srgbClr val="27452B"/>
+                </a:solidFill>
+                <a:latin typeface="Calibri"/>
+              </a:rPr>
+              <a:t>Assessment Criteria (/40)</a:t>
+            </a:r>
+          </a:p>
+          <a:p>
+            <a:pPr indent="-203200" marL="203200">
+              <a:spcAft>
+                <a:spcPts val="900"/>
+              </a:spcAft>
+              <a:buClr>
+                <a:srgbClr val="2F5233"/>
+              </a:buClr>
+              <a:buSzPct val="90000"/>
+              <a:buFont typeface="Arial"/>
+              <a:buChar char="–"/>
+            </a:pPr>
+            <a:r>
+              <a:rPr sz="1350" b="0" i="0">
+                <a:solidFill>
+                  <a:srgbClr val="20291F"/>
+                </a:solidFill>
+                <a:latin typeface="Calibri"/>
+              </a:rPr>
+              <a:t>Depth of analysis of the original design — 15 marks</a:t>
+            </a:r>
+          </a:p>
+          <a:p>
+            <a:pPr indent="-203200" marL="203200">
+              <a:spcAft>
+                <a:spcPts val="900"/>
+              </a:spcAft>
+              <a:buClr>
+                <a:srgbClr val="2F5233"/>
+              </a:buClr>
+              <a:buSzPct val="90000"/>
+              <a:buFont typeface="Arial"/>
+              <a:buChar char="–"/>
+            </a:pPr>
+            <a:r>
+              <a:rPr sz="1350" b="0" i="0">
+                <a:solidFill>
+                  <a:srgbClr val="20291F"/>
+                </a:solidFill>
+                <a:latin typeface="Calibri"/>
+              </a:rPr>
+              <a:t>Quality and originality of the reinterpretation proposal — 10 marks</a:t>
+            </a:r>
+          </a:p>
+          <a:p>
+            <a:pPr indent="-203200" marL="203200">
+              <a:spcAft>
+                <a:spcPts val="900"/>
+              </a:spcAft>
+              <a:buClr>
+                <a:srgbClr val="2F5233"/>
+              </a:buClr>
+              <a:buSzPct val="90000"/>
+              <a:buFont typeface="Arial"/>
+              <a:buChar char="–"/>
+            </a:pPr>
+            <a:r>
+              <a:rPr sz="1350" b="0" i="0">
+                <a:solidFill>
+                  <a:srgbClr val="20291F"/>
+                </a:solidFill>
+                <a:latin typeface="Calibri"/>
+              </a:rPr>
+              <a:t>Justification and links to the new context — 10 marks</a:t>
+            </a:r>
+          </a:p>
+          <a:p>
+            <a:pPr indent="-203200" marL="203200">
+              <a:spcAft>
+                <a:spcPts val="900"/>
+              </a:spcAft>
+              <a:buClr>
+                <a:srgbClr val="2F5233"/>
+              </a:buClr>
+              <a:buSzPct val="90000"/>
+              <a:buFont typeface="Arial"/>
+              <a:buChar char="–"/>
+            </a:pPr>
+            <a:r>
+              <a:rPr sz="1350" b="0" i="0">
+                <a:solidFill>
+                  <a:srgbClr val="20291F"/>
+                </a:solidFill>
+                <a:latin typeface="Calibri"/>
+              </a:rPr>
+              <a:t>Presentation of folio pages — 5 marks</a:t>
+            </a:r>
+          </a:p>
+        </p:txBody>
+      </p:sp>
+      <p:sp>
+        <p:nvSpPr>
+          <p:cNvPr id="5" name="Oval 4"/>
+          <p:cNvSpPr/>
+          <p:nvPr/>
+        </p:nvSpPr>
+        <p:spPr>
+          <a:xfrm>
+            <a:off x="10881360" y="5943600"/>
+            <a:ext cx="1005840" cy="1005840"/>
+          </a:xfrm>
+          <a:prstGeom prst="ellipse">
+            <a:avLst/>
+          </a:prstGeom>
+          <a:solidFill>
+            <a:srgbClr val="C5D5DB"/>
+          </a:solidFill>
+          <a:ln>
+            <a:noFill/>
+          </a:ln>
+          <a:effectLst/>
+        </p:spPr>
+        <p:style>
+          <a:lnRef idx="1">
+            <a:schemeClr val="accent1"/>
+          </a:lnRef>
+          <a:fillRef idx="3">
+            <a:schemeClr val="accent1"/>
+          </a:fillRef>
+          <a:effectRef idx="2">
+            <a:schemeClr val="accent1"/>
+          </a:effectRef>
+          <a:fontRef idx="minor">
+            <a:schemeClr val="lt1"/>
+          </a:fontRef>
+        </p:style>
+        <p:txBody>
+          <a:bodyPr rtlCol="0" anchor="ctr"/>
+          <a:lstStyle/>
+          <a:p>
+            <a:pPr algn="ctr"/>
           </a:p>
         </p:txBody>
       </p:sp>
@@ -10238,6 +11692,1111 @@
 </p:sld>
 </file>
 
+<file path=ppt/slides/slide30.xml><?xml version="1.0" encoding="utf-8"?>
+<p:sld xmlns:a="http://schemas.openxmlformats.org/drawingml/2006/main" xmlns:p="http://schemas.openxmlformats.org/presentationml/2006/main" xmlns:r="http://schemas.openxmlformats.org/officeDocument/2006/relationships">
+  <p:cSld>
+    <p:bg>
+      <p:bgPr>
+        <a:solidFill>
+          <a:srgbClr val="F7F5EC"/>
+        </a:solidFill>
+        <a:effectLst/>
+      </p:bgPr>
+    </p:bg>
+    <p:spTree>
+      <p:nvGrpSpPr>
+        <p:cNvPr id="1" name=""/>
+        <p:cNvGrpSpPr/>
+        <p:nvPr/>
+      </p:nvGrpSpPr>
+      <p:grpSpPr/>
+      <p:sp>
+        <p:nvSpPr>
+          <p:cNvPr id="2" name="Rounded Rectangle 1"/>
+          <p:cNvSpPr/>
+          <p:nvPr/>
+        </p:nvSpPr>
+        <p:spPr>
+          <a:xfrm>
+            <a:off x="685800" y="502920"/>
+            <a:ext cx="3291840" cy="457200"/>
+          </a:xfrm>
+          <a:prstGeom prst="roundRect">
+            <a:avLst>
+              <a:gd name="adj" fmla="val 50000"/>
+            </a:avLst>
+          </a:prstGeom>
+          <a:solidFill>
+            <a:srgbClr val="2F5233"/>
+          </a:solidFill>
+          <a:ln>
+            <a:noFill/>
+          </a:ln>
+          <a:effectLst/>
+        </p:spPr>
+        <p:style>
+          <a:lnRef idx="1">
+            <a:schemeClr val="accent1"/>
+          </a:lnRef>
+          <a:fillRef idx="3">
+            <a:schemeClr val="accent1"/>
+          </a:fillRef>
+          <a:effectRef idx="2">
+            <a:schemeClr val="accent1"/>
+          </a:effectRef>
+          <a:fontRef idx="minor">
+            <a:schemeClr val="lt1"/>
+          </a:fontRef>
+        </p:style>
+        <p:txBody>
+          <a:bodyPr rtlCol="0" anchor="ctr" wrap="none" lIns="50800" rIns="50800"/>
+          <a:lstStyle/>
+          <a:p>
+            <a:pPr algn="ctr"/>
+            <a:r>
+              <a:rPr sz="1100" b="1">
+                <a:solidFill>
+                  <a:srgbClr val="FFFFFF"/>
+                </a:solidFill>
+                <a:latin typeface="Calibri"/>
+              </a:rPr>
+              <a:t>SAC BRIEFING</a:t>
+            </a:r>
+          </a:p>
+        </p:txBody>
+      </p:sp>
+      <p:sp>
+        <p:nvSpPr>
+          <p:cNvPr id="3" name="TextBox 2"/>
+          <p:cNvSpPr txBox="1"/>
+          <p:nvPr/>
+        </p:nvSpPr>
+        <p:spPr>
+          <a:xfrm>
+            <a:off x="685800" y="1051560"/>
+            <a:ext cx="10607040" cy="822960"/>
+          </a:xfrm>
+          <a:prstGeom prst="rect">
+            <a:avLst/>
+          </a:prstGeom>
+          <a:noFill/>
+        </p:spPr>
+        <p:txBody>
+          <a:bodyPr wrap="square" anchor="t">
+            <a:spAutoFit/>
+          </a:bodyPr>
+          <a:lstStyle/>
+          <a:p>
+            <a:pPr algn="l"/>
+            <a:r>
+              <a:rPr sz="2700" b="1" i="0">
+                <a:solidFill>
+                  <a:srgbClr val="20291F"/>
+                </a:solidFill>
+                <a:latin typeface="Cambria"/>
+              </a:rPr>
+              <a:t>Outcome 2 (AOS 2) — The Brief and Range of Ideas</a:t>
+            </a:r>
+          </a:p>
+        </p:txBody>
+      </p:sp>
+      <p:sp>
+        <p:nvSpPr>
+          <p:cNvPr id="4" name="Rounded Rectangle 3"/>
+          <p:cNvSpPr/>
+          <p:nvPr/>
+        </p:nvSpPr>
+        <p:spPr>
+          <a:xfrm>
+            <a:off x="685800" y="1874519"/>
+            <a:ext cx="10607040" cy="4526280"/>
+          </a:xfrm>
+          <a:prstGeom prst="roundRect">
+            <a:avLst>
+              <a:gd name="adj" fmla="val 6000"/>
+            </a:avLst>
+          </a:prstGeom>
+          <a:solidFill>
+            <a:srgbClr val="EAEDEA"/>
+          </a:solidFill>
+          <a:ln>
+            <a:noFill/>
+          </a:ln>
+          <a:effectLst/>
+        </p:spPr>
+        <p:style>
+          <a:lnRef idx="1">
+            <a:schemeClr val="accent1"/>
+          </a:lnRef>
+          <a:fillRef idx="3">
+            <a:schemeClr val="accent1"/>
+          </a:fillRef>
+          <a:effectRef idx="2">
+            <a:schemeClr val="accent1"/>
+          </a:effectRef>
+          <a:fontRef idx="minor">
+            <a:schemeClr val="lt1"/>
+          </a:fontRef>
+        </p:style>
+        <p:txBody>
+          <a:bodyPr rtlCol="0" anchor="ctr" lIns="330200" rIns="330200" tIns="254000" bIns="254000" wrap="square"/>
+          <a:lstStyle/>
+          <a:p>
+            <a:pPr algn="ctr" indent="-203200" marL="203200">
+              <a:spcAft>
+                <a:spcPts val="900"/>
+              </a:spcAft>
+              <a:buClr>
+                <a:srgbClr val="2F5233"/>
+              </a:buClr>
+              <a:buSzPct val="90000"/>
+              <a:buFont typeface="Arial"/>
+              <a:buChar char="●"/>
+            </a:pPr>
+            <a:r>
+              <a:rPr sz="1500" b="1" i="0">
+                <a:solidFill>
+                  <a:srgbClr val="27452B"/>
+                </a:solidFill>
+                <a:latin typeface="Calibri"/>
+              </a:rPr>
+              <a:t>Task</a:t>
+            </a:r>
+          </a:p>
+          <a:p>
+            <a:pPr indent="-203200" marL="203200">
+              <a:spcAft>
+                <a:spcPts val="900"/>
+              </a:spcAft>
+              <a:buClr>
+                <a:srgbClr val="2F5233"/>
+              </a:buClr>
+              <a:buSzPct val="90000"/>
+              <a:buFont typeface="Arial"/>
+              <a:buChar char="–"/>
+            </a:pPr>
+            <a:r>
+              <a:rPr sz="1350" b="0" i="0">
+                <a:solidFill>
+                  <a:srgbClr val="20291F"/>
+                </a:solidFill>
+                <a:latin typeface="Calibri"/>
+              </a:rPr>
+              <a:t>Write a design brief (informed by your Unit 3 AOS1 analysis and reinterpretation) and generate a wide range of ideas leading to two distinct concepts. Submit: the written brief, research documentation, generation of ideas (minimum 15 thumbnails/concepts), and two developed, distinct concepts with annotations.</a:t>
+            </a:r>
+          </a:p>
+          <a:p>
+            <a:pPr indent="-203200" marL="203200">
+              <a:spcAft>
+                <a:spcPts val="900"/>
+              </a:spcAft>
+              <a:buClr>
+                <a:srgbClr val="2F5233"/>
+              </a:buClr>
+              <a:buSzPct val="90000"/>
+              <a:buFont typeface="Arial"/>
+              <a:buChar char="●"/>
+            </a:pPr>
+            <a:r>
+              <a:rPr sz="1500" b="1" i="0">
+                <a:solidFill>
+                  <a:srgbClr val="27452B"/>
+                </a:solidFill>
+                <a:latin typeface="Calibri"/>
+              </a:rPr>
+              <a:t>Conditions</a:t>
+            </a:r>
+          </a:p>
+          <a:p>
+            <a:pPr indent="-203200" marL="203200">
+              <a:spcAft>
+                <a:spcPts val="900"/>
+              </a:spcAft>
+              <a:buClr>
+                <a:srgbClr val="2F5233"/>
+              </a:buClr>
+              <a:buSzPct val="90000"/>
+              <a:buFont typeface="Arial"/>
+              <a:buChar char="–"/>
+            </a:pPr>
+            <a:r>
+              <a:rPr sz="1350" b="0" i="0">
+                <a:solidFill>
+                  <a:srgbClr val="20291F"/>
+                </a:solidFill>
+                <a:latin typeface="Calibri"/>
+              </a:rPr>
+              <a:t>Completed over approximately 5-6 weeks — typically the largest SAC of the year</a:t>
+            </a:r>
+          </a:p>
+          <a:p>
+            <a:pPr indent="-203200" marL="203200">
+              <a:spcAft>
+                <a:spcPts val="900"/>
+              </a:spcAft>
+              <a:buClr>
+                <a:srgbClr val="2F5233"/>
+              </a:buClr>
+              <a:buSzPct val="90000"/>
+              <a:buFont typeface="Arial"/>
+              <a:buChar char="–"/>
+            </a:pPr>
+            <a:r>
+              <a:rPr sz="1350" b="0" i="0">
+                <a:solidFill>
+                  <a:srgbClr val="20291F"/>
+                </a:solidFill>
+                <a:latin typeface="Calibri"/>
+              </a:rPr>
+              <a:t>Folio submission</a:t>
+            </a:r>
+          </a:p>
+          <a:p>
+            <a:pPr indent="-203200" marL="203200">
+              <a:spcAft>
+                <a:spcPts val="900"/>
+              </a:spcAft>
+              <a:buClr>
+                <a:srgbClr val="2F5233"/>
+              </a:buClr>
+              <a:buSzPct val="90000"/>
+              <a:buFont typeface="Arial"/>
+              <a:buChar char="–"/>
+            </a:pPr>
+            <a:r>
+              <a:rPr sz="1350" b="0" i="0">
+                <a:solidFill>
+                  <a:srgbClr val="20291F"/>
+                </a:solidFill>
+                <a:latin typeface="Calibri"/>
+              </a:rPr>
+              <a:t>Individual work</a:t>
+            </a:r>
+          </a:p>
+          <a:p>
+            <a:pPr indent="-203200" marL="203200">
+              <a:spcAft>
+                <a:spcPts val="900"/>
+              </a:spcAft>
+              <a:buClr>
+                <a:srgbClr val="2F5233"/>
+              </a:buClr>
+              <a:buSzPct val="90000"/>
+              <a:buFont typeface="Arial"/>
+              <a:buChar char="●"/>
+            </a:pPr>
+            <a:r>
+              <a:rPr sz="1500" b="1" i="0">
+                <a:solidFill>
+                  <a:srgbClr val="27452B"/>
+                </a:solidFill>
+                <a:latin typeface="Calibri"/>
+              </a:rPr>
+              <a:t>Assessment Criteria (/70)</a:t>
+            </a:r>
+          </a:p>
+          <a:p>
+            <a:pPr indent="-203200" marL="203200">
+              <a:spcAft>
+                <a:spcPts val="900"/>
+              </a:spcAft>
+              <a:buClr>
+                <a:srgbClr val="2F5233"/>
+              </a:buClr>
+              <a:buSzPct val="90000"/>
+              <a:buFont typeface="Arial"/>
+              <a:buChar char="–"/>
+            </a:pPr>
+            <a:r>
+              <a:rPr sz="1350" b="0" i="0">
+                <a:solidFill>
+                  <a:srgbClr val="20291F"/>
+                </a:solidFill>
+                <a:latin typeface="Calibri"/>
+              </a:rPr>
+              <a:t>Quality and clarity of the brief — 10 marks</a:t>
+            </a:r>
+          </a:p>
+          <a:p>
+            <a:pPr indent="-203200" marL="203200">
+              <a:spcAft>
+                <a:spcPts val="900"/>
+              </a:spcAft>
+              <a:buClr>
+                <a:srgbClr val="2F5233"/>
+              </a:buClr>
+              <a:buSzPct val="90000"/>
+              <a:buFont typeface="Arial"/>
+              <a:buChar char="–"/>
+            </a:pPr>
+            <a:r>
+              <a:rPr sz="1350" b="0" i="0">
+                <a:solidFill>
+                  <a:srgbClr val="20291F"/>
+                </a:solidFill>
+                <a:latin typeface="Calibri"/>
+              </a:rPr>
+              <a:t>Relevance of research — 10 marks</a:t>
+            </a:r>
+          </a:p>
+          <a:p>
+            <a:pPr indent="-203200" marL="203200">
+              <a:spcAft>
+                <a:spcPts val="900"/>
+              </a:spcAft>
+              <a:buClr>
+                <a:srgbClr val="2F5233"/>
+              </a:buClr>
+              <a:buSzPct val="90000"/>
+              <a:buFont typeface="Arial"/>
+              <a:buChar char="–"/>
+            </a:pPr>
+            <a:r>
+              <a:rPr sz="1350" b="0" i="0">
+                <a:solidFill>
+                  <a:srgbClr val="20291F"/>
+                </a:solidFill>
+                <a:latin typeface="Calibri"/>
+              </a:rPr>
+              <a:t>Range and quantity of ideas generated — 15 marks</a:t>
+            </a:r>
+          </a:p>
+          <a:p>
+            <a:pPr indent="-203200" marL="203200">
+              <a:spcAft>
+                <a:spcPts val="900"/>
+              </a:spcAft>
+              <a:buClr>
+                <a:srgbClr val="2F5233"/>
+              </a:buClr>
+              <a:buSzPct val="90000"/>
+              <a:buFont typeface="Arial"/>
+              <a:buChar char="–"/>
+            </a:pPr>
+            <a:r>
+              <a:rPr sz="1350" b="0" i="0">
+                <a:solidFill>
+                  <a:srgbClr val="20291F"/>
+                </a:solidFill>
+                <a:latin typeface="Calibri"/>
+              </a:rPr>
+              <a:t>Distinctiveness and quality of the two concepts — 20 marks</a:t>
+            </a:r>
+          </a:p>
+          <a:p>
+            <a:pPr indent="-203200" marL="203200">
+              <a:spcAft>
+                <a:spcPts val="900"/>
+              </a:spcAft>
+              <a:buClr>
+                <a:srgbClr val="2F5233"/>
+              </a:buClr>
+              <a:buSzPct val="90000"/>
+              <a:buFont typeface="Arial"/>
+              <a:buChar char="–"/>
+            </a:pPr>
+            <a:r>
+              <a:rPr sz="1350" b="0" i="0">
+                <a:solidFill>
+                  <a:srgbClr val="20291F"/>
+                </a:solidFill>
+                <a:latin typeface="Calibri"/>
+              </a:rPr>
+              <a:t>Annotation and documentation of design thinking — 15 marks</a:t>
+            </a:r>
+          </a:p>
+        </p:txBody>
+      </p:sp>
+      <p:sp>
+        <p:nvSpPr>
+          <p:cNvPr id="5" name="Oval 4"/>
+          <p:cNvSpPr/>
+          <p:nvPr/>
+        </p:nvSpPr>
+        <p:spPr>
+          <a:xfrm>
+            <a:off x="10881360" y="5943600"/>
+            <a:ext cx="1005840" cy="1005840"/>
+          </a:xfrm>
+          <a:prstGeom prst="ellipse">
+            <a:avLst/>
+          </a:prstGeom>
+          <a:solidFill>
+            <a:srgbClr val="C5D5DB"/>
+          </a:solidFill>
+          <a:ln>
+            <a:noFill/>
+          </a:ln>
+          <a:effectLst/>
+        </p:spPr>
+        <p:style>
+          <a:lnRef idx="1">
+            <a:schemeClr val="accent1"/>
+          </a:lnRef>
+          <a:fillRef idx="3">
+            <a:schemeClr val="accent1"/>
+          </a:fillRef>
+          <a:effectRef idx="2">
+            <a:schemeClr val="accent1"/>
+          </a:effectRef>
+          <a:fontRef idx="minor">
+            <a:schemeClr val="lt1"/>
+          </a:fontRef>
+        </p:style>
+        <p:txBody>
+          <a:bodyPr rtlCol="0" anchor="ctr"/>
+          <a:lstStyle/>
+          <a:p>
+            <a:pPr algn="ctr"/>
+          </a:p>
+        </p:txBody>
+      </p:sp>
+    </p:spTree>
+  </p:cSld>
+  <p:clrMapOvr>
+    <a:masterClrMapping/>
+  </p:clrMapOvr>
+</p:sld>
+</file>
+
+<file path=ppt/slides/slide31.xml><?xml version="1.0" encoding="utf-8"?>
+<p:sld xmlns:a="http://schemas.openxmlformats.org/drawingml/2006/main" xmlns:p="http://schemas.openxmlformats.org/presentationml/2006/main" xmlns:r="http://schemas.openxmlformats.org/officeDocument/2006/relationships">
+  <p:cSld>
+    <p:bg>
+      <p:bgPr>
+        <a:solidFill>
+          <a:srgbClr val="7FA3B0"/>
+        </a:solidFill>
+        <a:effectLst/>
+      </p:bgPr>
+    </p:bg>
+    <p:spTree>
+      <p:nvGrpSpPr>
+        <p:cNvPr id="1" name=""/>
+        <p:cNvGrpSpPr/>
+        <p:nvPr/>
+      </p:nvGrpSpPr>
+      <p:grpSpPr/>
+      <p:sp>
+        <p:nvSpPr>
+          <p:cNvPr id="2" name="Oval 1"/>
+          <p:cNvSpPr/>
+          <p:nvPr/>
+        </p:nvSpPr>
+        <p:spPr>
+          <a:xfrm>
+            <a:off x="-914400" y="-914400"/>
+            <a:ext cx="2103120" cy="2103120"/>
+          </a:xfrm>
+          <a:prstGeom prst="ellipse">
+            <a:avLst/>
+          </a:prstGeom>
+          <a:solidFill>
+            <a:srgbClr val="6F8F9A"/>
+          </a:solidFill>
+          <a:ln>
+            <a:noFill/>
+          </a:ln>
+          <a:effectLst/>
+        </p:spPr>
+        <p:style>
+          <a:lnRef idx="1">
+            <a:schemeClr val="accent1"/>
+          </a:lnRef>
+          <a:fillRef idx="3">
+            <a:schemeClr val="accent1"/>
+          </a:fillRef>
+          <a:effectRef idx="2">
+            <a:schemeClr val="accent1"/>
+          </a:effectRef>
+          <a:fontRef idx="minor">
+            <a:schemeClr val="lt1"/>
+          </a:fontRef>
+        </p:style>
+        <p:txBody>
+          <a:bodyPr rtlCol="0" anchor="ctr"/>
+          <a:lstStyle/>
+          <a:p>
+            <a:pPr algn="ctr"/>
+          </a:p>
+        </p:txBody>
+      </p:sp>
+      <p:sp>
+        <p:nvSpPr>
+          <p:cNvPr id="3" name="Oval 2"/>
+          <p:cNvSpPr/>
+          <p:nvPr/>
+        </p:nvSpPr>
+        <p:spPr>
+          <a:xfrm>
+            <a:off x="11064240" y="5852160"/>
+            <a:ext cx="1737360" cy="1737360"/>
+          </a:xfrm>
+          <a:prstGeom prst="ellipse">
+            <a:avLst/>
+          </a:prstGeom>
+          <a:solidFill>
+            <a:srgbClr val="6F8F9A"/>
+          </a:solidFill>
+          <a:ln>
+            <a:noFill/>
+          </a:ln>
+          <a:effectLst/>
+        </p:spPr>
+        <p:style>
+          <a:lnRef idx="1">
+            <a:schemeClr val="accent1"/>
+          </a:lnRef>
+          <a:fillRef idx="3">
+            <a:schemeClr val="accent1"/>
+          </a:fillRef>
+          <a:effectRef idx="2">
+            <a:schemeClr val="accent1"/>
+          </a:effectRef>
+          <a:fontRef idx="minor">
+            <a:schemeClr val="lt1"/>
+          </a:fontRef>
+        </p:style>
+        <p:txBody>
+          <a:bodyPr rtlCol="0" anchor="ctr"/>
+          <a:lstStyle/>
+          <a:p>
+            <a:pPr algn="ctr"/>
+          </a:p>
+        </p:txBody>
+      </p:sp>
+      <p:sp>
+        <p:nvSpPr>
+          <p:cNvPr id="4" name="Rounded Rectangle 3"/>
+          <p:cNvSpPr/>
+          <p:nvPr/>
+        </p:nvSpPr>
+        <p:spPr>
+          <a:xfrm>
+            <a:off x="685800" y="457200"/>
+            <a:ext cx="1431036" cy="502920"/>
+          </a:xfrm>
+          <a:prstGeom prst="roundRect">
+            <a:avLst>
+              <a:gd name="adj" fmla="val 50000"/>
+            </a:avLst>
+          </a:prstGeom>
+          <a:solidFill>
+            <a:srgbClr val="FFFFFF"/>
+          </a:solidFill>
+          <a:ln>
+            <a:noFill/>
+          </a:ln>
+          <a:effectLst/>
+        </p:spPr>
+        <p:style>
+          <a:lnRef idx="1">
+            <a:schemeClr val="accent1"/>
+          </a:lnRef>
+          <a:fillRef idx="3">
+            <a:schemeClr val="accent1"/>
+          </a:fillRef>
+          <a:effectRef idx="2">
+            <a:schemeClr val="accent1"/>
+          </a:effectRef>
+          <a:fontRef idx="minor">
+            <a:schemeClr val="lt1"/>
+          </a:fontRef>
+        </p:style>
+        <p:txBody>
+          <a:bodyPr rtlCol="0" anchor="ctr"/>
+          <a:lstStyle/>
+          <a:p>
+            <a:pPr algn="ctr"/>
+            <a:r>
+              <a:rPr b="1" sz="1400">
+                <a:solidFill>
+                  <a:srgbClr val="526972"/>
+                </a:solidFill>
+                <a:latin typeface="Calibri"/>
+              </a:rPr>
+              <a:t>DISCUSS</a:t>
+            </a:r>
+          </a:p>
+        </p:txBody>
+      </p:sp>
+      <p:sp>
+        <p:nvSpPr>
+          <p:cNvPr id="5" name="TextBox 4"/>
+          <p:cNvSpPr txBox="1"/>
+          <p:nvPr/>
+        </p:nvSpPr>
+        <p:spPr>
+          <a:xfrm>
+            <a:off x="685800" y="1143000"/>
+            <a:ext cx="10607040" cy="914400"/>
+          </a:xfrm>
+          <a:prstGeom prst="rect">
+            <a:avLst/>
+          </a:prstGeom>
+          <a:noFill/>
+        </p:spPr>
+        <p:txBody>
+          <a:bodyPr wrap="square" anchor="t">
+            <a:spAutoFit/>
+          </a:bodyPr>
+          <a:lstStyle/>
+          <a:p>
+            <a:pPr algn="l"/>
+            <a:r>
+              <a:rPr sz="3000" b="1" i="0">
+                <a:solidFill>
+                  <a:srgbClr val="FFFFFF"/>
+                </a:solidFill>
+                <a:latin typeface="Cambria"/>
+              </a:rPr>
+              <a:t>What Makes Concepts Distinct?</a:t>
+            </a:r>
+          </a:p>
+        </p:txBody>
+      </p:sp>
+      <p:sp>
+        <p:nvSpPr>
+          <p:cNvPr id="6" name="Rounded Rectangle 5"/>
+          <p:cNvSpPr/>
+          <p:nvPr/>
+        </p:nvSpPr>
+        <p:spPr>
+          <a:xfrm>
+            <a:off x="685800" y="2148840"/>
+            <a:ext cx="960120" cy="411480"/>
+          </a:xfrm>
+          <a:prstGeom prst="roundRect">
+            <a:avLst>
+              <a:gd name="adj" fmla="val 50000"/>
+            </a:avLst>
+          </a:prstGeom>
+          <a:solidFill>
+            <a:srgbClr val="5F7A84"/>
+          </a:solidFill>
+          <a:ln>
+            <a:noFill/>
+          </a:ln>
+          <a:effectLst/>
+        </p:spPr>
+        <p:style>
+          <a:lnRef idx="1">
+            <a:schemeClr val="accent1"/>
+          </a:lnRef>
+          <a:fillRef idx="3">
+            <a:schemeClr val="accent1"/>
+          </a:fillRef>
+          <a:effectRef idx="2">
+            <a:schemeClr val="accent1"/>
+          </a:effectRef>
+          <a:fontRef idx="minor">
+            <a:schemeClr val="lt1"/>
+          </a:fontRef>
+        </p:style>
+        <p:txBody>
+          <a:bodyPr rtlCol="0" anchor="ctr" wrap="none" lIns="50800" rIns="50800"/>
+          <a:lstStyle/>
+          <a:p>
+            <a:pPr algn="ctr"/>
+            <a:r>
+              <a:rPr sz="1050" b="1">
+                <a:solidFill>
+                  <a:srgbClr val="FFFFFF"/>
+                </a:solidFill>
+                <a:latin typeface="Calibri"/>
+              </a:rPr>
+              <a:t>5 MIN</a:t>
+            </a:r>
+          </a:p>
+        </p:txBody>
+      </p:sp>
+      <p:sp>
+        <p:nvSpPr>
+          <p:cNvPr id="7" name="Rounded Rectangle 6"/>
+          <p:cNvSpPr/>
+          <p:nvPr/>
+        </p:nvSpPr>
+        <p:spPr>
+          <a:xfrm>
+            <a:off x="1783080" y="2148840"/>
+            <a:ext cx="2066543" cy="411480"/>
+          </a:xfrm>
+          <a:prstGeom prst="roundRect">
+            <a:avLst>
+              <a:gd name="adj" fmla="val 50000"/>
+            </a:avLst>
+          </a:prstGeom>
+          <a:solidFill>
+            <a:srgbClr val="5F7A84"/>
+          </a:solidFill>
+          <a:ln>
+            <a:noFill/>
+          </a:ln>
+          <a:effectLst/>
+        </p:spPr>
+        <p:style>
+          <a:lnRef idx="1">
+            <a:schemeClr val="accent1"/>
+          </a:lnRef>
+          <a:fillRef idx="3">
+            <a:schemeClr val="accent1"/>
+          </a:fillRef>
+          <a:effectRef idx="2">
+            <a:schemeClr val="accent1"/>
+          </a:effectRef>
+          <a:fontRef idx="minor">
+            <a:schemeClr val="lt1"/>
+          </a:fontRef>
+        </p:style>
+        <p:txBody>
+          <a:bodyPr rtlCol="0" anchor="ctr" wrap="none" lIns="50800" rIns="50800"/>
+          <a:lstStyle/>
+          <a:p>
+            <a:pPr algn="ctr"/>
+            <a:r>
+              <a:rPr sz="1050" b="1">
+                <a:solidFill>
+                  <a:srgbClr val="FFFFFF"/>
+                </a:solidFill>
+                <a:latin typeface="Calibri"/>
+              </a:rPr>
+              <a:t>THINK-PAIR-SHARE</a:t>
+            </a:r>
+          </a:p>
+        </p:txBody>
+      </p:sp>
+      <p:sp>
+        <p:nvSpPr>
+          <p:cNvPr id="8" name="Rounded Rectangle 7"/>
+          <p:cNvSpPr/>
+          <p:nvPr/>
+        </p:nvSpPr>
+        <p:spPr>
+          <a:xfrm>
+            <a:off x="685800" y="2788920"/>
+            <a:ext cx="10607040" cy="3246120"/>
+          </a:xfrm>
+          <a:prstGeom prst="roundRect">
+            <a:avLst>
+              <a:gd name="adj" fmla="val 8000"/>
+            </a:avLst>
+          </a:prstGeom>
+          <a:solidFill>
+            <a:srgbClr val="FFFFFF"/>
+          </a:solidFill>
+          <a:ln>
+            <a:noFill/>
+          </a:ln>
+          <a:effectLst/>
+        </p:spPr>
+        <p:style>
+          <a:lnRef idx="1">
+            <a:schemeClr val="accent1"/>
+          </a:lnRef>
+          <a:fillRef idx="3">
+            <a:schemeClr val="accent1"/>
+          </a:fillRef>
+          <a:effectRef idx="2">
+            <a:schemeClr val="accent1"/>
+          </a:effectRef>
+          <a:fontRef idx="minor">
+            <a:schemeClr val="lt1"/>
+          </a:fontRef>
+        </p:style>
+        <p:txBody>
+          <a:bodyPr rtlCol="0" anchor="ctr" lIns="304800" rIns="304800" tIns="203200" bIns="203200" wrap="square"/>
+          <a:lstStyle/>
+          <a:p>
+            <a:pPr algn="ctr" indent="-203200" marL="203200">
+              <a:spcAft>
+                <a:spcPts val="900"/>
+              </a:spcAft>
+              <a:buClr>
+                <a:srgbClr val="7FA3B0"/>
+              </a:buClr>
+              <a:buSzPct val="90000"/>
+              <a:buFont typeface="Arial"/>
+              <a:buChar char="●"/>
+            </a:pPr>
+            <a:r>
+              <a:rPr sz="1450" b="0" i="0">
+                <a:solidFill>
+                  <a:srgbClr val="20291F"/>
+                </a:solidFill>
+                <a:latin typeface="Calibri"/>
+              </a:rPr>
+              <a:t>Think: look at two of your own thumbnail ideas — are they genuinely distinct, or just colour variants?</a:t>
+            </a:r>
+          </a:p>
+          <a:p>
+            <a:pPr indent="-203200" marL="203200">
+              <a:spcAft>
+                <a:spcPts val="900"/>
+              </a:spcAft>
+              <a:buClr>
+                <a:srgbClr val="7FA3B0"/>
+              </a:buClr>
+              <a:buSzPct val="90000"/>
+              <a:buFont typeface="Arial"/>
+              <a:buChar char="●"/>
+            </a:pPr>
+            <a:r>
+              <a:rPr sz="1450" b="0" i="0">
+                <a:solidFill>
+                  <a:srgbClr val="20291F"/>
+                </a:solidFill>
+                <a:latin typeface="Calibri"/>
+              </a:rPr>
+              <a:t>Pair: explain to a partner what makes (or doesn't make) them distinct.</a:t>
+            </a:r>
+          </a:p>
+          <a:p>
+            <a:pPr indent="-203200" marL="203200">
+              <a:spcAft>
+                <a:spcPts val="900"/>
+              </a:spcAft>
+              <a:buClr>
+                <a:srgbClr val="7FA3B0"/>
+              </a:buClr>
+              <a:buSzPct val="90000"/>
+              <a:buFont typeface="Arial"/>
+              <a:buChar char="●"/>
+            </a:pPr>
+            <a:r>
+              <a:rPr sz="1450" b="0" i="0">
+                <a:solidFill>
+                  <a:srgbClr val="20291F"/>
+                </a:solidFill>
+                <a:latin typeface="Calibri"/>
+              </a:rPr>
+              <a:t>Share: one pair reports a good example of genuine distinctiveness to the class.</a:t>
+            </a:r>
+          </a:p>
+        </p:txBody>
+      </p:sp>
+      <p:sp>
+        <p:nvSpPr>
+          <p:cNvPr id="9" name="TextBox 8"/>
+          <p:cNvSpPr txBox="1"/>
+          <p:nvPr/>
+        </p:nvSpPr>
+        <p:spPr>
+          <a:xfrm>
+            <a:off x="685800" y="6217920"/>
+            <a:ext cx="10607040" cy="502920"/>
+          </a:xfrm>
+          <a:prstGeom prst="rect">
+            <a:avLst/>
+          </a:prstGeom>
+          <a:noFill/>
+        </p:spPr>
+        <p:txBody>
+          <a:bodyPr wrap="square" anchor="t">
+            <a:spAutoFit/>
+          </a:bodyPr>
+          <a:lstStyle/>
+          <a:p>
+            <a:pPr algn="l"/>
+            <a:r>
+              <a:rPr sz="1250" b="0" i="1">
+                <a:solidFill>
+                  <a:srgbClr val="FFFFFF"/>
+                </a:solidFill>
+                <a:latin typeface="Calibri"/>
+              </a:rPr>
+              <a:t>Debrief: Distinctiveness is explicitly assessed in the Unit 3 AOS2 SAC criteria.</a:t>
+            </a:r>
+          </a:p>
+        </p:txBody>
+      </p:sp>
+    </p:spTree>
+  </p:cSld>
+  <p:clrMapOvr>
+    <a:masterClrMapping/>
+  </p:clrMapOvr>
+</p:sld>
+</file>
+
+<file path=ppt/slides/slide32.xml><?xml version="1.0" encoding="utf-8"?>
+<p:sld xmlns:a="http://schemas.openxmlformats.org/drawingml/2006/main" xmlns:p="http://schemas.openxmlformats.org/presentationml/2006/main" xmlns:r="http://schemas.openxmlformats.org/officeDocument/2006/relationships">
+  <p:cSld>
+    <p:bg>
+      <p:bgPr>
+        <a:solidFill>
+          <a:srgbClr val="2F5233"/>
+        </a:solidFill>
+        <a:effectLst/>
+      </p:bgPr>
+    </p:bg>
+    <p:spTree>
+      <p:nvGrpSpPr>
+        <p:cNvPr id="1" name=""/>
+        <p:cNvGrpSpPr/>
+        <p:nvPr/>
+      </p:nvGrpSpPr>
+      <p:grpSpPr/>
+      <p:sp>
+        <p:nvSpPr>
+          <p:cNvPr id="2" name="Oval 1"/>
+          <p:cNvSpPr/>
+          <p:nvPr/>
+        </p:nvSpPr>
+        <p:spPr>
+          <a:xfrm>
+            <a:off x="-1097280" y="4114800"/>
+            <a:ext cx="3108960" cy="3108960"/>
+          </a:xfrm>
+          <a:prstGeom prst="ellipse">
+            <a:avLst/>
+          </a:prstGeom>
+          <a:solidFill>
+            <a:srgbClr val="29482C"/>
+          </a:solidFill>
+          <a:ln>
+            <a:noFill/>
+          </a:ln>
+          <a:effectLst/>
+        </p:spPr>
+        <p:style>
+          <a:lnRef idx="1">
+            <a:schemeClr val="accent1"/>
+          </a:lnRef>
+          <a:fillRef idx="3">
+            <a:schemeClr val="accent1"/>
+          </a:fillRef>
+          <a:effectRef idx="2">
+            <a:schemeClr val="accent1"/>
+          </a:effectRef>
+          <a:fontRef idx="minor">
+            <a:schemeClr val="lt1"/>
+          </a:fontRef>
+        </p:style>
+        <p:txBody>
+          <a:bodyPr rtlCol="0" anchor="ctr"/>
+          <a:lstStyle/>
+          <a:p>
+            <a:pPr algn="ctr"/>
+          </a:p>
+        </p:txBody>
+      </p:sp>
+      <p:sp>
+        <p:nvSpPr>
+          <p:cNvPr id="3" name="Oval 2"/>
+          <p:cNvSpPr/>
+          <p:nvPr/>
+        </p:nvSpPr>
+        <p:spPr>
+          <a:xfrm>
+            <a:off x="9875520" y="-1188720"/>
+            <a:ext cx="2743200" cy="2743200"/>
+          </a:xfrm>
+          <a:prstGeom prst="ellipse">
+            <a:avLst/>
+          </a:prstGeom>
+          <a:solidFill>
+            <a:srgbClr val="C9743D"/>
+          </a:solidFill>
+          <a:ln>
+            <a:noFill/>
+          </a:ln>
+          <a:effectLst/>
+        </p:spPr>
+        <p:style>
+          <a:lnRef idx="1">
+            <a:schemeClr val="accent1"/>
+          </a:lnRef>
+          <a:fillRef idx="3">
+            <a:schemeClr val="accent1"/>
+          </a:fillRef>
+          <a:effectRef idx="2">
+            <a:schemeClr val="accent1"/>
+          </a:effectRef>
+          <a:fontRef idx="minor">
+            <a:schemeClr val="lt1"/>
+          </a:fontRef>
+        </p:style>
+        <p:txBody>
+          <a:bodyPr rtlCol="0" anchor="ctr"/>
+          <a:lstStyle/>
+          <a:p>
+            <a:pPr algn="ctr"/>
+          </a:p>
+        </p:txBody>
+      </p:sp>
+      <p:sp>
+        <p:nvSpPr>
+          <p:cNvPr id="4" name="Rounded Rectangle 3"/>
+          <p:cNvSpPr/>
+          <p:nvPr/>
+        </p:nvSpPr>
+        <p:spPr>
+          <a:xfrm>
+            <a:off x="1920240" y="2286000"/>
+            <a:ext cx="8321040" cy="2377440"/>
+          </a:xfrm>
+          <a:prstGeom prst="roundRect">
+            <a:avLst>
+              <a:gd name="adj" fmla="val 20000"/>
+            </a:avLst>
+          </a:prstGeom>
+          <a:solidFill>
+            <a:srgbClr val="FFFFFF"/>
+          </a:solidFill>
+          <a:ln>
+            <a:noFill/>
+          </a:ln>
+          <a:effectLst/>
+        </p:spPr>
+        <p:style>
+          <a:lnRef idx="1">
+            <a:schemeClr val="accent1"/>
+          </a:lnRef>
+          <a:fillRef idx="3">
+            <a:schemeClr val="accent1"/>
+          </a:fillRef>
+          <a:effectRef idx="2">
+            <a:schemeClr val="accent1"/>
+          </a:effectRef>
+          <a:fontRef idx="minor">
+            <a:schemeClr val="lt1"/>
+          </a:fontRef>
+        </p:style>
+        <p:txBody>
+          <a:bodyPr rtlCol="0" anchor="ctr"/>
+          <a:lstStyle/>
+          <a:p>
+            <a:pPr algn="ctr"/>
+            <a:r>
+              <a:rPr b="1" sz="3000">
+                <a:solidFill>
+                  <a:srgbClr val="2F5233"/>
+                </a:solidFill>
+                <a:latin typeface="Cambria"/>
+              </a:rPr>
+              <a:t>End of Unit 3</a:t>
+            </a:r>
+          </a:p>
+          <a:p>
+            <a:pPr algn="ctr"/>
+            <a:r>
+              <a:rPr sz="1400">
+                <a:solidFill>
+                  <a:srgbClr val="595959"/>
+                </a:solidFill>
+              </a:rPr>
+              <a:t>Review the matching workbook to consolidate what you have learnt.</a:t>
+            </a:r>
+          </a:p>
+        </p:txBody>
+      </p:sp>
+    </p:spTree>
+  </p:cSld>
+  <p:clrMapOvr>
+    <a:masterClrMapping/>
+  </p:clrMapOvr>
+</p:sld>
+</file>
+
 <file path=ppt/slides/slide4.xml><?xml version="1.0" encoding="utf-8"?>
 <p:sld xmlns:a="http://schemas.openxmlformats.org/drawingml/2006/main" xmlns:p="http://schemas.openxmlformats.org/presentationml/2006/main" xmlns:r="http://schemas.openxmlformats.org/officeDocument/2006/relationships">
   <p:cSld>
@@ -12463,7 +15022,7 @@
     <p:bg>
       <p:bgPr>
         <a:solidFill>
-          <a:srgbClr val="2F5233"/>
+          <a:srgbClr val="7FA3B0"/>
         </a:solidFill>
         <a:effectLst/>
       </p:bgPr>
@@ -12483,14 +15042,14 @@
         </p:nvSpPr>
         <p:spPr>
           <a:xfrm>
-            <a:off x="9692640" y="-914400"/>
-            <a:ext cx="2926080" cy="2926080"/>
+            <a:off x="-914400" y="-914400"/>
+            <a:ext cx="2103120" cy="2103120"/>
           </a:xfrm>
           <a:prstGeom prst="ellipse">
             <a:avLst/>
           </a:prstGeom>
           <a:solidFill>
-            <a:srgbClr val="29482C"/>
+            <a:srgbClr val="6F8F9A"/>
           </a:solidFill>
           <a:ln>
             <a:noFill/>
@@ -12527,14 +15086,14 @@
         </p:nvSpPr>
         <p:spPr>
           <a:xfrm>
-            <a:off x="-914400" y="4937760"/>
-            <a:ext cx="2377440" cy="2377440"/>
+            <a:off x="11064240" y="5852160"/>
+            <a:ext cx="1737360" cy="1737360"/>
           </a:xfrm>
           <a:prstGeom prst="ellipse">
             <a:avLst/>
           </a:prstGeom>
           <a:solidFill>
-            <a:srgbClr val="29482C"/>
+            <a:srgbClr val="6F8F9A"/>
           </a:solidFill>
           <a:ln>
             <a:noFill/>
@@ -12571,8 +15130,8 @@
         </p:nvSpPr>
         <p:spPr>
           <a:xfrm>
-            <a:off x="822960" y="1051560"/>
-            <a:ext cx="1188720" cy="502920"/>
+            <a:off x="685800" y="457200"/>
+            <a:ext cx="1696212" cy="502920"/>
           </a:xfrm>
           <a:prstGeom prst="roundRect">
             <a:avLst>
@@ -12602,40 +15161,75 @@
           </a:fontRef>
         </p:style>
         <p:txBody>
-          <a:bodyPr rtlCol="0" anchor="ctr" wrap="none" lIns="50800" rIns="50800"/>
+          <a:bodyPr rtlCol="0" anchor="ctr"/>
           <a:lstStyle/>
           <a:p>
             <a:pPr algn="ctr"/>
             <a:r>
-              <a:rPr sz="1400" b="1">
-                <a:solidFill>
-                  <a:srgbClr val="254128"/>
-                </a:solidFill>
-                <a:latin typeface="Calibri"/>
-              </a:rPr>
-              <a:t>02</a:t>
-            </a:r>
-          </a:p>
-        </p:txBody>
-      </p:sp>
-      <p:sp>
-        <p:nvSpPr>
-          <p:cNvPr id="5" name="Rounded Rectangle 4"/>
+              <a:rPr b="1" sz="1400">
+                <a:solidFill>
+                  <a:srgbClr val="526972"/>
+                </a:solidFill>
+                <a:latin typeface="Calibri"/>
+              </a:rPr>
+              <a:t>CHALLENGE</a:t>
+            </a:r>
+          </a:p>
+        </p:txBody>
+      </p:sp>
+      <p:sp>
+        <p:nvSpPr>
+          <p:cNvPr id="5" name="TextBox 4"/>
+          <p:cNvSpPr txBox="1"/>
+          <p:nvPr/>
+        </p:nvSpPr>
+        <p:spPr>
+          <a:xfrm>
+            <a:off x="685800" y="1143000"/>
+            <a:ext cx="10607040" cy="914400"/>
+          </a:xfrm>
+          <a:prstGeom prst="rect">
+            <a:avLst/>
+          </a:prstGeom>
+          <a:noFill/>
+        </p:spPr>
+        <p:txBody>
+          <a:bodyPr wrap="square" anchor="t">
+            <a:spAutoFit/>
+          </a:bodyPr>
+          <a:lstStyle/>
+          <a:p>
+            <a:pPr algn="l"/>
+            <a:r>
+              <a:rPr sz="3000" b="1" i="0">
+                <a:solidFill>
+                  <a:srgbClr val="FFFFFF"/>
+                </a:solidFill>
+                <a:latin typeface="Cambria"/>
+              </a:rPr>
+              <a:t>4-Minute Analysis Sprint</a:t>
+            </a:r>
+          </a:p>
+        </p:txBody>
+      </p:sp>
+      <p:sp>
+        <p:nvSpPr>
+          <p:cNvPr id="6" name="Rounded Rectangle 5"/>
           <p:cNvSpPr/>
           <p:nvPr/>
         </p:nvSpPr>
         <p:spPr>
           <a:xfrm>
-            <a:off x="822960" y="2011680"/>
-            <a:ext cx="10515600" cy="2834640"/>
+            <a:off x="685800" y="2148840"/>
+            <a:ext cx="960120" cy="411480"/>
           </a:xfrm>
           <a:prstGeom prst="roundRect">
             <a:avLst>
-              <a:gd name="adj" fmla="val 18000"/>
+              <a:gd name="adj" fmla="val 50000"/>
             </a:avLst>
           </a:prstGeom>
           <a:solidFill>
-            <a:srgbClr val="FFFFFF"/>
+            <a:srgbClr val="5F7A84"/>
           </a:solidFill>
           <a:ln>
             <a:noFill/>
@@ -12657,23 +15251,196 @@
           </a:fontRef>
         </p:style>
         <p:txBody>
-          <a:bodyPr rtlCol="0" anchor="ctr"/>
+          <a:bodyPr rtlCol="0" anchor="ctr" wrap="none" lIns="50800" rIns="50800"/>
           <a:lstStyle/>
           <a:p>
             <a:pPr algn="ctr"/>
-          </a:p>
-        </p:txBody>
-      </p:sp>
-      <p:sp>
-        <p:nvSpPr>
-          <p:cNvPr id="6" name="TextBox 5"/>
+            <a:r>
+              <a:rPr sz="1050" b="1">
+                <a:solidFill>
+                  <a:srgbClr val="FFFFFF"/>
+                </a:solidFill>
+                <a:latin typeface="Calibri"/>
+              </a:rPr>
+              <a:t>4 MIN</a:t>
+            </a:r>
+          </a:p>
+        </p:txBody>
+      </p:sp>
+      <p:sp>
+        <p:nvSpPr>
+          <p:cNvPr id="7" name="Rounded Rectangle 6"/>
+          <p:cNvSpPr/>
+          <p:nvPr/>
+        </p:nvSpPr>
+        <p:spPr>
+          <a:xfrm>
+            <a:off x="1783080" y="2148840"/>
+            <a:ext cx="1463040" cy="411480"/>
+          </a:xfrm>
+          <a:prstGeom prst="roundRect">
+            <a:avLst>
+              <a:gd name="adj" fmla="val 50000"/>
+            </a:avLst>
+          </a:prstGeom>
+          <a:solidFill>
+            <a:srgbClr val="5F7A84"/>
+          </a:solidFill>
+          <a:ln>
+            <a:noFill/>
+          </a:ln>
+          <a:effectLst/>
+        </p:spPr>
+        <p:style>
+          <a:lnRef idx="1">
+            <a:schemeClr val="accent1"/>
+          </a:lnRef>
+          <a:fillRef idx="3">
+            <a:schemeClr val="accent1"/>
+          </a:fillRef>
+          <a:effectRef idx="2">
+            <a:schemeClr val="accent1"/>
+          </a:effectRef>
+          <a:fontRef idx="minor">
+            <a:schemeClr val="lt1"/>
+          </a:fontRef>
+        </p:style>
+        <p:txBody>
+          <a:bodyPr rtlCol="0" anchor="ctr" wrap="none" lIns="50800" rIns="50800"/>
+          <a:lstStyle/>
+          <a:p>
+            <a:pPr algn="ctr"/>
+            <a:r>
+              <a:rPr sz="1050" b="1">
+                <a:solidFill>
+                  <a:srgbClr val="FFFFFF"/>
+                </a:solidFill>
+                <a:latin typeface="Calibri"/>
+              </a:rPr>
+              <a:t>INDIVIDUAL</a:t>
+            </a:r>
+          </a:p>
+        </p:txBody>
+      </p:sp>
+      <p:sp>
+        <p:nvSpPr>
+          <p:cNvPr id="8" name="Rounded Rectangle 7"/>
+          <p:cNvSpPr/>
+          <p:nvPr/>
+        </p:nvSpPr>
+        <p:spPr>
+          <a:xfrm>
+            <a:off x="685800" y="2788920"/>
+            <a:ext cx="10607040" cy="3246120"/>
+          </a:xfrm>
+          <a:prstGeom prst="roundRect">
+            <a:avLst>
+              <a:gd name="adj" fmla="val 8000"/>
+            </a:avLst>
+          </a:prstGeom>
+          <a:solidFill>
+            <a:srgbClr val="FFFFFF"/>
+          </a:solidFill>
+          <a:ln>
+            <a:noFill/>
+          </a:ln>
+          <a:effectLst/>
+        </p:spPr>
+        <p:style>
+          <a:lnRef idx="1">
+            <a:schemeClr val="accent1"/>
+          </a:lnRef>
+          <a:fillRef idx="3">
+            <a:schemeClr val="accent1"/>
+          </a:fillRef>
+          <a:effectRef idx="2">
+            <a:schemeClr val="accent1"/>
+          </a:effectRef>
+          <a:fontRef idx="minor">
+            <a:schemeClr val="lt1"/>
+          </a:fontRef>
+        </p:style>
+        <p:txBody>
+          <a:bodyPr rtlCol="0" anchor="ctr" lIns="304800" rIns="304800" tIns="203200" bIns="203200" wrap="square"/>
+          <a:lstStyle/>
+          <a:p>
+            <a:pPr algn="ctr" indent="-203200" marL="203200">
+              <a:spcAft>
+                <a:spcPts val="900"/>
+              </a:spcAft>
+              <a:buClr>
+                <a:srgbClr val="7FA3B0"/>
+              </a:buClr>
+              <a:buSzPct val="90000"/>
+              <a:buFont typeface="Arial"/>
+              <a:buChar char="●"/>
+            </a:pPr>
+            <a:r>
+              <a:rPr sz="1450" b="0" i="0">
+                <a:solidFill>
+                  <a:srgbClr val="20291F"/>
+                </a:solidFill>
+                <a:latin typeface="Calibri"/>
+              </a:rPr>
+              <a:t>You are shown a mystery image for 4 minutes only.</a:t>
+            </a:r>
+          </a:p>
+          <a:p>
+            <a:pPr indent="-203200" marL="203200">
+              <a:spcAft>
+                <a:spcPts val="900"/>
+              </a:spcAft>
+              <a:buClr>
+                <a:srgbClr val="7FA3B0"/>
+              </a:buClr>
+              <a:buSzPct val="90000"/>
+              <a:buFont typeface="Arial"/>
+              <a:buChar char="●"/>
+            </a:pPr>
+            <a:r>
+              <a:rPr sz="1450" b="0" i="0">
+                <a:solidFill>
+                  <a:srgbClr val="20291F"/>
+                </a:solidFill>
+                <a:latin typeface="Calibri"/>
+              </a:rPr>
+              <a:t>Analyse it using the framework: purpose/audience, elements/principles, materials/methods, context.</a:t>
+            </a:r>
+          </a:p>
+          <a:p>
+            <a:pPr indent="-203200" marL="203200">
+              <a:spcAft>
+                <a:spcPts val="900"/>
+              </a:spcAft>
+              <a:buClr>
+                <a:srgbClr val="7FA3B0"/>
+              </a:buClr>
+              <a:buSzPct val="90000"/>
+              <a:buFont typeface="Arial"/>
+              <a:buChar char="●"/>
+            </a:pPr>
+            <a:r>
+              <a:rPr sz="1450" b="0" i="0">
+                <a:solidFill>
+                  <a:srgbClr val="20291F"/>
+                </a:solidFill>
+                <a:latin typeface="Calibri"/>
+              </a:rPr>
+              <a:t>Write down just one strong analysis sentence using Name -&gt; Evidence -&gt; Effect.</a:t>
+            </a:r>
+          </a:p>
+        </p:txBody>
+      </p:sp>
+      <p:sp>
+        <p:nvSpPr>
+          <p:cNvPr id="9" name="TextBox 8"/>
           <p:cNvSpPr txBox="1"/>
           <p:nvPr/>
         </p:nvSpPr>
         <p:spPr>
           <a:xfrm>
-            <a:off x="1280160" y="2697480"/>
-            <a:ext cx="9601200" cy="1097280"/>
+            <a:off x="685800" y="6217920"/>
+            <a:ext cx="10607040" cy="502920"/>
           </a:xfrm>
           <a:prstGeom prst="rect">
             <a:avLst/>
@@ -12688,48 +15455,13 @@
           <a:p>
             <a:pPr algn="l"/>
             <a:r>
-              <a:rPr sz="3400" b="1" i="0">
-                <a:solidFill>
-                  <a:srgbClr val="27452B"/>
-                </a:solidFill>
-                <a:latin typeface="Cambria"/>
-              </a:rPr>
-              <a:t>The Brief &amp; Ideation</a:t>
-            </a:r>
-          </a:p>
-        </p:txBody>
-      </p:sp>
-      <p:sp>
-        <p:nvSpPr>
-          <p:cNvPr id="7" name="TextBox 6"/>
-          <p:cNvSpPr txBox="1"/>
-          <p:nvPr/>
-        </p:nvSpPr>
-        <p:spPr>
-          <a:xfrm>
-            <a:off x="1280160" y="3657600"/>
-            <a:ext cx="9601200" cy="548640"/>
-          </a:xfrm>
-          <a:prstGeom prst="rect">
-            <a:avLst/>
-          </a:prstGeom>
-          <a:noFill/>
-        </p:spPr>
-        <p:txBody>
-          <a:bodyPr wrap="square" anchor="t">
-            <a:spAutoFit/>
-          </a:bodyPr>
-          <a:lstStyle/>
-          <a:p>
-            <a:pPr algn="l"/>
-            <a:r>
-              <a:rPr sz="1500" b="0" i="0">
-                <a:solidFill>
-                  <a:srgbClr val="6B6B6B"/>
-                </a:solidFill>
-                <a:latin typeface="Calibri"/>
-              </a:rPr>
-              <a:t>AOS 2 - Design Industry Practice</a:t>
+              <a:rPr sz="1250" b="0" i="1">
+                <a:solidFill>
+                  <a:srgbClr val="FFFFFF"/>
+                </a:solidFill>
+                <a:latin typeface="Calibri"/>
+              </a:rPr>
+              <a:t>Debrief: Read out your sentence — did others focus on different features?</a:t>
             </a:r>
           </a:p>
         </p:txBody>
